--- a/docs/ppt/javabrain.pptx
+++ b/docs/ppt/javabrain.pptx
@@ -3817,7 +3817,7 @@
                 </a:solidFill>
                 <a:latin typeface="阿里巴巴普惠体 3.0"/>
               </a:rPr>
-              <a:t>让 Spring Boot 秒变 AI 中枢</a:t>
+              <a:t>让您的系统瞬间拥有“思考”与“执行”的智能大脑</a:t>
             </a:r>
           </a:p>
         </p:txBody>

--- a/docs/ppt/javabrain.pptx
+++ b/docs/ppt/javabrain.pptx
@@ -5065,7 +5065,7 @@
         </p:nvSpPr>
         <p:spPr>
           <a:xfrm>
-            <a:off x="457200" y="365760"/>
+            <a:off x="457200" y="274320"/>
             <a:ext cx="11277295" cy="548640"/>
           </a:xfrm>
           <a:prstGeom prst="rect">
@@ -5087,21 +5087,56 @@
                 </a:solidFill>
                 <a:latin typeface="阿里巴巴普惠体 3.0"/>
               </a:rPr>
-              <a:t>3 组件 · 2 仓库 · 路线图</a:t>
-            </a:r>
-          </a:p>
-        </p:txBody>
-      </p:sp>
-      <p:sp>
-        <p:nvSpPr>
-          <p:cNvPr id="3" name="Rounded Rectangle 2"/>
+              <a:t>JavaBrain 未来 12 个月路线图</a:t>
+            </a:r>
+          </a:p>
+        </p:txBody>
+      </p:sp>
+      <p:sp>
+        <p:nvSpPr>
+          <p:cNvPr id="3" name="TextBox 2"/>
+          <p:cNvSpPr txBox="1"/>
+          <p:nvPr/>
+        </p:nvSpPr>
+        <p:spPr>
+          <a:xfrm>
+            <a:off x="274320" y="960120"/>
+            <a:ext cx="5669280" cy="365760"/>
+          </a:xfrm>
+          <a:prstGeom prst="rect">
+            <a:avLst/>
+          </a:prstGeom>
+          <a:noFill/>
+        </p:spPr>
+        <p:txBody>
+          <a:bodyPr wrap="square">
+            <a:spAutoFit/>
+          </a:bodyPr>
+          <a:lstStyle/>
+          <a:p>
+            <a:pPr algn="ctr"/>
+            <a:r>
+              <a:rPr sz="1800" b="1">
+                <a:solidFill>
+                  <a:srgbClr val="007396"/>
+                </a:solidFill>
+                <a:latin typeface="阿里巴巴普惠体 3.0"/>
+              </a:rPr>
+              <a:t>灵梭 · AI 赋能中心</a:t>
+            </a:r>
+          </a:p>
+        </p:txBody>
+      </p:sp>
+      <p:sp>
+        <p:nvSpPr>
+          <p:cNvPr id="4" name="Rounded Rectangle 3"/>
           <p:cNvSpPr/>
           <p:nvPr/>
         </p:nvSpPr>
         <p:spPr>
           <a:xfrm>
-            <a:off x="609447" y="1188720"/>
-            <a:ext cx="3474720" cy="1645920"/>
+            <a:off x="274320" y="1463040"/>
+            <a:ext cx="5669280" cy="731520"/>
           </a:xfrm>
           <a:prstGeom prst="roundRect">
             <a:avLst/>
@@ -5109,7 +5144,7 @@
           <a:solidFill>
             <a:srgbClr val="FFFFFF"/>
           </a:solidFill>
-          <a:ln w="25400">
+          <a:ln w="19050">
             <a:solidFill>
               <a:srgbClr val="007396"/>
             </a:solidFill>
@@ -5139,70 +5174,35 @@
       </p:sp>
       <p:sp>
         <p:nvSpPr>
-          <p:cNvPr id="4" name="TextBox 3"/>
-          <p:cNvSpPr txBox="1"/>
-          <p:nvPr/>
-        </p:nvSpPr>
-        <p:spPr>
-          <a:xfrm>
-            <a:off x="609447" y="1280160"/>
-            <a:ext cx="3474720" cy="365760"/>
-          </a:xfrm>
-          <a:prstGeom prst="rect">
-            <a:avLst/>
-          </a:prstGeom>
-          <a:noFill/>
-        </p:spPr>
-        <p:txBody>
-          <a:bodyPr wrap="square">
-            <a:spAutoFit/>
-          </a:bodyPr>
-          <a:lstStyle/>
-          <a:p>
-            <a:pPr algn="ctr"/>
-            <a:r>
-              <a:rPr sz="2000" b="1">
+          <p:cNvPr id="5" name="TextBox 4"/>
+          <p:cNvSpPr txBox="1"/>
+          <p:nvPr/>
+        </p:nvSpPr>
+        <p:spPr>
+          <a:xfrm>
+            <a:off x="457200" y="1508760"/>
+            <a:ext cx="5486400" cy="320040"/>
+          </a:xfrm>
+          <a:prstGeom prst="rect">
+            <a:avLst/>
+          </a:prstGeom>
+          <a:noFill/>
+        </p:spPr>
+        <p:txBody>
+          <a:bodyPr wrap="square">
+            <a:spAutoFit/>
+          </a:bodyPr>
+          <a:lstStyle/>
+          <a:p>
+            <a:pPr algn="ctr"/>
+            <a:r>
+              <a:rPr sz="1400" b="1">
                 <a:solidFill>
                   <a:srgbClr val="007396"/>
                 </a:solidFill>
                 <a:latin typeface="阿里巴巴普惠体 3.0"/>
               </a:rPr>
-              <a:t>灵梭</a:t>
-            </a:r>
-          </a:p>
-        </p:txBody>
-      </p:sp>
-      <p:sp>
-        <p:nvSpPr>
-          <p:cNvPr id="5" name="TextBox 4"/>
-          <p:cNvSpPr txBox="1"/>
-          <p:nvPr/>
-        </p:nvSpPr>
-        <p:spPr>
-          <a:xfrm>
-            <a:off x="609447" y="1737360"/>
-            <a:ext cx="3474720" cy="365760"/>
-          </a:xfrm>
-          <a:prstGeom prst="rect">
-            <a:avLst/>
-          </a:prstGeom>
-          <a:noFill/>
-        </p:spPr>
-        <p:txBody>
-          <a:bodyPr wrap="square">
-            <a:spAutoFit/>
-          </a:bodyPr>
-          <a:lstStyle/>
-          <a:p>
-            <a:pPr algn="ctr"/>
-            <a:r>
-              <a:rPr sz="1600" b="1">
-                <a:solidFill>
-                  <a:srgbClr val="F59E0B"/>
-                </a:solidFill>
-                <a:latin typeface="Inter"/>
-              </a:rPr>
-              <a:t>★ 124</a:t>
+              <a:t>1. Agentic Workflow</a:t>
             </a:r>
           </a:p>
         </p:txBody>
@@ -5215,29 +5215,29 @@
         </p:nvSpPr>
         <p:spPr>
           <a:xfrm>
-            <a:off x="609447" y="2194560"/>
-            <a:ext cx="3474720" cy="365760"/>
-          </a:xfrm>
-          <a:prstGeom prst="rect">
-            <a:avLst/>
-          </a:prstGeom>
-          <a:noFill/>
-        </p:spPr>
-        <p:txBody>
-          <a:bodyPr wrap="square">
-            <a:spAutoFit/>
-          </a:bodyPr>
-          <a:lstStyle/>
-          <a:p>
-            <a:pPr algn="ctr"/>
-            <a:r>
-              <a:rPr sz="1200" b="0">
+            <a:off x="457200" y="1847088"/>
+            <a:ext cx="5486400" cy="320040"/>
+          </a:xfrm>
+          <a:prstGeom prst="rect">
+            <a:avLst/>
+          </a:prstGeom>
+          <a:noFill/>
+        </p:spPr>
+        <p:txBody>
+          <a:bodyPr wrap="square">
+            <a:spAutoFit/>
+          </a:bodyPr>
+          <a:lstStyle/>
+          <a:p>
+            <a:pPr algn="ctr"/>
+            <a:r>
+              <a:rPr sz="1100" b="0">
                 <a:solidFill>
                   <a:srgbClr val="6B7280"/>
                 </a:solidFill>
-                <a:latin typeface="JetBrains Mono"/>
-              </a:rPr>
-              <a:t>spring-ai-loom-agent</a:t>
+                <a:latin typeface="阿里巴巴普惠体 3.0"/>
+              </a:rPr>
+              <a:t>智能体工作流:自动拆解 + 多步推理 + 反思重试</a:t>
             </a:r>
           </a:p>
         </p:txBody>
@@ -5250,8 +5250,8 @@
         </p:nvSpPr>
         <p:spPr>
           <a:xfrm>
-            <a:off x="4358487" y="1188720"/>
-            <a:ext cx="3474720" cy="1645920"/>
+            <a:off x="274320" y="2331720"/>
+            <a:ext cx="5669280" cy="731520"/>
           </a:xfrm>
           <a:prstGeom prst="roundRect">
             <a:avLst/>
@@ -5259,9 +5259,9 @@
           <a:solidFill>
             <a:srgbClr val="FFFFFF"/>
           </a:solidFill>
-          <a:ln w="25400">
+          <a:ln w="19050">
             <a:solidFill>
-              <a:srgbClr val="6B46C1"/>
+              <a:srgbClr val="007396"/>
             </a:solidFill>
           </a:ln>
         </p:spPr>
@@ -5295,29 +5295,29 @@
         </p:nvSpPr>
         <p:spPr>
           <a:xfrm>
-            <a:off x="4358487" y="1280160"/>
-            <a:ext cx="3474720" cy="365760"/>
-          </a:xfrm>
-          <a:prstGeom prst="rect">
-            <a:avLst/>
-          </a:prstGeom>
-          <a:noFill/>
-        </p:spPr>
-        <p:txBody>
-          <a:bodyPr wrap="square">
-            <a:spAutoFit/>
-          </a:bodyPr>
-          <a:lstStyle/>
-          <a:p>
-            <a:pPr algn="ctr"/>
-            <a:r>
-              <a:rPr sz="2000" b="1">
-                <a:solidFill>
-                  <a:srgbClr val="6B46C1"/>
+            <a:off x="457200" y="2377439"/>
+            <a:ext cx="5486400" cy="320040"/>
+          </a:xfrm>
+          <a:prstGeom prst="rect">
+            <a:avLst/>
+          </a:prstGeom>
+          <a:noFill/>
+        </p:spPr>
+        <p:txBody>
+          <a:bodyPr wrap="square">
+            <a:spAutoFit/>
+          </a:bodyPr>
+          <a:lstStyle/>
+          <a:p>
+            <a:pPr algn="ctr"/>
+            <a:r>
+              <a:rPr sz="1400" b="1">
+                <a:solidFill>
+                  <a:srgbClr val="007396"/>
                 </a:solidFill>
                 <a:latin typeface="阿里巴巴普惠体 3.0"/>
               </a:rPr>
-              <a:t>SQL工坊</a:t>
+              <a:t>2. Graph-RAG + 实时认知</a:t>
             </a:r>
           </a:p>
         </p:txBody>
@@ -5330,78 +5330,43 @@
         </p:nvSpPr>
         <p:spPr>
           <a:xfrm>
-            <a:off x="4358487" y="1737360"/>
-            <a:ext cx="3474720" cy="365760"/>
-          </a:xfrm>
-          <a:prstGeom prst="rect">
-            <a:avLst/>
-          </a:prstGeom>
-          <a:noFill/>
-        </p:spPr>
-        <p:txBody>
-          <a:bodyPr wrap="square">
-            <a:spAutoFit/>
-          </a:bodyPr>
-          <a:lstStyle/>
-          <a:p>
-            <a:pPr algn="ctr"/>
-            <a:r>
-              <a:rPr sz="1600" b="1">
-                <a:solidFill>
-                  <a:srgbClr val="F59E0B"/>
-                </a:solidFill>
-                <a:latin typeface="Inter"/>
-              </a:rPr>
-              <a:t>★ 89</a:t>
-            </a:r>
-          </a:p>
-        </p:txBody>
-      </p:sp>
-      <p:sp>
-        <p:nvSpPr>
-          <p:cNvPr id="10" name="TextBox 9"/>
-          <p:cNvSpPr txBox="1"/>
-          <p:nvPr/>
-        </p:nvSpPr>
-        <p:spPr>
-          <a:xfrm>
-            <a:off x="4358487" y="2194560"/>
-            <a:ext cx="3474720" cy="365760"/>
-          </a:xfrm>
-          <a:prstGeom prst="rect">
-            <a:avLst/>
-          </a:prstGeom>
-          <a:noFill/>
-        </p:spPr>
-        <p:txBody>
-          <a:bodyPr wrap="square">
-            <a:spAutoFit/>
-          </a:bodyPr>
-          <a:lstStyle/>
-          <a:p>
-            <a:pPr algn="ctr"/>
-            <a:r>
-              <a:rPr sz="1200" b="0">
+            <a:off x="457200" y="2715768"/>
+            <a:ext cx="5486400" cy="320040"/>
+          </a:xfrm>
+          <a:prstGeom prst="rect">
+            <a:avLst/>
+          </a:prstGeom>
+          <a:noFill/>
+        </p:spPr>
+        <p:txBody>
+          <a:bodyPr wrap="square">
+            <a:spAutoFit/>
+          </a:bodyPr>
+          <a:lstStyle/>
+          <a:p>
+            <a:pPr algn="ctr"/>
+            <a:r>
+              <a:rPr sz="1100" b="0">
                 <a:solidFill>
                   <a:srgbClr val="6B7280"/>
                 </a:solidFill>
-                <a:latin typeface="JetBrains Mono"/>
-              </a:rPr>
-              <a:t>sql-forge</a:t>
-            </a:r>
-          </a:p>
-        </p:txBody>
-      </p:sp>
-      <p:sp>
-        <p:nvSpPr>
-          <p:cNvPr id="11" name="Rounded Rectangle 10"/>
+                <a:latin typeface="阿里巴巴普惠体 3.0"/>
+              </a:rPr>
+              <a:t>知识图谱融合 + 毫秒级增量更新</a:t>
+            </a:r>
+          </a:p>
+        </p:txBody>
+      </p:sp>
+      <p:sp>
+        <p:nvSpPr>
+          <p:cNvPr id="10" name="Rounded Rectangle 9"/>
           <p:cNvSpPr/>
           <p:nvPr/>
         </p:nvSpPr>
         <p:spPr>
           <a:xfrm>
-            <a:off x="8107527" y="1188720"/>
-            <a:ext cx="3474720" cy="1645920"/>
+            <a:off x="274320" y="3200400"/>
+            <a:ext cx="5669280" cy="731520"/>
           </a:xfrm>
           <a:prstGeom prst="roundRect">
             <a:avLst/>
@@ -5409,9 +5374,9 @@
           <a:solidFill>
             <a:srgbClr val="FFFFFF"/>
           </a:solidFill>
-          <a:ln w="25400">
+          <a:ln w="19050">
             <a:solidFill>
-              <a:srgbClr val="10B981"/>
+              <a:srgbClr val="007396"/>
             </a:solidFill>
           </a:ln>
         </p:spPr>
@@ -5439,129 +5404,94 @@
       </p:sp>
       <p:sp>
         <p:nvSpPr>
+          <p:cNvPr id="11" name="TextBox 10"/>
+          <p:cNvSpPr txBox="1"/>
+          <p:nvPr/>
+        </p:nvSpPr>
+        <p:spPr>
+          <a:xfrm>
+            <a:off x="457200" y="3246120"/>
+            <a:ext cx="5486400" cy="320040"/>
+          </a:xfrm>
+          <a:prstGeom prst="rect">
+            <a:avLst/>
+          </a:prstGeom>
+          <a:noFill/>
+        </p:spPr>
+        <p:txBody>
+          <a:bodyPr wrap="square">
+            <a:spAutoFit/>
+          </a:bodyPr>
+          <a:lstStyle/>
+          <a:p>
+            <a:pPr algn="ctr"/>
+            <a:r>
+              <a:rPr sz="1400" b="1">
+                <a:solidFill>
+                  <a:srgbClr val="007396"/>
+                </a:solidFill>
+                <a:latin typeface="阿里巴巴普惠体 3.0"/>
+              </a:rPr>
+              <a:t>3. 多模态交互</a:t>
+            </a:r>
+          </a:p>
+        </p:txBody>
+      </p:sp>
+      <p:sp>
+        <p:nvSpPr>
           <p:cNvPr id="12" name="TextBox 11"/>
           <p:cNvSpPr txBox="1"/>
           <p:nvPr/>
         </p:nvSpPr>
         <p:spPr>
           <a:xfrm>
-            <a:off x="8107527" y="1280160"/>
-            <a:ext cx="3474720" cy="365760"/>
-          </a:xfrm>
-          <a:prstGeom prst="rect">
-            <a:avLst/>
-          </a:prstGeom>
-          <a:noFill/>
-        </p:spPr>
-        <p:txBody>
-          <a:bodyPr wrap="square">
-            <a:spAutoFit/>
-          </a:bodyPr>
-          <a:lstStyle/>
-          <a:p>
-            <a:pPr algn="ctr"/>
-            <a:r>
-              <a:rPr sz="2000" b="1">
-                <a:solidFill>
-                  <a:srgbClr val="10B981"/>
+            <a:off x="457200" y="3584448"/>
+            <a:ext cx="5486400" cy="320040"/>
+          </a:xfrm>
+          <a:prstGeom prst="rect">
+            <a:avLst/>
+          </a:prstGeom>
+          <a:noFill/>
+        </p:spPr>
+        <p:txBody>
+          <a:bodyPr wrap="square">
+            <a:spAutoFit/>
+          </a:bodyPr>
+          <a:lstStyle/>
+          <a:p>
+            <a:pPr algn="ctr"/>
+            <a:r>
+              <a:rPr sz="1100" b="0">
+                <a:solidFill>
+                  <a:srgbClr val="6B7280"/>
                 </a:solidFill>
                 <a:latin typeface="阿里巴巴普惠体 3.0"/>
               </a:rPr>
-              <a:t>SQL工坊 MCP</a:t>
-            </a:r>
-          </a:p>
-        </p:txBody>
-      </p:sp>
-      <p:sp>
-        <p:nvSpPr>
-          <p:cNvPr id="13" name="TextBox 12"/>
-          <p:cNvSpPr txBox="1"/>
-          <p:nvPr/>
-        </p:nvSpPr>
-        <p:spPr>
-          <a:xfrm>
-            <a:off x="8107527" y="1737360"/>
-            <a:ext cx="3474720" cy="365760"/>
-          </a:xfrm>
-          <a:prstGeom prst="rect">
-            <a:avLst/>
-          </a:prstGeom>
-          <a:noFill/>
-        </p:spPr>
-        <p:txBody>
-          <a:bodyPr wrap="square">
-            <a:spAutoFit/>
-          </a:bodyPr>
-          <a:lstStyle/>
-          <a:p>
-            <a:pPr algn="ctr"/>
-            <a:r>
-              <a:rPr sz="1600" b="1">
-                <a:solidFill>
-                  <a:srgbClr val="F59E0B"/>
-                </a:solidFill>
-                <a:latin typeface="Inter"/>
-              </a:rPr>
-              <a:t>★ 89</a:t>
-            </a:r>
-          </a:p>
-        </p:txBody>
-      </p:sp>
-      <p:sp>
-        <p:nvSpPr>
-          <p:cNvPr id="14" name="TextBox 13"/>
-          <p:cNvSpPr txBox="1"/>
-          <p:nvPr/>
-        </p:nvSpPr>
-        <p:spPr>
-          <a:xfrm>
-            <a:off x="8107527" y="2194560"/>
-            <a:ext cx="3474720" cy="365760"/>
-          </a:xfrm>
-          <a:prstGeom prst="rect">
-            <a:avLst/>
-          </a:prstGeom>
-          <a:noFill/>
-        </p:spPr>
-        <p:txBody>
-          <a:bodyPr wrap="square">
-            <a:spAutoFit/>
-          </a:bodyPr>
-          <a:lstStyle/>
-          <a:p>
-            <a:pPr algn="ctr"/>
-            <a:r>
-              <a:rPr sz="1200" b="0">
-                <a:solidFill>
-                  <a:srgbClr val="6B7280"/>
-                </a:solidFill>
-                <a:latin typeface="JetBrains Mono"/>
-              </a:rPr>
-              <a:t>sql-forge</a:t>
-            </a:r>
-          </a:p>
-        </p:txBody>
-      </p:sp>
-      <p:sp>
-        <p:nvSpPr>
-          <p:cNvPr id="15" name="Rounded Rectangle 14"/>
+              <a:t>语音 / 图像 / AI 悬浮球</a:t>
+            </a:r>
+          </a:p>
+        </p:txBody>
+      </p:sp>
+      <p:sp>
+        <p:nvSpPr>
+          <p:cNvPr id="13" name="Rounded Rectangle 12"/>
           <p:cNvSpPr/>
           <p:nvPr/>
         </p:nvSpPr>
         <p:spPr>
           <a:xfrm>
-            <a:off x="975207" y="4114800"/>
-            <a:ext cx="2286000" cy="731520"/>
+            <a:off x="274320" y="4069079"/>
+            <a:ext cx="5669280" cy="731520"/>
           </a:xfrm>
           <a:prstGeom prst="roundRect">
             <a:avLst/>
           </a:prstGeom>
           <a:solidFill>
-            <a:srgbClr val="F59E0B"/>
+            <a:srgbClr val="FFFFFF"/>
           </a:solidFill>
-          <a:ln w="25400">
+          <a:ln w="19050">
             <a:solidFill>
-              <a:srgbClr val="F59E0B"/>
+              <a:srgbClr val="007396"/>
             </a:solidFill>
           </a:ln>
         </p:spPr>
@@ -5589,84 +5519,119 @@
       </p:sp>
       <p:sp>
         <p:nvSpPr>
+          <p:cNvPr id="14" name="TextBox 13"/>
+          <p:cNvSpPr txBox="1"/>
+          <p:nvPr/>
+        </p:nvSpPr>
+        <p:spPr>
+          <a:xfrm>
+            <a:off x="457200" y="4114799"/>
+            <a:ext cx="5486400" cy="320040"/>
+          </a:xfrm>
+          <a:prstGeom prst="rect">
+            <a:avLst/>
+          </a:prstGeom>
+          <a:noFill/>
+        </p:spPr>
+        <p:txBody>
+          <a:bodyPr wrap="square">
+            <a:spAutoFit/>
+          </a:bodyPr>
+          <a:lstStyle/>
+          <a:p>
+            <a:pPr algn="ctr"/>
+            <a:r>
+              <a:rPr sz="1400" b="1">
+                <a:solidFill>
+                  <a:srgbClr val="007396"/>
+                </a:solidFill>
+                <a:latin typeface="阿里巴巴普惠体 3.0"/>
+              </a:rPr>
+              <a:t>4. Skill 插件生态市场</a:t>
+            </a:r>
+          </a:p>
+        </p:txBody>
+      </p:sp>
+      <p:sp>
+        <p:nvSpPr>
+          <p:cNvPr id="15" name="TextBox 14"/>
+          <p:cNvSpPr txBox="1"/>
+          <p:nvPr/>
+        </p:nvSpPr>
+        <p:spPr>
+          <a:xfrm>
+            <a:off x="457200" y="4453127"/>
+            <a:ext cx="5486400" cy="320040"/>
+          </a:xfrm>
+          <a:prstGeom prst="rect">
+            <a:avLst/>
+          </a:prstGeom>
+          <a:noFill/>
+        </p:spPr>
+        <p:txBody>
+          <a:bodyPr wrap="square">
+            <a:spAutoFit/>
+          </a:bodyPr>
+          <a:lstStyle/>
+          <a:p>
+            <a:pPr algn="ctr"/>
+            <a:r>
+              <a:rPr sz="1100" b="0">
+                <a:solidFill>
+                  <a:srgbClr val="6B7280"/>
+                </a:solidFill>
+                <a:latin typeface="阿里巴巴普惠体 3.0"/>
+              </a:rPr>
+              <a:t>标准化打包 + 私有 Skill 市场</a:t>
+            </a:r>
+          </a:p>
+        </p:txBody>
+      </p:sp>
+      <p:sp>
+        <p:nvSpPr>
           <p:cNvPr id="16" name="TextBox 15"/>
           <p:cNvSpPr txBox="1"/>
           <p:nvPr/>
         </p:nvSpPr>
         <p:spPr>
           <a:xfrm>
-            <a:off x="975207" y="4251960"/>
-            <a:ext cx="2286000" cy="457200"/>
-          </a:xfrm>
-          <a:prstGeom prst="rect">
-            <a:avLst/>
-          </a:prstGeom>
-          <a:noFill/>
-        </p:spPr>
-        <p:txBody>
-          <a:bodyPr wrap="square">
-            <a:spAutoFit/>
-          </a:bodyPr>
-          <a:lstStyle/>
-          <a:p>
-            <a:pPr algn="ctr"/>
-            <a:r>
-              <a:rPr sz="1400" b="1">
-                <a:solidFill>
-                  <a:srgbClr val="FFFFFF"/>
+            <a:off x="6248095" y="960120"/>
+            <a:ext cx="5669280" cy="365760"/>
+          </a:xfrm>
+          <a:prstGeom prst="rect">
+            <a:avLst/>
+          </a:prstGeom>
+          <a:noFill/>
+        </p:spPr>
+        <p:txBody>
+          <a:bodyPr wrap="square">
+            <a:spAutoFit/>
+          </a:bodyPr>
+          <a:lstStyle/>
+          <a:p>
+            <a:pPr algn="ctr"/>
+            <a:r>
+              <a:rPr sz="1800" b="1">
+                <a:solidFill>
+                  <a:srgbClr val="6B46C1"/>
                 </a:solidFill>
                 <a:latin typeface="阿里巴巴普惠体 3.0"/>
               </a:rPr>
-              <a:t>V1.0 当前</a:t>
-            </a:r>
-          </a:p>
-        </p:txBody>
-      </p:sp>
-      <p:cxnSp>
-        <p:nvCxnSpPr>
-          <p:cNvPr id="17" name="Connector 16"/>
-          <p:cNvCxnSpPr/>
-          <p:nvPr/>
-        </p:nvCxnSpPr>
-        <p:spPr>
-          <a:xfrm>
-            <a:off x="3261207" y="4480560"/>
-            <a:ext cx="365760" cy="0"/>
-          </a:xfrm>
-          <a:prstGeom prst="line">
-            <a:avLst/>
-          </a:prstGeom>
-          <a:ln w="12700">
-            <a:solidFill>
-              <a:srgbClr val="6B7280"/>
-            </a:solidFill>
-          </a:ln>
-        </p:spPr>
-        <p:style>
-          <a:lnRef idx="2">
-            <a:schemeClr val="accent1"/>
-          </a:lnRef>
-          <a:fillRef idx="0">
-            <a:schemeClr val="accent1"/>
-          </a:fillRef>
-          <a:effectRef idx="1">
-            <a:schemeClr val="accent1"/>
-          </a:effectRef>
-          <a:fontRef idx="minor">
-            <a:schemeClr val="tx1"/>
-          </a:fontRef>
-        </p:style>
-      </p:cxnSp>
-      <p:sp>
-        <p:nvSpPr>
-          <p:cNvPr id="18" name="Rounded Rectangle 17"/>
+              <a:t>SQL工坊 · 数据管理引擎</a:t>
+            </a:r>
+          </a:p>
+        </p:txBody>
+      </p:sp>
+      <p:sp>
+        <p:nvSpPr>
+          <p:cNvPr id="17" name="Rounded Rectangle 16"/>
           <p:cNvSpPr/>
           <p:nvPr/>
         </p:nvSpPr>
         <p:spPr>
           <a:xfrm>
-            <a:off x="3626967" y="4114800"/>
-            <a:ext cx="2286000" cy="731520"/>
+            <a:off x="6248095" y="1463040"/>
+            <a:ext cx="5669280" cy="731520"/>
           </a:xfrm>
           <a:prstGeom prst="roundRect">
             <a:avLst/>
@@ -5674,9 +5639,9 @@
           <a:solidFill>
             <a:srgbClr val="FFFFFF"/>
           </a:solidFill>
-          <a:ln w="25400">
+          <a:ln w="19050">
             <a:solidFill>
-              <a:srgbClr val="E5E7EB"/>
+              <a:srgbClr val="6B46C1"/>
             </a:solidFill>
           </a:ln>
         </p:spPr>
@@ -5704,84 +5669,84 @@
       </p:sp>
       <p:sp>
         <p:nvSpPr>
+          <p:cNvPr id="18" name="TextBox 17"/>
+          <p:cNvSpPr txBox="1"/>
+          <p:nvPr/>
+        </p:nvSpPr>
+        <p:spPr>
+          <a:xfrm>
+            <a:off x="6430975" y="1508760"/>
+            <a:ext cx="5486400" cy="320040"/>
+          </a:xfrm>
+          <a:prstGeom prst="rect">
+            <a:avLst/>
+          </a:prstGeom>
+          <a:noFill/>
+        </p:spPr>
+        <p:txBody>
+          <a:bodyPr wrap="square">
+            <a:spAutoFit/>
+          </a:bodyPr>
+          <a:lstStyle/>
+          <a:p>
+            <a:pPr algn="ctr"/>
+            <a:r>
+              <a:rPr sz="1400" b="1">
+                <a:solidFill>
+                  <a:srgbClr val="6B46C1"/>
+                </a:solidFill>
+                <a:latin typeface="阿里巴巴普惠体 3.0"/>
+              </a:rPr>
+              <a:t>1. Text-to-SQL 终极形态</a:t>
+            </a:r>
+          </a:p>
+        </p:txBody>
+      </p:sp>
+      <p:sp>
+        <p:nvSpPr>
           <p:cNvPr id="19" name="TextBox 18"/>
           <p:cNvSpPr txBox="1"/>
           <p:nvPr/>
         </p:nvSpPr>
         <p:spPr>
           <a:xfrm>
-            <a:off x="3626967" y="4251960"/>
-            <a:ext cx="2286000" cy="457200"/>
-          </a:xfrm>
-          <a:prstGeom prst="rect">
-            <a:avLst/>
-          </a:prstGeom>
-          <a:noFill/>
-        </p:spPr>
-        <p:txBody>
-          <a:bodyPr wrap="square">
-            <a:spAutoFit/>
-          </a:bodyPr>
-          <a:lstStyle/>
-          <a:p>
-            <a:pPr algn="ctr"/>
-            <a:r>
-              <a:rPr sz="1400" b="0">
-                <a:solidFill>
-                  <a:srgbClr val="1F2937"/>
+            <a:off x="6430975" y="1847088"/>
+            <a:ext cx="5486400" cy="320040"/>
+          </a:xfrm>
+          <a:prstGeom prst="rect">
+            <a:avLst/>
+          </a:prstGeom>
+          <a:noFill/>
+        </p:spPr>
+        <p:txBody>
+          <a:bodyPr wrap="square">
+            <a:spAutoFit/>
+          </a:bodyPr>
+          <a:lstStyle/>
+          <a:p>
+            <a:pPr algn="ctr"/>
+            <a:r>
+              <a:rPr sz="1100" b="0">
+                <a:solidFill>
+                  <a:srgbClr val="6B7280"/>
                 </a:solidFill>
                 <a:latin typeface="阿里巴巴普惠体 3.0"/>
               </a:rPr>
-              <a:t>V1.1 多租户</a:t>
-            </a:r>
-          </a:p>
-        </p:txBody>
-      </p:sp>
-      <p:cxnSp>
-        <p:nvCxnSpPr>
-          <p:cNvPr id="20" name="Connector 19"/>
-          <p:cNvCxnSpPr/>
-          <p:nvPr/>
-        </p:nvCxnSpPr>
-        <p:spPr>
-          <a:xfrm>
-            <a:off x="5912967" y="4480560"/>
-            <a:ext cx="365760" cy="0"/>
-          </a:xfrm>
-          <a:prstGeom prst="line">
-            <a:avLst/>
-          </a:prstGeom>
-          <a:ln w="12700">
-            <a:solidFill>
-              <a:srgbClr val="6B7280"/>
-            </a:solidFill>
-          </a:ln>
-        </p:spPr>
-        <p:style>
-          <a:lnRef idx="2">
-            <a:schemeClr val="accent1"/>
-          </a:lnRef>
-          <a:fillRef idx="0">
-            <a:schemeClr val="accent1"/>
-          </a:fillRef>
-          <a:effectRef idx="1">
-            <a:schemeClr val="accent1"/>
-          </a:effectRef>
-          <a:fontRef idx="minor">
-            <a:schemeClr val="tx1"/>
-          </a:fontRef>
-        </p:style>
-      </p:cxnSp>
-      <p:sp>
-        <p:nvSpPr>
-          <p:cNvPr id="21" name="Rounded Rectangle 20"/>
+              <a:t>准确率 &gt;95% + 本地代码大模型 + Explain 优化</a:t>
+            </a:r>
+          </a:p>
+        </p:txBody>
+      </p:sp>
+      <p:sp>
+        <p:nvSpPr>
+          <p:cNvPr id="20" name="Rounded Rectangle 19"/>
           <p:cNvSpPr/>
           <p:nvPr/>
         </p:nvSpPr>
         <p:spPr>
           <a:xfrm>
-            <a:off x="6278727" y="4114800"/>
-            <a:ext cx="2286000" cy="731520"/>
+            <a:off x="6248095" y="2331720"/>
+            <a:ext cx="5669280" cy="731520"/>
           </a:xfrm>
           <a:prstGeom prst="roundRect">
             <a:avLst/>
@@ -5789,9 +5754,9 @@
           <a:solidFill>
             <a:srgbClr val="FFFFFF"/>
           </a:solidFill>
-          <a:ln w="25400">
+          <a:ln w="19050">
             <a:solidFill>
-              <a:srgbClr val="E5E7EB"/>
+              <a:srgbClr val="6B46C1"/>
             </a:solidFill>
           </a:ln>
         </p:spPr>
@@ -5819,84 +5784,84 @@
       </p:sp>
       <p:sp>
         <p:nvSpPr>
+          <p:cNvPr id="21" name="TextBox 20"/>
+          <p:cNvSpPr txBox="1"/>
+          <p:nvPr/>
+        </p:nvSpPr>
+        <p:spPr>
+          <a:xfrm>
+            <a:off x="6430975" y="2377439"/>
+            <a:ext cx="5486400" cy="320040"/>
+          </a:xfrm>
+          <a:prstGeom prst="rect">
+            <a:avLst/>
+          </a:prstGeom>
+          <a:noFill/>
+        </p:spPr>
+        <p:txBody>
+          <a:bodyPr wrap="square">
+            <a:spAutoFit/>
+          </a:bodyPr>
+          <a:lstStyle/>
+          <a:p>
+            <a:pPr algn="ctr"/>
+            <a:r>
+              <a:rPr sz="1400" b="1">
+                <a:solidFill>
+                  <a:srgbClr val="6B46C1"/>
+                </a:solidFill>
+                <a:latin typeface="阿里巴巴普惠体 3.0"/>
+              </a:rPr>
+              <a:t>2. HTAP 湖仓一体</a:t>
+            </a:r>
+          </a:p>
+        </p:txBody>
+      </p:sp>
+      <p:sp>
+        <p:nvSpPr>
           <p:cNvPr id="22" name="TextBox 21"/>
           <p:cNvSpPr txBox="1"/>
           <p:nvPr/>
         </p:nvSpPr>
         <p:spPr>
           <a:xfrm>
-            <a:off x="6278727" y="4251960"/>
-            <a:ext cx="2286000" cy="457200"/>
-          </a:xfrm>
-          <a:prstGeom prst="rect">
-            <a:avLst/>
-          </a:prstGeom>
-          <a:noFill/>
-        </p:spPr>
-        <p:txBody>
-          <a:bodyPr wrap="square">
-            <a:spAutoFit/>
-          </a:bodyPr>
-          <a:lstStyle/>
-          <a:p>
-            <a:pPr algn="ctr"/>
-            <a:r>
-              <a:rPr sz="1400" b="0">
-                <a:solidFill>
-                  <a:srgbClr val="1F2937"/>
+            <a:off x="6430975" y="2715768"/>
+            <a:ext cx="5486400" cy="320040"/>
+          </a:xfrm>
+          <a:prstGeom prst="rect">
+            <a:avLst/>
+          </a:prstGeom>
+          <a:noFill/>
+        </p:spPr>
+        <p:txBody>
+          <a:bodyPr wrap="square">
+            <a:spAutoFit/>
+          </a:bodyPr>
+          <a:lstStyle/>
+          <a:p>
+            <a:pPr algn="ctr"/>
+            <a:r>
+              <a:rPr sz="1100" b="0">
+                <a:solidFill>
+                  <a:srgbClr val="6B7280"/>
                 </a:solidFill>
                 <a:latin typeface="阿里巴巴普惠体 3.0"/>
               </a:rPr>
-              <a:t>V1.2 移动端</a:t>
-            </a:r>
-          </a:p>
-        </p:txBody>
-      </p:sp>
-      <p:cxnSp>
-        <p:nvCxnSpPr>
-          <p:cNvPr id="23" name="Connector 22"/>
-          <p:cNvCxnSpPr/>
-          <p:nvPr/>
-        </p:nvCxnSpPr>
-        <p:spPr>
-          <a:xfrm>
-            <a:off x="8564727" y="4480560"/>
-            <a:ext cx="365760" cy="0"/>
-          </a:xfrm>
-          <a:prstGeom prst="line">
-            <a:avLst/>
-          </a:prstGeom>
-          <a:ln w="12700">
-            <a:solidFill>
-              <a:srgbClr val="6B7280"/>
-            </a:solidFill>
-          </a:ln>
-        </p:spPr>
-        <p:style>
-          <a:lnRef idx="2">
-            <a:schemeClr val="accent1"/>
-          </a:lnRef>
-          <a:fillRef idx="0">
-            <a:schemeClr val="accent1"/>
-          </a:fillRef>
-          <a:effectRef idx="1">
-            <a:schemeClr val="accent1"/>
-          </a:effectRef>
-          <a:fontRef idx="minor">
-            <a:schemeClr val="tx1"/>
-          </a:fontRef>
-        </p:style>
-      </p:cxnSp>
-      <p:sp>
-        <p:nvSpPr>
-          <p:cNvPr id="24" name="Rounded Rectangle 23"/>
+              <a:t>Flink 实时流 + Iceberg / Hudi 湖仓格式</a:t>
+            </a:r>
+          </a:p>
+        </p:txBody>
+      </p:sp>
+      <p:sp>
+        <p:nvSpPr>
+          <p:cNvPr id="23" name="Rounded Rectangle 22"/>
           <p:cNvSpPr/>
           <p:nvPr/>
         </p:nvSpPr>
         <p:spPr>
           <a:xfrm>
-            <a:off x="8930487" y="4114800"/>
-            <a:ext cx="2286000" cy="731520"/>
+            <a:off x="6248095" y="3200400"/>
+            <a:ext cx="5669280" cy="731520"/>
           </a:xfrm>
           <a:prstGeom prst="roundRect">
             <a:avLst/>
@@ -5904,9 +5869,9 @@
           <a:solidFill>
             <a:srgbClr val="FFFFFF"/>
           </a:solidFill>
-          <a:ln w="25400">
+          <a:ln w="19050">
             <a:solidFill>
-              <a:srgbClr val="E5E7EB"/>
+              <a:srgbClr val="6B46C1"/>
             </a:solidFill>
           </a:ln>
         </p:spPr>
@@ -5934,70 +5899,425 @@
       </p:sp>
       <p:sp>
         <p:nvSpPr>
+          <p:cNvPr id="24" name="TextBox 23"/>
+          <p:cNvSpPr txBox="1"/>
+          <p:nvPr/>
+        </p:nvSpPr>
+        <p:spPr>
+          <a:xfrm>
+            <a:off x="6430975" y="3246120"/>
+            <a:ext cx="5486400" cy="320040"/>
+          </a:xfrm>
+          <a:prstGeom prst="rect">
+            <a:avLst/>
+          </a:prstGeom>
+          <a:noFill/>
+        </p:spPr>
+        <p:txBody>
+          <a:bodyPr wrap="square">
+            <a:spAutoFit/>
+          </a:bodyPr>
+          <a:lstStyle/>
+          <a:p>
+            <a:pPr algn="ctr"/>
+            <a:r>
+              <a:rPr sz="1400" b="1">
+                <a:solidFill>
+                  <a:srgbClr val="6B46C1"/>
+                </a:solidFill>
+                <a:latin typeface="阿里巴巴普惠体 3.0"/>
+              </a:rPr>
+              <a:t>3. 智能数据治理</a:t>
+            </a:r>
+          </a:p>
+        </p:txBody>
+      </p:sp>
+      <p:sp>
+        <p:nvSpPr>
           <p:cNvPr id="25" name="TextBox 24"/>
           <p:cNvSpPr txBox="1"/>
           <p:nvPr/>
         </p:nvSpPr>
         <p:spPr>
           <a:xfrm>
-            <a:off x="8930487" y="4251960"/>
-            <a:ext cx="2286000" cy="457200"/>
-          </a:xfrm>
-          <a:prstGeom prst="rect">
-            <a:avLst/>
-          </a:prstGeom>
-          <a:noFill/>
-        </p:spPr>
-        <p:txBody>
-          <a:bodyPr wrap="square">
-            <a:spAutoFit/>
-          </a:bodyPr>
-          <a:lstStyle/>
-          <a:p>
-            <a:pPr algn="ctr"/>
-            <a:r>
-              <a:rPr sz="1400" b="0">
-                <a:solidFill>
-                  <a:srgbClr val="1F2937"/>
+            <a:off x="6430975" y="3584448"/>
+            <a:ext cx="5486400" cy="320040"/>
+          </a:xfrm>
+          <a:prstGeom prst="rect">
+            <a:avLst/>
+          </a:prstGeom>
+          <a:noFill/>
+        </p:spPr>
+        <p:txBody>
+          <a:bodyPr wrap="square">
+            <a:spAutoFit/>
+          </a:bodyPr>
+          <a:lstStyle/>
+          <a:p>
+            <a:pPr algn="ctr"/>
+            <a:r>
+              <a:rPr sz="1100" b="0">
+                <a:solidFill>
+                  <a:srgbClr val="6B7280"/>
                 </a:solidFill>
                 <a:latin typeface="阿里巴巴普惠体 3.0"/>
               </a:rPr>
-              <a:t>V1.3 工作流</a:t>
-            </a:r>
-          </a:p>
-        </p:txBody>
-      </p:sp>
-      <p:sp>
-        <p:nvSpPr>
-          <p:cNvPr id="26" name="TextBox 25"/>
-          <p:cNvSpPr txBox="1"/>
-          <p:nvPr/>
-        </p:nvSpPr>
-        <p:spPr>
-          <a:xfrm>
-            <a:off x="457200" y="5486400"/>
-            <a:ext cx="11277295" cy="365760"/>
-          </a:xfrm>
-          <a:prstGeom prst="rect">
-            <a:avLst/>
-          </a:prstGeom>
-          <a:noFill/>
-        </p:spPr>
-        <p:txBody>
-          <a:bodyPr wrap="square">
-            <a:spAutoFit/>
-          </a:bodyPr>
-          <a:lstStyle/>
-          <a:p>
-            <a:pPr algn="ctr"/>
-            <a:r>
-              <a:rPr sz="1400" b="0">
+              <a:t>血缘分析 + 动态脱敏 + 自动化审计</a:t>
+            </a:r>
+          </a:p>
+        </p:txBody>
+      </p:sp>
+      <p:sp>
+        <p:nvSpPr>
+          <p:cNvPr id="26" name="Rounded Rectangle 25"/>
+          <p:cNvSpPr/>
+          <p:nvPr/>
+        </p:nvSpPr>
+        <p:spPr>
+          <a:xfrm>
+            <a:off x="6248095" y="4069079"/>
+            <a:ext cx="5669280" cy="731520"/>
+          </a:xfrm>
+          <a:prstGeom prst="roundRect">
+            <a:avLst/>
+          </a:prstGeom>
+          <a:solidFill>
+            <a:srgbClr val="FFFFFF"/>
+          </a:solidFill>
+          <a:ln w="19050">
+            <a:solidFill>
+              <a:srgbClr val="6B46C1"/>
+            </a:solidFill>
+          </a:ln>
+        </p:spPr>
+        <p:style>
+          <a:lnRef idx="1">
+            <a:schemeClr val="accent1"/>
+          </a:lnRef>
+          <a:fillRef idx="3">
+            <a:schemeClr val="accent1"/>
+          </a:fillRef>
+          <a:effectRef idx="2">
+            <a:schemeClr val="accent1"/>
+          </a:effectRef>
+          <a:fontRef idx="minor">
+            <a:schemeClr val="lt1"/>
+          </a:fontRef>
+        </p:style>
+        <p:txBody>
+          <a:bodyPr rtlCol="0" anchor="ctr"/>
+          <a:lstStyle/>
+          <a:p>
+            <a:pPr algn="ctr"/>
+          </a:p>
+        </p:txBody>
+      </p:sp>
+      <p:sp>
+        <p:nvSpPr>
+          <p:cNvPr id="27" name="TextBox 26"/>
+          <p:cNvSpPr txBox="1"/>
+          <p:nvPr/>
+        </p:nvSpPr>
+        <p:spPr>
+          <a:xfrm>
+            <a:off x="6430975" y="4114799"/>
+            <a:ext cx="5486400" cy="320040"/>
+          </a:xfrm>
+          <a:prstGeom prst="rect">
+            <a:avLst/>
+          </a:prstGeom>
+          <a:noFill/>
+        </p:spPr>
+        <p:txBody>
+          <a:bodyPr wrap="square">
+            <a:spAutoFit/>
+          </a:bodyPr>
+          <a:lstStyle/>
+          <a:p>
+            <a:pPr algn="ctr"/>
+            <a:r>
+              <a:rPr sz="1400" b="1">
+                <a:solidFill>
+                  <a:srgbClr val="6B46C1"/>
+                </a:solidFill>
+                <a:latin typeface="阿里巴巴普惠体 3.0"/>
+              </a:rPr>
+              <a:t>4. Serverless 弹性</a:t>
+            </a:r>
+          </a:p>
+        </p:txBody>
+      </p:sp>
+      <p:sp>
+        <p:nvSpPr>
+          <p:cNvPr id="28" name="TextBox 27"/>
+          <p:cNvSpPr txBox="1"/>
+          <p:nvPr/>
+        </p:nvSpPr>
+        <p:spPr>
+          <a:xfrm>
+            <a:off x="6430975" y="4453127"/>
+            <a:ext cx="5486400" cy="320040"/>
+          </a:xfrm>
+          <a:prstGeom prst="rect">
+            <a:avLst/>
+          </a:prstGeom>
+          <a:noFill/>
+        </p:spPr>
+        <p:txBody>
+          <a:bodyPr wrap="square">
+            <a:spAutoFit/>
+          </a:bodyPr>
+          <a:lstStyle/>
+          <a:p>
+            <a:pPr algn="ctr"/>
+            <a:r>
+              <a:rPr sz="1100" b="0">
                 <a:solidFill>
                   <a:srgbClr val="6B7280"/>
                 </a:solidFill>
                 <a:latin typeface="阿里巴巴普惠体 3.0"/>
               </a:rPr>
-              <a:t>3 个组件 · 2 个仓库 · 各自独立维护 · 按需组合</a:t>
+              <a:t>计算/存储分离 + 自动扩缩容</a:t>
+            </a:r>
+          </a:p>
+        </p:txBody>
+      </p:sp>
+      <p:sp>
+        <p:nvSpPr>
+          <p:cNvPr id="29" name="Rounded Rectangle 28"/>
+          <p:cNvSpPr/>
+          <p:nvPr/>
+        </p:nvSpPr>
+        <p:spPr>
+          <a:xfrm>
+            <a:off x="1828800" y="5120640"/>
+            <a:ext cx="8534095" cy="320040"/>
+          </a:xfrm>
+          <a:prstGeom prst="roundRect">
+            <a:avLst/>
+          </a:prstGeom>
+          <a:solidFill>
+            <a:srgbClr val="FEF3C7"/>
+          </a:solidFill>
+          <a:ln w="19050">
+            <a:solidFill>
+              <a:srgbClr val="F59E0B"/>
+            </a:solidFill>
+          </a:ln>
+        </p:spPr>
+        <p:style>
+          <a:lnRef idx="1">
+            <a:schemeClr val="accent1"/>
+          </a:lnRef>
+          <a:fillRef idx="3">
+            <a:schemeClr val="accent1"/>
+          </a:fillRef>
+          <a:effectRef idx="2">
+            <a:schemeClr val="accent1"/>
+          </a:effectRef>
+          <a:fontRef idx="minor">
+            <a:schemeClr val="lt1"/>
+          </a:fontRef>
+        </p:style>
+        <p:txBody>
+          <a:bodyPr rtlCol="0" anchor="ctr"/>
+          <a:lstStyle/>
+          <a:p>
+            <a:pPr algn="ctr"/>
+          </a:p>
+        </p:txBody>
+      </p:sp>
+      <p:sp>
+        <p:nvSpPr>
+          <p:cNvPr id="30" name="TextBox 29"/>
+          <p:cNvSpPr txBox="1"/>
+          <p:nvPr/>
+        </p:nvSpPr>
+        <p:spPr>
+          <a:xfrm>
+            <a:off x="1828800" y="5138927"/>
+            <a:ext cx="8534095" cy="301752"/>
+          </a:xfrm>
+          <a:prstGeom prst="rect">
+            <a:avLst/>
+          </a:prstGeom>
+          <a:noFill/>
+        </p:spPr>
+        <p:txBody>
+          <a:bodyPr wrap="square">
+            <a:spAutoFit/>
+          </a:bodyPr>
+          <a:lstStyle/>
+          <a:p>
+            <a:pPr algn="ctr"/>
+            <a:r>
+              <a:rPr sz="1400" b="1">
+                <a:solidFill>
+                  <a:srgbClr val="F59E0B"/>
+                </a:solidFill>
+                <a:latin typeface="阿里巴巴普惠体 3.0"/>
+              </a:rPr>
+              <a:t>★ 让 AI 懂数据,让数据懂 AI</a:t>
+            </a:r>
+          </a:p>
+        </p:txBody>
+      </p:sp>
+      <p:sp>
+        <p:nvSpPr>
+          <p:cNvPr id="31" name="Rounded Rectangle 30"/>
+          <p:cNvSpPr/>
+          <p:nvPr/>
+        </p:nvSpPr>
+        <p:spPr>
+          <a:xfrm>
+            <a:off x="1828800" y="5504688"/>
+            <a:ext cx="8534095" cy="320040"/>
+          </a:xfrm>
+          <a:prstGeom prst="roundRect">
+            <a:avLst/>
+          </a:prstGeom>
+          <a:solidFill>
+            <a:srgbClr val="FEF3C7"/>
+          </a:solidFill>
+          <a:ln w="19050">
+            <a:solidFill>
+              <a:srgbClr val="F59E0B"/>
+            </a:solidFill>
+          </a:ln>
+        </p:spPr>
+        <p:style>
+          <a:lnRef idx="1">
+            <a:schemeClr val="accent1"/>
+          </a:lnRef>
+          <a:fillRef idx="3">
+            <a:schemeClr val="accent1"/>
+          </a:fillRef>
+          <a:effectRef idx="2">
+            <a:schemeClr val="accent1"/>
+          </a:effectRef>
+          <a:fontRef idx="minor">
+            <a:schemeClr val="lt1"/>
+          </a:fontRef>
+        </p:style>
+        <p:txBody>
+          <a:bodyPr rtlCol="0" anchor="ctr"/>
+          <a:lstStyle/>
+          <a:p>
+            <a:pPr algn="ctr"/>
+          </a:p>
+        </p:txBody>
+      </p:sp>
+      <p:sp>
+        <p:nvSpPr>
+          <p:cNvPr id="32" name="TextBox 31"/>
+          <p:cNvSpPr txBox="1"/>
+          <p:nvPr/>
+        </p:nvSpPr>
+        <p:spPr>
+          <a:xfrm>
+            <a:off x="1828800" y="5522975"/>
+            <a:ext cx="8534095" cy="301752"/>
+          </a:xfrm>
+          <a:prstGeom prst="rect">
+            <a:avLst/>
+          </a:prstGeom>
+          <a:noFill/>
+        </p:spPr>
+        <p:txBody>
+          <a:bodyPr wrap="square">
+            <a:spAutoFit/>
+          </a:bodyPr>
+          <a:lstStyle/>
+          <a:p>
+            <a:pPr algn="ctr"/>
+            <a:r>
+              <a:rPr sz="1400" b="1">
+                <a:solidFill>
+                  <a:srgbClr val="F59E0B"/>
+                </a:solidFill>
+                <a:latin typeface="阿里巴巴普惠体 3.0"/>
+              </a:rPr>
+              <a:t>★ 终极形态:对话式数据分析 (CDA) 标杆</a:t>
+            </a:r>
+          </a:p>
+        </p:txBody>
+      </p:sp>
+      <p:sp>
+        <p:nvSpPr>
+          <p:cNvPr id="33" name="Rounded Rectangle 32"/>
+          <p:cNvSpPr/>
+          <p:nvPr/>
+        </p:nvSpPr>
+        <p:spPr>
+          <a:xfrm>
+            <a:off x="1828800" y="5888736"/>
+            <a:ext cx="8534095" cy="320040"/>
+          </a:xfrm>
+          <a:prstGeom prst="roundRect">
+            <a:avLst/>
+          </a:prstGeom>
+          <a:solidFill>
+            <a:srgbClr val="FEF3C7"/>
+          </a:solidFill>
+          <a:ln w="19050">
+            <a:solidFill>
+              <a:srgbClr val="F59E0B"/>
+            </a:solidFill>
+          </a:ln>
+        </p:spPr>
+        <p:style>
+          <a:lnRef idx="1">
+            <a:schemeClr val="accent1"/>
+          </a:lnRef>
+          <a:fillRef idx="3">
+            <a:schemeClr val="accent1"/>
+          </a:fillRef>
+          <a:effectRef idx="2">
+            <a:schemeClr val="accent1"/>
+          </a:effectRef>
+          <a:fontRef idx="minor">
+            <a:schemeClr val="lt1"/>
+          </a:fontRef>
+        </p:style>
+        <p:txBody>
+          <a:bodyPr rtlCol="0" anchor="ctr"/>
+          <a:lstStyle/>
+          <a:p>
+            <a:pPr algn="ctr"/>
+          </a:p>
+        </p:txBody>
+      </p:sp>
+      <p:sp>
+        <p:nvSpPr>
+          <p:cNvPr id="34" name="TextBox 33"/>
+          <p:cNvSpPr txBox="1"/>
+          <p:nvPr/>
+        </p:nvSpPr>
+        <p:spPr>
+          <a:xfrm>
+            <a:off x="1828800" y="5907023"/>
+            <a:ext cx="8534095" cy="301752"/>
+          </a:xfrm>
+          <a:prstGeom prst="rect">
+            <a:avLst/>
+          </a:prstGeom>
+          <a:noFill/>
+        </p:spPr>
+        <p:txBody>
+          <a:bodyPr wrap="square">
+            <a:spAutoFit/>
+          </a:bodyPr>
+          <a:lstStyle/>
+          <a:p>
+            <a:pPr algn="ctr"/>
+            <a:r>
+              <a:rPr sz="1400" b="1">
+                <a:solidFill>
+                  <a:srgbClr val="F59E0B"/>
+                </a:solidFill>
+                <a:latin typeface="阿里巴巴普惠体 3.0"/>
+              </a:rPr>
+              <a:t>★ 零代码 AI 应用工厂 (Amis + Skill 绑定)</a:t>
             </a:r>
           </a:p>
         </p:txBody>
@@ -6016,7 +6336,7 @@
             <p:tnCond val="0"/>
           </p:cond>
           <p:par>
-            <p:cTn id="4" nodeType="withEffect" dur="500" begin="0ms" fill="hold">
+            <p:cTn id="3" nodeType="withEffect" dur="500" begin="0ms" fill="hold">
               <p:animEffect presetClass="entr" presetId="10" dur="500"/>
             </p:cTn>
           </p:par>
@@ -6033,7 +6353,7 @@
             <p:tnCond val="0"/>
           </p:cond>
           <p:par>
-            <p:cTn id="8" nodeType="withEffect" dur="500" begin="300ms" fill="hold">
+            <p:cTn id="5" nodeType="withEffect" dur="500" begin="400ms" fill="hold">
               <p:animEffect presetClass="entr" presetId="10" dur="500"/>
             </p:cTn>
           </p:par>
@@ -6050,7 +6370,7 @@
             <p:tnCond val="0"/>
           </p:cond>
           <p:par>
-            <p:cTn id="12" nodeType="withEffect" dur="500" begin="600ms" fill="hold">
+            <p:cTn id="8" nodeType="withEffect" dur="500" begin="600ms" fill="hold">
               <p:animEffect presetClass="entr" presetId="10" dur="500"/>
             </p:cTn>
           </p:par>
@@ -6067,7 +6387,7 @@
             <p:tnCond val="0"/>
           </p:cond>
           <p:par>
-            <p:cTn id="16" nodeType="withEffect" dur="500" begin="1200ms" fill="hold">
+            <p:cTn id="11" nodeType="withEffect" dur="500" begin="800ms" fill="hold">
               <p:animEffect presetClass="entr" presetId="10" dur="500"/>
             </p:cTn>
           </p:par>
@@ -6084,7 +6404,143 @@
             <p:tnCond val="0"/>
           </p:cond>
           <p:par>
-            <p:cTn id="16" nodeType="withEffect" dur="1500" begin="2000ms" fill="hold" repeatCount="indefinite">
+            <p:cTn id="14" nodeType="withEffect" dur="500" begin="1000ms" fill="hold">
+              <p:animEffect presetClass="entr" presetId="10" dur="500"/>
+            </p:cTn>
+          </p:par>
+        </p:par>
+      </p:par>
+    </p:tnLst>
+  </p:timing>
+  <p:timing>
+    <p:tnLst>
+      <p:par>
+        <p:pPr/>
+        <p:par>
+          <p:cond>
+            <p:tnCond val="0"/>
+          </p:cond>
+          <p:par>
+            <p:cTn id="18" nodeType="withEffect" dur="500" begin="1200ms" fill="hold">
+              <p:animEffect presetClass="entr" presetId="10" dur="500"/>
+            </p:cTn>
+          </p:par>
+        </p:par>
+      </p:par>
+    </p:tnLst>
+  </p:timing>
+  <p:timing>
+    <p:tnLst>
+      <p:par>
+        <p:pPr/>
+        <p:par>
+          <p:cond>
+            <p:tnCond val="0"/>
+          </p:cond>
+          <p:par>
+            <p:cTn id="21" nodeType="withEffect" dur="500" begin="1400ms" fill="hold">
+              <p:animEffect presetClass="entr" presetId="10" dur="500"/>
+            </p:cTn>
+          </p:par>
+        </p:par>
+      </p:par>
+    </p:tnLst>
+  </p:timing>
+  <p:timing>
+    <p:tnLst>
+      <p:par>
+        <p:pPr/>
+        <p:par>
+          <p:cond>
+            <p:tnCond val="0"/>
+          </p:cond>
+          <p:par>
+            <p:cTn id="24" nodeType="withEffect" dur="500" begin="1600ms" fill="hold">
+              <p:animEffect presetClass="entr" presetId="10" dur="500"/>
+            </p:cTn>
+          </p:par>
+        </p:par>
+      </p:par>
+    </p:tnLst>
+  </p:timing>
+  <p:timing>
+    <p:tnLst>
+      <p:par>
+        <p:pPr/>
+        <p:par>
+          <p:cond>
+            <p:tnCond val="0"/>
+          </p:cond>
+          <p:par>
+            <p:cTn id="27" nodeType="withEffect" dur="500" begin="1800ms" fill="hold">
+              <p:animEffect presetClass="entr" presetId="10" dur="500"/>
+            </p:cTn>
+          </p:par>
+        </p:par>
+      </p:par>
+    </p:tnLst>
+  </p:timing>
+  <p:timing>
+    <p:tnLst>
+      <p:par>
+        <p:pPr/>
+        <p:par>
+          <p:cond>
+            <p:tnCond val="0"/>
+          </p:cond>
+          <p:par>
+            <p:cTn id="30" nodeType="withEffect" dur="500" begin="2000ms" fill="hold">
+              <p:animEffect presetClass="entr" presetId="10" dur="500"/>
+            </p:cTn>
+          </p:par>
+        </p:par>
+      </p:par>
+    </p:tnLst>
+  </p:timing>
+  <p:timing>
+    <p:tnLst>
+      <p:par>
+        <p:pPr/>
+        <p:par>
+          <p:cond>
+            <p:tnCond val="0"/>
+          </p:cond>
+          <p:par>
+            <p:cTn id="32" nodeType="withEffect" dur="500" begin="2300ms" fill="hold">
+              <p:animEffect presetClass="entr" presetId="10" dur="500"/>
+            </p:cTn>
+          </p:par>
+        </p:par>
+      </p:par>
+    </p:tnLst>
+  </p:timing>
+  <p:timing>
+    <p:tnLst>
+      <p:par>
+        <p:pPr/>
+        <p:par>
+          <p:cond>
+            <p:tnCond val="0"/>
+          </p:cond>
+          <p:par>
+            <p:cTn id="34" nodeType="withEffect" dur="500" begin="2600ms" fill="hold">
+              <p:animEffect presetClass="entr" presetId="10" dur="500"/>
+            </p:cTn>
+          </p:par>
+        </p:par>
+      </p:par>
+    </p:tnLst>
+  </p:timing>
+  <p:timing>
+    <p:tnLst>
+      <p:par>
+        <p:pPr/>
+        <p:par>
+          <p:cond>
+            <p:tnCond val="0"/>
+          </p:cond>
+          <p:par>
+            <p:cTn id="32" nodeType="withEffect" dur="1500" begin="3500ms" fill="hold" repeatCount="indefinite">
               <p:animEffect presetClass="emph" presetId="26" dur="1500"/>
             </p:cTn>
           </p:par>
@@ -6322,13 +6778,13 @@
           <a:p>
             <a:pPr algn="ctr"/>
             <a:r>
-              <a:rPr sz="2200" b="1">
+              <a:rPr sz="2000" b="1">
                 <a:solidFill>
                   <a:srgbClr val="F59E0B"/>
                 </a:solidFill>
                 <a:latin typeface="阿里巴巴普惠体 3.0"/>
               </a:rPr>
-              <a:t>★ 让 AI 不再是 Demo,让企业系统真正智能</a:t>
+              <a:t>★ 让 AI 懂数据,让数据懂 AI — 打造对话式数据分析标杆</a:t>
             </a:r>
           </a:p>
         </p:txBody>
@@ -7924,29 +8380,29 @@
         </p:nvSpPr>
         <p:spPr>
           <a:xfrm>
-            <a:off x="1371600" y="3200400"/>
-            <a:ext cx="9448495" cy="457200"/>
-          </a:xfrm>
-          <a:prstGeom prst="rect">
-            <a:avLst/>
-          </a:prstGeom>
-          <a:noFill/>
-        </p:spPr>
-        <p:txBody>
-          <a:bodyPr wrap="square">
-            <a:spAutoFit/>
-          </a:bodyPr>
-          <a:lstStyle/>
-          <a:p>
-            <a:pPr algn="ctr"/>
-            <a:r>
-              <a:rPr sz="1800" b="1">
+            <a:off x="640080" y="3200400"/>
+            <a:ext cx="10881360" cy="457200"/>
+          </a:xfrm>
+          <a:prstGeom prst="rect">
+            <a:avLst/>
+          </a:prstGeom>
+          <a:noFill/>
+        </p:spPr>
+        <p:txBody>
+          <a:bodyPr wrap="square">
+            <a:spAutoFit/>
+          </a:bodyPr>
+          <a:lstStyle/>
+          <a:p>
+            <a:pPr algn="ctr"/>
+            <a:r>
+              <a:rPr sz="1600" b="1">
                 <a:solidFill>
                   <a:srgbClr val="F59E0B"/>
                 </a:solidFill>
                 <a:latin typeface="阿里巴巴普惠体 3.0"/>
               </a:rPr>
-              <a:t>✓ 三个都是依赖库,不是产品</a:t>
+              <a:t>✓ 灵梭:Spring Boot AI 加速器,零配置接入 RAG / MCP / Skill</a:t>
             </a:r>
           </a:p>
         </p:txBody>
@@ -7959,29 +8415,29 @@
         </p:nvSpPr>
         <p:spPr>
           <a:xfrm>
-            <a:off x="1371600" y="3749039"/>
-            <a:ext cx="9448495" cy="457200"/>
-          </a:xfrm>
-          <a:prstGeom prst="rect">
-            <a:avLst/>
-          </a:prstGeom>
-          <a:noFill/>
-        </p:spPr>
-        <p:txBody>
-          <a:bodyPr wrap="square">
-            <a:spAutoFit/>
-          </a:bodyPr>
-          <a:lstStyle/>
-          <a:p>
-            <a:pPr algn="ctr"/>
-            <a:r>
-              <a:rPr sz="1800" b="0">
+            <a:off x="640080" y="3703320"/>
+            <a:ext cx="10881360" cy="457200"/>
+          </a:xfrm>
+          <a:prstGeom prst="rect">
+            <a:avLst/>
+          </a:prstGeom>
+          <a:noFill/>
+        </p:spPr>
+        <p:txBody>
+          <a:bodyPr wrap="square">
+            <a:spAutoFit/>
+          </a:bodyPr>
+          <a:lstStyle/>
+          <a:p>
+            <a:pPr algn="ctr"/>
+            <a:r>
+              <a:rPr sz="1600" b="0">
                 <a:solidFill>
                   <a:srgbClr val="1F2937"/>
                 </a:solidFill>
                 <a:latin typeface="阿里巴巴普惠体 3.0"/>
               </a:rPr>
-              <a:t>✓ 组件化、按需引入,各自独立可用</a:t>
+              <a:t>✓ SQL工坊:JSON CRUD + Calcite 联邦 + Amis 低代码,数据开发效率 +300%</a:t>
             </a:r>
           </a:p>
         </p:txBody>
@@ -7994,29 +8450,29 @@
         </p:nvSpPr>
         <p:spPr>
           <a:xfrm>
-            <a:off x="1371600" y="4297680"/>
-            <a:ext cx="9448495" cy="457200"/>
-          </a:xfrm>
-          <a:prstGeom prst="rect">
-            <a:avLst/>
-          </a:prstGeom>
-          <a:noFill/>
-        </p:spPr>
-        <p:txBody>
-          <a:bodyPr wrap="square">
-            <a:spAutoFit/>
-          </a:bodyPr>
-          <a:lstStyle/>
-          <a:p>
-            <a:pPr algn="ctr"/>
-            <a:r>
-              <a:rPr sz="1800" b="0">
+            <a:off x="640080" y="4206240"/>
+            <a:ext cx="10881360" cy="457200"/>
+          </a:xfrm>
+          <a:prstGeom prst="rect">
+            <a:avLst/>
+          </a:prstGeom>
+          <a:noFill/>
+        </p:spPr>
+        <p:txBody>
+          <a:bodyPr wrap="square">
+            <a:spAutoFit/>
+          </a:bodyPr>
+          <a:lstStyle/>
+          <a:p>
+            <a:pPr algn="ctr"/>
+            <a:r>
+              <a:rPr sz="1600" b="0">
                 <a:solidFill>
                   <a:srgbClr val="6B7280"/>
                 </a:solidFill>
                 <a:latin typeface="阿里巴巴普惠体 3.0"/>
               </a:rPr>
-              <a:t>✓ ├── 灵梭 / SQL工坊 / SQL工坊 MCP 都可单独用</a:t>
+              <a:t>✓ SQL工坊 MCP:打通 AI ↔ 业务数据库,数据不出企业</a:t>
             </a:r>
           </a:p>
         </p:txBody>
@@ -8029,29 +8485,29 @@
         </p:nvSpPr>
         <p:spPr>
           <a:xfrm>
-            <a:off x="1371600" y="4846320"/>
-            <a:ext cx="9448495" cy="457200"/>
-          </a:xfrm>
-          <a:prstGeom prst="rect">
-            <a:avLst/>
-          </a:prstGeom>
-          <a:noFill/>
-        </p:spPr>
-        <p:txBody>
-          <a:bodyPr wrap="square">
-            <a:spAutoFit/>
-          </a:bodyPr>
-          <a:lstStyle/>
-          <a:p>
-            <a:pPr algn="ctr"/>
-            <a:r>
-              <a:rPr sz="1800" b="0">
+            <a:off x="640080" y="4709160"/>
+            <a:ext cx="10881360" cy="457200"/>
+          </a:xfrm>
+          <a:prstGeom prst="rect">
+            <a:avLst/>
+          </a:prstGeom>
+          <a:noFill/>
+        </p:spPr>
+        <p:txBody>
+          <a:bodyPr wrap="square">
+            <a:spAutoFit/>
+          </a:bodyPr>
+          <a:lstStyle/>
+          <a:p>
+            <a:pPr algn="ctr"/>
+            <a:r>
+              <a:rPr sz="1600" b="0">
                 <a:solidFill>
                   <a:srgbClr val="1F2937"/>
                 </a:solidFill>
                 <a:latin typeface="阿里巴巴普惠体 3.0"/>
               </a:rPr>
-              <a:t>✓ 组合起来 = 企业 AI 落地完整闭环</a:t>
+              <a:t>✓ 3 个依赖库可单独引入;SQL工坊还可单独服务对接外部项目</a:t>
             </a:r>
           </a:p>
         </p:txBody>

--- a/docs/ppt/javabrain.pptx
+++ b/docs/ppt/javabrain.pptx
@@ -3107,25 +3107,53 @@
         <p:nvPr/>
       </p:nvGrpSpPr>
       <p:grpSpPr/>
-      <p:sp>
-        <p:nvSpPr>
-          <p:cNvPr id="2" name="Rounded Rectangle 1"/>
+      <p:pic>
+        <p:nvPicPr>
+          <p:cNvPr id="2" name="Picture 1" descr="p1-neural-v1.png"/>
+          <p:cNvPicPr>
+            <a:picLocks noChangeAspect="1"/>
+          </p:cNvPicPr>
+          <p:nvPr/>
+        </p:nvPicPr>
+        <p:blipFill>
+          <a:blip r:embed="rId2">
+            <a:alphaModFix amt="32000"/>
+          </a:blip>
+          <a:stretch>
+            <a:fillRect/>
+          </a:stretch>
+        </p:blipFill>
+        <p:spPr>
+          <a:xfrm>
+            <a:off x="4114800" y="457200"/>
+            <a:ext cx="7772400" cy="5029200"/>
+          </a:xfrm>
+          <a:prstGeom prst="rect">
+            <a:avLst/>
+          </a:prstGeom>
+        </p:spPr>
+      </p:pic>
+      <p:sp>
+        <p:nvSpPr>
+          <p:cNvPr id="3" name="Oval 2"/>
           <p:cNvSpPr/>
           <p:nvPr/>
         </p:nvSpPr>
         <p:spPr>
           <a:xfrm>
-            <a:off x="4084167" y="1371600"/>
-            <a:ext cx="1097280" cy="1097280"/>
-          </a:xfrm>
-          <a:prstGeom prst="roundRect">
+            <a:off x="5669280" y="365760"/>
+            <a:ext cx="548640" cy="548640"/>
+          </a:xfrm>
+          <a:prstGeom prst="ellipse">
             <a:avLst/>
           </a:prstGeom>
           <a:solidFill>
             <a:srgbClr val="007396"/>
           </a:solidFill>
-          <a:ln>
-            <a:noFill/>
+          <a:ln w="25400">
+            <a:solidFill>
+              <a:srgbClr val="007396"/>
+            </a:solidFill>
           </a:ln>
         </p:spPr>
         <p:style>
@@ -3152,20 +3180,21 @@
       </p:sp>
       <p:sp>
         <p:nvSpPr>
-          <p:cNvPr id="3" name="Oval 2"/>
+          <p:cNvPr id="4" name="Oval 3"/>
           <p:cNvSpPr/>
           <p:nvPr/>
         </p:nvSpPr>
         <p:spPr>
           <a:xfrm>
-            <a:off x="4193895" y="1283817"/>
-            <a:ext cx="175564" cy="175564"/>
+            <a:off x="4160520" y="868680"/>
+            <a:ext cx="914400" cy="914400"/>
           </a:xfrm>
           <a:prstGeom prst="ellipse">
             <a:avLst/>
           </a:prstGeom>
           <a:solidFill>
             <a:srgbClr val="007396"/>
+            <a:alpha val="30000"/>
           </a:solidFill>
           <a:ln>
             <a:noFill/>
@@ -3195,14 +3224,14 @@
       </p:sp>
       <p:sp>
         <p:nvSpPr>
-          <p:cNvPr id="4" name="Oval 3"/>
+          <p:cNvPr id="5" name="Oval 4"/>
           <p:cNvSpPr/>
           <p:nvPr/>
         </p:nvSpPr>
         <p:spPr>
           <a:xfrm>
-            <a:off x="4435297" y="1283817"/>
-            <a:ext cx="175564" cy="175564"/>
+            <a:off x="4389120" y="1097280"/>
+            <a:ext cx="457200" cy="457200"/>
           </a:xfrm>
           <a:prstGeom prst="ellipse">
             <a:avLst/>
@@ -3211,7 +3240,9 @@
             <a:srgbClr val="007396"/>
           </a:solidFill>
           <a:ln>
-            <a:noFill/>
+            <a:solidFill>
+              <a:srgbClr val="007396"/>
+            </a:solidFill>
           </a:ln>
         </p:spPr>
         <p:style>
@@ -3238,20 +3269,21 @@
       </p:sp>
       <p:sp>
         <p:nvSpPr>
-          <p:cNvPr id="5" name="Oval 4"/>
+          <p:cNvPr id="6" name="Oval 5"/>
           <p:cNvSpPr/>
           <p:nvPr/>
         </p:nvSpPr>
         <p:spPr>
           <a:xfrm>
-            <a:off x="4654753" y="1283817"/>
-            <a:ext cx="175564" cy="175564"/>
+            <a:off x="5867704" y="868680"/>
+            <a:ext cx="914400" cy="914400"/>
           </a:xfrm>
           <a:prstGeom prst="ellipse">
             <a:avLst/>
           </a:prstGeom>
           <a:solidFill>
-            <a:srgbClr val="007396"/>
+            <a:srgbClr val="6B46C1"/>
+            <a:alpha val="30000"/>
           </a:solidFill>
           <a:ln>
             <a:noFill/>
@@ -3281,23 +3313,25 @@
       </p:sp>
       <p:sp>
         <p:nvSpPr>
-          <p:cNvPr id="6" name="Oval 5"/>
+          <p:cNvPr id="7" name="Oval 6"/>
           <p:cNvSpPr/>
           <p:nvPr/>
         </p:nvSpPr>
         <p:spPr>
           <a:xfrm>
-            <a:off x="4896154" y="1283817"/>
-            <a:ext cx="175564" cy="175564"/>
+            <a:off x="6096304" y="1097280"/>
+            <a:ext cx="457200" cy="457200"/>
           </a:xfrm>
           <a:prstGeom prst="ellipse">
             <a:avLst/>
           </a:prstGeom>
           <a:solidFill>
-            <a:srgbClr val="007396"/>
+            <a:srgbClr val="6B46C1"/>
           </a:solidFill>
           <a:ln>
-            <a:noFill/>
+            <a:solidFill>
+              <a:srgbClr val="6B46C1"/>
+            </a:solidFill>
           </a:ln>
         </p:spPr>
         <p:style>
@@ -3324,20 +3358,21 @@
       </p:sp>
       <p:sp>
         <p:nvSpPr>
-          <p:cNvPr id="7" name="Rounded Rectangle 6"/>
+          <p:cNvPr id="8" name="Oval 7"/>
           <p:cNvSpPr/>
           <p:nvPr/>
         </p:nvSpPr>
         <p:spPr>
           <a:xfrm>
-            <a:off x="5547207" y="1371600"/>
-            <a:ext cx="1097280" cy="1097280"/>
-          </a:xfrm>
-          <a:prstGeom prst="roundRect">
+            <a:off x="7573975" y="868680"/>
+            <a:ext cx="914400" cy="914400"/>
+          </a:xfrm>
+          <a:prstGeom prst="ellipse">
             <a:avLst/>
           </a:prstGeom>
           <a:solidFill>
-            <a:srgbClr val="6B46C1"/>
+            <a:srgbClr val="10B981"/>
+            <a:alpha val="30000"/>
           </a:solidFill>
           <a:ln>
             <a:noFill/>
@@ -3367,23 +3402,25 @@
       </p:sp>
       <p:sp>
         <p:nvSpPr>
-          <p:cNvPr id="8" name="Oval 7"/>
+          <p:cNvPr id="9" name="Oval 8"/>
           <p:cNvSpPr/>
           <p:nvPr/>
         </p:nvSpPr>
         <p:spPr>
           <a:xfrm>
-            <a:off x="5656935" y="1283817"/>
-            <a:ext cx="175564" cy="175564"/>
+            <a:off x="7802575" y="1097280"/>
+            <a:ext cx="457200" cy="457200"/>
           </a:xfrm>
           <a:prstGeom prst="ellipse">
             <a:avLst/>
           </a:prstGeom>
           <a:solidFill>
-            <a:srgbClr val="6B46C1"/>
+            <a:srgbClr val="10B981"/>
           </a:solidFill>
           <a:ln>
-            <a:noFill/>
+            <a:solidFill>
+              <a:srgbClr val="10B981"/>
+            </a:solidFill>
           </a:ln>
         </p:spPr>
         <p:style>
@@ -3410,427 +3447,188 @@
       </p:sp>
       <p:sp>
         <p:nvSpPr>
-          <p:cNvPr id="9" name="Oval 8"/>
+          <p:cNvPr id="10" name="TextBox 9"/>
+          <p:cNvSpPr txBox="1"/>
+          <p:nvPr/>
+        </p:nvSpPr>
+        <p:spPr>
+          <a:xfrm>
+            <a:off x="3657600" y="1737360"/>
+            <a:ext cx="1920240" cy="365760"/>
+          </a:xfrm>
+          <a:prstGeom prst="rect">
+            <a:avLst/>
+          </a:prstGeom>
+          <a:noFill/>
+        </p:spPr>
+        <p:txBody>
+          <a:bodyPr wrap="square">
+            <a:spAutoFit/>
+          </a:bodyPr>
+          <a:lstStyle/>
+          <a:p>
+            <a:pPr algn="ctr"/>
+            <a:r>
+              <a:rPr sz="1400" b="1">
+                <a:solidFill>
+                  <a:srgbClr val="007396"/>
+                </a:solidFill>
+                <a:latin typeface="阿里巴巴普惠体 3.0"/>
+              </a:rPr>
+              <a:t>灵梭</a:t>
+            </a:r>
+          </a:p>
+        </p:txBody>
+      </p:sp>
+      <p:sp>
+        <p:nvSpPr>
+          <p:cNvPr id="11" name="TextBox 10"/>
+          <p:cNvSpPr txBox="1"/>
+          <p:nvPr/>
+        </p:nvSpPr>
+        <p:spPr>
+          <a:xfrm>
+            <a:off x="5364784" y="1737360"/>
+            <a:ext cx="1920240" cy="365760"/>
+          </a:xfrm>
+          <a:prstGeom prst="rect">
+            <a:avLst/>
+          </a:prstGeom>
+          <a:noFill/>
+        </p:spPr>
+        <p:txBody>
+          <a:bodyPr wrap="square">
+            <a:spAutoFit/>
+          </a:bodyPr>
+          <a:lstStyle/>
+          <a:p>
+            <a:pPr algn="ctr"/>
+            <a:r>
+              <a:rPr sz="1400" b="1">
+                <a:solidFill>
+                  <a:srgbClr val="6B46C1"/>
+                </a:solidFill>
+                <a:latin typeface="阿里巴巴普惠体 3.0"/>
+              </a:rPr>
+              <a:t>SQL工坊</a:t>
+            </a:r>
+          </a:p>
+        </p:txBody>
+      </p:sp>
+      <p:sp>
+        <p:nvSpPr>
+          <p:cNvPr id="12" name="TextBox 11"/>
+          <p:cNvSpPr txBox="1"/>
+          <p:nvPr/>
+        </p:nvSpPr>
+        <p:spPr>
+          <a:xfrm>
+            <a:off x="7071055" y="1737360"/>
+            <a:ext cx="1920240" cy="365760"/>
+          </a:xfrm>
+          <a:prstGeom prst="rect">
+            <a:avLst/>
+          </a:prstGeom>
+          <a:noFill/>
+        </p:spPr>
+        <p:txBody>
+          <a:bodyPr wrap="square">
+            <a:spAutoFit/>
+          </a:bodyPr>
+          <a:lstStyle/>
+          <a:p>
+            <a:pPr algn="ctr"/>
+            <a:r>
+              <a:rPr sz="1400" b="1">
+                <a:solidFill>
+                  <a:srgbClr val="10B981"/>
+                </a:solidFill>
+                <a:latin typeface="阿里巴巴普惠体 3.0"/>
+              </a:rPr>
+              <a:t>SQL工坊 MCP</a:t>
+            </a:r>
+          </a:p>
+        </p:txBody>
+      </p:sp>
+      <p:sp>
+        <p:nvSpPr>
+          <p:cNvPr id="13" name="TextBox 12"/>
+          <p:cNvSpPr txBox="1"/>
+          <p:nvPr/>
+        </p:nvSpPr>
+        <p:spPr>
+          <a:xfrm>
+            <a:off x="914400" y="3931920"/>
+            <a:ext cx="10362895" cy="1280160"/>
+          </a:xfrm>
+          <a:prstGeom prst="rect">
+            <a:avLst/>
+          </a:prstGeom>
+          <a:noFill/>
+        </p:spPr>
+        <p:txBody>
+          <a:bodyPr wrap="square">
+            <a:spAutoFit/>
+          </a:bodyPr>
+          <a:lstStyle/>
+          <a:p>
+            <a:pPr algn="ctr"/>
+            <a:r>
+              <a:rPr sz="7200" b="1">
+                <a:solidFill>
+                  <a:srgbClr val="1F2937"/>
+                </a:solidFill>
+                <a:latin typeface="Inter"/>
+              </a:rPr>
+              <a:t>JavaBrain</a:t>
+            </a:r>
+          </a:p>
+        </p:txBody>
+      </p:sp>
+      <p:sp>
+        <p:nvSpPr>
+          <p:cNvPr id="14" name="TextBox 13"/>
+          <p:cNvSpPr txBox="1"/>
+          <p:nvPr/>
+        </p:nvSpPr>
+        <p:spPr>
+          <a:xfrm>
+            <a:off x="914400" y="5212080"/>
+            <a:ext cx="10362895" cy="457200"/>
+          </a:xfrm>
+          <a:prstGeom prst="rect">
+            <a:avLst/>
+          </a:prstGeom>
+          <a:noFill/>
+        </p:spPr>
+        <p:txBody>
+          <a:bodyPr wrap="square">
+            <a:spAutoFit/>
+          </a:bodyPr>
+          <a:lstStyle/>
+          <a:p>
+            <a:pPr algn="ctr"/>
+            <a:r>
+              <a:rPr sz="2400" b="0">
+                <a:solidFill>
+                  <a:srgbClr val="6B7280"/>
+                </a:solidFill>
+                <a:latin typeface="阿里巴巴普惠体 3.0"/>
+              </a:rPr>
+              <a:t>让您的系统瞬间拥有“思考”与“执行”的智能大脑</a:t>
+            </a:r>
+          </a:p>
+        </p:txBody>
+      </p:sp>
+      <p:sp>
+        <p:nvSpPr>
+          <p:cNvPr id="15" name="Rounded Rectangle 14"/>
           <p:cNvSpPr/>
           <p:nvPr/>
         </p:nvSpPr>
         <p:spPr>
           <a:xfrm>
-            <a:off x="5898337" y="1283817"/>
-            <a:ext cx="175564" cy="175564"/>
-          </a:xfrm>
-          <a:prstGeom prst="ellipse">
-            <a:avLst/>
-          </a:prstGeom>
-          <a:solidFill>
-            <a:srgbClr val="6B46C1"/>
-          </a:solidFill>
-          <a:ln>
-            <a:noFill/>
-          </a:ln>
-        </p:spPr>
-        <p:style>
-          <a:lnRef idx="1">
-            <a:schemeClr val="accent1"/>
-          </a:lnRef>
-          <a:fillRef idx="3">
-            <a:schemeClr val="accent1"/>
-          </a:fillRef>
-          <a:effectRef idx="2">
-            <a:schemeClr val="accent1"/>
-          </a:effectRef>
-          <a:fontRef idx="minor">
-            <a:schemeClr val="lt1"/>
-          </a:fontRef>
-        </p:style>
-        <p:txBody>
-          <a:bodyPr rtlCol="0" anchor="ctr"/>
-          <a:lstStyle/>
-          <a:p>
-            <a:pPr algn="ctr"/>
-          </a:p>
-        </p:txBody>
-      </p:sp>
-      <p:sp>
-        <p:nvSpPr>
-          <p:cNvPr id="10" name="Oval 9"/>
-          <p:cNvSpPr/>
-          <p:nvPr/>
-        </p:nvSpPr>
-        <p:spPr>
-          <a:xfrm>
-            <a:off x="6117793" y="1283817"/>
-            <a:ext cx="175564" cy="175564"/>
-          </a:xfrm>
-          <a:prstGeom prst="ellipse">
-            <a:avLst/>
-          </a:prstGeom>
-          <a:solidFill>
-            <a:srgbClr val="6B46C1"/>
-          </a:solidFill>
-          <a:ln>
-            <a:noFill/>
-          </a:ln>
-        </p:spPr>
-        <p:style>
-          <a:lnRef idx="1">
-            <a:schemeClr val="accent1"/>
-          </a:lnRef>
-          <a:fillRef idx="3">
-            <a:schemeClr val="accent1"/>
-          </a:fillRef>
-          <a:effectRef idx="2">
-            <a:schemeClr val="accent1"/>
-          </a:effectRef>
-          <a:fontRef idx="minor">
-            <a:schemeClr val="lt1"/>
-          </a:fontRef>
-        </p:style>
-        <p:txBody>
-          <a:bodyPr rtlCol="0" anchor="ctr"/>
-          <a:lstStyle/>
-          <a:p>
-            <a:pPr algn="ctr"/>
-          </a:p>
-        </p:txBody>
-      </p:sp>
-      <p:sp>
-        <p:nvSpPr>
-          <p:cNvPr id="11" name="Oval 10"/>
-          <p:cNvSpPr/>
-          <p:nvPr/>
-        </p:nvSpPr>
-        <p:spPr>
-          <a:xfrm>
-            <a:off x="6359194" y="1283817"/>
-            <a:ext cx="175564" cy="175564"/>
-          </a:xfrm>
-          <a:prstGeom prst="ellipse">
-            <a:avLst/>
-          </a:prstGeom>
-          <a:solidFill>
-            <a:srgbClr val="6B46C1"/>
-          </a:solidFill>
-          <a:ln>
-            <a:noFill/>
-          </a:ln>
-        </p:spPr>
-        <p:style>
-          <a:lnRef idx="1">
-            <a:schemeClr val="accent1"/>
-          </a:lnRef>
-          <a:fillRef idx="3">
-            <a:schemeClr val="accent1"/>
-          </a:fillRef>
-          <a:effectRef idx="2">
-            <a:schemeClr val="accent1"/>
-          </a:effectRef>
-          <a:fontRef idx="minor">
-            <a:schemeClr val="lt1"/>
-          </a:fontRef>
-        </p:style>
-        <p:txBody>
-          <a:bodyPr rtlCol="0" anchor="ctr"/>
-          <a:lstStyle/>
-          <a:p>
-            <a:pPr algn="ctr"/>
-          </a:p>
-        </p:txBody>
-      </p:sp>
-      <p:sp>
-        <p:nvSpPr>
-          <p:cNvPr id="12" name="Rounded Rectangle 11"/>
-          <p:cNvSpPr/>
-          <p:nvPr/>
-        </p:nvSpPr>
-        <p:spPr>
-          <a:xfrm>
-            <a:off x="7010247" y="1371600"/>
-            <a:ext cx="1097280" cy="1097280"/>
-          </a:xfrm>
-          <a:prstGeom prst="roundRect">
-            <a:avLst/>
-          </a:prstGeom>
-          <a:solidFill>
-            <a:srgbClr val="10B981"/>
-          </a:solidFill>
-          <a:ln>
-            <a:noFill/>
-          </a:ln>
-        </p:spPr>
-        <p:style>
-          <a:lnRef idx="1">
-            <a:schemeClr val="accent1"/>
-          </a:lnRef>
-          <a:fillRef idx="3">
-            <a:schemeClr val="accent1"/>
-          </a:fillRef>
-          <a:effectRef idx="2">
-            <a:schemeClr val="accent1"/>
-          </a:effectRef>
-          <a:fontRef idx="minor">
-            <a:schemeClr val="lt1"/>
-          </a:fontRef>
-        </p:style>
-        <p:txBody>
-          <a:bodyPr rtlCol="0" anchor="ctr"/>
-          <a:lstStyle/>
-          <a:p>
-            <a:pPr algn="ctr"/>
-          </a:p>
-        </p:txBody>
-      </p:sp>
-      <p:sp>
-        <p:nvSpPr>
-          <p:cNvPr id="13" name="Oval 12"/>
-          <p:cNvSpPr/>
-          <p:nvPr/>
-        </p:nvSpPr>
-        <p:spPr>
-          <a:xfrm>
-            <a:off x="7119975" y="1283817"/>
-            <a:ext cx="175564" cy="175564"/>
-          </a:xfrm>
-          <a:prstGeom prst="ellipse">
-            <a:avLst/>
-          </a:prstGeom>
-          <a:solidFill>
-            <a:srgbClr val="10B981"/>
-          </a:solidFill>
-          <a:ln>
-            <a:noFill/>
-          </a:ln>
-        </p:spPr>
-        <p:style>
-          <a:lnRef idx="1">
-            <a:schemeClr val="accent1"/>
-          </a:lnRef>
-          <a:fillRef idx="3">
-            <a:schemeClr val="accent1"/>
-          </a:fillRef>
-          <a:effectRef idx="2">
-            <a:schemeClr val="accent1"/>
-          </a:effectRef>
-          <a:fontRef idx="minor">
-            <a:schemeClr val="lt1"/>
-          </a:fontRef>
-        </p:style>
-        <p:txBody>
-          <a:bodyPr rtlCol="0" anchor="ctr"/>
-          <a:lstStyle/>
-          <a:p>
-            <a:pPr algn="ctr"/>
-          </a:p>
-        </p:txBody>
-      </p:sp>
-      <p:sp>
-        <p:nvSpPr>
-          <p:cNvPr id="14" name="Oval 13"/>
-          <p:cNvSpPr/>
-          <p:nvPr/>
-        </p:nvSpPr>
-        <p:spPr>
-          <a:xfrm>
-            <a:off x="7361377" y="1283817"/>
-            <a:ext cx="175564" cy="175564"/>
-          </a:xfrm>
-          <a:prstGeom prst="ellipse">
-            <a:avLst/>
-          </a:prstGeom>
-          <a:solidFill>
-            <a:srgbClr val="10B981"/>
-          </a:solidFill>
-          <a:ln>
-            <a:noFill/>
-          </a:ln>
-        </p:spPr>
-        <p:style>
-          <a:lnRef idx="1">
-            <a:schemeClr val="accent1"/>
-          </a:lnRef>
-          <a:fillRef idx="3">
-            <a:schemeClr val="accent1"/>
-          </a:fillRef>
-          <a:effectRef idx="2">
-            <a:schemeClr val="accent1"/>
-          </a:effectRef>
-          <a:fontRef idx="minor">
-            <a:schemeClr val="lt1"/>
-          </a:fontRef>
-        </p:style>
-        <p:txBody>
-          <a:bodyPr rtlCol="0" anchor="ctr"/>
-          <a:lstStyle/>
-          <a:p>
-            <a:pPr algn="ctr"/>
-          </a:p>
-        </p:txBody>
-      </p:sp>
-      <p:sp>
-        <p:nvSpPr>
-          <p:cNvPr id="15" name="Oval 14"/>
-          <p:cNvSpPr/>
-          <p:nvPr/>
-        </p:nvSpPr>
-        <p:spPr>
-          <a:xfrm>
-            <a:off x="7580833" y="1283817"/>
-            <a:ext cx="175564" cy="175564"/>
-          </a:xfrm>
-          <a:prstGeom prst="ellipse">
-            <a:avLst/>
-          </a:prstGeom>
-          <a:solidFill>
-            <a:srgbClr val="10B981"/>
-          </a:solidFill>
-          <a:ln>
-            <a:noFill/>
-          </a:ln>
-        </p:spPr>
-        <p:style>
-          <a:lnRef idx="1">
-            <a:schemeClr val="accent1"/>
-          </a:lnRef>
-          <a:fillRef idx="3">
-            <a:schemeClr val="accent1"/>
-          </a:fillRef>
-          <a:effectRef idx="2">
-            <a:schemeClr val="accent1"/>
-          </a:effectRef>
-          <a:fontRef idx="minor">
-            <a:schemeClr val="lt1"/>
-          </a:fontRef>
-        </p:style>
-        <p:txBody>
-          <a:bodyPr rtlCol="0" anchor="ctr"/>
-          <a:lstStyle/>
-          <a:p>
-            <a:pPr algn="ctr"/>
-          </a:p>
-        </p:txBody>
-      </p:sp>
-      <p:sp>
-        <p:nvSpPr>
-          <p:cNvPr id="16" name="Oval 15"/>
-          <p:cNvSpPr/>
-          <p:nvPr/>
-        </p:nvSpPr>
-        <p:spPr>
-          <a:xfrm>
-            <a:off x="7822234" y="1283817"/>
-            <a:ext cx="175564" cy="175564"/>
-          </a:xfrm>
-          <a:prstGeom prst="ellipse">
-            <a:avLst/>
-          </a:prstGeom>
-          <a:solidFill>
-            <a:srgbClr val="10B981"/>
-          </a:solidFill>
-          <a:ln>
-            <a:noFill/>
-          </a:ln>
-        </p:spPr>
-        <p:style>
-          <a:lnRef idx="1">
-            <a:schemeClr val="accent1"/>
-          </a:lnRef>
-          <a:fillRef idx="3">
-            <a:schemeClr val="accent1"/>
-          </a:fillRef>
-          <a:effectRef idx="2">
-            <a:schemeClr val="accent1"/>
-          </a:effectRef>
-          <a:fontRef idx="minor">
-            <a:schemeClr val="lt1"/>
-          </a:fontRef>
-        </p:style>
-        <p:txBody>
-          <a:bodyPr rtlCol="0" anchor="ctr"/>
-          <a:lstStyle/>
-          <a:p>
-            <a:pPr algn="ctr"/>
-          </a:p>
-        </p:txBody>
-      </p:sp>
-      <p:sp>
-        <p:nvSpPr>
-          <p:cNvPr id="17" name="TextBox 16"/>
-          <p:cNvSpPr txBox="1"/>
-          <p:nvPr/>
-        </p:nvSpPr>
-        <p:spPr>
-          <a:xfrm>
-            <a:off x="914400" y="3108960"/>
-            <a:ext cx="10362895" cy="1280160"/>
-          </a:xfrm>
-          <a:prstGeom prst="rect">
-            <a:avLst/>
-          </a:prstGeom>
-          <a:noFill/>
-        </p:spPr>
-        <p:txBody>
-          <a:bodyPr wrap="square">
-            <a:spAutoFit/>
-          </a:bodyPr>
-          <a:lstStyle/>
-          <a:p>
-            <a:pPr algn="ctr"/>
-            <a:r>
-              <a:rPr sz="7200" b="1">
-                <a:solidFill>
-                  <a:srgbClr val="1F2937"/>
-                </a:solidFill>
-                <a:latin typeface="Inter"/>
-              </a:rPr>
-              <a:t>JavaBrain</a:t>
-            </a:r>
-          </a:p>
-        </p:txBody>
-      </p:sp>
-      <p:sp>
-        <p:nvSpPr>
-          <p:cNvPr id="18" name="TextBox 17"/>
-          <p:cNvSpPr txBox="1"/>
-          <p:nvPr/>
-        </p:nvSpPr>
-        <p:spPr>
-          <a:xfrm>
-            <a:off x="914400" y="4389120"/>
-            <a:ext cx="10362895" cy="457200"/>
-          </a:xfrm>
-          <a:prstGeom prst="rect">
-            <a:avLst/>
-          </a:prstGeom>
-          <a:noFill/>
-        </p:spPr>
-        <p:txBody>
-          <a:bodyPr wrap="square">
-            <a:spAutoFit/>
-          </a:bodyPr>
-          <a:lstStyle/>
-          <a:p>
-            <a:pPr algn="ctr"/>
-            <a:r>
-              <a:rPr sz="2400" b="0">
-                <a:solidFill>
-                  <a:srgbClr val="6B7280"/>
-                </a:solidFill>
-                <a:latin typeface="阿里巴巴普惠体 3.0"/>
-              </a:rPr>
-              <a:t>让您的系统瞬间拥有“思考”与“执行”的智能大脑</a:t>
-            </a:r>
-          </a:p>
-        </p:txBody>
-      </p:sp>
-      <p:sp>
-        <p:nvSpPr>
-          <p:cNvPr id="19" name="Rounded Rectangle 18"/>
-          <p:cNvSpPr/>
-          <p:nvPr/>
-        </p:nvSpPr>
-        <p:spPr>
-          <a:xfrm>
-            <a:off x="3657600" y="5029200"/>
+            <a:off x="3657600" y="5852160"/>
             <a:ext cx="4876495" cy="548640"/>
           </a:xfrm>
           <a:prstGeom prst="roundRect">
@@ -3867,13 +3665,13 @@
       </p:sp>
       <p:sp>
         <p:nvSpPr>
-          <p:cNvPr id="20" name="TextBox 19"/>
-          <p:cNvSpPr txBox="1"/>
-          <p:nvPr/>
-        </p:nvSpPr>
-        <p:spPr>
-          <a:xfrm>
-            <a:off x="3657600" y="5074920"/>
+          <p:cNvPr id="16" name="TextBox 15"/>
+          <p:cNvSpPr txBox="1"/>
+          <p:nvPr/>
+        </p:nvSpPr>
+        <p:spPr>
+          <a:xfrm>
+            <a:off x="3657600" y="5897880"/>
             <a:ext cx="4876495" cy="457200"/>
           </a:xfrm>
           <a:prstGeom prst="rect">
@@ -3914,7 +3712,7 @@
             <p:tnCond val="0"/>
           </p:cond>
           <p:par>
-            <p:cTn id="3" nodeType="withEffect" dur="500" begin="0ms" fill="hold">
+            <p:cTn id="4" nodeType="withEffect" dur="500" begin="0ms" fill="hold">
               <p:animEffect presetClass="entr" presetId="10" dur="500"/>
             </p:cTn>
           </p:par>
@@ -3931,7 +3729,7 @@
             <p:tnCond val="0"/>
           </p:cond>
           <p:par>
-            <p:cTn id="8" nodeType="withEffect" dur="500" begin="300ms" fill="hold">
+            <p:cTn id="5" nodeType="withEffect" dur="500" begin="300ms" fill="hold">
               <p:animEffect presetClass="entr" presetId="10" dur="500"/>
             </p:cTn>
           </p:par>
@@ -3948,7 +3746,7 @@
             <p:tnCond val="0"/>
           </p:cond>
           <p:par>
-            <p:cTn id="13" nodeType="withEffect" dur="500" begin="600ms" fill="hold">
+            <p:cTn id="6" nodeType="withEffect" dur="500" begin="600ms" fill="hold">
               <p:animEffect presetClass="entr" presetId="10" dur="500"/>
             </p:cTn>
           </p:par>
@@ -3965,7 +3763,7 @@
             <p:tnCond val="0"/>
           </p:cond>
           <p:par>
-            <p:cTn id="18" nodeType="withEffect" dur="500" begin="900ms" fill="hold">
+            <p:cTn id="14" nodeType="withEffect" dur="500" begin="900ms" fill="hold">
               <p:animEffect presetClass="entr" presetId="10" dur="500"/>
             </p:cTn>
           </p:par>
@@ -3982,7 +3780,7 @@
             <p:tnCond val="0"/>
           </p:cond>
           <p:par>
-            <p:cTn id="20" nodeType="withEffect" dur="500" begin="1400ms" fill="hold">
+            <p:cTn id="16" nodeType="withEffect" dur="500" begin="1400ms" fill="hold">
               <p:animEffect presetClass="entr" presetId="10" dur="500"/>
             </p:cTn>
           </p:par>
@@ -7073,58 +6871,299 @@
         </p:nvSpPr>
         <p:spPr>
           <a:xfrm>
-            <a:off x="457200" y="365760"/>
-            <a:ext cx="11277295" cy="640080"/>
-          </a:xfrm>
-          <a:prstGeom prst="rect">
-            <a:avLst/>
-          </a:prstGeom>
-          <a:noFill/>
-        </p:spPr>
-        <p:txBody>
-          <a:bodyPr wrap="square">
-            <a:spAutoFit/>
-          </a:bodyPr>
-          <a:lstStyle/>
-          <a:p>
-            <a:pPr algn="ctr"/>
-            <a:r>
-              <a:rPr sz="2800" b="1">
+            <a:off x="457200" y="274320"/>
+            <a:ext cx="11277295" cy="548640"/>
+          </a:xfrm>
+          <a:prstGeom prst="rect">
+            <a:avLst/>
+          </a:prstGeom>
+          <a:noFill/>
+        </p:spPr>
+        <p:txBody>
+          <a:bodyPr wrap="square">
+            <a:spAutoFit/>
+          </a:bodyPr>
+          <a:lstStyle/>
+          <a:p>
+            <a:pPr algn="ctr"/>
+            <a:r>
+              <a:rPr sz="2400" b="1">
                 <a:solidFill>
                   <a:srgbClr val="1F2937"/>
                 </a:solidFill>
                 <a:latin typeface="阿里巴巴普惠体 3.0"/>
               </a:rPr>
-              <a:t>接入 AI 的 3 个痛点 vs JavaBrain 的 3 个解法</a:t>
-            </a:r>
-          </a:p>
-        </p:txBody>
-      </p:sp>
-      <p:sp>
-        <p:nvSpPr>
-          <p:cNvPr id="3" name="TextBox 2"/>
-          <p:cNvSpPr txBox="1"/>
-          <p:nvPr/>
-        </p:nvSpPr>
-        <p:spPr>
-          <a:xfrm>
-            <a:off x="457200" y="1828800"/>
-            <a:ext cx="4114800" cy="914400"/>
-          </a:xfrm>
-          <a:prstGeom prst="rect">
-            <a:avLst/>
-          </a:prstGeom>
-          <a:noFill/>
-        </p:spPr>
-        <p:txBody>
-          <a:bodyPr wrap="square">
-            <a:spAutoFit/>
-          </a:bodyPr>
-          <a:lstStyle/>
-          <a:p>
-            <a:pPr algn="ctr"/>
-            <a:r>
-              <a:rPr sz="4800" b="1">
+              <a:t>接入 AI 的 3 个痛点  vs  JavaBrain 的 3 个解法</a:t>
+            </a:r>
+          </a:p>
+        </p:txBody>
+      </p:sp>
+      <p:sp>
+        <p:nvSpPr>
+          <p:cNvPr id="3" name="Rectangle 2"/>
+          <p:cNvSpPr/>
+          <p:nvPr/>
+        </p:nvSpPr>
+        <p:spPr>
+          <a:xfrm>
+            <a:off x="609904" y="3657600"/>
+            <a:ext cx="10972800" cy="54864"/>
+          </a:xfrm>
+          <a:prstGeom prst="rect">
+            <a:avLst/>
+          </a:prstGeom>
+          <a:solidFill>
+            <a:srgbClr val="E5E7EB"/>
+          </a:solidFill>
+          <a:ln>
+            <a:noFill/>
+          </a:ln>
+        </p:spPr>
+        <p:style>
+          <a:lnRef idx="1">
+            <a:schemeClr val="accent1"/>
+          </a:lnRef>
+          <a:fillRef idx="3">
+            <a:schemeClr val="accent1"/>
+          </a:fillRef>
+          <a:effectRef idx="2">
+            <a:schemeClr val="accent1"/>
+          </a:effectRef>
+          <a:fontRef idx="minor">
+            <a:schemeClr val="lt1"/>
+          </a:fontRef>
+        </p:style>
+        <p:txBody>
+          <a:bodyPr rtlCol="0" anchor="ctr"/>
+          <a:lstStyle/>
+          <a:p>
+            <a:pPr algn="ctr"/>
+          </a:p>
+        </p:txBody>
+      </p:sp>
+      <p:sp>
+        <p:nvSpPr>
+          <p:cNvPr id="4" name="Rectangle 3"/>
+          <p:cNvSpPr/>
+          <p:nvPr/>
+        </p:nvSpPr>
+        <p:spPr>
+          <a:xfrm>
+            <a:off x="609904" y="3657600"/>
+            <a:ext cx="5486400" cy="54864"/>
+          </a:xfrm>
+          <a:prstGeom prst="rect">
+            <a:avLst/>
+          </a:prstGeom>
+          <a:solidFill>
+            <a:srgbClr val="DC2626"/>
+          </a:solidFill>
+          <a:ln>
+            <a:noFill/>
+          </a:ln>
+        </p:spPr>
+        <p:style>
+          <a:lnRef idx="1">
+            <a:schemeClr val="accent1"/>
+          </a:lnRef>
+          <a:fillRef idx="3">
+            <a:schemeClr val="accent1"/>
+          </a:fillRef>
+          <a:effectRef idx="2">
+            <a:schemeClr val="accent1"/>
+          </a:effectRef>
+          <a:fontRef idx="minor">
+            <a:schemeClr val="lt1"/>
+          </a:fontRef>
+        </p:style>
+        <p:txBody>
+          <a:bodyPr rtlCol="0" anchor="ctr"/>
+          <a:lstStyle/>
+          <a:p>
+            <a:pPr algn="ctr"/>
+          </a:p>
+        </p:txBody>
+      </p:sp>
+      <p:sp>
+        <p:nvSpPr>
+          <p:cNvPr id="5" name="Rectangle 4"/>
+          <p:cNvSpPr/>
+          <p:nvPr/>
+        </p:nvSpPr>
+        <p:spPr>
+          <a:xfrm>
+            <a:off x="5959144" y="3657600"/>
+            <a:ext cx="1371600" cy="54864"/>
+          </a:xfrm>
+          <a:prstGeom prst="rect">
+            <a:avLst/>
+          </a:prstGeom>
+          <a:solidFill>
+            <a:srgbClr val="F59E0B"/>
+          </a:solidFill>
+          <a:ln>
+            <a:noFill/>
+          </a:ln>
+        </p:spPr>
+        <p:style>
+          <a:lnRef idx="1">
+            <a:schemeClr val="accent1"/>
+          </a:lnRef>
+          <a:fillRef idx="3">
+            <a:schemeClr val="accent1"/>
+          </a:fillRef>
+          <a:effectRef idx="2">
+            <a:schemeClr val="accent1"/>
+          </a:effectRef>
+          <a:fontRef idx="minor">
+            <a:schemeClr val="lt1"/>
+          </a:fontRef>
+        </p:style>
+        <p:txBody>
+          <a:bodyPr rtlCol="0" anchor="ctr"/>
+          <a:lstStyle/>
+          <a:p>
+            <a:pPr algn="ctr"/>
+          </a:p>
+        </p:txBody>
+      </p:sp>
+      <p:sp>
+        <p:nvSpPr>
+          <p:cNvPr id="6" name="Rectangle 5"/>
+          <p:cNvSpPr/>
+          <p:nvPr/>
+        </p:nvSpPr>
+        <p:spPr>
+          <a:xfrm>
+            <a:off x="6096304" y="3657600"/>
+            <a:ext cx="5486400" cy="54864"/>
+          </a:xfrm>
+          <a:prstGeom prst="rect">
+            <a:avLst/>
+          </a:prstGeom>
+          <a:solidFill>
+            <a:srgbClr val="10B981"/>
+          </a:solidFill>
+          <a:ln>
+            <a:noFill/>
+          </a:ln>
+        </p:spPr>
+        <p:style>
+          <a:lnRef idx="1">
+            <a:schemeClr val="accent1"/>
+          </a:lnRef>
+          <a:fillRef idx="3">
+            <a:schemeClr val="accent1"/>
+          </a:fillRef>
+          <a:effectRef idx="2">
+            <a:schemeClr val="accent1"/>
+          </a:effectRef>
+          <a:fontRef idx="minor">
+            <a:schemeClr val="lt1"/>
+          </a:fontRef>
+        </p:style>
+        <p:txBody>
+          <a:bodyPr rtlCol="0" anchor="ctr"/>
+          <a:lstStyle/>
+          <a:p>
+            <a:pPr algn="ctr"/>
+          </a:p>
+        </p:txBody>
+      </p:sp>
+      <p:pic>
+        <p:nvPicPr>
+          <p:cNvPr id="7" name="Picture 6" descr="p2-red-1-overwork.png"/>
+          <p:cNvPicPr>
+            <a:picLocks noChangeAspect="1"/>
+          </p:cNvPicPr>
+          <p:nvPr/>
+        </p:nvPicPr>
+        <p:blipFill>
+          <a:blip r:embed="rId2"/>
+          <a:stretch>
+            <a:fillRect/>
+          </a:stretch>
+        </p:blipFill>
+        <p:spPr>
+          <a:xfrm>
+            <a:off x="61264" y="1280160"/>
+            <a:ext cx="1097280" cy="1097280"/>
+          </a:xfrm>
+          <a:prstGeom prst="rect">
+            <a:avLst/>
+          </a:prstGeom>
+        </p:spPr>
+      </p:pic>
+      <p:sp>
+        <p:nvSpPr>
+          <p:cNvPr id="8" name="Oval 7"/>
+          <p:cNvSpPr/>
+          <p:nvPr/>
+        </p:nvSpPr>
+        <p:spPr>
+          <a:xfrm>
+            <a:off x="500176" y="3575304"/>
+            <a:ext cx="219456" cy="219456"/>
+          </a:xfrm>
+          <a:prstGeom prst="ellipse">
+            <a:avLst/>
+          </a:prstGeom>
+          <a:solidFill>
+            <a:srgbClr val="DC2626"/>
+          </a:solidFill>
+          <a:ln w="25400">
+            <a:solidFill>
+              <a:srgbClr val="FFFFFF"/>
+            </a:solidFill>
+          </a:ln>
+        </p:spPr>
+        <p:style>
+          <a:lnRef idx="1">
+            <a:schemeClr val="accent1"/>
+          </a:lnRef>
+          <a:fillRef idx="3">
+            <a:schemeClr val="accent1"/>
+          </a:fillRef>
+          <a:effectRef idx="2">
+            <a:schemeClr val="accent1"/>
+          </a:effectRef>
+          <a:fontRef idx="minor">
+            <a:schemeClr val="lt1"/>
+          </a:fontRef>
+        </p:style>
+        <p:txBody>
+          <a:bodyPr rtlCol="0" anchor="ctr"/>
+          <a:lstStyle/>
+          <a:p>
+            <a:pPr algn="ctr"/>
+          </a:p>
+        </p:txBody>
+      </p:sp>
+      <p:sp>
+        <p:nvSpPr>
+          <p:cNvPr id="9" name="TextBox 8"/>
+          <p:cNvSpPr txBox="1"/>
+          <p:nvPr/>
+        </p:nvSpPr>
+        <p:spPr>
+          <a:xfrm>
+            <a:off x="-30175" y="3931920"/>
+            <a:ext cx="1280160" cy="548640"/>
+          </a:xfrm>
+          <a:prstGeom prst="rect">
+            <a:avLst/>
+          </a:prstGeom>
+          <a:noFill/>
+        </p:spPr>
+        <p:txBody>
+          <a:bodyPr wrap="square">
+            <a:spAutoFit/>
+          </a:bodyPr>
+          <a:lstStyle/>
+          <a:p>
+            <a:pPr algn="ctr"/>
+            <a:r>
+              <a:rPr sz="2400" b="1">
                 <a:solidFill>
                   <a:srgbClr val="DC2626"/>
                 </a:solidFill>
@@ -7137,29 +7176,133 @@
       </p:sp>
       <p:sp>
         <p:nvSpPr>
-          <p:cNvPr id="4" name="TextBox 3"/>
-          <p:cNvSpPr txBox="1"/>
-          <p:nvPr/>
-        </p:nvSpPr>
-        <p:spPr>
-          <a:xfrm>
-            <a:off x="457200" y="3017520"/>
-            <a:ext cx="4114800" cy="914400"/>
-          </a:xfrm>
-          <a:prstGeom prst="rect">
-            <a:avLst/>
-          </a:prstGeom>
-          <a:noFill/>
-        </p:spPr>
-        <p:txBody>
-          <a:bodyPr wrap="square">
-            <a:spAutoFit/>
-          </a:bodyPr>
-          <a:lstStyle/>
-          <a:p>
-            <a:pPr algn="ctr"/>
-            <a:r>
-              <a:rPr sz="4800" b="1">
+          <p:cNvPr id="10" name="TextBox 9"/>
+          <p:cNvSpPr txBox="1"/>
+          <p:nvPr/>
+        </p:nvSpPr>
+        <p:spPr>
+          <a:xfrm>
+            <a:off x="-121615" y="4526280"/>
+            <a:ext cx="1463040" cy="365760"/>
+          </a:xfrm>
+          <a:prstGeom prst="rect">
+            <a:avLst/>
+          </a:prstGeom>
+          <a:noFill/>
+        </p:spPr>
+        <p:txBody>
+          <a:bodyPr wrap="square">
+            <a:spAutoFit/>
+          </a:bodyPr>
+          <a:lstStyle/>
+          <a:p>
+            <a:pPr algn="ctr"/>
+            <a:r>
+              <a:rPr sz="1400" b="0">
+                <a:solidFill>
+                  <a:srgbClr val="6B7280"/>
+                </a:solidFill>
+                <a:latin typeface="阿里巴巴普惠体 3.0"/>
+              </a:rPr>
+              <a:t>集成 AI</a:t>
+            </a:r>
+          </a:p>
+        </p:txBody>
+      </p:sp>
+      <p:pic>
+        <p:nvPicPr>
+          <p:cNvPr id="11" name="Picture 10" descr="p2-red-2-bureaucracy.png"/>
+          <p:cNvPicPr>
+            <a:picLocks noChangeAspect="1"/>
+          </p:cNvPicPr>
+          <p:nvPr/>
+        </p:nvPicPr>
+        <p:blipFill>
+          <a:blip r:embed="rId3"/>
+          <a:stretch>
+            <a:fillRect/>
+          </a:stretch>
+        </p:blipFill>
+        <p:spPr>
+          <a:xfrm>
+            <a:off x="2255824" y="1280160"/>
+            <a:ext cx="1097280" cy="1097280"/>
+          </a:xfrm>
+          <a:prstGeom prst="rect">
+            <a:avLst/>
+          </a:prstGeom>
+        </p:spPr>
+      </p:pic>
+      <p:sp>
+        <p:nvSpPr>
+          <p:cNvPr id="12" name="Oval 11"/>
+          <p:cNvSpPr/>
+          <p:nvPr/>
+        </p:nvSpPr>
+        <p:spPr>
+          <a:xfrm>
+            <a:off x="2694736" y="3575304"/>
+            <a:ext cx="219456" cy="219456"/>
+          </a:xfrm>
+          <a:prstGeom prst="ellipse">
+            <a:avLst/>
+          </a:prstGeom>
+          <a:solidFill>
+            <a:srgbClr val="DC2626"/>
+          </a:solidFill>
+          <a:ln w="25400">
+            <a:solidFill>
+              <a:srgbClr val="FFFFFF"/>
+            </a:solidFill>
+          </a:ln>
+        </p:spPr>
+        <p:style>
+          <a:lnRef idx="1">
+            <a:schemeClr val="accent1"/>
+          </a:lnRef>
+          <a:fillRef idx="3">
+            <a:schemeClr val="accent1"/>
+          </a:fillRef>
+          <a:effectRef idx="2">
+            <a:schemeClr val="accent1"/>
+          </a:effectRef>
+          <a:fontRef idx="minor">
+            <a:schemeClr val="lt1"/>
+          </a:fontRef>
+        </p:style>
+        <p:txBody>
+          <a:bodyPr rtlCol="0" anchor="ctr"/>
+          <a:lstStyle/>
+          <a:p>
+            <a:pPr algn="ctr"/>
+          </a:p>
+        </p:txBody>
+      </p:sp>
+      <p:sp>
+        <p:nvSpPr>
+          <p:cNvPr id="13" name="TextBox 12"/>
+          <p:cNvSpPr txBox="1"/>
+          <p:nvPr/>
+        </p:nvSpPr>
+        <p:spPr>
+          <a:xfrm>
+            <a:off x="2164384" y="3931920"/>
+            <a:ext cx="1280160" cy="548640"/>
+          </a:xfrm>
+          <a:prstGeom prst="rect">
+            <a:avLst/>
+          </a:prstGeom>
+          <a:noFill/>
+        </p:spPr>
+        <p:txBody>
+          <a:bodyPr wrap="square">
+            <a:spAutoFit/>
+          </a:bodyPr>
+          <a:lstStyle/>
+          <a:p>
+            <a:pPr algn="ctr"/>
+            <a:r>
+              <a:rPr sz="2400" b="1">
                 <a:solidFill>
                   <a:srgbClr val="DC2626"/>
                 </a:solidFill>
@@ -7172,29 +7315,133 @@
       </p:sp>
       <p:sp>
         <p:nvSpPr>
-          <p:cNvPr id="5" name="TextBox 4"/>
-          <p:cNvSpPr txBox="1"/>
-          <p:nvPr/>
-        </p:nvSpPr>
-        <p:spPr>
-          <a:xfrm>
-            <a:off x="457200" y="4206240"/>
-            <a:ext cx="4114800" cy="914400"/>
-          </a:xfrm>
-          <a:prstGeom prst="rect">
-            <a:avLst/>
-          </a:prstGeom>
-          <a:noFill/>
-        </p:spPr>
-        <p:txBody>
-          <a:bodyPr wrap="square">
-            <a:spAutoFit/>
-          </a:bodyPr>
-          <a:lstStyle/>
-          <a:p>
-            <a:pPr algn="ctr"/>
-            <a:r>
-              <a:rPr sz="4800" b="1">
+          <p:cNvPr id="14" name="TextBox 13"/>
+          <p:cNvSpPr txBox="1"/>
+          <p:nvPr/>
+        </p:nvSpPr>
+        <p:spPr>
+          <a:xfrm>
+            <a:off x="2072944" y="4526280"/>
+            <a:ext cx="1463040" cy="365760"/>
+          </a:xfrm>
+          <a:prstGeom prst="rect">
+            <a:avLst/>
+          </a:prstGeom>
+          <a:noFill/>
+        </p:spPr>
+        <p:txBody>
+          <a:bodyPr wrap="square">
+            <a:spAutoFit/>
+          </a:bodyPr>
+          <a:lstStyle/>
+          <a:p>
+            <a:pPr algn="ctr"/>
+            <a:r>
+              <a:rPr sz="1400" b="0">
+                <a:solidFill>
+                  <a:srgbClr val="6B7280"/>
+                </a:solidFill>
+                <a:latin typeface="阿里巴巴普惠体 3.0"/>
+              </a:rPr>
+              <a:t>训练数据</a:t>
+            </a:r>
+          </a:p>
+        </p:txBody>
+      </p:sp>
+      <p:pic>
+        <p:nvPicPr>
+          <p:cNvPr id="15" name="Picture 14" descr="p2-red-3-tangled.png"/>
+          <p:cNvPicPr>
+            <a:picLocks noChangeAspect="1"/>
+          </p:cNvPicPr>
+          <p:nvPr/>
+        </p:nvPicPr>
+        <p:blipFill>
+          <a:blip r:embed="rId4"/>
+          <a:stretch>
+            <a:fillRect/>
+          </a:stretch>
+        </p:blipFill>
+        <p:spPr>
+          <a:xfrm>
+            <a:off x="4450384" y="1280160"/>
+            <a:ext cx="1097280" cy="1097280"/>
+          </a:xfrm>
+          <a:prstGeom prst="rect">
+            <a:avLst/>
+          </a:prstGeom>
+        </p:spPr>
+      </p:pic>
+      <p:sp>
+        <p:nvSpPr>
+          <p:cNvPr id="16" name="Oval 15"/>
+          <p:cNvSpPr/>
+          <p:nvPr/>
+        </p:nvSpPr>
+        <p:spPr>
+          <a:xfrm>
+            <a:off x="4889296" y="3575304"/>
+            <a:ext cx="219456" cy="219456"/>
+          </a:xfrm>
+          <a:prstGeom prst="ellipse">
+            <a:avLst/>
+          </a:prstGeom>
+          <a:solidFill>
+            <a:srgbClr val="DC2626"/>
+          </a:solidFill>
+          <a:ln w="25400">
+            <a:solidFill>
+              <a:srgbClr val="FFFFFF"/>
+            </a:solidFill>
+          </a:ln>
+        </p:spPr>
+        <p:style>
+          <a:lnRef idx="1">
+            <a:schemeClr val="accent1"/>
+          </a:lnRef>
+          <a:fillRef idx="3">
+            <a:schemeClr val="accent1"/>
+          </a:fillRef>
+          <a:effectRef idx="2">
+            <a:schemeClr val="accent1"/>
+          </a:effectRef>
+          <a:fontRef idx="minor">
+            <a:schemeClr val="lt1"/>
+          </a:fontRef>
+        </p:style>
+        <p:txBody>
+          <a:bodyPr rtlCol="0" anchor="ctr"/>
+          <a:lstStyle/>
+          <a:p>
+            <a:pPr algn="ctr"/>
+          </a:p>
+        </p:txBody>
+      </p:sp>
+      <p:sp>
+        <p:nvSpPr>
+          <p:cNvPr id="17" name="TextBox 16"/>
+          <p:cNvSpPr txBox="1"/>
+          <p:nvPr/>
+        </p:nvSpPr>
+        <p:spPr>
+          <a:xfrm>
+            <a:off x="4358944" y="3931920"/>
+            <a:ext cx="1280160" cy="548640"/>
+          </a:xfrm>
+          <a:prstGeom prst="rect">
+            <a:avLst/>
+          </a:prstGeom>
+          <a:noFill/>
+        </p:spPr>
+        <p:txBody>
+          <a:bodyPr wrap="square">
+            <a:spAutoFit/>
+          </a:bodyPr>
+          <a:lstStyle/>
+          <a:p>
+            <a:pPr algn="ctr"/>
+            <a:r>
+              <a:rPr sz="2400" b="1">
                 <a:solidFill>
                   <a:srgbClr val="DC2626"/>
                 </a:solidFill>
@@ -7207,139 +7454,416 @@
       </p:sp>
       <p:sp>
         <p:nvSpPr>
-          <p:cNvPr id="6" name="TextBox 5"/>
-          <p:cNvSpPr txBox="1"/>
-          <p:nvPr/>
-        </p:nvSpPr>
-        <p:spPr>
-          <a:xfrm>
-            <a:off x="4572000" y="3108960"/>
-            <a:ext cx="3047695" cy="914400"/>
-          </a:xfrm>
-          <a:prstGeom prst="rect">
-            <a:avLst/>
-          </a:prstGeom>
-          <a:noFill/>
-        </p:spPr>
-        <p:txBody>
-          <a:bodyPr wrap="square">
-            <a:spAutoFit/>
-          </a:bodyPr>
-          <a:lstStyle/>
-          <a:p>
-            <a:pPr algn="ctr"/>
-            <a:r>
-              <a:rPr sz="7200" b="1">
-                <a:solidFill>
-                  <a:srgbClr val="F59E0B"/>
+          <p:cNvPr id="18" name="TextBox 17"/>
+          <p:cNvSpPr txBox="1"/>
+          <p:nvPr/>
+        </p:nvSpPr>
+        <p:spPr>
+          <a:xfrm>
+            <a:off x="4267504" y="4526280"/>
+            <a:ext cx="1463040" cy="365760"/>
+          </a:xfrm>
+          <a:prstGeom prst="rect">
+            <a:avLst/>
+          </a:prstGeom>
+          <a:noFill/>
+        </p:spPr>
+        <p:txBody>
+          <a:bodyPr wrap="square">
+            <a:spAutoFit/>
+          </a:bodyPr>
+          <a:lstStyle/>
+          <a:p>
+            <a:pPr algn="ctr"/>
+            <a:r>
+              <a:rPr sz="1400" b="0">
+                <a:solidFill>
+                  <a:srgbClr val="6B7280"/>
+                </a:solidFill>
+                <a:latin typeface="阿里巴巴普惠体 3.0"/>
+              </a:rPr>
+              <a:t>上线联调</a:t>
+            </a:r>
+          </a:p>
+        </p:txBody>
+      </p:sp>
+      <p:pic>
+        <p:nvPicPr>
+          <p:cNvPr id="19" name="Picture 18" descr="p2-green-3-dashboard.png"/>
+          <p:cNvPicPr>
+            <a:picLocks noChangeAspect="1"/>
+          </p:cNvPicPr>
+          <p:nvPr/>
+        </p:nvPicPr>
+        <p:blipFill>
+          <a:blip r:embed="rId5"/>
+          <a:stretch>
+            <a:fillRect/>
+          </a:stretch>
+        </p:blipFill>
+        <p:spPr>
+          <a:xfrm>
+            <a:off x="6644944" y="1280160"/>
+            <a:ext cx="1097280" cy="1097280"/>
+          </a:xfrm>
+          <a:prstGeom prst="rect">
+            <a:avLst/>
+          </a:prstGeom>
+        </p:spPr>
+      </p:pic>
+      <p:sp>
+        <p:nvSpPr>
+          <p:cNvPr id="20" name="Oval 19"/>
+          <p:cNvSpPr/>
+          <p:nvPr/>
+        </p:nvSpPr>
+        <p:spPr>
+          <a:xfrm>
+            <a:off x="7083856" y="3575304"/>
+            <a:ext cx="219456" cy="219456"/>
+          </a:xfrm>
+          <a:prstGeom prst="ellipse">
+            <a:avLst/>
+          </a:prstGeom>
+          <a:solidFill>
+            <a:srgbClr val="10B981"/>
+          </a:solidFill>
+          <a:ln w="25400">
+            <a:solidFill>
+              <a:srgbClr val="FFFFFF"/>
+            </a:solidFill>
+          </a:ln>
+        </p:spPr>
+        <p:style>
+          <a:lnRef idx="1">
+            <a:schemeClr val="accent1"/>
+          </a:lnRef>
+          <a:fillRef idx="3">
+            <a:schemeClr val="accent1"/>
+          </a:fillRef>
+          <a:effectRef idx="2">
+            <a:schemeClr val="accent1"/>
+          </a:effectRef>
+          <a:fontRef idx="minor">
+            <a:schemeClr val="lt1"/>
+          </a:fontRef>
+        </p:style>
+        <p:txBody>
+          <a:bodyPr rtlCol="0" anchor="ctr"/>
+          <a:lstStyle/>
+          <a:p>
+            <a:pPr algn="ctr"/>
+          </a:p>
+        </p:txBody>
+      </p:sp>
+      <p:sp>
+        <p:nvSpPr>
+          <p:cNvPr id="21" name="TextBox 20"/>
+          <p:cNvSpPr txBox="1"/>
+          <p:nvPr/>
+        </p:nvSpPr>
+        <p:spPr>
+          <a:xfrm>
+            <a:off x="6553504" y="3931920"/>
+            <a:ext cx="1280160" cy="548640"/>
+          </a:xfrm>
+          <a:prstGeom prst="rect">
+            <a:avLst/>
+          </a:prstGeom>
+          <a:noFill/>
+        </p:spPr>
+        <p:txBody>
+          <a:bodyPr wrap="square">
+            <a:spAutoFit/>
+          </a:bodyPr>
+          <a:lstStyle/>
+          <a:p>
+            <a:pPr algn="ctr"/>
+            <a:r>
+              <a:rPr sz="2400" b="1">
+                <a:solidFill>
+                  <a:srgbClr val="10B981"/>
                 </a:solidFill>
                 <a:latin typeface="Inter"/>
               </a:rPr>
-              <a:t>→</a:t>
-            </a:r>
-          </a:p>
-        </p:txBody>
-      </p:sp>
-      <p:sp>
-        <p:nvSpPr>
-          <p:cNvPr id="7" name="TextBox 6"/>
-          <p:cNvSpPr txBox="1"/>
-          <p:nvPr/>
-        </p:nvSpPr>
-        <p:spPr>
-          <a:xfrm>
-            <a:off x="7619695" y="1828800"/>
-            <a:ext cx="4114800" cy="914400"/>
-          </a:xfrm>
-          <a:prstGeom prst="rect">
-            <a:avLst/>
-          </a:prstGeom>
-          <a:noFill/>
-        </p:spPr>
-        <p:txBody>
-          <a:bodyPr wrap="square">
-            <a:spAutoFit/>
-          </a:bodyPr>
-          <a:lstStyle/>
-          <a:p>
-            <a:pPr algn="ctr"/>
-            <a:r>
-              <a:rPr sz="4800" b="1">
+              <a:t>3 分</a:t>
+            </a:r>
+          </a:p>
+        </p:txBody>
+      </p:sp>
+      <p:sp>
+        <p:nvSpPr>
+          <p:cNvPr id="22" name="TextBox 21"/>
+          <p:cNvSpPr txBox="1"/>
+          <p:nvPr/>
+        </p:nvSpPr>
+        <p:spPr>
+          <a:xfrm>
+            <a:off x="6462064" y="4526280"/>
+            <a:ext cx="1463040" cy="365760"/>
+          </a:xfrm>
+          <a:prstGeom prst="rect">
+            <a:avLst/>
+          </a:prstGeom>
+          <a:noFill/>
+        </p:spPr>
+        <p:txBody>
+          <a:bodyPr wrap="square">
+            <a:spAutoFit/>
+          </a:bodyPr>
+          <a:lstStyle/>
+          <a:p>
+            <a:pPr algn="ctr"/>
+            <a:r>
+              <a:rPr sz="1400" b="0">
+                <a:solidFill>
+                  <a:srgbClr val="6B7280"/>
+                </a:solidFill>
+                <a:latin typeface="阿里巴巴普惠体 3.0"/>
+              </a:rPr>
+              <a:t>一键集成</a:t>
+            </a:r>
+          </a:p>
+        </p:txBody>
+      </p:sp>
+      <p:pic>
+        <p:nvPicPr>
+          <p:cNvPr id="23" name="Picture 22" descr="p2-green-2-rocket.png"/>
+          <p:cNvPicPr>
+            <a:picLocks noChangeAspect="1"/>
+          </p:cNvPicPr>
+          <p:nvPr/>
+        </p:nvPicPr>
+        <p:blipFill>
+          <a:blip r:embed="rId6"/>
+          <a:stretch>
+            <a:fillRect/>
+          </a:stretch>
+        </p:blipFill>
+        <p:spPr>
+          <a:xfrm>
+            <a:off x="8839504" y="1280160"/>
+            <a:ext cx="1097280" cy="1097280"/>
+          </a:xfrm>
+          <a:prstGeom prst="rect">
+            <a:avLst/>
+          </a:prstGeom>
+        </p:spPr>
+      </p:pic>
+      <p:sp>
+        <p:nvSpPr>
+          <p:cNvPr id="24" name="Oval 23"/>
+          <p:cNvSpPr/>
+          <p:nvPr/>
+        </p:nvSpPr>
+        <p:spPr>
+          <a:xfrm>
+            <a:off x="9278416" y="3575304"/>
+            <a:ext cx="219456" cy="219456"/>
+          </a:xfrm>
+          <a:prstGeom prst="ellipse">
+            <a:avLst/>
+          </a:prstGeom>
+          <a:solidFill>
+            <a:srgbClr val="10B981"/>
+          </a:solidFill>
+          <a:ln w="25400">
+            <a:solidFill>
+              <a:srgbClr val="FFFFFF"/>
+            </a:solidFill>
+          </a:ln>
+        </p:spPr>
+        <p:style>
+          <a:lnRef idx="1">
+            <a:schemeClr val="accent1"/>
+          </a:lnRef>
+          <a:fillRef idx="3">
+            <a:schemeClr val="accent1"/>
+          </a:fillRef>
+          <a:effectRef idx="2">
+            <a:schemeClr val="accent1"/>
+          </a:effectRef>
+          <a:fontRef idx="minor">
+            <a:schemeClr val="lt1"/>
+          </a:fontRef>
+        </p:style>
+        <p:txBody>
+          <a:bodyPr rtlCol="0" anchor="ctr"/>
+          <a:lstStyle/>
+          <a:p>
+            <a:pPr algn="ctr"/>
+          </a:p>
+        </p:txBody>
+      </p:sp>
+      <p:sp>
+        <p:nvSpPr>
+          <p:cNvPr id="25" name="TextBox 24"/>
+          <p:cNvSpPr txBox="1"/>
+          <p:nvPr/>
+        </p:nvSpPr>
+        <p:spPr>
+          <a:xfrm>
+            <a:off x="8748064" y="3931920"/>
+            <a:ext cx="1280160" cy="548640"/>
+          </a:xfrm>
+          <a:prstGeom prst="rect">
+            <a:avLst/>
+          </a:prstGeom>
+          <a:noFill/>
+        </p:spPr>
+        <p:txBody>
+          <a:bodyPr wrap="square">
+            <a:spAutoFit/>
+          </a:bodyPr>
+          <a:lstStyle/>
+          <a:p>
+            <a:pPr algn="ctr"/>
+            <a:r>
+              <a:rPr sz="2400" b="1">
                 <a:solidFill>
                   <a:srgbClr val="10B981"/>
                 </a:solidFill>
                 <a:latin typeface="Inter"/>
               </a:rPr>
-              <a:t>3 分</a:t>
-            </a:r>
-          </a:p>
-        </p:txBody>
-      </p:sp>
-      <p:sp>
-        <p:nvSpPr>
-          <p:cNvPr id="8" name="TextBox 7"/>
-          <p:cNvSpPr txBox="1"/>
-          <p:nvPr/>
-        </p:nvSpPr>
-        <p:spPr>
-          <a:xfrm>
-            <a:off x="7619695" y="3017520"/>
-            <a:ext cx="4114800" cy="914400"/>
-          </a:xfrm>
-          <a:prstGeom prst="rect">
-            <a:avLst/>
-          </a:prstGeom>
-          <a:noFill/>
-        </p:spPr>
-        <p:txBody>
-          <a:bodyPr wrap="square">
-            <a:spAutoFit/>
-          </a:bodyPr>
-          <a:lstStyle/>
-          <a:p>
-            <a:pPr algn="ctr"/>
-            <a:r>
-              <a:rPr sz="4800" b="1">
+              <a:t>90 秒</a:t>
+            </a:r>
+          </a:p>
+        </p:txBody>
+      </p:sp>
+      <p:sp>
+        <p:nvSpPr>
+          <p:cNvPr id="26" name="TextBox 25"/>
+          <p:cNvSpPr txBox="1"/>
+          <p:nvPr/>
+        </p:nvSpPr>
+        <p:spPr>
+          <a:xfrm>
+            <a:off x="8656624" y="4526280"/>
+            <a:ext cx="1463040" cy="365760"/>
+          </a:xfrm>
+          <a:prstGeom prst="rect">
+            <a:avLst/>
+          </a:prstGeom>
+          <a:noFill/>
+        </p:spPr>
+        <p:txBody>
+          <a:bodyPr wrap="square">
+            <a:spAutoFit/>
+          </a:bodyPr>
+          <a:lstStyle/>
+          <a:p>
+            <a:pPr algn="ctr"/>
+            <a:r>
+              <a:rPr sz="1400" b="0">
+                <a:solidFill>
+                  <a:srgbClr val="6B7280"/>
+                </a:solidFill>
+                <a:latin typeface="阿里巴巴普惠体 3.0"/>
+              </a:rPr>
+              <a:t>出报告</a:t>
+            </a:r>
+          </a:p>
+        </p:txBody>
+      </p:sp>
+      <p:pic>
+        <p:nvPicPr>
+          <p:cNvPr id="27" name="Picture 26" descr="p2-green-1-final.png"/>
+          <p:cNvPicPr>
+            <a:picLocks noChangeAspect="1"/>
+          </p:cNvPicPr>
+          <p:nvPr/>
+        </p:nvPicPr>
+        <p:blipFill>
+          <a:blip r:embed="rId7"/>
+          <a:stretch>
+            <a:fillRect/>
+          </a:stretch>
+        </p:blipFill>
+        <p:spPr>
+          <a:xfrm>
+            <a:off x="11034064" y="1280160"/>
+            <a:ext cx="1097280" cy="1097280"/>
+          </a:xfrm>
+          <a:prstGeom prst="rect">
+            <a:avLst/>
+          </a:prstGeom>
+        </p:spPr>
+      </p:pic>
+      <p:sp>
+        <p:nvSpPr>
+          <p:cNvPr id="28" name="Oval 27"/>
+          <p:cNvSpPr/>
+          <p:nvPr/>
+        </p:nvSpPr>
+        <p:spPr>
+          <a:xfrm>
+            <a:off x="11472976" y="3575304"/>
+            <a:ext cx="219456" cy="219456"/>
+          </a:xfrm>
+          <a:prstGeom prst="ellipse">
+            <a:avLst/>
+          </a:prstGeom>
+          <a:solidFill>
+            <a:srgbClr val="10B981"/>
+          </a:solidFill>
+          <a:ln w="25400">
+            <a:solidFill>
+              <a:srgbClr val="FFFFFF"/>
+            </a:solidFill>
+          </a:ln>
+        </p:spPr>
+        <p:style>
+          <a:lnRef idx="1">
+            <a:schemeClr val="accent1"/>
+          </a:lnRef>
+          <a:fillRef idx="3">
+            <a:schemeClr val="accent1"/>
+          </a:fillRef>
+          <a:effectRef idx="2">
+            <a:schemeClr val="accent1"/>
+          </a:effectRef>
+          <a:fontRef idx="minor">
+            <a:schemeClr val="lt1"/>
+          </a:fontRef>
+        </p:style>
+        <p:txBody>
+          <a:bodyPr rtlCol="0" anchor="ctr"/>
+          <a:lstStyle/>
+          <a:p>
+            <a:pPr algn="ctr"/>
+          </a:p>
+        </p:txBody>
+      </p:sp>
+      <p:sp>
+        <p:nvSpPr>
+          <p:cNvPr id="29" name="TextBox 28"/>
+          <p:cNvSpPr txBox="1"/>
+          <p:nvPr/>
+        </p:nvSpPr>
+        <p:spPr>
+          <a:xfrm>
+            <a:off x="10942624" y="3931920"/>
+            <a:ext cx="1280160" cy="548640"/>
+          </a:xfrm>
+          <a:prstGeom prst="rect">
+            <a:avLst/>
+          </a:prstGeom>
+          <a:noFill/>
+        </p:spPr>
+        <p:txBody>
+          <a:bodyPr wrap="square">
+            <a:spAutoFit/>
+          </a:bodyPr>
+          <a:lstStyle/>
+          <a:p>
+            <a:pPr algn="ctr"/>
+            <a:r>
+              <a:rPr sz="2400" b="1">
                 <a:solidFill>
                   <a:srgbClr val="10B981"/>
                 </a:solidFill>
                 <a:latin typeface="Inter"/>
               </a:rPr>
-              <a:t>90 秒</a:t>
-            </a:r>
-          </a:p>
-        </p:txBody>
-      </p:sp>
-      <p:sp>
-        <p:nvSpPr>
-          <p:cNvPr id="9" name="TextBox 8"/>
-          <p:cNvSpPr txBox="1"/>
-          <p:nvPr/>
-        </p:nvSpPr>
-        <p:spPr>
-          <a:xfrm>
-            <a:off x="7619695" y="4206240"/>
-            <a:ext cx="4114800" cy="914400"/>
-          </a:xfrm>
-          <a:prstGeom prst="rect">
-            <a:avLst/>
-          </a:prstGeom>
-          <a:noFill/>
-        </p:spPr>
-        <p:txBody>
-          <a:bodyPr wrap="square">
-            <a:spAutoFit/>
-          </a:bodyPr>
-          <a:lstStyle/>
-          <a:p>
-            <a:pPr algn="ctr"/>
-            <a:r>
-              <a:rPr sz="4800" b="1">
-                <a:solidFill>
-                  <a:srgbClr val="10B981"/>
-                </a:solidFill>
-                <a:latin typeface="Inter"/>
-              </a:rPr>
               <a:t>10 分</a:t>
             </a:r>
           </a:p>
@@ -7347,16 +7871,51 @@
       </p:sp>
       <p:sp>
         <p:nvSpPr>
-          <p:cNvPr id="10" name="Rounded Rectangle 9"/>
+          <p:cNvPr id="30" name="TextBox 29"/>
+          <p:cNvSpPr txBox="1"/>
+          <p:nvPr/>
+        </p:nvSpPr>
+        <p:spPr>
+          <a:xfrm>
+            <a:off x="10851184" y="4526280"/>
+            <a:ext cx="1463040" cy="365760"/>
+          </a:xfrm>
+          <a:prstGeom prst="rect">
+            <a:avLst/>
+          </a:prstGeom>
+          <a:noFill/>
+        </p:spPr>
+        <p:txBody>
+          <a:bodyPr wrap="square">
+            <a:spAutoFit/>
+          </a:bodyPr>
+          <a:lstStyle/>
+          <a:p>
+            <a:pPr algn="ctr"/>
+            <a:r>
+              <a:rPr sz="1400" b="0">
+                <a:solidFill>
+                  <a:srgbClr val="6B7280"/>
+                </a:solidFill>
+                <a:latin typeface="阿里巴巴普惠体 3.0"/>
+              </a:rPr>
+              <a:t>出页面</a:t>
+            </a:r>
+          </a:p>
+        </p:txBody>
+      </p:sp>
+      <p:sp>
+        <p:nvSpPr>
+          <p:cNvPr id="31" name="Oval 30"/>
           <p:cNvSpPr/>
           <p:nvPr/>
         </p:nvSpPr>
         <p:spPr>
           <a:xfrm>
-            <a:off x="3200400" y="5760720"/>
-            <a:ext cx="5790895" cy="640080"/>
-          </a:xfrm>
-          <a:prstGeom prst="roundRect">
+            <a:off x="5593384" y="3154680"/>
+            <a:ext cx="1005840" cy="1005840"/>
+          </a:xfrm>
+          <a:prstGeom prst="ellipse">
             <a:avLst/>
           </a:prstGeom>
           <a:solidFill>
@@ -7392,7 +7951,122 @@
       </p:sp>
       <p:sp>
         <p:nvSpPr>
-          <p:cNvPr id="11" name="TextBox 10"/>
+          <p:cNvPr id="32" name="TextBox 31"/>
+          <p:cNvSpPr txBox="1"/>
+          <p:nvPr/>
+        </p:nvSpPr>
+        <p:spPr>
+          <a:xfrm>
+            <a:off x="5547664" y="3429000"/>
+            <a:ext cx="1097280" cy="457200"/>
+          </a:xfrm>
+          <a:prstGeom prst="rect">
+            <a:avLst/>
+          </a:prstGeom>
+          <a:noFill/>
+        </p:spPr>
+        <p:txBody>
+          <a:bodyPr wrap="square">
+            <a:spAutoFit/>
+          </a:bodyPr>
+          <a:lstStyle/>
+          <a:p>
+            <a:pPr algn="ctr"/>
+            <a:r>
+              <a:rPr sz="2200" b="1">
+                <a:solidFill>
+                  <a:srgbClr val="F59E0B"/>
+                </a:solidFill>
+                <a:latin typeface="Inter"/>
+              </a:rPr>
+              <a:t>1440×</a:t>
+            </a:r>
+          </a:p>
+        </p:txBody>
+      </p:sp>
+      <p:sp>
+        <p:nvSpPr>
+          <p:cNvPr id="33" name="TextBox 32"/>
+          <p:cNvSpPr txBox="1"/>
+          <p:nvPr/>
+        </p:nvSpPr>
+        <p:spPr>
+          <a:xfrm>
+            <a:off x="5456224" y="3822191"/>
+            <a:ext cx="1280160" cy="365760"/>
+          </a:xfrm>
+          <a:prstGeom prst="rect">
+            <a:avLst/>
+          </a:prstGeom>
+          <a:noFill/>
+        </p:spPr>
+        <p:txBody>
+          <a:bodyPr wrap="square">
+            <a:spAutoFit/>
+          </a:bodyPr>
+          <a:lstStyle/>
+          <a:p>
+            <a:pPr algn="ctr"/>
+            <a:r>
+              <a:rPr sz="1100" b="1">
+                <a:solidFill>
+                  <a:srgbClr val="F59E0B"/>
+                </a:solidFill>
+                <a:latin typeface="阿里巴巴普惠体 3.0"/>
+              </a:rPr>
+              <a:t>效率提升</a:t>
+            </a:r>
+          </a:p>
+        </p:txBody>
+      </p:sp>
+      <p:sp>
+        <p:nvSpPr>
+          <p:cNvPr id="34" name="Rounded Rectangle 33"/>
+          <p:cNvSpPr/>
+          <p:nvPr/>
+        </p:nvSpPr>
+        <p:spPr>
+          <a:xfrm>
+            <a:off x="3200400" y="5760720"/>
+            <a:ext cx="5790895" cy="640080"/>
+          </a:xfrm>
+          <a:prstGeom prst="roundRect">
+            <a:avLst/>
+          </a:prstGeom>
+          <a:solidFill>
+            <a:srgbClr val="FEF3C7"/>
+          </a:solidFill>
+          <a:ln w="38100">
+            <a:solidFill>
+              <a:srgbClr val="F59E0B"/>
+            </a:solidFill>
+          </a:ln>
+        </p:spPr>
+        <p:style>
+          <a:lnRef idx="1">
+            <a:schemeClr val="accent1"/>
+          </a:lnRef>
+          <a:fillRef idx="3">
+            <a:schemeClr val="accent1"/>
+          </a:fillRef>
+          <a:effectRef idx="2">
+            <a:schemeClr val="accent1"/>
+          </a:effectRef>
+          <a:fontRef idx="minor">
+            <a:schemeClr val="lt1"/>
+          </a:fontRef>
+        </p:style>
+        <p:txBody>
+          <a:bodyPr rtlCol="0" anchor="ctr"/>
+          <a:lstStyle/>
+          <a:p>
+            <a:pPr algn="ctr"/>
+          </a:p>
+        </p:txBody>
+      </p:sp>
+      <p:sp>
+        <p:nvSpPr>
+          <p:cNvPr id="35" name="TextBox 34"/>
           <p:cNvSpPr txBox="1"/>
           <p:nvPr/>
         </p:nvSpPr>
@@ -7420,7 +8094,7 @@
                 </a:solidFill>
                 <a:latin typeface="阿里巴巴普惠体 3.0"/>
               </a:rPr>
-              <a:t>★ 3 月 vs 3 分 = 1440 倍效率提升</a:t>
+              <a:t>★ 3 月 vs 3 分 — 从季度到分钟</a:t>
             </a:r>
           </a:p>
         </p:txBody>
@@ -7439,7 +8113,7 @@
             <p:tnCond val="0"/>
           </p:cond>
           <p:par>
-            <p:cTn id="4" nodeType="withEffect" dur="500" begin="0ms" fill="hold">
+            <p:cTn id="8" nodeType="withEffect" dur="500" begin="0ms" fill="hold">
               <p:animEffect presetClass="entr" presetId="10" dur="500"/>
             </p:cTn>
           </p:par>
@@ -7456,7 +8130,7 @@
             <p:tnCond val="0"/>
           </p:cond>
           <p:par>
-            <p:cTn id="5" nodeType="withEffect" dur="500" begin="600ms" fill="hold">
+            <p:cTn id="9" nodeType="withEffect" dur="500" begin="350ms" fill="hold">
               <p:animEffect presetClass="entr" presetId="10" dur="500"/>
             </p:cTn>
           </p:par>
@@ -7473,7 +8147,7 @@
             <p:tnCond val="0"/>
           </p:cond>
           <p:par>
-            <p:cTn id="6" nodeType="withEffect" dur="500" begin="1200ms" fill="hold">
+            <p:cTn id="10" nodeType="withEffect" dur="500" begin="700ms" fill="hold">
               <p:animEffect presetClass="entr" presetId="10" dur="500"/>
             </p:cTn>
           </p:par>
@@ -7490,7 +8164,7 @@
             <p:tnCond val="0"/>
           </p:cond>
           <p:par>
-            <p:cTn id="7" nodeType="withEffect" dur="500" begin="2000ms" fill="hold">
+            <p:cTn id="11" nodeType="withEffect" dur="500" begin="1050ms" fill="hold">
               <p:animEffect presetClass="entr" presetId="10" dur="500"/>
             </p:cTn>
           </p:par>
@@ -7507,7 +8181,7 @@
             <p:tnCond val="0"/>
           </p:cond>
           <p:par>
-            <p:cTn id="8" nodeType="withEffect" dur="500" begin="2800ms" fill="hold">
+            <p:cTn id="12" nodeType="withEffect" dur="500" begin="1400ms" fill="hold">
               <p:animEffect presetClass="entr" presetId="10" dur="500"/>
             </p:cTn>
           </p:par>
@@ -7524,7 +8198,7 @@
             <p:tnCond val="0"/>
           </p:cond>
           <p:par>
-            <p:cTn id="9" nodeType="withEffect" dur="500" begin="3400ms" fill="hold">
+            <p:cTn id="13" nodeType="withEffect" dur="500" begin="1750ms" fill="hold">
               <p:animEffect presetClass="entr" presetId="10" dur="500"/>
             </p:cTn>
           </p:par>
@@ -7541,8 +8215,8 @@
             <p:tnCond val="0"/>
           </p:cond>
           <p:par>
-            <p:cTn id="10" nodeType="withEffect" dur="500" begin="4000ms" fill="hold">
-              <p:animEffect presetClass="entr" presetId="10" dur="500"/>
+            <p:cTn id="35" nodeType="withEffect" dur="1500" begin="3500ms" fill="hold" repeatCount="indefinite">
+              <p:animEffect presetClass="emph" presetId="26" dur="1500"/>
             </p:cTn>
           </p:par>
         </p:par>
@@ -7558,8 +8232,8 @@
             <p:tnCond val="0"/>
           </p:cond>
           <p:par>
-            <p:cTn id="11" nodeType="withEffect" dur="1500" begin="5000ms" fill="hold" repeatCount="indefinite">
-              <p:animEffect presetClass="emph" presetId="26" dur="1500"/>
+            <p:cTn id="32" nodeType="withEffect" dur="500" begin="2200ms" fill="hold">
+              <p:animEffect presetClass="entr" presetId="10" dur="500"/>
             </p:cTn>
           </p:par>
         </p:par>

--- a/docs/ppt/javabrain.pptx
+++ b/docs/ppt/javabrain.pptx
@@ -3109,7 +3109,7 @@
       <p:grpSpPr/>
       <p:pic>
         <p:nvPicPr>
-          <p:cNvPr id="2" name="Picture 1" descr="p1-neural-v1.png"/>
+          <p:cNvPr id="2" name="Picture 1" descr="p1v2-d1-brain-3streams.png"/>
           <p:cNvPicPr>
             <a:picLocks noChangeAspect="1"/>
           </p:cNvPicPr>
@@ -3117,7 +3117,7 @@
         </p:nvPicPr>
         <p:blipFill>
           <a:blip r:embed="rId2">
-            <a:alphaModFix amt="32000"/>
+            <a:alphaModFix amt="38000"/>
           </a:blip>
           <a:stretch>
             <a:fillRect/>
@@ -3125,8 +3125,8 @@
         </p:blipFill>
         <p:spPr>
           <a:xfrm>
-            <a:off x="4114800" y="457200"/>
-            <a:ext cx="7772400" cy="5029200"/>
+            <a:off x="2743200" y="91440"/>
+            <a:ext cx="6858000" cy="3017520"/>
           </a:xfrm>
           <a:prstGeom prst="rect">
             <a:avLst/>
@@ -3135,14 +3135,84 @@
       </p:pic>
       <p:sp>
         <p:nvSpPr>
-          <p:cNvPr id="3" name="Oval 2"/>
+          <p:cNvPr id="3" name="TextBox 2"/>
+          <p:cNvSpPr txBox="1"/>
+          <p:nvPr/>
+        </p:nvSpPr>
+        <p:spPr>
+          <a:xfrm>
+            <a:off x="914400" y="3200400"/>
+            <a:ext cx="10362895" cy="1280160"/>
+          </a:xfrm>
+          <a:prstGeom prst="rect">
+            <a:avLst/>
+          </a:prstGeom>
+          <a:noFill/>
+        </p:spPr>
+        <p:txBody>
+          <a:bodyPr wrap="square">
+            <a:spAutoFit/>
+          </a:bodyPr>
+          <a:lstStyle/>
+          <a:p>
+            <a:pPr algn="ctr"/>
+            <a:r>
+              <a:rPr sz="7200" b="1">
+                <a:solidFill>
+                  <a:srgbClr val="1F2937"/>
+                </a:solidFill>
+                <a:latin typeface="Inter"/>
+              </a:rPr>
+              <a:t>JavaBrain</a:t>
+            </a:r>
+          </a:p>
+        </p:txBody>
+      </p:sp>
+      <p:sp>
+        <p:nvSpPr>
+          <p:cNvPr id="4" name="TextBox 3"/>
+          <p:cNvSpPr txBox="1"/>
+          <p:nvPr/>
+        </p:nvSpPr>
+        <p:spPr>
+          <a:xfrm>
+            <a:off x="914400" y="4480560"/>
+            <a:ext cx="10362895" cy="457200"/>
+          </a:xfrm>
+          <a:prstGeom prst="rect">
+            <a:avLst/>
+          </a:prstGeom>
+          <a:noFill/>
+        </p:spPr>
+        <p:txBody>
+          <a:bodyPr wrap="square">
+            <a:spAutoFit/>
+          </a:bodyPr>
+          <a:lstStyle/>
+          <a:p>
+            <a:pPr algn="ctr"/>
+            <a:r>
+              <a:rPr sz="2400" b="0">
+                <a:solidFill>
+                  <a:srgbClr val="6B7280"/>
+                </a:solidFill>
+                <a:latin typeface="阿里巴巴普惠体 3.0"/>
+              </a:rPr>
+              <a:t>让您的系统瞬间拥有“思考”与“执行”的智能大脑</a:t>
+            </a:r>
+          </a:p>
+        </p:txBody>
+      </p:sp>
+      <p:sp>
+        <p:nvSpPr>
+          <p:cNvPr id="5" name="Oval 4"/>
           <p:cNvSpPr/>
           <p:nvPr/>
         </p:nvSpPr>
         <p:spPr>
           <a:xfrm>
-            <a:off x="5669280" y="365760"/>
-            <a:ext cx="548640" cy="548640"/>
+            <a:off x="3200400" y="5120640"/>
+            <a:ext cx="164592" cy="164592"/>
           </a:xfrm>
           <a:prstGeom prst="ellipse">
             <a:avLst/>
@@ -3150,10 +3220,8 @@
           <a:solidFill>
             <a:srgbClr val="007396"/>
           </a:solidFill>
-          <a:ln w="25400">
-            <a:solidFill>
-              <a:srgbClr val="007396"/>
-            </a:solidFill>
+          <a:ln>
+            <a:noFill/>
           </a:ln>
         </p:spPr>
         <p:style>
@@ -3180,21 +3248,20 @@
       </p:sp>
       <p:sp>
         <p:nvSpPr>
-          <p:cNvPr id="4" name="Oval 3"/>
+          <p:cNvPr id="6" name="Oval 5"/>
           <p:cNvSpPr/>
           <p:nvPr/>
         </p:nvSpPr>
         <p:spPr>
           <a:xfrm>
-            <a:off x="4160520" y="868680"/>
-            <a:ext cx="914400" cy="914400"/>
+            <a:off x="5639104" y="5120640"/>
+            <a:ext cx="164592" cy="164592"/>
           </a:xfrm>
           <a:prstGeom prst="ellipse">
             <a:avLst/>
           </a:prstGeom>
           <a:solidFill>
-            <a:srgbClr val="007396"/>
-            <a:alpha val="30000"/>
+            <a:srgbClr val="6B46C1"/>
           </a:solidFill>
           <a:ln>
             <a:noFill/>
@@ -3224,25 +3291,23 @@
       </p:sp>
       <p:sp>
         <p:nvSpPr>
-          <p:cNvPr id="5" name="Oval 4"/>
+          <p:cNvPr id="7" name="Oval 6"/>
           <p:cNvSpPr/>
           <p:nvPr/>
         </p:nvSpPr>
         <p:spPr>
           <a:xfrm>
-            <a:off x="4389120" y="1097280"/>
-            <a:ext cx="457200" cy="457200"/>
+            <a:off x="8076895" y="5120640"/>
+            <a:ext cx="164592" cy="164592"/>
           </a:xfrm>
           <a:prstGeom prst="ellipse">
             <a:avLst/>
           </a:prstGeom>
           <a:solidFill>
-            <a:srgbClr val="007396"/>
+            <a:srgbClr val="10B981"/>
           </a:solidFill>
           <a:ln>
-            <a:solidFill>
-              <a:srgbClr val="007396"/>
-            </a:solidFill>
+            <a:noFill/>
           </a:ln>
         </p:spPr>
         <p:style>
@@ -3269,179 +3334,71 @@
       </p:sp>
       <p:sp>
         <p:nvSpPr>
-          <p:cNvPr id="6" name="Oval 5"/>
-          <p:cNvSpPr/>
-          <p:nvPr/>
-        </p:nvSpPr>
-        <p:spPr>
-          <a:xfrm>
-            <a:off x="5867704" y="868680"/>
-            <a:ext cx="914400" cy="914400"/>
-          </a:xfrm>
-          <a:prstGeom prst="ellipse">
-            <a:avLst/>
-          </a:prstGeom>
-          <a:solidFill>
-            <a:srgbClr val="6B46C1"/>
-            <a:alpha val="30000"/>
-          </a:solidFill>
-          <a:ln>
-            <a:noFill/>
-          </a:ln>
-        </p:spPr>
-        <p:style>
-          <a:lnRef idx="1">
-            <a:schemeClr val="accent1"/>
-          </a:lnRef>
-          <a:fillRef idx="3">
-            <a:schemeClr val="accent1"/>
-          </a:fillRef>
-          <a:effectRef idx="2">
-            <a:schemeClr val="accent1"/>
-          </a:effectRef>
-          <a:fontRef idx="minor">
-            <a:schemeClr val="lt1"/>
-          </a:fontRef>
-        </p:style>
-        <p:txBody>
-          <a:bodyPr rtlCol="0" anchor="ctr"/>
-          <a:lstStyle/>
-          <a:p>
-            <a:pPr algn="ctr"/>
-          </a:p>
-        </p:txBody>
-      </p:sp>
-      <p:sp>
-        <p:nvSpPr>
-          <p:cNvPr id="7" name="Oval 6"/>
-          <p:cNvSpPr/>
-          <p:nvPr/>
-        </p:nvSpPr>
-        <p:spPr>
-          <a:xfrm>
-            <a:off x="6096304" y="1097280"/>
-            <a:ext cx="457200" cy="457200"/>
-          </a:xfrm>
-          <a:prstGeom prst="ellipse">
-            <a:avLst/>
-          </a:prstGeom>
-          <a:solidFill>
-            <a:srgbClr val="6B46C1"/>
-          </a:solidFill>
-          <a:ln>
-            <a:solidFill>
-              <a:srgbClr val="6B46C1"/>
-            </a:solidFill>
-          </a:ln>
-        </p:spPr>
-        <p:style>
-          <a:lnRef idx="1">
-            <a:schemeClr val="accent1"/>
-          </a:lnRef>
-          <a:fillRef idx="3">
-            <a:schemeClr val="accent1"/>
-          </a:fillRef>
-          <a:effectRef idx="2">
-            <a:schemeClr val="accent1"/>
-          </a:effectRef>
-          <a:fontRef idx="minor">
-            <a:schemeClr val="lt1"/>
-          </a:fontRef>
-        </p:style>
-        <p:txBody>
-          <a:bodyPr rtlCol="0" anchor="ctr"/>
-          <a:lstStyle/>
-          <a:p>
-            <a:pPr algn="ctr"/>
-          </a:p>
-        </p:txBody>
-      </p:sp>
-      <p:sp>
-        <p:nvSpPr>
-          <p:cNvPr id="8" name="Oval 7"/>
-          <p:cNvSpPr/>
-          <p:nvPr/>
-        </p:nvSpPr>
-        <p:spPr>
-          <a:xfrm>
-            <a:off x="7573975" y="868680"/>
-            <a:ext cx="914400" cy="914400"/>
-          </a:xfrm>
-          <a:prstGeom prst="ellipse">
-            <a:avLst/>
-          </a:prstGeom>
-          <a:solidFill>
-            <a:srgbClr val="10B981"/>
-            <a:alpha val="30000"/>
-          </a:solidFill>
-          <a:ln>
-            <a:noFill/>
-          </a:ln>
-        </p:spPr>
-        <p:style>
-          <a:lnRef idx="1">
-            <a:schemeClr val="accent1"/>
-          </a:lnRef>
-          <a:fillRef idx="3">
-            <a:schemeClr val="accent1"/>
-          </a:fillRef>
-          <a:effectRef idx="2">
-            <a:schemeClr val="accent1"/>
-          </a:effectRef>
-          <a:fontRef idx="minor">
-            <a:schemeClr val="lt1"/>
-          </a:fontRef>
-        </p:style>
-        <p:txBody>
-          <a:bodyPr rtlCol="0" anchor="ctr"/>
-          <a:lstStyle/>
-          <a:p>
-            <a:pPr algn="ctr"/>
-          </a:p>
-        </p:txBody>
-      </p:sp>
-      <p:sp>
-        <p:nvSpPr>
-          <p:cNvPr id="9" name="Oval 8"/>
-          <p:cNvSpPr/>
-          <p:nvPr/>
-        </p:nvSpPr>
-        <p:spPr>
-          <a:xfrm>
-            <a:off x="7802575" y="1097280"/>
-            <a:ext cx="457200" cy="457200"/>
-          </a:xfrm>
-          <a:prstGeom prst="ellipse">
-            <a:avLst/>
-          </a:prstGeom>
-          <a:solidFill>
-            <a:srgbClr val="10B981"/>
-          </a:solidFill>
-          <a:ln>
-            <a:solidFill>
-              <a:srgbClr val="10B981"/>
-            </a:solidFill>
-          </a:ln>
-        </p:spPr>
-        <p:style>
-          <a:lnRef idx="1">
-            <a:schemeClr val="accent1"/>
-          </a:lnRef>
-          <a:fillRef idx="3">
-            <a:schemeClr val="accent1"/>
-          </a:fillRef>
-          <a:effectRef idx="2">
-            <a:schemeClr val="accent1"/>
-          </a:effectRef>
-          <a:fontRef idx="minor">
-            <a:schemeClr val="lt1"/>
-          </a:fontRef>
-        </p:style>
-        <p:txBody>
-          <a:bodyPr rtlCol="0" anchor="ctr"/>
-          <a:lstStyle/>
-          <a:p>
-            <a:pPr algn="ctr"/>
+          <p:cNvPr id="8" name="TextBox 7"/>
+          <p:cNvSpPr txBox="1"/>
+          <p:nvPr/>
+        </p:nvSpPr>
+        <p:spPr>
+          <a:xfrm>
+            <a:off x="3429000" y="5056631"/>
+            <a:ext cx="1828800" cy="365760"/>
+          </a:xfrm>
+          <a:prstGeom prst="rect">
+            <a:avLst/>
+          </a:prstGeom>
+          <a:noFill/>
+        </p:spPr>
+        <p:txBody>
+          <a:bodyPr wrap="square">
+            <a:spAutoFit/>
+          </a:bodyPr>
+          <a:lstStyle/>
+          <a:p>
+            <a:pPr algn="ctr"/>
+            <a:r>
+              <a:rPr sz="1400" b="1">
+                <a:solidFill>
+                  <a:srgbClr val="007396"/>
+                </a:solidFill>
+                <a:latin typeface="阿里巴巴普惠体 3.0"/>
+              </a:rPr>
+              <a:t>灵梭</a:t>
+            </a:r>
+          </a:p>
+        </p:txBody>
+      </p:sp>
+      <p:sp>
+        <p:nvSpPr>
+          <p:cNvPr id="9" name="TextBox 8"/>
+          <p:cNvSpPr txBox="1"/>
+          <p:nvPr/>
+        </p:nvSpPr>
+        <p:spPr>
+          <a:xfrm>
+            <a:off x="5867704" y="5056631"/>
+            <a:ext cx="1828800" cy="365760"/>
+          </a:xfrm>
+          <a:prstGeom prst="rect">
+            <a:avLst/>
+          </a:prstGeom>
+          <a:noFill/>
+        </p:spPr>
+        <p:txBody>
+          <a:bodyPr wrap="square">
+            <a:spAutoFit/>
+          </a:bodyPr>
+          <a:lstStyle/>
+          <a:p>
+            <a:pPr algn="ctr"/>
+            <a:r>
+              <a:rPr sz="1400" b="1">
+                <a:solidFill>
+                  <a:srgbClr val="6B46C1"/>
+                </a:solidFill>
+                <a:latin typeface="阿里巴巴普惠体 3.0"/>
+              </a:rPr>
+              <a:t>SQL工坊</a:t>
+            </a:r>
           </a:p>
         </p:txBody>
       </p:sp>
@@ -3453,8 +3410,8 @@
         </p:nvSpPr>
         <p:spPr>
           <a:xfrm>
-            <a:off x="3657600" y="1737360"/>
-            <a:ext cx="1920240" cy="365760"/>
+            <a:off x="8305495" y="5056631"/>
+            <a:ext cx="1828800" cy="365760"/>
           </a:xfrm>
           <a:prstGeom prst="rect">
             <a:avLst/>
@@ -3471,80 +3428,10 @@
             <a:r>
               <a:rPr sz="1400" b="1">
                 <a:solidFill>
-                  <a:srgbClr val="007396"/>
+                  <a:srgbClr val="10B981"/>
                 </a:solidFill>
                 <a:latin typeface="阿里巴巴普惠体 3.0"/>
               </a:rPr>
-              <a:t>灵梭</a:t>
-            </a:r>
-          </a:p>
-        </p:txBody>
-      </p:sp>
-      <p:sp>
-        <p:nvSpPr>
-          <p:cNvPr id="11" name="TextBox 10"/>
-          <p:cNvSpPr txBox="1"/>
-          <p:nvPr/>
-        </p:nvSpPr>
-        <p:spPr>
-          <a:xfrm>
-            <a:off x="5364784" y="1737360"/>
-            <a:ext cx="1920240" cy="365760"/>
-          </a:xfrm>
-          <a:prstGeom prst="rect">
-            <a:avLst/>
-          </a:prstGeom>
-          <a:noFill/>
-        </p:spPr>
-        <p:txBody>
-          <a:bodyPr wrap="square">
-            <a:spAutoFit/>
-          </a:bodyPr>
-          <a:lstStyle/>
-          <a:p>
-            <a:pPr algn="ctr"/>
-            <a:r>
-              <a:rPr sz="1400" b="1">
-                <a:solidFill>
-                  <a:srgbClr val="6B46C1"/>
-                </a:solidFill>
-                <a:latin typeface="阿里巴巴普惠体 3.0"/>
-              </a:rPr>
-              <a:t>SQL工坊</a:t>
-            </a:r>
-          </a:p>
-        </p:txBody>
-      </p:sp>
-      <p:sp>
-        <p:nvSpPr>
-          <p:cNvPr id="12" name="TextBox 11"/>
-          <p:cNvSpPr txBox="1"/>
-          <p:nvPr/>
-        </p:nvSpPr>
-        <p:spPr>
-          <a:xfrm>
-            <a:off x="7071055" y="1737360"/>
-            <a:ext cx="1920240" cy="365760"/>
-          </a:xfrm>
-          <a:prstGeom prst="rect">
-            <a:avLst/>
-          </a:prstGeom>
-          <a:noFill/>
-        </p:spPr>
-        <p:txBody>
-          <a:bodyPr wrap="square">
-            <a:spAutoFit/>
-          </a:bodyPr>
-          <a:lstStyle/>
-          <a:p>
-            <a:pPr algn="ctr"/>
-            <a:r>
-              <a:rPr sz="1400" b="1">
-                <a:solidFill>
-                  <a:srgbClr val="10B981"/>
-                </a:solidFill>
-                <a:latin typeface="阿里巴巴普惠体 3.0"/>
-              </a:rPr>
               <a:t>SQL工坊 MCP</a:t>
             </a:r>
           </a:p>
@@ -3552,77 +3439,7 @@
       </p:sp>
       <p:sp>
         <p:nvSpPr>
-          <p:cNvPr id="13" name="TextBox 12"/>
-          <p:cNvSpPr txBox="1"/>
-          <p:nvPr/>
-        </p:nvSpPr>
-        <p:spPr>
-          <a:xfrm>
-            <a:off x="914400" y="3931920"/>
-            <a:ext cx="10362895" cy="1280160"/>
-          </a:xfrm>
-          <a:prstGeom prst="rect">
-            <a:avLst/>
-          </a:prstGeom>
-          <a:noFill/>
-        </p:spPr>
-        <p:txBody>
-          <a:bodyPr wrap="square">
-            <a:spAutoFit/>
-          </a:bodyPr>
-          <a:lstStyle/>
-          <a:p>
-            <a:pPr algn="ctr"/>
-            <a:r>
-              <a:rPr sz="7200" b="1">
-                <a:solidFill>
-                  <a:srgbClr val="1F2937"/>
-                </a:solidFill>
-                <a:latin typeface="Inter"/>
-              </a:rPr>
-              <a:t>JavaBrain</a:t>
-            </a:r>
-          </a:p>
-        </p:txBody>
-      </p:sp>
-      <p:sp>
-        <p:nvSpPr>
-          <p:cNvPr id="14" name="TextBox 13"/>
-          <p:cNvSpPr txBox="1"/>
-          <p:nvPr/>
-        </p:nvSpPr>
-        <p:spPr>
-          <a:xfrm>
-            <a:off x="914400" y="5212080"/>
-            <a:ext cx="10362895" cy="457200"/>
-          </a:xfrm>
-          <a:prstGeom prst="rect">
-            <a:avLst/>
-          </a:prstGeom>
-          <a:noFill/>
-        </p:spPr>
-        <p:txBody>
-          <a:bodyPr wrap="square">
-            <a:spAutoFit/>
-          </a:bodyPr>
-          <a:lstStyle/>
-          <a:p>
-            <a:pPr algn="ctr"/>
-            <a:r>
-              <a:rPr sz="2400" b="0">
-                <a:solidFill>
-                  <a:srgbClr val="6B7280"/>
-                </a:solidFill>
-                <a:latin typeface="阿里巴巴普惠体 3.0"/>
-              </a:rPr>
-              <a:t>让您的系统瞬间拥有“思考”与“执行”的智能大脑</a:t>
-            </a:r>
-          </a:p>
-        </p:txBody>
-      </p:sp>
-      <p:sp>
-        <p:nvSpPr>
-          <p:cNvPr id="15" name="Rounded Rectangle 14"/>
+          <p:cNvPr id="11" name="Rounded Rectangle 10"/>
           <p:cNvSpPr/>
           <p:nvPr/>
         </p:nvSpPr>
@@ -3665,7 +3482,7 @@
       </p:sp>
       <p:sp>
         <p:nvSpPr>
-          <p:cNvPr id="16" name="TextBox 15"/>
+          <p:cNvPr id="12" name="TextBox 11"/>
           <p:cNvSpPr txBox="1"/>
           <p:nvPr/>
         </p:nvSpPr>
@@ -3729,7 +3546,7 @@
             <p:tnCond val="0"/>
           </p:cond>
           <p:par>
-            <p:cTn id="5" nodeType="withEffect" dur="500" begin="300ms" fill="hold">
+            <p:cTn id="5" nodeType="withEffect" dur="500" begin="400ms" fill="hold">
               <p:animEffect presetClass="entr" presetId="10" dur="500"/>
             </p:cTn>
           </p:par>
@@ -3746,7 +3563,7 @@
             <p:tnCond val="0"/>
           </p:cond>
           <p:par>
-            <p:cTn id="6" nodeType="withEffect" dur="500" begin="600ms" fill="hold">
+            <p:cTn id="6" nodeType="withEffect" dur="500" begin="800ms" fill="hold">
               <p:animEffect presetClass="entr" presetId="10" dur="500"/>
             </p:cTn>
           </p:par>
@@ -3763,7 +3580,7 @@
             <p:tnCond val="0"/>
           </p:cond>
           <p:par>
-            <p:cTn id="14" nodeType="withEffect" dur="500" begin="900ms" fill="hold">
+            <p:cTn id="9" nodeType="withEffect" dur="500" begin="1000ms" fill="hold">
               <p:animEffect presetClass="entr" presetId="10" dur="500"/>
             </p:cTn>
           </p:par>
@@ -3780,7 +3597,7 @@
             <p:tnCond val="0"/>
           </p:cond>
           <p:par>
-            <p:cTn id="16" nodeType="withEffect" dur="500" begin="1400ms" fill="hold">
+            <p:cTn id="12" nodeType="withEffect" dur="500" begin="1400ms" fill="hold">
               <p:animEffect presetClass="entr" presetId="10" dur="500"/>
             </p:cTn>
           </p:par>

--- a/docs/ppt/javabrain.pptx
+++ b/docs/ppt/javabrain.pptx
@@ -3504,13 +3504,13 @@
           <a:p>
             <a:pPr algn="ctr"/>
             <a:r>
-              <a:rPr sz="1800" b="1">
+              <a:rPr sz="2200" b="1">
                 <a:solidFill>
                   <a:srgbClr val="FFFFFF"/>
                 </a:solidFill>
                 <a:latin typeface="阿里巴巴普惠体 3.0"/>
               </a:rPr>
-              <a:t>3 组件 · 1 starter · 0 漂移</a:t>
+              <a:t>3 分钟接入 AI</a:t>
             </a:r>
           </a:p>
         </p:txBody>
@@ -4811,7 +4811,7 @@
           <a:p>
             <a:pPr algn="ctr"/>
             <a:r>
-              <a:rPr sz="1400" b="1">
+              <a:rPr sz="1500" b="1">
                 <a:solidFill>
                   <a:srgbClr val="007396"/>
                 </a:solidFill>
@@ -4846,7 +4846,7 @@
           <a:p>
             <a:pPr algn="ctr"/>
             <a:r>
-              <a:rPr sz="1100" b="0">
+              <a:rPr sz="1300" b="0">
                 <a:solidFill>
                   <a:srgbClr val="6B7280"/>
                 </a:solidFill>
@@ -4926,7 +4926,7 @@
           <a:p>
             <a:pPr algn="ctr"/>
             <a:r>
-              <a:rPr sz="1400" b="1">
+              <a:rPr sz="1500" b="1">
                 <a:solidFill>
                   <a:srgbClr val="007396"/>
                 </a:solidFill>
@@ -4961,7 +4961,7 @@
           <a:p>
             <a:pPr algn="ctr"/>
             <a:r>
-              <a:rPr sz="1100" b="0">
+              <a:rPr sz="1300" b="0">
                 <a:solidFill>
                   <a:srgbClr val="6B7280"/>
                 </a:solidFill>
@@ -5041,7 +5041,7 @@
           <a:p>
             <a:pPr algn="ctr"/>
             <a:r>
-              <a:rPr sz="1400" b="1">
+              <a:rPr sz="1500" b="1">
                 <a:solidFill>
                   <a:srgbClr val="007396"/>
                 </a:solidFill>
@@ -5076,7 +5076,7 @@
           <a:p>
             <a:pPr algn="ctr"/>
             <a:r>
-              <a:rPr sz="1100" b="0">
+              <a:rPr sz="1300" b="0">
                 <a:solidFill>
                   <a:srgbClr val="6B7280"/>
                 </a:solidFill>
@@ -5156,7 +5156,7 @@
           <a:p>
             <a:pPr algn="ctr"/>
             <a:r>
-              <a:rPr sz="1400" b="1">
+              <a:rPr sz="1500" b="1">
                 <a:solidFill>
                   <a:srgbClr val="007396"/>
                 </a:solidFill>
@@ -5191,7 +5191,7 @@
           <a:p>
             <a:pPr algn="ctr"/>
             <a:r>
-              <a:rPr sz="1100" b="0">
+              <a:rPr sz="1300" b="0">
                 <a:solidFill>
                   <a:srgbClr val="6B7280"/>
                 </a:solidFill>
@@ -5306,7 +5306,7 @@
           <a:p>
             <a:pPr algn="ctr"/>
             <a:r>
-              <a:rPr sz="1400" b="1">
+              <a:rPr sz="1500" b="1">
                 <a:solidFill>
                   <a:srgbClr val="6B46C1"/>
                 </a:solidFill>
@@ -5341,7 +5341,7 @@
           <a:p>
             <a:pPr algn="ctr"/>
             <a:r>
-              <a:rPr sz="1100" b="0">
+              <a:rPr sz="1300" b="0">
                 <a:solidFill>
                   <a:srgbClr val="6B7280"/>
                 </a:solidFill>
@@ -5421,7 +5421,7 @@
           <a:p>
             <a:pPr algn="ctr"/>
             <a:r>
-              <a:rPr sz="1400" b="1">
+              <a:rPr sz="1500" b="1">
                 <a:solidFill>
                   <a:srgbClr val="6B46C1"/>
                 </a:solidFill>
@@ -5456,7 +5456,7 @@
           <a:p>
             <a:pPr algn="ctr"/>
             <a:r>
-              <a:rPr sz="1100" b="0">
+              <a:rPr sz="1300" b="0">
                 <a:solidFill>
                   <a:srgbClr val="6B7280"/>
                 </a:solidFill>
@@ -5536,7 +5536,7 @@
           <a:p>
             <a:pPr algn="ctr"/>
             <a:r>
-              <a:rPr sz="1400" b="1">
+              <a:rPr sz="1500" b="1">
                 <a:solidFill>
                   <a:srgbClr val="6B46C1"/>
                 </a:solidFill>
@@ -5571,7 +5571,7 @@
           <a:p>
             <a:pPr algn="ctr"/>
             <a:r>
-              <a:rPr sz="1100" b="0">
+              <a:rPr sz="1300" b="0">
                 <a:solidFill>
                   <a:srgbClr val="6B7280"/>
                 </a:solidFill>
@@ -5651,7 +5651,7 @@
           <a:p>
             <a:pPr algn="ctr"/>
             <a:r>
-              <a:rPr sz="1400" b="1">
+              <a:rPr sz="1500" b="1">
                 <a:solidFill>
                   <a:srgbClr val="6B46C1"/>
                 </a:solidFill>
@@ -5686,7 +5686,7 @@
           <a:p>
             <a:pPr algn="ctr"/>
             <a:r>
-              <a:rPr sz="1100" b="0">
+              <a:rPr sz="1300" b="0">
                 <a:solidFill>
                   <a:srgbClr val="6B7280"/>
                 </a:solidFill>
@@ -5766,7 +5766,7 @@
           <a:p>
             <a:pPr algn="ctr"/>
             <a:r>
-              <a:rPr sz="1400" b="1">
+              <a:rPr sz="1500" b="1">
                 <a:solidFill>
                   <a:srgbClr val="F59E0B"/>
                 </a:solidFill>
@@ -5846,7 +5846,7 @@
           <a:p>
             <a:pPr algn="ctr"/>
             <a:r>
-              <a:rPr sz="1400" b="1">
+              <a:rPr sz="1500" b="1">
                 <a:solidFill>
                   <a:srgbClr val="F59E0B"/>
                 </a:solidFill>
@@ -5926,7 +5926,7 @@
           <a:p>
             <a:pPr algn="ctr"/>
             <a:r>
-              <a:rPr sz="1400" b="1">
+              <a:rPr sz="1500" b="1">
                 <a:solidFill>
                   <a:srgbClr val="F59E0B"/>
                 </a:solidFill>
@@ -9507,41 +9507,6 @@
           </a:p>
         </p:txBody>
       </p:sp>
-      <p:sp>
-        <p:nvSpPr>
-          <p:cNvPr id="12" name="TextBox 11"/>
-          <p:cNvSpPr txBox="1"/>
-          <p:nvPr/>
-        </p:nvSpPr>
-        <p:spPr>
-          <a:xfrm>
-            <a:off x="457200" y="5486400"/>
-            <a:ext cx="11277295" cy="365760"/>
-          </a:xfrm>
-          <a:prstGeom prst="rect">
-            <a:avLst/>
-          </a:prstGeom>
-          <a:noFill/>
-        </p:spPr>
-        <p:txBody>
-          <a:bodyPr wrap="square">
-            <a:spAutoFit/>
-          </a:bodyPr>
-          <a:lstStyle/>
-          <a:p>
-            <a:pPr algn="ctr"/>
-            <a:r>
-              <a:rPr sz="1600" b="1">
-                <a:solidFill>
-                  <a:srgbClr val="6B46C1"/>
-                </a:solidFill>
-                <a:latin typeface="阿里巴巴普惠体 3.0"/>
-              </a:rPr>
-              <a:t>▼ 下一页 · 6 大功能模块</a:t>
-            </a:r>
-          </a:p>
-        </p:txBody>
-      </p:sp>
     </p:spTree>
   </p:cSld>
   <p:clrMapOvr>
@@ -10964,41 +10929,6 @@
           <a:p>
             <a:r>
               <a:t>数据不出企业</a:t>
-            </a:r>
-          </a:p>
-        </p:txBody>
-      </p:sp>
-      <p:sp>
-        <p:nvSpPr>
-          <p:cNvPr id="12" name="TextBox 11"/>
-          <p:cNvSpPr txBox="1"/>
-          <p:nvPr/>
-        </p:nvSpPr>
-        <p:spPr>
-          <a:xfrm>
-            <a:off x="457200" y="5486400"/>
-            <a:ext cx="11277295" cy="365760"/>
-          </a:xfrm>
-          <a:prstGeom prst="rect">
-            <a:avLst/>
-          </a:prstGeom>
-          <a:noFill/>
-        </p:spPr>
-        <p:txBody>
-          <a:bodyPr wrap="square">
-            <a:spAutoFit/>
-          </a:bodyPr>
-          <a:lstStyle/>
-          <a:p>
-            <a:pPr algn="ctr"/>
-            <a:r>
-              <a:rPr sz="1600" b="1">
-                <a:solidFill>
-                  <a:srgbClr val="6B46C1"/>
-                </a:solidFill>
-                <a:latin typeface="阿里巴巴普惠体 3.0"/>
-              </a:rPr>
-              <a:t>▼ 下一页 · 4 starter + 6 功能</a:t>
             </a:r>
           </a:p>
         </p:txBody>

--- a/docs/ppt/javabrain.pptx
+++ b/docs/ppt/javabrain.pptx
@@ -4672,9 +4672,35 @@
         <p:nvPr/>
       </p:nvGrpSpPr>
       <p:grpSpPr/>
-      <p:sp>
-        <p:nvSpPr>
-          <p:cNvPr id="2" name="TextBox 1"/>
+      <p:pic>
+        <p:nvPicPr>
+          <p:cNvPr id="2" name="Picture 1" descr="p9-bg-timeline.png"/>
+          <p:cNvPicPr>
+            <a:picLocks noChangeAspect="1"/>
+          </p:cNvPicPr>
+          <p:nvPr/>
+        </p:nvPicPr>
+        <p:blipFill>
+          <a:blip r:embed="rId2">
+            <a:alphaModFix amt="30000"/>
+          </a:blip>
+          <a:stretch>
+            <a:fillRect/>
+          </a:stretch>
+        </p:blipFill>
+        <p:spPr>
+          <a:xfrm>
+            <a:off x="7772400" y="182880"/>
+            <a:ext cx="4114800" cy="731520"/>
+          </a:xfrm>
+          <a:prstGeom prst="rect">
+            <a:avLst/>
+          </a:prstGeom>
+        </p:spPr>
+      </p:pic>
+      <p:sp>
+        <p:nvSpPr>
+          <p:cNvPr id="3" name="TextBox 2"/>
           <p:cNvSpPr txBox="1"/>
           <p:nvPr/>
         </p:nvSpPr>
@@ -4702,14 +4728,14 @@
                 </a:solidFill>
                 <a:latin typeface="阿里巴巴普惠体 3.0"/>
               </a:rPr>
-              <a:t>JavaBrain 未来 12 个月路线图</a:t>
-            </a:r>
-          </a:p>
-        </p:txBody>
-      </p:sp>
-      <p:sp>
-        <p:nvSpPr>
-          <p:cNvPr id="3" name="TextBox 2"/>
+              <a:t>JavaBrain 路线图</a:t>
+            </a:r>
+          </a:p>
+        </p:txBody>
+      </p:sp>
+      <p:sp>
+        <p:nvSpPr>
+          <p:cNvPr id="4" name="TextBox 3"/>
           <p:cNvSpPr txBox="1"/>
           <p:nvPr/>
         </p:nvSpPr>
@@ -4744,7 +4770,7 @@
       </p:sp>
       <p:sp>
         <p:nvSpPr>
-          <p:cNvPr id="4" name="Rounded Rectangle 3"/>
+          <p:cNvPr id="5" name="Rounded Rectangle 4"/>
           <p:cNvSpPr/>
           <p:nvPr/>
         </p:nvSpPr>
@@ -4789,7 +4815,7 @@
       </p:sp>
       <p:sp>
         <p:nvSpPr>
-          <p:cNvPr id="5" name="TextBox 4"/>
+          <p:cNvPr id="6" name="TextBox 5"/>
           <p:cNvSpPr txBox="1"/>
           <p:nvPr/>
         </p:nvSpPr>
@@ -4824,7 +4850,7 @@
       </p:sp>
       <p:sp>
         <p:nvSpPr>
-          <p:cNvPr id="6" name="TextBox 5"/>
+          <p:cNvPr id="7" name="TextBox 6"/>
           <p:cNvSpPr txBox="1"/>
           <p:nvPr/>
         </p:nvSpPr>
@@ -4859,7 +4885,7 @@
       </p:sp>
       <p:sp>
         <p:nvSpPr>
-          <p:cNvPr id="7" name="Rounded Rectangle 6"/>
+          <p:cNvPr id="8" name="Rounded Rectangle 7"/>
           <p:cNvSpPr/>
           <p:nvPr/>
         </p:nvSpPr>
@@ -4904,7 +4930,7 @@
       </p:sp>
       <p:sp>
         <p:nvSpPr>
-          <p:cNvPr id="8" name="TextBox 7"/>
+          <p:cNvPr id="9" name="TextBox 8"/>
           <p:cNvSpPr txBox="1"/>
           <p:nvPr/>
         </p:nvSpPr>
@@ -4939,7 +4965,7 @@
       </p:sp>
       <p:sp>
         <p:nvSpPr>
-          <p:cNvPr id="9" name="TextBox 8"/>
+          <p:cNvPr id="10" name="TextBox 9"/>
           <p:cNvSpPr txBox="1"/>
           <p:nvPr/>
         </p:nvSpPr>
@@ -4974,7 +5000,7 @@
       </p:sp>
       <p:sp>
         <p:nvSpPr>
-          <p:cNvPr id="10" name="Rounded Rectangle 9"/>
+          <p:cNvPr id="11" name="Rounded Rectangle 10"/>
           <p:cNvSpPr/>
           <p:nvPr/>
         </p:nvSpPr>
@@ -5019,7 +5045,7 @@
       </p:sp>
       <p:sp>
         <p:nvSpPr>
-          <p:cNvPr id="11" name="TextBox 10"/>
+          <p:cNvPr id="12" name="TextBox 11"/>
           <p:cNvSpPr txBox="1"/>
           <p:nvPr/>
         </p:nvSpPr>
@@ -5054,7 +5080,7 @@
       </p:sp>
       <p:sp>
         <p:nvSpPr>
-          <p:cNvPr id="12" name="TextBox 11"/>
+          <p:cNvPr id="13" name="TextBox 12"/>
           <p:cNvSpPr txBox="1"/>
           <p:nvPr/>
         </p:nvSpPr>
@@ -5089,7 +5115,7 @@
       </p:sp>
       <p:sp>
         <p:nvSpPr>
-          <p:cNvPr id="13" name="Rounded Rectangle 12"/>
+          <p:cNvPr id="14" name="Rounded Rectangle 13"/>
           <p:cNvSpPr/>
           <p:nvPr/>
         </p:nvSpPr>
@@ -5134,7 +5160,7 @@
       </p:sp>
       <p:sp>
         <p:nvSpPr>
-          <p:cNvPr id="14" name="TextBox 13"/>
+          <p:cNvPr id="15" name="TextBox 14"/>
           <p:cNvSpPr txBox="1"/>
           <p:nvPr/>
         </p:nvSpPr>
@@ -5169,7 +5195,7 @@
       </p:sp>
       <p:sp>
         <p:nvSpPr>
-          <p:cNvPr id="15" name="TextBox 14"/>
+          <p:cNvPr id="16" name="TextBox 15"/>
           <p:cNvSpPr txBox="1"/>
           <p:nvPr/>
         </p:nvSpPr>
@@ -5204,7 +5230,7 @@
       </p:sp>
       <p:sp>
         <p:nvSpPr>
-          <p:cNvPr id="16" name="TextBox 15"/>
+          <p:cNvPr id="17" name="TextBox 16"/>
           <p:cNvSpPr txBox="1"/>
           <p:nvPr/>
         </p:nvSpPr>
@@ -5239,7 +5265,7 @@
       </p:sp>
       <p:sp>
         <p:nvSpPr>
-          <p:cNvPr id="17" name="Rounded Rectangle 16"/>
+          <p:cNvPr id="18" name="Rounded Rectangle 17"/>
           <p:cNvSpPr/>
           <p:nvPr/>
         </p:nvSpPr>
@@ -5284,7 +5310,7 @@
       </p:sp>
       <p:sp>
         <p:nvSpPr>
-          <p:cNvPr id="18" name="TextBox 17"/>
+          <p:cNvPr id="19" name="TextBox 18"/>
           <p:cNvSpPr txBox="1"/>
           <p:nvPr/>
         </p:nvSpPr>
@@ -5319,7 +5345,7 @@
       </p:sp>
       <p:sp>
         <p:nvSpPr>
-          <p:cNvPr id="19" name="TextBox 18"/>
+          <p:cNvPr id="20" name="TextBox 19"/>
           <p:cNvSpPr txBox="1"/>
           <p:nvPr/>
         </p:nvSpPr>
@@ -5354,7 +5380,7 @@
       </p:sp>
       <p:sp>
         <p:nvSpPr>
-          <p:cNvPr id="20" name="Rounded Rectangle 19"/>
+          <p:cNvPr id="21" name="Rounded Rectangle 20"/>
           <p:cNvSpPr/>
           <p:nvPr/>
         </p:nvSpPr>
@@ -5399,7 +5425,7 @@
       </p:sp>
       <p:sp>
         <p:nvSpPr>
-          <p:cNvPr id="21" name="TextBox 20"/>
+          <p:cNvPr id="22" name="TextBox 21"/>
           <p:cNvSpPr txBox="1"/>
           <p:nvPr/>
         </p:nvSpPr>
@@ -5434,7 +5460,7 @@
       </p:sp>
       <p:sp>
         <p:nvSpPr>
-          <p:cNvPr id="22" name="TextBox 21"/>
+          <p:cNvPr id="23" name="TextBox 22"/>
           <p:cNvSpPr txBox="1"/>
           <p:nvPr/>
         </p:nvSpPr>
@@ -5469,7 +5495,7 @@
       </p:sp>
       <p:sp>
         <p:nvSpPr>
-          <p:cNvPr id="23" name="Rounded Rectangle 22"/>
+          <p:cNvPr id="24" name="Rounded Rectangle 23"/>
           <p:cNvSpPr/>
           <p:nvPr/>
         </p:nvSpPr>
@@ -5514,7 +5540,7 @@
       </p:sp>
       <p:sp>
         <p:nvSpPr>
-          <p:cNvPr id="24" name="TextBox 23"/>
+          <p:cNvPr id="25" name="TextBox 24"/>
           <p:cNvSpPr txBox="1"/>
           <p:nvPr/>
         </p:nvSpPr>
@@ -5549,7 +5575,7 @@
       </p:sp>
       <p:sp>
         <p:nvSpPr>
-          <p:cNvPr id="25" name="TextBox 24"/>
+          <p:cNvPr id="26" name="TextBox 25"/>
           <p:cNvSpPr txBox="1"/>
           <p:nvPr/>
         </p:nvSpPr>
@@ -5584,7 +5610,7 @@
       </p:sp>
       <p:sp>
         <p:nvSpPr>
-          <p:cNvPr id="26" name="Rounded Rectangle 25"/>
+          <p:cNvPr id="27" name="Rounded Rectangle 26"/>
           <p:cNvSpPr/>
           <p:nvPr/>
         </p:nvSpPr>
@@ -5629,7 +5655,7 @@
       </p:sp>
       <p:sp>
         <p:nvSpPr>
-          <p:cNvPr id="27" name="TextBox 26"/>
+          <p:cNvPr id="28" name="TextBox 27"/>
           <p:cNvSpPr txBox="1"/>
           <p:nvPr/>
         </p:nvSpPr>
@@ -5664,7 +5690,7 @@
       </p:sp>
       <p:sp>
         <p:nvSpPr>
-          <p:cNvPr id="28" name="TextBox 27"/>
+          <p:cNvPr id="29" name="TextBox 28"/>
           <p:cNvSpPr txBox="1"/>
           <p:nvPr/>
         </p:nvSpPr>
@@ -5699,7 +5725,7 @@
       </p:sp>
       <p:sp>
         <p:nvSpPr>
-          <p:cNvPr id="29" name="Rounded Rectangle 28"/>
+          <p:cNvPr id="30" name="Rounded Rectangle 29"/>
           <p:cNvSpPr/>
           <p:nvPr/>
         </p:nvSpPr>
@@ -5744,7 +5770,7 @@
       </p:sp>
       <p:sp>
         <p:nvSpPr>
-          <p:cNvPr id="30" name="TextBox 29"/>
+          <p:cNvPr id="31" name="TextBox 30"/>
           <p:cNvSpPr txBox="1"/>
           <p:nvPr/>
         </p:nvSpPr>
@@ -5779,7 +5805,7 @@
       </p:sp>
       <p:sp>
         <p:nvSpPr>
-          <p:cNvPr id="31" name="Rounded Rectangle 30"/>
+          <p:cNvPr id="32" name="Rounded Rectangle 31"/>
           <p:cNvSpPr/>
           <p:nvPr/>
         </p:nvSpPr>
@@ -5824,7 +5850,7 @@
       </p:sp>
       <p:sp>
         <p:nvSpPr>
-          <p:cNvPr id="32" name="TextBox 31"/>
+          <p:cNvPr id="33" name="TextBox 32"/>
           <p:cNvSpPr txBox="1"/>
           <p:nvPr/>
         </p:nvSpPr>
@@ -5859,7 +5885,7 @@
       </p:sp>
       <p:sp>
         <p:nvSpPr>
-          <p:cNvPr id="33" name="Rounded Rectangle 32"/>
+          <p:cNvPr id="34" name="Rounded Rectangle 33"/>
           <p:cNvSpPr/>
           <p:nvPr/>
         </p:nvSpPr>
@@ -5904,7 +5930,7 @@
       </p:sp>
       <p:sp>
         <p:nvSpPr>
-          <p:cNvPr id="34" name="TextBox 33"/>
+          <p:cNvPr id="35" name="TextBox 34"/>
           <p:cNvSpPr txBox="1"/>
           <p:nvPr/>
         </p:nvSpPr>
@@ -5951,7 +5977,7 @@
             <p:tnCond val="0"/>
           </p:cond>
           <p:par>
-            <p:cTn id="3" nodeType="withEffect" dur="500" begin="0ms" fill="hold">
+            <p:cTn id="4" nodeType="withEffect" dur="500" begin="0ms" fill="hold">
               <p:animEffect presetClass="entr" presetId="10" dur="500"/>
             </p:cTn>
           </p:par>
@@ -5968,7 +5994,7 @@
             <p:tnCond val="0"/>
           </p:cond>
           <p:par>
-            <p:cTn id="5" nodeType="withEffect" dur="500" begin="400ms" fill="hold">
+            <p:cTn id="6" nodeType="withEffect" dur="500" begin="400ms" fill="hold">
               <p:animEffect presetClass="entr" presetId="10" dur="500"/>
             </p:cTn>
           </p:par>
@@ -5985,7 +6011,7 @@
             <p:tnCond val="0"/>
           </p:cond>
           <p:par>
-            <p:cTn id="8" nodeType="withEffect" dur="500" begin="600ms" fill="hold">
+            <p:cTn id="9" nodeType="withEffect" dur="500" begin="600ms" fill="hold">
               <p:animEffect presetClass="entr" presetId="10" dur="500"/>
             </p:cTn>
           </p:par>
@@ -6002,7 +6028,7 @@
             <p:tnCond val="0"/>
           </p:cond>
           <p:par>
-            <p:cTn id="11" nodeType="withEffect" dur="500" begin="800ms" fill="hold">
+            <p:cTn id="12" nodeType="withEffect" dur="500" begin="800ms" fill="hold">
               <p:animEffect presetClass="entr" presetId="10" dur="500"/>
             </p:cTn>
           </p:par>
@@ -6019,7 +6045,7 @@
             <p:tnCond val="0"/>
           </p:cond>
           <p:par>
-            <p:cTn id="14" nodeType="withEffect" dur="500" begin="1000ms" fill="hold">
+            <p:cTn id="15" nodeType="withEffect" dur="500" begin="1000ms" fill="hold">
               <p:animEffect presetClass="entr" presetId="10" dur="500"/>
             </p:cTn>
           </p:par>
@@ -6036,7 +6062,7 @@
             <p:tnCond val="0"/>
           </p:cond>
           <p:par>
-            <p:cTn id="18" nodeType="withEffect" dur="500" begin="1200ms" fill="hold">
+            <p:cTn id="19" nodeType="withEffect" dur="500" begin="1200ms" fill="hold">
               <p:animEffect presetClass="entr" presetId="10" dur="500"/>
             </p:cTn>
           </p:par>
@@ -6053,7 +6079,7 @@
             <p:tnCond val="0"/>
           </p:cond>
           <p:par>
-            <p:cTn id="21" nodeType="withEffect" dur="500" begin="1400ms" fill="hold">
+            <p:cTn id="22" nodeType="withEffect" dur="500" begin="1400ms" fill="hold">
               <p:animEffect presetClass="entr" presetId="10" dur="500"/>
             </p:cTn>
           </p:par>
@@ -6070,7 +6096,7 @@
             <p:tnCond val="0"/>
           </p:cond>
           <p:par>
-            <p:cTn id="24" nodeType="withEffect" dur="500" begin="1600ms" fill="hold">
+            <p:cTn id="25" nodeType="withEffect" dur="500" begin="1600ms" fill="hold">
               <p:animEffect presetClass="entr" presetId="10" dur="500"/>
             </p:cTn>
           </p:par>
@@ -6087,7 +6113,7 @@
             <p:tnCond val="0"/>
           </p:cond>
           <p:par>
-            <p:cTn id="27" nodeType="withEffect" dur="500" begin="1800ms" fill="hold">
+            <p:cTn id="28" nodeType="withEffect" dur="500" begin="1800ms" fill="hold">
               <p:animEffect presetClass="entr" presetId="10" dur="500"/>
             </p:cTn>
           </p:par>
@@ -6104,7 +6130,7 @@
             <p:tnCond val="0"/>
           </p:cond>
           <p:par>
-            <p:cTn id="30" nodeType="withEffect" dur="500" begin="2000ms" fill="hold">
+            <p:cTn id="31" nodeType="withEffect" dur="500" begin="2000ms" fill="hold">
               <p:animEffect presetClass="entr" presetId="10" dur="500"/>
             </p:cTn>
           </p:par>
@@ -6121,7 +6147,7 @@
             <p:tnCond val="0"/>
           </p:cond>
           <p:par>
-            <p:cTn id="32" nodeType="withEffect" dur="500" begin="2300ms" fill="hold">
+            <p:cTn id="33" nodeType="withEffect" dur="500" begin="2300ms" fill="hold">
               <p:animEffect presetClass="entr" presetId="10" dur="500"/>
             </p:cTn>
           </p:par>
@@ -6138,7 +6164,7 @@
             <p:tnCond val="0"/>
           </p:cond>
           <p:par>
-            <p:cTn id="34" nodeType="withEffect" dur="500" begin="2600ms" fill="hold">
+            <p:cTn id="35" nodeType="withEffect" dur="500" begin="2600ms" fill="hold">
               <p:animEffect presetClass="entr" presetId="10" dur="500"/>
             </p:cTn>
           </p:par>
@@ -6155,7 +6181,7 @@
             <p:tnCond val="0"/>
           </p:cond>
           <p:par>
-            <p:cTn id="32" nodeType="withEffect" dur="1500" begin="3500ms" fill="hold" repeatCount="indefinite">
+            <p:cTn id="33" nodeType="withEffect" dur="1500" begin="3500ms" fill="hold" repeatCount="indefinite">
               <p:animEffect presetClass="emph" presetId="26" dur="1500"/>
             </p:cTn>
           </p:par>
@@ -9097,6 +9123,32 @@
         <p:nvPr/>
       </p:nvGrpSpPr>
       <p:grpSpPr/>
+      <p:pic>
+        <p:nvPicPr>
+          <p:cNvPr id="13" name="Picture 12" descr="p4a-ai-orchestrate.png"/>
+          <p:cNvPicPr>
+            <a:picLocks noChangeAspect="1"/>
+          </p:cNvPicPr>
+          <p:nvPr/>
+        </p:nvPicPr>
+        <p:blipFill>
+          <a:blip r:embed="rId2">
+            <a:alphaModFix amt="55000"/>
+          </a:blip>
+          <a:stretch>
+            <a:fillRect/>
+          </a:stretch>
+        </p:blipFill>
+        <p:spPr>
+          <a:xfrm>
+            <a:off x="274320" y="2194560"/>
+            <a:ext cx="4114800" cy="3657600"/>
+          </a:xfrm>
+          <a:prstGeom prst="rect">
+            <a:avLst/>
+          </a:prstGeom>
+        </p:spPr>
+      </p:pic>
       <p:sp>
         <p:nvSpPr>
           <p:cNvPr id="2" name="TextBox 1"/>
@@ -9140,8 +9192,8 @@
         </p:nvSpPr>
         <p:spPr>
           <a:xfrm>
-            <a:off x="457200" y="914400"/>
-            <a:ext cx="11277295" cy="914400"/>
+            <a:off x="457200" y="777240"/>
+            <a:ext cx="11277295" cy="640080"/>
           </a:xfrm>
           <a:prstGeom prst="rect">
             <a:avLst/>
@@ -9162,21 +9214,56 @@
                 </a:solidFill>
                 <a:latin typeface="阿里巴巴普惠体 3.0"/>
               </a:rPr>
-              <a:t>Spring AI 一键启动 · 改 .st 文件 AI 行为就变</a:t>
-            </a:r>
-          </a:p>
-        </p:txBody>
-      </p:sp>
-      <p:sp>
-        <p:nvSpPr>
-          <p:cNvPr id="4" name="Rounded Rectangle 3"/>
+              <a:t>Spring AI 一键启动</a:t>
+            </a:r>
+          </a:p>
+        </p:txBody>
+      </p:sp>
+      <p:sp>
+        <p:nvSpPr>
+          <p:cNvPr id="4" name="TextBox 3"/>
+          <p:cNvSpPr txBox="1"/>
+          <p:nvPr/>
+        </p:nvSpPr>
+        <p:spPr>
+          <a:xfrm>
+            <a:off x="457200" y="1325880"/>
+            <a:ext cx="11277295" cy="365760"/>
+          </a:xfrm>
+          <a:prstGeom prst="rect">
+            <a:avLst/>
+          </a:prstGeom>
+          <a:noFill/>
+        </p:spPr>
+        <p:txBody>
+          <a:bodyPr wrap="square">
+            <a:spAutoFit/>
+          </a:bodyPr>
+          <a:lstStyle/>
+          <a:p>
+            <a:pPr algn="ctr"/>
+            <a:r>
+              <a:rPr sz="1600" b="1">
+                <a:solidFill>
+                  <a:srgbClr val="F59E0B"/>
+                </a:solidFill>
+                <a:latin typeface="阿里巴巴普惠体 3.0"/>
+              </a:rPr>
+              <a:t>★ 改一个 .st 文件,AI 行为就变</a:t>
+            </a:r>
+          </a:p>
+        </p:txBody>
+      </p:sp>
+      <p:sp>
+        <p:nvSpPr>
+          <p:cNvPr id="5" name="Rounded Rectangle 4"/>
           <p:cNvSpPr/>
           <p:nvPr/>
         </p:nvSpPr>
         <p:spPr>
           <a:xfrm>
-            <a:off x="1386687" y="2286000"/>
-            <a:ext cx="4572000" cy="1188720"/>
+            <a:off x="7315200" y="2194560"/>
+            <a:ext cx="4114800" cy="1188720"/>
           </a:xfrm>
           <a:prstGeom prst="roundRect">
             <a:avLst/>
@@ -9214,29 +9301,29 @@
       </p:sp>
       <p:sp>
         <p:nvSpPr>
-          <p:cNvPr id="5" name="TextBox 4"/>
-          <p:cNvSpPr txBox="1"/>
-          <p:nvPr/>
-        </p:nvSpPr>
-        <p:spPr>
-          <a:xfrm>
-            <a:off x="1386687" y="2468880"/>
-            <a:ext cx="4572000" cy="822960"/>
-          </a:xfrm>
-          <a:prstGeom prst="rect">
-            <a:avLst/>
-          </a:prstGeom>
-          <a:noFill/>
-        </p:spPr>
-        <p:txBody>
-          <a:bodyPr wrap="square">
-            <a:spAutoFit/>
-          </a:bodyPr>
-          <a:lstStyle/>
-          <a:p>
-            <a:pPr algn="ctr"/>
-            <a:r>
-              <a:rPr sz="1800" b="1">
+          <p:cNvPr id="6" name="TextBox 5"/>
+          <p:cNvSpPr txBox="1"/>
+          <p:nvPr/>
+        </p:nvSpPr>
+        <p:spPr>
+          <a:xfrm>
+            <a:off x="7315200" y="2377440"/>
+            <a:ext cx="4114800" cy="822960"/>
+          </a:xfrm>
+          <a:prstGeom prst="rect">
+            <a:avLst/>
+          </a:prstGeom>
+          <a:noFill/>
+        </p:spPr>
+        <p:txBody>
+          <a:bodyPr wrap="square">
+            <a:spAutoFit/>
+          </a:bodyPr>
+          <a:lstStyle/>
+          <a:p>
+            <a:pPr algn="ctr"/>
+            <a:r>
+              <a:rPr sz="1600" b="1">
                 <a:solidFill>
                   <a:srgbClr val="007396"/>
                 </a:solidFill>
@@ -9254,14 +9341,14 @@
       </p:sp>
       <p:sp>
         <p:nvSpPr>
-          <p:cNvPr id="6" name="Rounded Rectangle 5"/>
+          <p:cNvPr id="7" name="Rounded Rectangle 6"/>
           <p:cNvSpPr/>
           <p:nvPr/>
         </p:nvSpPr>
         <p:spPr>
           <a:xfrm>
-            <a:off x="6233007" y="2286000"/>
-            <a:ext cx="4572000" cy="1188720"/>
+            <a:off x="11658600" y="2194560"/>
+            <a:ext cx="4114800" cy="1188720"/>
           </a:xfrm>
           <a:prstGeom prst="roundRect">
             <a:avLst/>
@@ -9299,29 +9386,29 @@
       </p:sp>
       <p:sp>
         <p:nvSpPr>
-          <p:cNvPr id="7" name="TextBox 6"/>
-          <p:cNvSpPr txBox="1"/>
-          <p:nvPr/>
-        </p:nvSpPr>
-        <p:spPr>
-          <a:xfrm>
-            <a:off x="6233007" y="2468880"/>
-            <a:ext cx="4572000" cy="822960"/>
-          </a:xfrm>
-          <a:prstGeom prst="rect">
-            <a:avLst/>
-          </a:prstGeom>
-          <a:noFill/>
-        </p:spPr>
-        <p:txBody>
-          <a:bodyPr wrap="square">
-            <a:spAutoFit/>
-          </a:bodyPr>
-          <a:lstStyle/>
-          <a:p>
-            <a:pPr algn="ctr"/>
-            <a:r>
-              <a:rPr sz="1800" b="1">
+          <p:cNvPr id="8" name="TextBox 7"/>
+          <p:cNvSpPr txBox="1"/>
+          <p:nvPr/>
+        </p:nvSpPr>
+        <p:spPr>
+          <a:xfrm>
+            <a:off x="11658600" y="2377440"/>
+            <a:ext cx="4114800" cy="822960"/>
+          </a:xfrm>
+          <a:prstGeom prst="rect">
+            <a:avLst/>
+          </a:prstGeom>
+          <a:noFill/>
+        </p:spPr>
+        <p:txBody>
+          <a:bodyPr wrap="square">
+            <a:spAutoFit/>
+          </a:bodyPr>
+          <a:lstStyle/>
+          <a:p>
+            <a:pPr algn="ctr"/>
+            <a:r>
+              <a:rPr sz="1600" b="1">
                 <a:solidFill>
                   <a:srgbClr val="F59E0B"/>
                 </a:solidFill>
@@ -9339,14 +9426,14 @@
       </p:sp>
       <p:sp>
         <p:nvSpPr>
-          <p:cNvPr id="8" name="Rounded Rectangle 7"/>
+          <p:cNvPr id="9" name="Rounded Rectangle 8"/>
           <p:cNvSpPr/>
           <p:nvPr/>
         </p:nvSpPr>
         <p:spPr>
           <a:xfrm>
-            <a:off x="1386687" y="3749039"/>
-            <a:ext cx="4572000" cy="1188720"/>
+            <a:off x="7315200" y="3611880"/>
+            <a:ext cx="4114800" cy="1188720"/>
           </a:xfrm>
           <a:prstGeom prst="roundRect">
             <a:avLst/>
@@ -9384,29 +9471,29 @@
       </p:sp>
       <p:sp>
         <p:nvSpPr>
-          <p:cNvPr id="9" name="TextBox 8"/>
-          <p:cNvSpPr txBox="1"/>
-          <p:nvPr/>
-        </p:nvSpPr>
-        <p:spPr>
-          <a:xfrm>
-            <a:off x="1386687" y="3931920"/>
-            <a:ext cx="4572000" cy="822960"/>
-          </a:xfrm>
-          <a:prstGeom prst="rect">
-            <a:avLst/>
-          </a:prstGeom>
-          <a:noFill/>
-        </p:spPr>
-        <p:txBody>
-          <a:bodyPr wrap="square">
-            <a:spAutoFit/>
-          </a:bodyPr>
-          <a:lstStyle/>
-          <a:p>
-            <a:pPr algn="ctr"/>
-            <a:r>
-              <a:rPr sz="1800" b="1">
+          <p:cNvPr id="10" name="TextBox 9"/>
+          <p:cNvSpPr txBox="1"/>
+          <p:nvPr/>
+        </p:nvSpPr>
+        <p:spPr>
+          <a:xfrm>
+            <a:off x="7315200" y="3794760"/>
+            <a:ext cx="4114800" cy="822960"/>
+          </a:xfrm>
+          <a:prstGeom prst="rect">
+            <a:avLst/>
+          </a:prstGeom>
+          <a:noFill/>
+        </p:spPr>
+        <p:txBody>
+          <a:bodyPr wrap="square">
+            <a:spAutoFit/>
+          </a:bodyPr>
+          <a:lstStyle/>
+          <a:p>
+            <a:pPr algn="ctr"/>
+            <a:r>
+              <a:rPr sz="1600" b="1">
                 <a:solidFill>
                   <a:srgbClr val="F59E0B"/>
                 </a:solidFill>
@@ -9424,14 +9511,14 @@
       </p:sp>
       <p:sp>
         <p:nvSpPr>
-          <p:cNvPr id="10" name="Rounded Rectangle 9"/>
+          <p:cNvPr id="11" name="Rounded Rectangle 10"/>
           <p:cNvSpPr/>
           <p:nvPr/>
         </p:nvSpPr>
         <p:spPr>
           <a:xfrm>
-            <a:off x="6233007" y="3749039"/>
-            <a:ext cx="4572000" cy="1188720"/>
+            <a:off x="11658600" y="3611880"/>
+            <a:ext cx="4114800" cy="1188720"/>
           </a:xfrm>
           <a:prstGeom prst="roundRect">
             <a:avLst/>
@@ -9469,29 +9556,29 @@
       </p:sp>
       <p:sp>
         <p:nvSpPr>
-          <p:cNvPr id="11" name="TextBox 10"/>
-          <p:cNvSpPr txBox="1"/>
-          <p:nvPr/>
-        </p:nvSpPr>
-        <p:spPr>
-          <a:xfrm>
-            <a:off x="6233007" y="3931920"/>
-            <a:ext cx="4572000" cy="822960"/>
-          </a:xfrm>
-          <a:prstGeom prst="rect">
-            <a:avLst/>
-          </a:prstGeom>
-          <a:noFill/>
-        </p:spPr>
-        <p:txBody>
-          <a:bodyPr wrap="square">
-            <a:spAutoFit/>
-          </a:bodyPr>
-          <a:lstStyle/>
-          <a:p>
-            <a:pPr algn="ctr"/>
-            <a:r>
-              <a:rPr sz="1800" b="1">
+          <p:cNvPr id="12" name="TextBox 11"/>
+          <p:cNvSpPr txBox="1"/>
+          <p:nvPr/>
+        </p:nvSpPr>
+        <p:spPr>
+          <a:xfrm>
+            <a:off x="11658600" y="3794760"/>
+            <a:ext cx="4114800" cy="822960"/>
+          </a:xfrm>
+          <a:prstGeom prst="rect">
+            <a:avLst/>
+          </a:prstGeom>
+          <a:noFill/>
+        </p:spPr>
+        <p:txBody>
+          <a:bodyPr wrap="square">
+            <a:spAutoFit/>
+          </a:bodyPr>
+          <a:lstStyle/>
+          <a:p>
+            <a:pPr algn="ctr"/>
+            <a:r>
+              <a:rPr sz="1600" b="1">
                 <a:solidFill>
                   <a:srgbClr val="007396"/>
                 </a:solidFill>
@@ -9538,7 +9625,7 @@
             <p:tnCond val="0"/>
           </p:cond>
           <p:par>
-            <p:cTn id="5" nodeType="withEffect" dur="500" begin="600ms" fill="hold">
+            <p:cTn id="6" nodeType="withEffect" dur="500" begin="400ms" fill="hold">
               <p:animEffect presetClass="entr" presetId="10" dur="500"/>
             </p:cTn>
           </p:par>
@@ -9555,7 +9642,7 @@
             <p:tnCond val="0"/>
           </p:cond>
           <p:par>
-            <p:cTn id="9" nodeType="withEffect" dur="500" begin="1200ms" fill="hold">
+            <p:cTn id="8" nodeType="withEffect" dur="500" begin="700ms" fill="hold">
               <p:animEffect presetClass="entr" presetId="10" dur="500"/>
             </p:cTn>
           </p:par>
@@ -9572,7 +9659,41 @@
             <p:tnCond val="0"/>
           </p:cond>
           <p:par>
-            <p:cTn id="9" nodeType="withEffect" dur="1500" begin="2000ms" fill="hold" repeatCount="indefinite">
+            <p:cTn id="10" nodeType="withEffect" dur="500" begin="1000ms" fill="hold">
+              <p:animEffect presetClass="entr" presetId="10" dur="500"/>
+            </p:cTn>
+          </p:par>
+        </p:par>
+      </p:par>
+    </p:tnLst>
+  </p:timing>
+  <p:timing>
+    <p:tnLst>
+      <p:par>
+        <p:pPr/>
+        <p:par>
+          <p:cond>
+            <p:tnCond val="0"/>
+          </p:cond>
+          <p:par>
+            <p:cTn id="12" nodeType="withEffect" dur="500" begin="1300ms" fill="hold">
+              <p:animEffect presetClass="entr" presetId="10" dur="500"/>
+            </p:cTn>
+          </p:par>
+        </p:par>
+      </p:par>
+    </p:tnLst>
+  </p:timing>
+  <p:timing>
+    <p:tnLst>
+      <p:par>
+        <p:pPr/>
+        <p:par>
+          <p:cond>
+            <p:tnCond val="0"/>
+          </p:cond>
+          <p:par>
+            <p:cTn id="10" nodeType="withEffect" dur="1500" begin="2500ms" fill="hold" repeatCount="indefinite">
               <p:animEffect presetClass="emph" presetId="26" dur="1500"/>
             </p:cTn>
           </p:par>
@@ -10523,6 +10644,32 @@
         <p:nvPr/>
       </p:nvGrpSpPr>
       <p:grpSpPr/>
+      <p:pic>
+        <p:nvPicPr>
+          <p:cNvPr id="13" name="Picture 12" descr="p5a-calcite-federation.png"/>
+          <p:cNvPicPr>
+            <a:picLocks noChangeAspect="1"/>
+          </p:cNvPicPr>
+          <p:nvPr/>
+        </p:nvPicPr>
+        <p:blipFill>
+          <a:blip r:embed="rId2">
+            <a:alphaModFix amt="55000"/>
+          </a:blip>
+          <a:stretch>
+            <a:fillRect/>
+          </a:stretch>
+        </p:blipFill>
+        <p:spPr>
+          <a:xfrm>
+            <a:off x="274320" y="2194560"/>
+            <a:ext cx="4114800" cy="3657600"/>
+          </a:xfrm>
+          <a:prstGeom prst="rect">
+            <a:avLst/>
+          </a:prstGeom>
+        </p:spPr>
+      </p:pic>
       <p:sp>
         <p:nvSpPr>
           <p:cNvPr id="2" name="TextBox 1"/>
@@ -10566,8 +10713,8 @@
         </p:nvSpPr>
         <p:spPr>
           <a:xfrm>
-            <a:off x="457200" y="914400"/>
-            <a:ext cx="11277295" cy="914400"/>
+            <a:off x="457200" y="777240"/>
+            <a:ext cx="11277295" cy="640080"/>
           </a:xfrm>
           <a:prstGeom prst="rect">
             <a:avLst/>
@@ -10595,14 +10742,49 @@
       </p:sp>
       <p:sp>
         <p:nvSpPr>
-          <p:cNvPr id="4" name="Rounded Rectangle 3"/>
+          <p:cNvPr id="4" name="TextBox 3"/>
+          <p:cNvSpPr txBox="1"/>
+          <p:nvPr/>
+        </p:nvSpPr>
+        <p:spPr>
+          <a:xfrm>
+            <a:off x="457200" y="1325880"/>
+            <a:ext cx="11277295" cy="365760"/>
+          </a:xfrm>
+          <a:prstGeom prst="rect">
+            <a:avLst/>
+          </a:prstGeom>
+          <a:noFill/>
+        </p:spPr>
+        <p:txBody>
+          <a:bodyPr wrap="square">
+            <a:spAutoFit/>
+          </a:bodyPr>
+          <a:lstStyle/>
+          <a:p>
+            <a:pPr algn="ctr"/>
+            <a:r>
+              <a:rPr sz="1600" b="1">
+                <a:solidFill>
+                  <a:srgbClr val="F59E0B"/>
+                </a:solidFill>
+                <a:latin typeface="阿里巴巴普惠体 3.0"/>
+              </a:rPr>
+              <a:t>★ 一套协议 5 method,跨库即写即用,数据不出企业</a:t>
+            </a:r>
+          </a:p>
+        </p:txBody>
+      </p:sp>
+      <p:sp>
+        <p:nvSpPr>
+          <p:cNvPr id="5" name="Rounded Rectangle 4"/>
           <p:cNvSpPr/>
           <p:nvPr/>
         </p:nvSpPr>
         <p:spPr>
           <a:xfrm>
-            <a:off x="1386687" y="2286000"/>
-            <a:ext cx="4572000" cy="1188720"/>
+            <a:off x="7315200" y="2194560"/>
+            <a:ext cx="4114800" cy="1188720"/>
           </a:xfrm>
           <a:prstGeom prst="roundRect">
             <a:avLst/>
@@ -10640,29 +10822,29 @@
       </p:sp>
       <p:sp>
         <p:nvSpPr>
-          <p:cNvPr id="5" name="TextBox 4"/>
-          <p:cNvSpPr txBox="1"/>
-          <p:nvPr/>
-        </p:nvSpPr>
-        <p:spPr>
-          <a:xfrm>
-            <a:off x="1386687" y="2468880"/>
-            <a:ext cx="4572000" cy="822960"/>
-          </a:xfrm>
-          <a:prstGeom prst="rect">
-            <a:avLst/>
-          </a:prstGeom>
-          <a:noFill/>
-        </p:spPr>
-        <p:txBody>
-          <a:bodyPr wrap="square">
-            <a:spAutoFit/>
-          </a:bodyPr>
-          <a:lstStyle/>
-          <a:p>
-            <a:pPr algn="ctr"/>
-            <a:r>
-              <a:rPr sz="1800" b="1">
+          <p:cNvPr id="6" name="TextBox 5"/>
+          <p:cNvSpPr txBox="1"/>
+          <p:nvPr/>
+        </p:nvSpPr>
+        <p:spPr>
+          <a:xfrm>
+            <a:off x="7315200" y="2377440"/>
+            <a:ext cx="4114800" cy="822960"/>
+          </a:xfrm>
+          <a:prstGeom prst="rect">
+            <a:avLst/>
+          </a:prstGeom>
+          <a:noFill/>
+        </p:spPr>
+        <p:txBody>
+          <a:bodyPr wrap="square">
+            <a:spAutoFit/>
+          </a:bodyPr>
+          <a:lstStyle/>
+          <a:p>
+            <a:pPr algn="ctr"/>
+            <a:r>
+              <a:rPr sz="1600" b="1">
                 <a:solidFill>
                   <a:srgbClr val="F59E0B"/>
                 </a:solidFill>
@@ -10680,14 +10862,14 @@
       </p:sp>
       <p:sp>
         <p:nvSpPr>
-          <p:cNvPr id="6" name="Rounded Rectangle 5"/>
+          <p:cNvPr id="7" name="Rounded Rectangle 6"/>
           <p:cNvSpPr/>
           <p:nvPr/>
         </p:nvSpPr>
         <p:spPr>
           <a:xfrm>
-            <a:off x="6233007" y="2286000"/>
-            <a:ext cx="4572000" cy="1188720"/>
+            <a:off x="11658600" y="2194560"/>
+            <a:ext cx="4114800" cy="1188720"/>
           </a:xfrm>
           <a:prstGeom prst="roundRect">
             <a:avLst/>
@@ -10725,29 +10907,29 @@
       </p:sp>
       <p:sp>
         <p:nvSpPr>
-          <p:cNvPr id="7" name="TextBox 6"/>
-          <p:cNvSpPr txBox="1"/>
-          <p:nvPr/>
-        </p:nvSpPr>
-        <p:spPr>
-          <a:xfrm>
-            <a:off x="6233007" y="2468880"/>
-            <a:ext cx="4572000" cy="822960"/>
-          </a:xfrm>
-          <a:prstGeom prst="rect">
-            <a:avLst/>
-          </a:prstGeom>
-          <a:noFill/>
-        </p:spPr>
-        <p:txBody>
-          <a:bodyPr wrap="square">
-            <a:spAutoFit/>
-          </a:bodyPr>
-          <a:lstStyle/>
-          <a:p>
-            <a:pPr algn="ctr"/>
-            <a:r>
-              <a:rPr sz="1800" b="1">
+          <p:cNvPr id="8" name="TextBox 7"/>
+          <p:cNvSpPr txBox="1"/>
+          <p:nvPr/>
+        </p:nvSpPr>
+        <p:spPr>
+          <a:xfrm>
+            <a:off x="11658600" y="2377440"/>
+            <a:ext cx="4114800" cy="822960"/>
+          </a:xfrm>
+          <a:prstGeom prst="rect">
+            <a:avLst/>
+          </a:prstGeom>
+          <a:noFill/>
+        </p:spPr>
+        <p:txBody>
+          <a:bodyPr wrap="square">
+            <a:spAutoFit/>
+          </a:bodyPr>
+          <a:lstStyle/>
+          <a:p>
+            <a:pPr algn="ctr"/>
+            <a:r>
+              <a:rPr sz="1600" b="1">
                 <a:solidFill>
                   <a:srgbClr val="F59E0B"/>
                 </a:solidFill>
@@ -10765,14 +10947,14 @@
       </p:sp>
       <p:sp>
         <p:nvSpPr>
-          <p:cNvPr id="8" name="Rounded Rectangle 7"/>
+          <p:cNvPr id="9" name="Rounded Rectangle 8"/>
           <p:cNvSpPr/>
           <p:nvPr/>
         </p:nvSpPr>
         <p:spPr>
           <a:xfrm>
-            <a:off x="1386687" y="3749039"/>
-            <a:ext cx="4572000" cy="1188720"/>
+            <a:off x="7315200" y="3611880"/>
+            <a:ext cx="4114800" cy="1188720"/>
           </a:xfrm>
           <a:prstGeom prst="roundRect">
             <a:avLst/>
@@ -10810,29 +10992,29 @@
       </p:sp>
       <p:sp>
         <p:nvSpPr>
-          <p:cNvPr id="9" name="TextBox 8"/>
-          <p:cNvSpPr txBox="1"/>
-          <p:nvPr/>
-        </p:nvSpPr>
-        <p:spPr>
-          <a:xfrm>
-            <a:off x="1386687" y="3931920"/>
-            <a:ext cx="4572000" cy="822960"/>
-          </a:xfrm>
-          <a:prstGeom prst="rect">
-            <a:avLst/>
-          </a:prstGeom>
-          <a:noFill/>
-        </p:spPr>
-        <p:txBody>
-          <a:bodyPr wrap="square">
-            <a:spAutoFit/>
-          </a:bodyPr>
-          <a:lstStyle/>
-          <a:p>
-            <a:pPr algn="ctr"/>
-            <a:r>
-              <a:rPr sz="1800" b="1">
+          <p:cNvPr id="10" name="TextBox 9"/>
+          <p:cNvSpPr txBox="1"/>
+          <p:nvPr/>
+        </p:nvSpPr>
+        <p:spPr>
+          <a:xfrm>
+            <a:off x="7315200" y="3794760"/>
+            <a:ext cx="4114800" cy="822960"/>
+          </a:xfrm>
+          <a:prstGeom prst="rect">
+            <a:avLst/>
+          </a:prstGeom>
+          <a:noFill/>
+        </p:spPr>
+        <p:txBody>
+          <a:bodyPr wrap="square">
+            <a:spAutoFit/>
+          </a:bodyPr>
+          <a:lstStyle/>
+          <a:p>
+            <a:pPr algn="ctr"/>
+            <a:r>
+              <a:rPr sz="1600" b="1">
                 <a:solidFill>
                   <a:srgbClr val="F59E0B"/>
                 </a:solidFill>
@@ -10850,14 +11032,14 @@
       </p:sp>
       <p:sp>
         <p:nvSpPr>
-          <p:cNvPr id="10" name="Rounded Rectangle 9"/>
+          <p:cNvPr id="11" name="Rounded Rectangle 10"/>
           <p:cNvSpPr/>
           <p:nvPr/>
         </p:nvSpPr>
         <p:spPr>
           <a:xfrm>
-            <a:off x="6233007" y="3749039"/>
-            <a:ext cx="4572000" cy="1188720"/>
+            <a:off x="11658600" y="3611880"/>
+            <a:ext cx="4114800" cy="1188720"/>
           </a:xfrm>
           <a:prstGeom prst="roundRect">
             <a:avLst/>
@@ -10895,29 +11077,29 @@
       </p:sp>
       <p:sp>
         <p:nvSpPr>
-          <p:cNvPr id="11" name="TextBox 10"/>
-          <p:cNvSpPr txBox="1"/>
-          <p:nvPr/>
-        </p:nvSpPr>
-        <p:spPr>
-          <a:xfrm>
-            <a:off x="6233007" y="3931920"/>
-            <a:ext cx="4572000" cy="822960"/>
-          </a:xfrm>
-          <a:prstGeom prst="rect">
-            <a:avLst/>
-          </a:prstGeom>
-          <a:noFill/>
-        </p:spPr>
-        <p:txBody>
-          <a:bodyPr wrap="square">
-            <a:spAutoFit/>
-          </a:bodyPr>
-          <a:lstStyle/>
-          <a:p>
-            <a:pPr algn="ctr"/>
-            <a:r>
-              <a:rPr sz="1800" b="1">
+          <p:cNvPr id="12" name="TextBox 11"/>
+          <p:cNvSpPr txBox="1"/>
+          <p:nvPr/>
+        </p:nvSpPr>
+        <p:spPr>
+          <a:xfrm>
+            <a:off x="11658600" y="3794760"/>
+            <a:ext cx="4114800" cy="822960"/>
+          </a:xfrm>
+          <a:prstGeom prst="rect">
+            <a:avLst/>
+          </a:prstGeom>
+          <a:noFill/>
+        </p:spPr>
+        <p:txBody>
+          <a:bodyPr wrap="square">
+            <a:spAutoFit/>
+          </a:bodyPr>
+          <a:lstStyle/>
+          <a:p>
+            <a:pPr algn="ctr"/>
+            <a:r>
+              <a:rPr sz="1600" b="1">
                 <a:solidFill>
                   <a:srgbClr val="007396"/>
                 </a:solidFill>
@@ -10964,7 +11146,7 @@
             <p:tnCond val="0"/>
           </p:cond>
           <p:par>
-            <p:cTn id="5" nodeType="withEffect" dur="500" begin="600ms" fill="hold">
+            <p:cTn id="6" nodeType="withEffect" dur="500" begin="400ms" fill="hold">
               <p:animEffect presetClass="entr" presetId="10" dur="500"/>
             </p:cTn>
           </p:par>
@@ -10981,7 +11163,7 @@
             <p:tnCond val="0"/>
           </p:cond>
           <p:par>
-            <p:cTn id="11" nodeType="withEffect" dur="500" begin="1200ms" fill="hold">
+            <p:cTn id="8" nodeType="withEffect" dur="500" begin="700ms" fill="hold">
               <p:animEffect presetClass="entr" presetId="10" dur="500"/>
             </p:cTn>
           </p:par>
@@ -10998,7 +11180,41 @@
             <p:tnCond val="0"/>
           </p:cond>
           <p:par>
-            <p:cTn id="11" nodeType="withEffect" dur="1500" begin="2000ms" fill="hold" repeatCount="indefinite">
+            <p:cTn id="10" nodeType="withEffect" dur="500" begin="1000ms" fill="hold">
+              <p:animEffect presetClass="entr" presetId="10" dur="500"/>
+            </p:cTn>
+          </p:par>
+        </p:par>
+      </p:par>
+    </p:tnLst>
+  </p:timing>
+  <p:timing>
+    <p:tnLst>
+      <p:par>
+        <p:pPr/>
+        <p:par>
+          <p:cond>
+            <p:tnCond val="0"/>
+          </p:cond>
+          <p:par>
+            <p:cTn id="12" nodeType="withEffect" dur="500" begin="1300ms" fill="hold">
+              <p:animEffect presetClass="entr" presetId="10" dur="500"/>
+            </p:cTn>
+          </p:par>
+        </p:par>
+      </p:par>
+    </p:tnLst>
+  </p:timing>
+  <p:timing>
+    <p:tnLst>
+      <p:par>
+        <p:pPr/>
+        <p:par>
+          <p:cond>
+            <p:tnCond val="0"/>
+          </p:cond>
+          <p:par>
+            <p:cTn id="12" nodeType="withEffect" dur="1500" begin="2500ms" fill="hold" repeatCount="indefinite">
               <p:animEffect presetClass="emph" presetId="26" dur="1500"/>
             </p:cTn>
           </p:par>

--- a/docs/ppt/javabrain.pptx
+++ b/docs/ppt/javabrain.pptx
@@ -3515,6 +3515,41 @@
           </a:p>
         </p:txBody>
       </p:sp>
+      <p:sp>
+        <p:nvSpPr>
+          <p:cNvPr id="13" name="TextBox 12"/>
+          <p:cNvSpPr txBox="1"/>
+          <p:nvPr/>
+        </p:nvSpPr>
+        <p:spPr>
+          <a:xfrm>
+            <a:off x="10607040" y="6446520"/>
+            <a:ext cx="1280160" cy="274320"/>
+          </a:xfrm>
+          <a:prstGeom prst="rect">
+            <a:avLst/>
+          </a:prstGeom>
+          <a:noFill/>
+        </p:spPr>
+        <p:txBody>
+          <a:bodyPr wrap="square">
+            <a:spAutoFit/>
+          </a:bodyPr>
+          <a:lstStyle/>
+          <a:p>
+            <a:pPr algn="ctr"/>
+            <a:r>
+              <a:rPr sz="1000" b="0">
+                <a:solidFill>
+                  <a:srgbClr val="6B7280"/>
+                </a:solidFill>
+                <a:latin typeface="Inter"/>
+              </a:rPr>
+              <a:t>01 / 12</a:t>
+            </a:r>
+          </a:p>
+        </p:txBody>
+      </p:sp>
     </p:spTree>
   </p:cSld>
   <p:clrMapOvr>
@@ -3634,23 +3669,23 @@
         </p:nvSpPr>
         <p:spPr>
           <a:xfrm>
-            <a:off x="457200" y="365760"/>
-            <a:ext cx="11277295" cy="548640"/>
-          </a:xfrm>
-          <a:prstGeom prst="rect">
-            <a:avLst/>
-          </a:prstGeom>
-          <a:noFill/>
-        </p:spPr>
-        <p:txBody>
-          <a:bodyPr wrap="square">
-            <a:spAutoFit/>
-          </a:bodyPr>
-          <a:lstStyle/>
-          <a:p>
-            <a:pPr algn="ctr"/>
-            <a:r>
-              <a:rPr sz="2800" b="1">
+            <a:off x="457200" y="274320"/>
+            <a:ext cx="11277295" cy="457200"/>
+          </a:xfrm>
+          <a:prstGeom prst="rect">
+            <a:avLst/>
+          </a:prstGeom>
+          <a:noFill/>
+        </p:spPr>
+        <p:txBody>
+          <a:bodyPr wrap="square">
+            <a:spAutoFit/>
+          </a:bodyPr>
+          <a:lstStyle/>
+          <a:p>
+            <a:pPr algn="ctr"/>
+            <a:r>
+              <a:rPr sz="2400" b="1">
                 <a:solidFill>
                   <a:srgbClr val="1F2937"/>
                 </a:solidFill>
@@ -3669,23 +3704,23 @@
         </p:nvSpPr>
         <p:spPr>
           <a:xfrm>
-            <a:off x="457200" y="1188720"/>
-            <a:ext cx="5029200" cy="365760"/>
-          </a:xfrm>
-          <a:prstGeom prst="rect">
-            <a:avLst/>
-          </a:prstGeom>
-          <a:noFill/>
-        </p:spPr>
-        <p:txBody>
-          <a:bodyPr wrap="square">
-            <a:spAutoFit/>
-          </a:bodyPr>
-          <a:lstStyle/>
-          <a:p>
-            <a:pPr algn="ctr"/>
-            <a:r>
-              <a:rPr sz="1800" b="1">
+            <a:off x="274320" y="868680"/>
+            <a:ext cx="3657600" cy="320040"/>
+          </a:xfrm>
+          <a:prstGeom prst="rect">
+            <a:avLst/>
+          </a:prstGeom>
+          <a:noFill/>
+        </p:spPr>
+        <p:txBody>
+          <a:bodyPr wrap="square">
+            <a:spAutoFit/>
+          </a:bodyPr>
+          <a:lstStyle/>
+          <a:p>
+            <a:pPr algn="ctr"/>
+            <a:r>
+              <a:rPr sz="1500" b="1">
                 <a:solidFill>
                   <a:srgbClr val="007396"/>
                 </a:solidFill>
@@ -3704,29 +3739,29 @@
         </p:nvSpPr>
         <p:spPr>
           <a:xfrm>
-            <a:off x="640080" y="1737360"/>
-            <a:ext cx="5486400" cy="457200"/>
-          </a:xfrm>
-          <a:prstGeom prst="rect">
-            <a:avLst/>
-          </a:prstGeom>
-          <a:noFill/>
-        </p:spPr>
-        <p:txBody>
-          <a:bodyPr wrap="square">
-            <a:spAutoFit/>
-          </a:bodyPr>
-          <a:lstStyle/>
-          <a:p>
-            <a:pPr algn="ctr"/>
-            <a:r>
-              <a:rPr sz="1600" b="0">
+            <a:off x="365760" y="1371600"/>
+            <a:ext cx="3657600" cy="365760"/>
+          </a:xfrm>
+          <a:prstGeom prst="rect">
+            <a:avLst/>
+          </a:prstGeom>
+          <a:noFill/>
+        </p:spPr>
+        <p:txBody>
+          <a:bodyPr wrap="square">
+            <a:spAutoFit/>
+          </a:bodyPr>
+          <a:lstStyle/>
+          <a:p>
+            <a:pPr algn="ctr"/>
+            <a:r>
+              <a:rPr sz="1300" b="0">
                 <a:solidFill>
                   <a:srgbClr val="1F2937"/>
                 </a:solidFill>
                 <a:latin typeface="阿里巴巴普惠体 3.0"/>
               </a:rPr>
-              <a:t>✓ 7 张表测试(简单/字典/自关联/多外键)</a:t>
+              <a:t>✓ 7 张表测试(简单/字典/自关联)</a:t>
             </a:r>
           </a:p>
         </p:txBody>
@@ -3739,29 +3774,29 @@
         </p:nvSpPr>
         <p:spPr>
           <a:xfrm>
-            <a:off x="640080" y="2377439"/>
-            <a:ext cx="5486400" cy="457200"/>
-          </a:xfrm>
-          <a:prstGeom prst="rect">
-            <a:avLst/>
-          </a:prstGeom>
-          <a:noFill/>
-        </p:spPr>
-        <p:txBody>
-          <a:bodyPr wrap="square">
-            <a:spAutoFit/>
-          </a:bodyPr>
-          <a:lstStyle/>
-          <a:p>
-            <a:pPr algn="ctr"/>
-            <a:r>
-              <a:rPr sz="1600" b="0">
+            <a:off x="365760" y="1874519"/>
+            <a:ext cx="3657600" cy="365760"/>
+          </a:xfrm>
+          <a:prstGeom prst="rect">
+            <a:avLst/>
+          </a:prstGeom>
+          <a:noFill/>
+        </p:spPr>
+        <p:txBody>
+          <a:bodyPr wrap="square">
+            <a:spAutoFit/>
+          </a:bodyPr>
+          <a:lstStyle/>
+          <a:p>
+            <a:pPr algn="ctr"/>
+            <a:r>
+              <a:rPr sz="1300" b="0">
                 <a:solidFill>
                   <a:srgbClr val="1F2937"/>
                 </a:solidFill>
                 <a:latin typeface="阿里巴巴普惠体 3.0"/>
               </a:rPr>
-              <a:t>✓ 0 漂移 / 0 错误链接 / 0 中文乱码</a:t>
+              <a:t>✓ 0 漂移 / 0 错误链接 / 0 乱码</a:t>
             </a:r>
           </a:p>
         </p:txBody>
@@ -3774,23 +3809,23 @@
         </p:nvSpPr>
         <p:spPr>
           <a:xfrm>
-            <a:off x="640080" y="3017520"/>
-            <a:ext cx="5486400" cy="457200"/>
-          </a:xfrm>
-          <a:prstGeom prst="rect">
-            <a:avLst/>
-          </a:prstGeom>
-          <a:noFill/>
-        </p:spPr>
-        <p:txBody>
-          <a:bodyPr wrap="square">
-            <a:spAutoFit/>
-          </a:bodyPr>
-          <a:lstStyle/>
-          <a:p>
-            <a:pPr algn="ctr"/>
-            <a:r>
-              <a:rPr sz="1600" b="0">
+            <a:off x="365760" y="2377440"/>
+            <a:ext cx="3657600" cy="365760"/>
+          </a:xfrm>
+          <a:prstGeom prst="rect">
+            <a:avLst/>
+          </a:prstGeom>
+          <a:noFill/>
+        </p:spPr>
+        <p:txBody>
+          <a:bodyPr wrap="square">
+            <a:spAutoFit/>
+          </a:bodyPr>
+          <a:lstStyle/>
+          <a:p>
+            <a:pPr algn="ctr"/>
+            <a:r>
+              <a:rPr sz="1300" b="0">
                 <a:solidFill>
                   <a:srgbClr val="1F2937"/>
                 </a:solidFill>
@@ -3809,23 +3844,23 @@
         </p:nvSpPr>
         <p:spPr>
           <a:xfrm>
-            <a:off x="640080" y="3657599"/>
-            <a:ext cx="5486400" cy="457200"/>
-          </a:xfrm>
-          <a:prstGeom prst="rect">
-            <a:avLst/>
-          </a:prstGeom>
-          <a:noFill/>
-        </p:spPr>
-        <p:txBody>
-          <a:bodyPr wrap="square">
-            <a:spAutoFit/>
-          </a:bodyPr>
-          <a:lstStyle/>
-          <a:p>
-            <a:pPr algn="ctr"/>
-            <a:r>
-              <a:rPr sz="1600" b="1">
+            <a:off x="365760" y="2880360"/>
+            <a:ext cx="3657600" cy="365760"/>
+          </a:xfrm>
+          <a:prstGeom prst="rect">
+            <a:avLst/>
+          </a:prstGeom>
+          <a:noFill/>
+        </p:spPr>
+        <p:txBody>
+          <a:bodyPr wrap="square">
+            <a:spAutoFit/>
+          </a:bodyPr>
+          <a:lstStyle/>
+          <a:p>
+            <a:pPr algn="ctr"/>
+            <a:r>
+              <a:rPr sz="1300" b="1">
                 <a:solidFill>
                   <a:srgbClr val="F59E0B"/>
                 </a:solidFill>
@@ -3844,29 +3879,29 @@
         </p:nvSpPr>
         <p:spPr>
           <a:xfrm>
-            <a:off x="6400800" y="1188720"/>
-            <a:ext cx="5029200" cy="365760"/>
-          </a:xfrm>
-          <a:prstGeom prst="rect">
-            <a:avLst/>
-          </a:prstGeom>
-          <a:noFill/>
-        </p:spPr>
-        <p:txBody>
-          <a:bodyPr wrap="square">
-            <a:spAutoFit/>
-          </a:bodyPr>
-          <a:lstStyle/>
-          <a:p>
-            <a:pPr algn="ctr"/>
-            <a:r>
-              <a:rPr sz="1800" b="1">
+            <a:off x="4297680" y="868680"/>
+            <a:ext cx="3200400" cy="320040"/>
+          </a:xfrm>
+          <a:prstGeom prst="rect">
+            <a:avLst/>
+          </a:prstGeom>
+          <a:noFill/>
+        </p:spPr>
+        <p:txBody>
+          <a:bodyPr wrap="square">
+            <a:spAutoFit/>
+          </a:bodyPr>
+          <a:lstStyle/>
+          <a:p>
+            <a:pPr algn="ctr"/>
+            <a:r>
+              <a:rPr sz="1500" b="1">
                 <a:solidFill>
                   <a:srgbClr val="6B46C1"/>
                 </a:solidFill>
                 <a:latin typeface="阿里巴巴普惠体 3.0"/>
               </a:rPr>
-              <a:t>商业派 · 5 项对比</a:t>
+              <a:t>开发时间 · 3 种方案</a:t>
             </a:r>
           </a:p>
         </p:txBody>
@@ -3879,8 +3914,382 @@
         </p:nvSpPr>
         <p:spPr>
           <a:xfrm>
-            <a:off x="6400800" y="1737360"/>
-            <a:ext cx="5029200" cy="411480"/>
+            <a:off x="4480560" y="2011680"/>
+            <a:ext cx="822960" cy="2560320"/>
+          </a:xfrm>
+          <a:prstGeom prst="rect">
+            <a:avLst/>
+          </a:prstGeom>
+          <a:solidFill>
+            <a:srgbClr val="E5E7EB"/>
+          </a:solidFill>
+          <a:ln>
+            <a:noFill/>
+          </a:ln>
+        </p:spPr>
+        <p:style>
+          <a:lnRef idx="1">
+            <a:schemeClr val="accent1"/>
+          </a:lnRef>
+          <a:fillRef idx="3">
+            <a:schemeClr val="accent1"/>
+          </a:fillRef>
+          <a:effectRef idx="2">
+            <a:schemeClr val="accent1"/>
+          </a:effectRef>
+          <a:fontRef idx="minor">
+            <a:schemeClr val="lt1"/>
+          </a:fontRef>
+        </p:style>
+        <p:txBody>
+          <a:bodyPr rtlCol="0" anchor="ctr"/>
+          <a:lstStyle/>
+          <a:p>
+            <a:pPr algn="ctr"/>
+          </a:p>
+        </p:txBody>
+      </p:sp>
+      <p:sp>
+        <p:nvSpPr>
+          <p:cNvPr id="10" name="TextBox 9"/>
+          <p:cNvSpPr txBox="1"/>
+          <p:nvPr/>
+        </p:nvSpPr>
+        <p:spPr>
+          <a:xfrm>
+            <a:off x="4480560" y="1691640"/>
+            <a:ext cx="822960" cy="274320"/>
+          </a:xfrm>
+          <a:prstGeom prst="rect">
+            <a:avLst/>
+          </a:prstGeom>
+          <a:noFill/>
+        </p:spPr>
+        <p:txBody>
+          <a:bodyPr wrap="square">
+            <a:spAutoFit/>
+          </a:bodyPr>
+          <a:lstStyle/>
+          <a:p>
+            <a:pPr algn="ctr"/>
+            <a:r>
+              <a:rPr sz="1100" b="1">
+                <a:solidFill>
+                  <a:srgbClr val="E5E7EB"/>
+                </a:solidFill>
+                <a:latin typeface="阿里巴巴普惠体 3.0"/>
+              </a:rPr>
+              <a:t>30天</a:t>
+            </a:r>
+          </a:p>
+        </p:txBody>
+      </p:sp>
+      <p:sp>
+        <p:nvSpPr>
+          <p:cNvPr id="11" name="TextBox 10"/>
+          <p:cNvSpPr txBox="1"/>
+          <p:nvPr/>
+        </p:nvSpPr>
+        <p:spPr>
+          <a:xfrm>
+            <a:off x="4480560" y="4709160"/>
+            <a:ext cx="822960" cy="274320"/>
+          </a:xfrm>
+          <a:prstGeom prst="rect">
+            <a:avLst/>
+          </a:prstGeom>
+          <a:noFill/>
+        </p:spPr>
+        <p:txBody>
+          <a:bodyPr wrap="square">
+            <a:spAutoFit/>
+          </a:bodyPr>
+          <a:lstStyle/>
+          <a:p>
+            <a:pPr algn="ctr"/>
+            <a:r>
+              <a:rPr sz="1100" b="1">
+                <a:solidFill>
+                  <a:srgbClr val="1F2937"/>
+                </a:solidFill>
+                <a:latin typeface="阿里巴巴普惠体 3.0"/>
+              </a:rPr>
+              <a:t>传统开发</a:t>
+            </a:r>
+          </a:p>
+        </p:txBody>
+      </p:sp>
+      <p:sp>
+        <p:nvSpPr>
+          <p:cNvPr id="12" name="Rectangle 11"/>
+          <p:cNvSpPr/>
+          <p:nvPr/>
+        </p:nvSpPr>
+        <p:spPr>
+          <a:xfrm>
+            <a:off x="5532120" y="3718560"/>
+            <a:ext cx="822960" cy="853439"/>
+          </a:xfrm>
+          <a:prstGeom prst="rect">
+            <a:avLst/>
+          </a:prstGeom>
+          <a:solidFill>
+            <a:srgbClr val="DC2626"/>
+          </a:solidFill>
+          <a:ln>
+            <a:noFill/>
+          </a:ln>
+        </p:spPr>
+        <p:style>
+          <a:lnRef idx="1">
+            <a:schemeClr val="accent1"/>
+          </a:lnRef>
+          <a:fillRef idx="3">
+            <a:schemeClr val="accent1"/>
+          </a:fillRef>
+          <a:effectRef idx="2">
+            <a:schemeClr val="accent1"/>
+          </a:effectRef>
+          <a:fontRef idx="minor">
+            <a:schemeClr val="lt1"/>
+          </a:fontRef>
+        </p:style>
+        <p:txBody>
+          <a:bodyPr rtlCol="0" anchor="ctr"/>
+          <a:lstStyle/>
+          <a:p>
+            <a:pPr algn="ctr"/>
+          </a:p>
+        </p:txBody>
+      </p:sp>
+      <p:sp>
+        <p:nvSpPr>
+          <p:cNvPr id="13" name="TextBox 12"/>
+          <p:cNvSpPr txBox="1"/>
+          <p:nvPr/>
+        </p:nvSpPr>
+        <p:spPr>
+          <a:xfrm>
+            <a:off x="5532120" y="3398519"/>
+            <a:ext cx="822960" cy="274320"/>
+          </a:xfrm>
+          <a:prstGeom prst="rect">
+            <a:avLst/>
+          </a:prstGeom>
+          <a:noFill/>
+        </p:spPr>
+        <p:txBody>
+          <a:bodyPr wrap="square">
+            <a:spAutoFit/>
+          </a:bodyPr>
+          <a:lstStyle/>
+          <a:p>
+            <a:pPr algn="ctr"/>
+            <a:r>
+              <a:rPr sz="1100" b="1">
+                <a:solidFill>
+                  <a:srgbClr val="DC2626"/>
+                </a:solidFill>
+                <a:latin typeface="阿里巴巴普惠体 3.0"/>
+              </a:rPr>
+              <a:t>10天</a:t>
+            </a:r>
+          </a:p>
+        </p:txBody>
+      </p:sp>
+      <p:sp>
+        <p:nvSpPr>
+          <p:cNvPr id="14" name="TextBox 13"/>
+          <p:cNvSpPr txBox="1"/>
+          <p:nvPr/>
+        </p:nvSpPr>
+        <p:spPr>
+          <a:xfrm>
+            <a:off x="5532120" y="4709160"/>
+            <a:ext cx="822960" cy="274320"/>
+          </a:xfrm>
+          <a:prstGeom prst="rect">
+            <a:avLst/>
+          </a:prstGeom>
+          <a:noFill/>
+        </p:spPr>
+        <p:txBody>
+          <a:bodyPr wrap="square">
+            <a:spAutoFit/>
+          </a:bodyPr>
+          <a:lstStyle/>
+          <a:p>
+            <a:pPr algn="ctr"/>
+            <a:r>
+              <a:rPr sz="1100" b="1">
+                <a:solidFill>
+                  <a:srgbClr val="1F2937"/>
+                </a:solidFill>
+                <a:latin typeface="阿里巴巴普惠体 3.0"/>
+              </a:rPr>
+              <a:t>集成 AI</a:t>
+            </a:r>
+          </a:p>
+        </p:txBody>
+      </p:sp>
+      <p:sp>
+        <p:nvSpPr>
+          <p:cNvPr id="15" name="Rectangle 14"/>
+          <p:cNvSpPr/>
+          <p:nvPr/>
+        </p:nvSpPr>
+        <p:spPr>
+          <a:xfrm>
+            <a:off x="6583680" y="4486656"/>
+            <a:ext cx="822960" cy="85343"/>
+          </a:xfrm>
+          <a:prstGeom prst="rect">
+            <a:avLst/>
+          </a:prstGeom>
+          <a:solidFill>
+            <a:srgbClr val="10B981"/>
+          </a:solidFill>
+          <a:ln>
+            <a:noFill/>
+          </a:ln>
+        </p:spPr>
+        <p:style>
+          <a:lnRef idx="1">
+            <a:schemeClr val="accent1"/>
+          </a:lnRef>
+          <a:fillRef idx="3">
+            <a:schemeClr val="accent1"/>
+          </a:fillRef>
+          <a:effectRef idx="2">
+            <a:schemeClr val="accent1"/>
+          </a:effectRef>
+          <a:fontRef idx="minor">
+            <a:schemeClr val="lt1"/>
+          </a:fontRef>
+        </p:style>
+        <p:txBody>
+          <a:bodyPr rtlCol="0" anchor="ctr"/>
+          <a:lstStyle/>
+          <a:p>
+            <a:pPr algn="ctr"/>
+          </a:p>
+        </p:txBody>
+      </p:sp>
+      <p:sp>
+        <p:nvSpPr>
+          <p:cNvPr id="16" name="TextBox 15"/>
+          <p:cNvSpPr txBox="1"/>
+          <p:nvPr/>
+        </p:nvSpPr>
+        <p:spPr>
+          <a:xfrm>
+            <a:off x="6583680" y="4166616"/>
+            <a:ext cx="822960" cy="274320"/>
+          </a:xfrm>
+          <a:prstGeom prst="rect">
+            <a:avLst/>
+          </a:prstGeom>
+          <a:noFill/>
+        </p:spPr>
+        <p:txBody>
+          <a:bodyPr wrap="square">
+            <a:spAutoFit/>
+          </a:bodyPr>
+          <a:lstStyle/>
+          <a:p>
+            <a:pPr algn="ctr"/>
+            <a:r>
+              <a:rPr sz="1100" b="1">
+                <a:solidFill>
+                  <a:srgbClr val="10B981"/>
+                </a:solidFill>
+                <a:latin typeface="阿里巴巴普惠体 3.0"/>
+              </a:rPr>
+              <a:t>1天</a:t>
+            </a:r>
+          </a:p>
+        </p:txBody>
+      </p:sp>
+      <p:sp>
+        <p:nvSpPr>
+          <p:cNvPr id="17" name="TextBox 16"/>
+          <p:cNvSpPr txBox="1"/>
+          <p:nvPr/>
+        </p:nvSpPr>
+        <p:spPr>
+          <a:xfrm>
+            <a:off x="6583680" y="4709160"/>
+            <a:ext cx="822960" cy="274320"/>
+          </a:xfrm>
+          <a:prstGeom prst="rect">
+            <a:avLst/>
+          </a:prstGeom>
+          <a:noFill/>
+        </p:spPr>
+        <p:txBody>
+          <a:bodyPr wrap="square">
+            <a:spAutoFit/>
+          </a:bodyPr>
+          <a:lstStyle/>
+          <a:p>
+            <a:pPr algn="ctr"/>
+            <a:r>
+              <a:rPr sz="1100" b="1">
+                <a:solidFill>
+                  <a:srgbClr val="1F2937"/>
+                </a:solidFill>
+                <a:latin typeface="阿里巴巴普惠体 3.0"/>
+              </a:rPr>
+              <a:t>JavaBrain</a:t>
+            </a:r>
+          </a:p>
+        </p:txBody>
+      </p:sp>
+      <p:sp>
+        <p:nvSpPr>
+          <p:cNvPr id="18" name="TextBox 17"/>
+          <p:cNvSpPr txBox="1"/>
+          <p:nvPr/>
+        </p:nvSpPr>
+        <p:spPr>
+          <a:xfrm>
+            <a:off x="7589520" y="868680"/>
+            <a:ext cx="4389120" cy="320040"/>
+          </a:xfrm>
+          <a:prstGeom prst="rect">
+            <a:avLst/>
+          </a:prstGeom>
+          <a:noFill/>
+        </p:spPr>
+        <p:txBody>
+          <a:bodyPr wrap="square">
+            <a:spAutoFit/>
+          </a:bodyPr>
+          <a:lstStyle/>
+          <a:p>
+            <a:pPr algn="ctr"/>
+            <a:r>
+              <a:rPr sz="1500" b="1">
+                <a:solidFill>
+                  <a:srgbClr val="6B46C1"/>
+                </a:solidFill>
+                <a:latin typeface="阿里巴巴普惠体 3.0"/>
+              </a:rPr>
+              <a:t>商业派 · 5 项对比</a:t>
+            </a:r>
+          </a:p>
+        </p:txBody>
+      </p:sp>
+      <p:sp>
+        <p:nvSpPr>
+          <p:cNvPr id="19" name="Rectangle 18"/>
+          <p:cNvSpPr/>
+          <p:nvPr/>
+        </p:nvSpPr>
+        <p:spPr>
+          <a:xfrm>
+            <a:off x="7589520" y="1371600"/>
+            <a:ext cx="4389120" cy="411480"/>
           </a:xfrm>
           <a:prstGeom prst="rect">
             <a:avLst/>
@@ -3918,28 +4327,28 @@
       </p:sp>
       <p:sp>
         <p:nvSpPr>
-          <p:cNvPr id="10" name="TextBox 9"/>
-          <p:cNvSpPr txBox="1"/>
-          <p:nvPr/>
-        </p:nvSpPr>
-        <p:spPr>
-          <a:xfrm>
-            <a:off x="6583680" y="1783080"/>
-            <a:ext cx="3200400" cy="365760"/>
-          </a:xfrm>
-          <a:prstGeom prst="rect">
-            <a:avLst/>
-          </a:prstGeom>
-          <a:noFill/>
-        </p:spPr>
-        <p:txBody>
-          <a:bodyPr wrap="square">
-            <a:spAutoFit/>
-          </a:bodyPr>
-          <a:lstStyle/>
-          <a:p>
-            <a:r>
-              <a:rPr sz="1600" b="0">
+          <p:cNvPr id="20" name="TextBox 19"/>
+          <p:cNvSpPr txBox="1"/>
+          <p:nvPr/>
+        </p:nvSpPr>
+        <p:spPr>
+          <a:xfrm>
+            <a:off x="7772400" y="1417320"/>
+            <a:ext cx="2743200" cy="365760"/>
+          </a:xfrm>
+          <a:prstGeom prst="rect">
+            <a:avLst/>
+          </a:prstGeom>
+          <a:noFill/>
+        </p:spPr>
+        <p:txBody>
+          <a:bodyPr wrap="square">
+            <a:spAutoFit/>
+          </a:bodyPr>
+          <a:lstStyle/>
+          <a:p>
+            <a:r>
+              <a:rPr sz="1400" b="0">
                 <a:solidFill>
                   <a:srgbClr val="1F2937"/>
                 </a:solidFill>
@@ -3952,29 +4361,29 @@
       </p:sp>
       <p:sp>
         <p:nvSpPr>
-          <p:cNvPr id="11" name="TextBox 10"/>
-          <p:cNvSpPr txBox="1"/>
-          <p:nvPr/>
-        </p:nvSpPr>
-        <p:spPr>
-          <a:xfrm>
-            <a:off x="9875520" y="1783080"/>
-            <a:ext cx="1371600" cy="365760"/>
-          </a:xfrm>
-          <a:prstGeom prst="rect">
-            <a:avLst/>
-          </a:prstGeom>
-          <a:noFill/>
-        </p:spPr>
-        <p:txBody>
-          <a:bodyPr wrap="square">
-            <a:spAutoFit/>
-          </a:bodyPr>
-          <a:lstStyle/>
-          <a:p>
-            <a:pPr algn="ctr"/>
-            <a:r>
-              <a:rPr sz="1800" b="1">
+          <p:cNvPr id="21" name="TextBox 20"/>
+          <p:cNvSpPr txBox="1"/>
+          <p:nvPr/>
+        </p:nvSpPr>
+        <p:spPr>
+          <a:xfrm>
+            <a:off x="10698480" y="1417320"/>
+            <a:ext cx="1097280" cy="365760"/>
+          </a:xfrm>
+          <a:prstGeom prst="rect">
+            <a:avLst/>
+          </a:prstGeom>
+          <a:noFill/>
+        </p:spPr>
+        <p:txBody>
+          <a:bodyPr wrap="square">
+            <a:spAutoFit/>
+          </a:bodyPr>
+          <a:lstStyle/>
+          <a:p>
+            <a:pPr algn="ctr"/>
+            <a:r>
+              <a:rPr sz="1600" b="1">
                 <a:solidFill>
                   <a:srgbClr val="10B981"/>
                 </a:solidFill>
@@ -3987,14 +4396,14 @@
       </p:sp>
       <p:sp>
         <p:nvSpPr>
-          <p:cNvPr id="12" name="Rectangle 11"/>
+          <p:cNvPr id="22" name="Rectangle 21"/>
           <p:cNvSpPr/>
           <p:nvPr/>
         </p:nvSpPr>
         <p:spPr>
           <a:xfrm>
-            <a:off x="6400800" y="2194560"/>
-            <a:ext cx="5029200" cy="411480"/>
+            <a:off x="7589520" y="1828800"/>
+            <a:ext cx="4389120" cy="411480"/>
           </a:xfrm>
           <a:prstGeom prst="rect">
             <a:avLst/>
@@ -4032,28 +4441,28 @@
       </p:sp>
       <p:sp>
         <p:nvSpPr>
-          <p:cNvPr id="13" name="TextBox 12"/>
-          <p:cNvSpPr txBox="1"/>
-          <p:nvPr/>
-        </p:nvSpPr>
-        <p:spPr>
-          <a:xfrm>
-            <a:off x="6583680" y="2240280"/>
-            <a:ext cx="3200400" cy="365760"/>
-          </a:xfrm>
-          <a:prstGeom prst="rect">
-            <a:avLst/>
-          </a:prstGeom>
-          <a:noFill/>
-        </p:spPr>
-        <p:txBody>
-          <a:bodyPr wrap="square">
-            <a:spAutoFit/>
-          </a:bodyPr>
-          <a:lstStyle/>
-          <a:p>
-            <a:r>
-              <a:rPr sz="1600" b="0">
+          <p:cNvPr id="23" name="TextBox 22"/>
+          <p:cNvSpPr txBox="1"/>
+          <p:nvPr/>
+        </p:nvSpPr>
+        <p:spPr>
+          <a:xfrm>
+            <a:off x="7772400" y="1874519"/>
+            <a:ext cx="2743200" cy="365760"/>
+          </a:xfrm>
+          <a:prstGeom prst="rect">
+            <a:avLst/>
+          </a:prstGeom>
+          <a:noFill/>
+        </p:spPr>
+        <p:txBody>
+          <a:bodyPr wrap="square">
+            <a:spAutoFit/>
+          </a:bodyPr>
+          <a:lstStyle/>
+          <a:p>
+            <a:r>
+              <a:rPr sz="1400" b="0">
                 <a:solidFill>
                   <a:srgbClr val="1F2937"/>
                 </a:solidFill>
@@ -4066,29 +4475,29 @@
       </p:sp>
       <p:sp>
         <p:nvSpPr>
-          <p:cNvPr id="14" name="TextBox 13"/>
-          <p:cNvSpPr txBox="1"/>
-          <p:nvPr/>
-        </p:nvSpPr>
-        <p:spPr>
-          <a:xfrm>
-            <a:off x="9875520" y="2240280"/>
-            <a:ext cx="1371600" cy="365760"/>
-          </a:xfrm>
-          <a:prstGeom prst="rect">
-            <a:avLst/>
-          </a:prstGeom>
-          <a:noFill/>
-        </p:spPr>
-        <p:txBody>
-          <a:bodyPr wrap="square">
-            <a:spAutoFit/>
-          </a:bodyPr>
-          <a:lstStyle/>
-          <a:p>
-            <a:pPr algn="ctr"/>
-            <a:r>
-              <a:rPr sz="1800" b="1">
+          <p:cNvPr id="24" name="TextBox 23"/>
+          <p:cNvSpPr txBox="1"/>
+          <p:nvPr/>
+        </p:nvSpPr>
+        <p:spPr>
+          <a:xfrm>
+            <a:off x="10698480" y="1874519"/>
+            <a:ext cx="1097280" cy="365760"/>
+          </a:xfrm>
+          <a:prstGeom prst="rect">
+            <a:avLst/>
+          </a:prstGeom>
+          <a:noFill/>
+        </p:spPr>
+        <p:txBody>
+          <a:bodyPr wrap="square">
+            <a:spAutoFit/>
+          </a:bodyPr>
+          <a:lstStyle/>
+          <a:p>
+            <a:pPr algn="ctr"/>
+            <a:r>
+              <a:rPr sz="1600" b="1">
                 <a:solidFill>
                   <a:srgbClr val="10B981"/>
                 </a:solidFill>
@@ -4101,14 +4510,14 @@
       </p:sp>
       <p:sp>
         <p:nvSpPr>
-          <p:cNvPr id="15" name="Rectangle 14"/>
+          <p:cNvPr id="25" name="Rectangle 24"/>
           <p:cNvSpPr/>
           <p:nvPr/>
         </p:nvSpPr>
         <p:spPr>
           <a:xfrm>
-            <a:off x="6400800" y="2651760"/>
-            <a:ext cx="5029200" cy="411480"/>
+            <a:off x="7589520" y="2286000"/>
+            <a:ext cx="4389120" cy="411480"/>
           </a:xfrm>
           <a:prstGeom prst="rect">
             <a:avLst/>
@@ -4146,28 +4555,28 @@
       </p:sp>
       <p:sp>
         <p:nvSpPr>
-          <p:cNvPr id="16" name="TextBox 15"/>
-          <p:cNvSpPr txBox="1"/>
-          <p:nvPr/>
-        </p:nvSpPr>
-        <p:spPr>
-          <a:xfrm>
-            <a:off x="6583680" y="2697480"/>
-            <a:ext cx="3200400" cy="365760"/>
-          </a:xfrm>
-          <a:prstGeom prst="rect">
-            <a:avLst/>
-          </a:prstGeom>
-          <a:noFill/>
-        </p:spPr>
-        <p:txBody>
-          <a:bodyPr wrap="square">
-            <a:spAutoFit/>
-          </a:bodyPr>
-          <a:lstStyle/>
-          <a:p>
-            <a:r>
-              <a:rPr sz="1600" b="0">
+          <p:cNvPr id="26" name="TextBox 25"/>
+          <p:cNvSpPr txBox="1"/>
+          <p:nvPr/>
+        </p:nvSpPr>
+        <p:spPr>
+          <a:xfrm>
+            <a:off x="7772400" y="2331720"/>
+            <a:ext cx="2743200" cy="365760"/>
+          </a:xfrm>
+          <a:prstGeom prst="rect">
+            <a:avLst/>
+          </a:prstGeom>
+          <a:noFill/>
+        </p:spPr>
+        <p:txBody>
+          <a:bodyPr wrap="square">
+            <a:spAutoFit/>
+          </a:bodyPr>
+          <a:lstStyle/>
+          <a:p>
+            <a:r>
+              <a:rPr sz="1400" b="0">
                 <a:solidFill>
                   <a:srgbClr val="1F2937"/>
                 </a:solidFill>
@@ -4180,29 +4589,29 @@
       </p:sp>
       <p:sp>
         <p:nvSpPr>
-          <p:cNvPr id="17" name="TextBox 16"/>
-          <p:cNvSpPr txBox="1"/>
-          <p:nvPr/>
-        </p:nvSpPr>
-        <p:spPr>
-          <a:xfrm>
-            <a:off x="9875520" y="2697480"/>
-            <a:ext cx="1371600" cy="365760"/>
-          </a:xfrm>
-          <a:prstGeom prst="rect">
-            <a:avLst/>
-          </a:prstGeom>
-          <a:noFill/>
-        </p:spPr>
-        <p:txBody>
-          <a:bodyPr wrap="square">
-            <a:spAutoFit/>
-          </a:bodyPr>
-          <a:lstStyle/>
-          <a:p>
-            <a:pPr algn="ctr"/>
-            <a:r>
-              <a:rPr sz="1800" b="1">
+          <p:cNvPr id="27" name="TextBox 26"/>
+          <p:cNvSpPr txBox="1"/>
+          <p:nvPr/>
+        </p:nvSpPr>
+        <p:spPr>
+          <a:xfrm>
+            <a:off x="10698480" y="2331720"/>
+            <a:ext cx="1097280" cy="365760"/>
+          </a:xfrm>
+          <a:prstGeom prst="rect">
+            <a:avLst/>
+          </a:prstGeom>
+          <a:noFill/>
+        </p:spPr>
+        <p:txBody>
+          <a:bodyPr wrap="square">
+            <a:spAutoFit/>
+          </a:bodyPr>
+          <a:lstStyle/>
+          <a:p>
+            <a:pPr algn="ctr"/>
+            <a:r>
+              <a:rPr sz="1600" b="1">
                 <a:solidFill>
                   <a:srgbClr val="10B981"/>
                 </a:solidFill>
@@ -4215,14 +4624,14 @@
       </p:sp>
       <p:sp>
         <p:nvSpPr>
-          <p:cNvPr id="18" name="Rectangle 17"/>
+          <p:cNvPr id="28" name="Rectangle 27"/>
           <p:cNvSpPr/>
           <p:nvPr/>
         </p:nvSpPr>
         <p:spPr>
           <a:xfrm>
-            <a:off x="6400800" y="3108960"/>
-            <a:ext cx="5029200" cy="411480"/>
+            <a:off x="7589520" y="2743200"/>
+            <a:ext cx="4389120" cy="411480"/>
           </a:xfrm>
           <a:prstGeom prst="rect">
             <a:avLst/>
@@ -4260,28 +4669,28 @@
       </p:sp>
       <p:sp>
         <p:nvSpPr>
-          <p:cNvPr id="19" name="TextBox 18"/>
-          <p:cNvSpPr txBox="1"/>
-          <p:nvPr/>
-        </p:nvSpPr>
-        <p:spPr>
-          <a:xfrm>
-            <a:off x="6583680" y="3154680"/>
-            <a:ext cx="3200400" cy="365760"/>
-          </a:xfrm>
-          <a:prstGeom prst="rect">
-            <a:avLst/>
-          </a:prstGeom>
-          <a:noFill/>
-        </p:spPr>
-        <p:txBody>
-          <a:bodyPr wrap="square">
-            <a:spAutoFit/>
-          </a:bodyPr>
-          <a:lstStyle/>
-          <a:p>
-            <a:r>
-              <a:rPr sz="1600" b="0">
+          <p:cNvPr id="29" name="TextBox 28"/>
+          <p:cNvSpPr txBox="1"/>
+          <p:nvPr/>
+        </p:nvSpPr>
+        <p:spPr>
+          <a:xfrm>
+            <a:off x="7772400" y="2788920"/>
+            <a:ext cx="2743200" cy="365760"/>
+          </a:xfrm>
+          <a:prstGeom prst="rect">
+            <a:avLst/>
+          </a:prstGeom>
+          <a:noFill/>
+        </p:spPr>
+        <p:txBody>
+          <a:bodyPr wrap="square">
+            <a:spAutoFit/>
+          </a:bodyPr>
+          <a:lstStyle/>
+          <a:p>
+            <a:r>
+              <a:rPr sz="1400" b="0">
                 <a:solidFill>
                   <a:srgbClr val="1F2937"/>
                 </a:solidFill>
@@ -4294,29 +4703,29 @@
       </p:sp>
       <p:sp>
         <p:nvSpPr>
-          <p:cNvPr id="20" name="TextBox 19"/>
-          <p:cNvSpPr txBox="1"/>
-          <p:nvPr/>
-        </p:nvSpPr>
-        <p:spPr>
-          <a:xfrm>
-            <a:off x="9875520" y="3154680"/>
-            <a:ext cx="1371600" cy="365760"/>
-          </a:xfrm>
-          <a:prstGeom prst="rect">
-            <a:avLst/>
-          </a:prstGeom>
-          <a:noFill/>
-        </p:spPr>
-        <p:txBody>
-          <a:bodyPr wrap="square">
-            <a:spAutoFit/>
-          </a:bodyPr>
-          <a:lstStyle/>
-          <a:p>
-            <a:pPr algn="ctr"/>
-            <a:r>
-              <a:rPr sz="1800" b="1">
+          <p:cNvPr id="30" name="TextBox 29"/>
+          <p:cNvSpPr txBox="1"/>
+          <p:nvPr/>
+        </p:nvSpPr>
+        <p:spPr>
+          <a:xfrm>
+            <a:off x="10698480" y="2788920"/>
+            <a:ext cx="1097280" cy="365760"/>
+          </a:xfrm>
+          <a:prstGeom prst="rect">
+            <a:avLst/>
+          </a:prstGeom>
+          <a:noFill/>
+        </p:spPr>
+        <p:txBody>
+          <a:bodyPr wrap="square">
+            <a:spAutoFit/>
+          </a:bodyPr>
+          <a:lstStyle/>
+          <a:p>
+            <a:pPr algn="ctr"/>
+            <a:r>
+              <a:rPr sz="1600" b="1">
                 <a:solidFill>
                   <a:srgbClr val="10B981"/>
                 </a:solidFill>
@@ -4329,14 +4738,14 @@
       </p:sp>
       <p:sp>
         <p:nvSpPr>
-          <p:cNvPr id="21" name="Rectangle 20"/>
+          <p:cNvPr id="31" name="Rectangle 30"/>
           <p:cNvSpPr/>
           <p:nvPr/>
         </p:nvSpPr>
         <p:spPr>
           <a:xfrm>
-            <a:off x="6400800" y="3566160"/>
-            <a:ext cx="5029200" cy="411480"/>
+            <a:off x="7589520" y="3200400"/>
+            <a:ext cx="4389120" cy="411480"/>
           </a:xfrm>
           <a:prstGeom prst="rect">
             <a:avLst/>
@@ -4374,28 +4783,28 @@
       </p:sp>
       <p:sp>
         <p:nvSpPr>
-          <p:cNvPr id="22" name="TextBox 21"/>
-          <p:cNvSpPr txBox="1"/>
-          <p:nvPr/>
-        </p:nvSpPr>
-        <p:spPr>
-          <a:xfrm>
-            <a:off x="6583680" y="3611880"/>
-            <a:ext cx="3200400" cy="365760"/>
-          </a:xfrm>
-          <a:prstGeom prst="rect">
-            <a:avLst/>
-          </a:prstGeom>
-          <a:noFill/>
-        </p:spPr>
-        <p:txBody>
-          <a:bodyPr wrap="square">
-            <a:spAutoFit/>
-          </a:bodyPr>
-          <a:lstStyle/>
-          <a:p>
-            <a:r>
-              <a:rPr sz="1600" b="0">
+          <p:cNvPr id="32" name="TextBox 31"/>
+          <p:cNvSpPr txBox="1"/>
+          <p:nvPr/>
+        </p:nvSpPr>
+        <p:spPr>
+          <a:xfrm>
+            <a:off x="7772400" y="3246120"/>
+            <a:ext cx="2743200" cy="365760"/>
+          </a:xfrm>
+          <a:prstGeom prst="rect">
+            <a:avLst/>
+          </a:prstGeom>
+          <a:noFill/>
+        </p:spPr>
+        <p:txBody>
+          <a:bodyPr wrap="square">
+            <a:spAutoFit/>
+          </a:bodyPr>
+          <a:lstStyle/>
+          <a:p>
+            <a:r>
+              <a:rPr sz="1400" b="0">
                 <a:solidFill>
                   <a:srgbClr val="1F2937"/>
                 </a:solidFill>
@@ -4408,14 +4817,49 @@
       </p:sp>
       <p:sp>
         <p:nvSpPr>
-          <p:cNvPr id="23" name="TextBox 22"/>
-          <p:cNvSpPr txBox="1"/>
-          <p:nvPr/>
-        </p:nvSpPr>
-        <p:spPr>
-          <a:xfrm>
-            <a:off x="9875520" y="3611880"/>
-            <a:ext cx="1371600" cy="365760"/>
+          <p:cNvPr id="33" name="TextBox 32"/>
+          <p:cNvSpPr txBox="1"/>
+          <p:nvPr/>
+        </p:nvSpPr>
+        <p:spPr>
+          <a:xfrm>
+            <a:off x="10698480" y="3246120"/>
+            <a:ext cx="1097280" cy="365760"/>
+          </a:xfrm>
+          <a:prstGeom prst="rect">
+            <a:avLst/>
+          </a:prstGeom>
+          <a:noFill/>
+        </p:spPr>
+        <p:txBody>
+          <a:bodyPr wrap="square">
+            <a:spAutoFit/>
+          </a:bodyPr>
+          <a:lstStyle/>
+          <a:p>
+            <a:pPr algn="ctr"/>
+            <a:r>
+              <a:rPr sz="1600" b="1">
+                <a:solidFill>
+                  <a:srgbClr val="10B981"/>
+                </a:solidFill>
+                <a:latin typeface="Inter"/>
+              </a:rPr>
+              <a:t>✓</a:t>
+            </a:r>
+          </a:p>
+        </p:txBody>
+      </p:sp>
+      <p:sp>
+        <p:nvSpPr>
+          <p:cNvPr id="34" name="TextBox 33"/>
+          <p:cNvSpPr txBox="1"/>
+          <p:nvPr/>
+        </p:nvSpPr>
+        <p:spPr>
+          <a:xfrm>
+            <a:off x="457200" y="5760720"/>
+            <a:ext cx="11277295" cy="457200"/>
           </a:xfrm>
           <a:prstGeom prst="rect">
             <a:avLst/>
@@ -4432,46 +4876,46 @@
             <a:r>
               <a:rPr sz="1800" b="1">
                 <a:solidFill>
-                  <a:srgbClr val="10B981"/>
+                  <a:srgbClr val="F59E0B"/>
+                </a:solidFill>
+                <a:latin typeface="阿里巴巴普惠体 3.0"/>
+              </a:rPr>
+              <a:t>★ JavaBrain 在 安全 + 智能 + 私有化 三角都做到</a:t>
+            </a:r>
+          </a:p>
+        </p:txBody>
+      </p:sp>
+      <p:sp>
+        <p:nvSpPr>
+          <p:cNvPr id="35" name="TextBox 34"/>
+          <p:cNvSpPr txBox="1"/>
+          <p:nvPr/>
+        </p:nvSpPr>
+        <p:spPr>
+          <a:xfrm>
+            <a:off x="10607040" y="6446520"/>
+            <a:ext cx="1280160" cy="274320"/>
+          </a:xfrm>
+          <a:prstGeom prst="rect">
+            <a:avLst/>
+          </a:prstGeom>
+          <a:noFill/>
+        </p:spPr>
+        <p:txBody>
+          <a:bodyPr wrap="square">
+            <a:spAutoFit/>
+          </a:bodyPr>
+          <a:lstStyle/>
+          <a:p>
+            <a:pPr algn="ctr"/>
+            <a:r>
+              <a:rPr sz="1000" b="0">
+                <a:solidFill>
+                  <a:srgbClr val="6B7280"/>
                 </a:solidFill>
                 <a:latin typeface="Inter"/>
               </a:rPr>
-              <a:t>✓</a:t>
-            </a:r>
-          </a:p>
-        </p:txBody>
-      </p:sp>
-      <p:sp>
-        <p:nvSpPr>
-          <p:cNvPr id="24" name="TextBox 23"/>
-          <p:cNvSpPr txBox="1"/>
-          <p:nvPr/>
-        </p:nvSpPr>
-        <p:spPr>
-          <a:xfrm>
-            <a:off x="457200" y="5486400"/>
-            <a:ext cx="11277295" cy="457200"/>
-          </a:xfrm>
-          <a:prstGeom prst="rect">
-            <a:avLst/>
-          </a:prstGeom>
-          <a:noFill/>
-        </p:spPr>
-        <p:txBody>
-          <a:bodyPr wrap="square">
-            <a:spAutoFit/>
-          </a:bodyPr>
-          <a:lstStyle/>
-          <a:p>
-            <a:pPr algn="ctr"/>
-            <a:r>
-              <a:rPr sz="2000" b="1">
-                <a:solidFill>
-                  <a:srgbClr val="F59E0B"/>
-                </a:solidFill>
-                <a:latin typeface="阿里巴巴普惠体 3.0"/>
-              </a:rPr>
-              <a:t>★ JavaBrain 在 安全 + 智能 + 私有化 三角都做到</a:t>
+              <a:t>10 / 12</a:t>
             </a:r>
           </a:p>
         </p:txBody>
@@ -4507,7 +4951,7 @@
             <p:tnCond val="0"/>
           </p:cond>
           <p:par>
-            <p:cTn id="6" nodeType="withEffect" dur="500" begin="600ms" fill="hold">
+            <p:cTn id="6" nodeType="withEffect" dur="500" begin="400ms" fill="hold">
               <p:animEffect presetClass="entr" presetId="10" dur="500"/>
             </p:cTn>
           </p:par>
@@ -4524,7 +4968,7 @@
             <p:tnCond val="0"/>
           </p:cond>
           <p:par>
-            <p:cTn id="7" nodeType="withEffect" dur="500" begin="1200ms" fill="hold">
+            <p:cTn id="7" nodeType="withEffect" dur="500" begin="800ms" fill="hold">
               <p:animEffect presetClass="entr" presetId="10" dur="500"/>
             </p:cTn>
           </p:par>
@@ -4541,7 +4985,7 @@
             <p:tnCond val="0"/>
           </p:cond>
           <p:par>
-            <p:cTn id="8" nodeType="withEffect" dur="500" begin="1800ms" fill="hold">
+            <p:cTn id="8" nodeType="withEffect" dur="500" begin="1200ms" fill="hold">
               <p:animEffect presetClass="entr" presetId="10" dur="500"/>
             </p:cTn>
           </p:par>
@@ -4558,7 +5002,7 @@
             <p:tnCond val="0"/>
           </p:cond>
           <p:par>
-            <p:cTn id="11" nodeType="withEffect" dur="500" begin="3000ms" fill="hold">
+            <p:cTn id="10" nodeType="withEffect" dur="500" begin="1800ms" fill="hold">
               <p:animEffect presetClass="entr" presetId="10" dur="500"/>
             </p:cTn>
           </p:par>
@@ -4575,7 +5019,7 @@
             <p:tnCond val="0"/>
           </p:cond>
           <p:par>
-            <p:cTn id="14" nodeType="withEffect" dur="500" begin="3700ms" fill="hold">
+            <p:cTn id="13" nodeType="withEffect" dur="500" begin="2050ms" fill="hold">
               <p:animEffect presetClass="entr" presetId="10" dur="500"/>
             </p:cTn>
           </p:par>
@@ -4592,7 +5036,7 @@
             <p:tnCond val="0"/>
           </p:cond>
           <p:par>
-            <p:cTn id="17" nodeType="withEffect" dur="500" begin="4400ms" fill="hold">
+            <p:cTn id="16" nodeType="withEffect" dur="500" begin="2300ms" fill="hold">
               <p:animEffect presetClass="entr" presetId="10" dur="500"/>
             </p:cTn>
           </p:par>
@@ -4609,7 +5053,7 @@
             <p:tnCond val="0"/>
           </p:cond>
           <p:par>
-            <p:cTn id="20" nodeType="withEffect" dur="500" begin="5100ms" fill="hold">
+            <p:cTn id="21" nodeType="withEffect" dur="500" begin="3000ms" fill="hold">
               <p:animEffect presetClass="entr" presetId="10" dur="500"/>
             </p:cTn>
           </p:par>
@@ -4626,7 +5070,58 @@
             <p:tnCond val="0"/>
           </p:cond>
           <p:par>
-            <p:cTn id="23" nodeType="withEffect" dur="500" begin="5800ms" fill="hold">
+            <p:cTn id="24" nodeType="withEffect" dur="500" begin="3500ms" fill="hold">
+              <p:animEffect presetClass="entr" presetId="10" dur="500"/>
+            </p:cTn>
+          </p:par>
+        </p:par>
+      </p:par>
+    </p:tnLst>
+  </p:timing>
+  <p:timing>
+    <p:tnLst>
+      <p:par>
+        <p:pPr/>
+        <p:par>
+          <p:cond>
+            <p:tnCond val="0"/>
+          </p:cond>
+          <p:par>
+            <p:cTn id="27" nodeType="withEffect" dur="500" begin="4000ms" fill="hold">
+              <p:animEffect presetClass="entr" presetId="10" dur="500"/>
+            </p:cTn>
+          </p:par>
+        </p:par>
+      </p:par>
+    </p:tnLst>
+  </p:timing>
+  <p:timing>
+    <p:tnLst>
+      <p:par>
+        <p:pPr/>
+        <p:par>
+          <p:cond>
+            <p:tnCond val="0"/>
+          </p:cond>
+          <p:par>
+            <p:cTn id="30" nodeType="withEffect" dur="500" begin="4500ms" fill="hold">
+              <p:animEffect presetClass="entr" presetId="10" dur="500"/>
+            </p:cTn>
+          </p:par>
+        </p:par>
+      </p:par>
+    </p:tnLst>
+  </p:timing>
+  <p:timing>
+    <p:tnLst>
+      <p:par>
+        <p:pPr/>
+        <p:par>
+          <p:cond>
+            <p:tnCond val="0"/>
+          </p:cond>
+          <p:par>
+            <p:cTn id="33" nodeType="withEffect" dur="500" begin="5000ms" fill="hold">
               <p:animEffect presetClass="entr" presetId="10" dur="500"/>
             </p:cTn>
           </p:par>
@@ -4682,7 +5177,7 @@
         </p:nvPicPr>
         <p:blipFill>
           <a:blip r:embed="rId2">
-            <a:alphaModFix amt="30000"/>
+            <a:alphaModFix amt="100000"/>
           </a:blip>
           <a:stretch>
             <a:fillRect/>
@@ -4690,8 +5185,8 @@
         </p:blipFill>
         <p:spPr>
           <a:xfrm>
-            <a:off x="7772400" y="182880"/>
-            <a:ext cx="4114800" cy="731520"/>
+            <a:off x="8686800" y="228600"/>
+            <a:ext cx="3200400" cy="594360"/>
           </a:xfrm>
           <a:prstGeom prst="rect">
             <a:avLst/>
@@ -5959,6 +6454,41 @@
                 <a:latin typeface="阿里巴巴普惠体 3.0"/>
               </a:rPr>
               <a:t>★ 零代码 AI 应用工厂 (Amis + Skill 绑定)</a:t>
+            </a:r>
+          </a:p>
+        </p:txBody>
+      </p:sp>
+      <p:sp>
+        <p:nvSpPr>
+          <p:cNvPr id="36" name="TextBox 35"/>
+          <p:cNvSpPr txBox="1"/>
+          <p:nvPr/>
+        </p:nvSpPr>
+        <p:spPr>
+          <a:xfrm>
+            <a:off x="10607040" y="6446520"/>
+            <a:ext cx="1280160" cy="274320"/>
+          </a:xfrm>
+          <a:prstGeom prst="rect">
+            <a:avLst/>
+          </a:prstGeom>
+          <a:noFill/>
+        </p:spPr>
+        <p:txBody>
+          <a:bodyPr wrap="square">
+            <a:spAutoFit/>
+          </a:bodyPr>
+          <a:lstStyle/>
+          <a:p>
+            <a:pPr algn="ctr"/>
+            <a:r>
+              <a:rPr sz="1000" b="0">
+                <a:solidFill>
+                  <a:srgbClr val="6B7280"/>
+                </a:solidFill>
+                <a:latin typeface="Inter"/>
+              </a:rPr>
+              <a:t>11 / 12</a:t>
             </a:r>
           </a:p>
         </p:txBody>
@@ -6210,15 +6740,39 @@
         <p:nvPr/>
       </p:nvGrpSpPr>
       <p:grpSpPr/>
-      <p:sp>
-        <p:nvSpPr>
-          <p:cNvPr id="2" name="TextBox 1"/>
-          <p:cNvSpPr txBox="1"/>
-          <p:nvPr/>
-        </p:nvSpPr>
-        <p:spPr>
-          <a:xfrm>
-            <a:off x="457200" y="548640"/>
+      <p:pic>
+        <p:nvPicPr>
+          <p:cNvPr id="2" name="Picture 1" descr="p10_brain_logo.png"/>
+          <p:cNvPicPr>
+            <a:picLocks noChangeAspect="1"/>
+          </p:cNvPicPr>
+          <p:nvPr/>
+        </p:nvPicPr>
+        <p:blipFill>
+          <a:blip r:embed="rId2"/>
+          <a:stretch>
+            <a:fillRect/>
+          </a:stretch>
+        </p:blipFill>
+        <p:spPr>
+          <a:xfrm>
+            <a:off x="5394960" y="45720"/>
+            <a:ext cx="1371600" cy="548640"/>
+          </a:xfrm>
+          <a:prstGeom prst="rect">
+            <a:avLst/>
+          </a:prstGeom>
+        </p:spPr>
+      </p:pic>
+      <p:sp>
+        <p:nvSpPr>
+          <p:cNvPr id="3" name="TextBox 2"/>
+          <p:cNvSpPr txBox="1"/>
+          <p:nvPr/>
+        </p:nvSpPr>
+        <p:spPr>
+          <a:xfrm>
+            <a:off x="457200" y="685800"/>
             <a:ext cx="11277295" cy="1097280"/>
           </a:xfrm>
           <a:prstGeom prst="rect">
@@ -6234,7 +6788,7 @@
           <a:p>
             <a:pPr algn="ctr"/>
             <a:r>
-              <a:rPr sz="7200" b="1">
+              <a:rPr sz="6000" b="1">
                 <a:solidFill>
                   <a:srgbClr val="1F2937"/>
                 </a:solidFill>
@@ -6247,7 +6801,7 @@
       </p:sp>
       <p:sp>
         <p:nvSpPr>
-          <p:cNvPr id="3" name="TextBox 2"/>
+          <p:cNvPr id="4" name="TextBox 3"/>
           <p:cNvSpPr txBox="1"/>
           <p:nvPr/>
         </p:nvSpPr>
@@ -6282,7 +6836,7 @@
       </p:sp>
       <p:sp>
         <p:nvSpPr>
-          <p:cNvPr id="4" name="TextBox 3"/>
+          <p:cNvPr id="5" name="TextBox 4"/>
           <p:cNvSpPr txBox="1"/>
           <p:nvPr/>
         </p:nvSpPr>
@@ -6317,7 +6871,7 @@
       </p:sp>
       <p:sp>
         <p:nvSpPr>
-          <p:cNvPr id="5" name="TextBox 4"/>
+          <p:cNvPr id="6" name="TextBox 5"/>
           <p:cNvSpPr txBox="1"/>
           <p:nvPr/>
         </p:nvSpPr>
@@ -6352,7 +6906,7 @@
       </p:sp>
       <p:sp>
         <p:nvSpPr>
-          <p:cNvPr id="6" name="Rounded Rectangle 5"/>
+          <p:cNvPr id="7" name="Rounded Rectangle 6"/>
           <p:cNvSpPr/>
           <p:nvPr/>
         </p:nvSpPr>
@@ -6397,7 +6951,7 @@
       </p:sp>
       <p:sp>
         <p:nvSpPr>
-          <p:cNvPr id="7" name="TextBox 6"/>
+          <p:cNvPr id="8" name="TextBox 7"/>
           <p:cNvSpPr txBox="1"/>
           <p:nvPr/>
         </p:nvSpPr>
@@ -6432,7 +6986,7 @@
       </p:sp>
       <p:sp>
         <p:nvSpPr>
-          <p:cNvPr id="8" name="Rounded Rectangle 7"/>
+          <p:cNvPr id="9" name="Rounded Rectangle 8"/>
           <p:cNvSpPr/>
           <p:nvPr/>
         </p:nvSpPr>
@@ -6475,7 +7029,7 @@
       </p:sp>
       <p:sp>
         <p:nvSpPr>
-          <p:cNvPr id="9" name="TextBox 8"/>
+          <p:cNvPr id="10" name="TextBox 9"/>
           <p:cNvSpPr txBox="1"/>
           <p:nvPr/>
         </p:nvSpPr>
@@ -6510,7 +7064,7 @@
       </p:sp>
       <p:sp>
         <p:nvSpPr>
-          <p:cNvPr id="10" name="TextBox 9"/>
+          <p:cNvPr id="11" name="TextBox 10"/>
           <p:cNvSpPr txBox="1"/>
           <p:nvPr/>
         </p:nvSpPr>
@@ -6545,7 +7099,7 @@
       </p:sp>
       <p:sp>
         <p:nvSpPr>
-          <p:cNvPr id="11" name="TextBox 10"/>
+          <p:cNvPr id="12" name="TextBox 11"/>
           <p:cNvSpPr txBox="1"/>
           <p:nvPr/>
         </p:nvSpPr>
@@ -6574,6 +7128,41 @@
                 <a:latin typeface="阿里巴巴普惠体 3.0"/>
               </a:rPr>
               <a:t>感谢 [团队名] · 联系: [邮箱]</a:t>
+            </a:r>
+          </a:p>
+        </p:txBody>
+      </p:sp>
+      <p:sp>
+        <p:nvSpPr>
+          <p:cNvPr id="13" name="TextBox 12"/>
+          <p:cNvSpPr txBox="1"/>
+          <p:nvPr/>
+        </p:nvSpPr>
+        <p:spPr>
+          <a:xfrm>
+            <a:off x="10607040" y="6446520"/>
+            <a:ext cx="1280160" cy="274320"/>
+          </a:xfrm>
+          <a:prstGeom prst="rect">
+            <a:avLst/>
+          </a:prstGeom>
+          <a:noFill/>
+        </p:spPr>
+        <p:txBody>
+          <a:bodyPr wrap="square">
+            <a:spAutoFit/>
+          </a:bodyPr>
+          <a:lstStyle/>
+          <a:p>
+            <a:pPr algn="ctr"/>
+            <a:r>
+              <a:rPr sz="1000" b="0">
+                <a:solidFill>
+                  <a:srgbClr val="6B7280"/>
+                </a:solidFill>
+                <a:latin typeface="Inter"/>
+              </a:rPr>
+              <a:t>12 / 12</a:t>
             </a:r>
           </a:p>
         </p:txBody>
@@ -6592,7 +7181,7 @@
             <p:tnCond val="0"/>
           </p:cond>
           <p:par>
-            <p:cTn id="3" nodeType="withEffect" dur="500" begin="0ms" fill="hold">
+            <p:cTn id="4" nodeType="withEffect" dur="500" begin="0ms" fill="hold">
               <p:animEffect presetClass="entr" presetId="10" dur="500"/>
             </p:cTn>
           </p:par>
@@ -6609,7 +7198,7 @@
             <p:tnCond val="0"/>
           </p:cond>
           <p:par>
-            <p:cTn id="4" nodeType="withEffect" dur="500" begin="600ms" fill="hold">
+            <p:cTn id="5" nodeType="withEffect" dur="500" begin="600ms" fill="hold">
               <p:animEffect presetClass="entr" presetId="10" dur="500"/>
             </p:cTn>
           </p:par>
@@ -6626,7 +7215,7 @@
             <p:tnCond val="0"/>
           </p:cond>
           <p:par>
-            <p:cTn id="5" nodeType="withEffect" dur="500" begin="1200ms" fill="hold">
+            <p:cTn id="6" nodeType="withEffect" dur="500" begin="1200ms" fill="hold">
               <p:animEffect presetClass="entr" presetId="10" dur="500"/>
             </p:cTn>
           </p:par>
@@ -6643,7 +7232,7 @@
             <p:tnCond val="0"/>
           </p:cond>
           <p:par>
-            <p:cTn id="6" nodeType="withEffect" dur="500" begin="1800ms" fill="hold">
+            <p:cTn id="7" nodeType="withEffect" dur="500" begin="1800ms" fill="hold">
               <p:animEffect presetClass="entr" presetId="10" dur="500"/>
             </p:cTn>
           </p:par>
@@ -6660,7 +7249,7 @@
             <p:tnCond val="0"/>
           </p:cond>
           <p:par>
-            <p:cTn id="7" nodeType="withEffect" dur="1500" begin="6000ms" fill="hold" repeatCount="indefinite">
+            <p:cTn id="8" nodeType="withEffect" dur="1500" begin="6000ms" fill="hold" repeatCount="indefinite">
               <p:animEffect presetClass="emph" presetId="26" dur="1500"/>
             </p:cTn>
           </p:par>
@@ -6677,7 +7266,7 @@
             <p:tnCond val="0"/>
           </p:cond>
           <p:par>
-            <p:cTn id="9" nodeType="withEffect" dur="500" begin="10000ms" fill="hold">
+            <p:cTn id="10" nodeType="withEffect" dur="500" begin="10000ms" fill="hold">
               <p:animEffect presetClass="entr" presetId="10" dur="500"/>
             </p:cTn>
           </p:par>
@@ -7938,6 +8527,41 @@
                 <a:latin typeface="阿里巴巴普惠体 3.0"/>
               </a:rPr>
               <a:t>★ 3 月 vs 3 分 — 从季度到分钟</a:t>
+            </a:r>
+          </a:p>
+        </p:txBody>
+      </p:sp>
+      <p:sp>
+        <p:nvSpPr>
+          <p:cNvPr id="36" name="TextBox 35"/>
+          <p:cNvSpPr txBox="1"/>
+          <p:nvPr/>
+        </p:nvSpPr>
+        <p:spPr>
+          <a:xfrm>
+            <a:off x="10607040" y="6446520"/>
+            <a:ext cx="1280160" cy="274320"/>
+          </a:xfrm>
+          <a:prstGeom prst="rect">
+            <a:avLst/>
+          </a:prstGeom>
+          <a:noFill/>
+        </p:spPr>
+        <p:txBody>
+          <a:bodyPr wrap="square">
+            <a:spAutoFit/>
+          </a:bodyPr>
+          <a:lstStyle/>
+          <a:p>
+            <a:pPr algn="ctr"/>
+            <a:r>
+              <a:rPr sz="1000" b="0">
+                <a:solidFill>
+                  <a:srgbClr val="6B7280"/>
+                </a:solidFill>
+                <a:latin typeface="Inter"/>
+              </a:rPr>
+              <a:t>02 / 12</a:t>
             </a:r>
           </a:p>
         </p:txBody>
@@ -9029,6 +9653,41 @@
           </a:p>
         </p:txBody>
       </p:sp>
+      <p:sp>
+        <p:nvSpPr>
+          <p:cNvPr id="25" name="TextBox 24"/>
+          <p:cNvSpPr txBox="1"/>
+          <p:nvPr/>
+        </p:nvSpPr>
+        <p:spPr>
+          <a:xfrm>
+            <a:off x="10607040" y="6446520"/>
+            <a:ext cx="1280160" cy="274320"/>
+          </a:xfrm>
+          <a:prstGeom prst="rect">
+            <a:avLst/>
+          </a:prstGeom>
+          <a:noFill/>
+        </p:spPr>
+        <p:txBody>
+          <a:bodyPr wrap="square">
+            <a:spAutoFit/>
+          </a:bodyPr>
+          <a:lstStyle/>
+          <a:p>
+            <a:pPr algn="ctr"/>
+            <a:r>
+              <a:rPr sz="1000" b="0">
+                <a:solidFill>
+                  <a:srgbClr val="6B7280"/>
+                </a:solidFill>
+                <a:latin typeface="Inter"/>
+              </a:rPr>
+              <a:t>03 / 12</a:t>
+            </a:r>
+          </a:p>
+        </p:txBody>
+      </p:sp>
     </p:spTree>
   </p:cSld>
   <p:clrMapOvr>
@@ -9125,7 +9784,7 @@
       <p:grpSpPr/>
       <p:pic>
         <p:nvPicPr>
-          <p:cNvPr id="13" name="Picture 12" descr="p4a-ai-orchestrate.png"/>
+          <p:cNvPr id="20" name="Picture 19" descr="p4a-ai-orchestrate.png"/>
           <p:cNvPicPr>
             <a:picLocks noChangeAspect="1"/>
           </p:cNvPicPr>
@@ -9133,7 +9792,7 @@
         </p:nvPicPr>
         <p:blipFill>
           <a:blip r:embed="rId2">
-            <a:alphaModFix amt="55000"/>
+            <a:alphaModFix amt="100000"/>
           </a:blip>
           <a:stretch>
             <a:fillRect/>
@@ -9141,8 +9800,8 @@
         </p:blipFill>
         <p:spPr>
           <a:xfrm>
-            <a:off x="274320" y="2194560"/>
-            <a:ext cx="4114800" cy="3657600"/>
+            <a:off x="365760" y="4846320"/>
+            <a:ext cx="2286000" cy="1828800"/>
           </a:xfrm>
           <a:prstGeom prst="rect">
             <a:avLst/>
@@ -9157,7 +9816,7 @@
         </p:nvSpPr>
         <p:spPr>
           <a:xfrm>
-            <a:off x="457200" y="365760"/>
+            <a:off x="457200" y="274320"/>
             <a:ext cx="11277295" cy="365760"/>
           </a:xfrm>
           <a:prstGeom prst="rect">
@@ -9192,7 +9851,7 @@
         </p:nvSpPr>
         <p:spPr>
           <a:xfrm>
-            <a:off x="457200" y="777240"/>
+            <a:off x="457200" y="640080"/>
             <a:ext cx="11277295" cy="640080"/>
           </a:xfrm>
           <a:prstGeom prst="rect">
@@ -9208,13 +9867,13 @@
           <a:p>
             <a:pPr algn="ctr"/>
             <a:r>
-              <a:rPr sz="3200" b="1">
+              <a:rPr sz="2800" b="1">
                 <a:solidFill>
                   <a:srgbClr val="1F2937"/>
                 </a:solidFill>
                 <a:latin typeface="阿里巴巴普惠体 3.0"/>
               </a:rPr>
-              <a:t>Spring AI 一键启动</a:t>
+              <a:t>从 Spring AI 裸用到 JavaBrain 一体化</a:t>
             </a:r>
           </a:p>
         </p:txBody>
@@ -9227,7 +9886,7 @@
         </p:nvSpPr>
         <p:spPr>
           <a:xfrm>
-            <a:off x="457200" y="1325880"/>
+            <a:off x="457200" y="1280160"/>
             <a:ext cx="11277295" cy="365760"/>
           </a:xfrm>
           <a:prstGeom prst="rect">
@@ -9243,13 +9902,13 @@
           <a:p>
             <a:pPr algn="ctr"/>
             <a:r>
-              <a:rPr sz="1600" b="1">
+              <a:rPr sz="1500" b="1">
                 <a:solidFill>
                   <a:srgbClr val="F59E0B"/>
                 </a:solidFill>
                 <a:latin typeface="阿里巴巴普惠体 3.0"/>
               </a:rPr>
-              <a:t>★ 改一个 .st 文件,AI 行为就变</a:t>
+              <a:t>★ 50 行配置 → 1 行模板,半年维护成本归零</a:t>
             </a:r>
           </a:p>
         </p:txBody>
@@ -9262,8 +9921,8 @@
         </p:nvSpPr>
         <p:spPr>
           <a:xfrm>
-            <a:off x="7315200" y="2194560"/>
-            <a:ext cx="4114800" cy="1188720"/>
+            <a:off x="655167" y="1828800"/>
+            <a:ext cx="3383280" cy="2743200"/>
           </a:xfrm>
           <a:prstGeom prst="roundRect">
             <a:avLst/>
@@ -9271,7 +9930,7 @@
           <a:solidFill>
             <a:srgbClr val="FFFFFF"/>
           </a:solidFill>
-          <a:ln w="12700">
+          <a:ln w="19050">
             <a:solidFill>
               <a:srgbClr val="E5E7EB"/>
             </a:solidFill>
@@ -9307,48 +9966,343 @@
         </p:nvSpPr>
         <p:spPr>
           <a:xfrm>
-            <a:off x="7315200" y="2377440"/>
-            <a:ext cx="4114800" cy="822960"/>
-          </a:xfrm>
-          <a:prstGeom prst="rect">
-            <a:avLst/>
-          </a:prstGeom>
-          <a:noFill/>
-        </p:spPr>
-        <p:txBody>
-          <a:bodyPr wrap="square">
-            <a:spAutoFit/>
-          </a:bodyPr>
-          <a:lstStyle/>
-          <a:p>
-            <a:pPr algn="ctr"/>
-            <a:r>
-              <a:rPr sz="1600" b="1">
+            <a:off x="838047" y="1920240"/>
+            <a:ext cx="1280160" cy="1280160"/>
+          </a:xfrm>
+          <a:prstGeom prst="rect">
+            <a:avLst/>
+          </a:prstGeom>
+          <a:noFill/>
+        </p:spPr>
+        <p:txBody>
+          <a:bodyPr wrap="square">
+            <a:spAutoFit/>
+          </a:bodyPr>
+          <a:lstStyle/>
+          <a:p>
+            <a:pPr algn="ctr"/>
+            <a:r>
+              <a:rPr sz="7200" b="1">
+                <a:solidFill>
+                  <a:srgbClr val="E5E7EB"/>
+                </a:solidFill>
+                <a:latin typeface="Inter"/>
+              </a:rPr>
+              <a:t>1</a:t>
+            </a:r>
+          </a:p>
+        </p:txBody>
+      </p:sp>
+      <p:sp>
+        <p:nvSpPr>
+          <p:cNvPr id="7" name="TextBox 6"/>
+          <p:cNvSpPr txBox="1"/>
+          <p:nvPr/>
+        </p:nvSpPr>
+        <p:spPr>
+          <a:xfrm>
+            <a:off x="838047" y="3200400"/>
+            <a:ext cx="3017520" cy="457200"/>
+          </a:xfrm>
+          <a:prstGeom prst="rect">
+            <a:avLst/>
+          </a:prstGeom>
+          <a:noFill/>
+        </p:spPr>
+        <p:txBody>
+          <a:bodyPr wrap="square">
+            <a:spAutoFit/>
+          </a:bodyPr>
+          <a:lstStyle/>
+          <a:p>
+            <a:pPr algn="ctr"/>
+            <a:r>
+              <a:rPr sz="2000" b="1">
+                <a:solidFill>
+                  <a:srgbClr val="E5E7EB"/>
+                </a:solidFill>
+                <a:latin typeface="阿里巴巴普惠体 3.0"/>
+              </a:rPr>
+              <a:t>裸 Spring AI</a:t>
+            </a:r>
+          </a:p>
+        </p:txBody>
+      </p:sp>
+      <p:sp>
+        <p:nvSpPr>
+          <p:cNvPr id="8" name="TextBox 7"/>
+          <p:cNvSpPr txBox="1"/>
+          <p:nvPr/>
+        </p:nvSpPr>
+        <p:spPr>
+          <a:xfrm>
+            <a:off x="838047" y="3657600"/>
+            <a:ext cx="3017520" cy="548640"/>
+          </a:xfrm>
+          <a:prstGeom prst="rect">
+            <a:avLst/>
+          </a:prstGeom>
+          <a:noFill/>
+        </p:spPr>
+        <p:txBody>
+          <a:bodyPr wrap="square">
+            <a:spAutoFit/>
+          </a:bodyPr>
+          <a:lstStyle/>
+          <a:p>
+            <a:pPr algn="ctr"/>
+            <a:r>
+              <a:rPr sz="1300" b="0">
+                <a:solidFill>
+                  <a:srgbClr val="6B7280"/>
+                </a:solidFill>
+                <a:latin typeface="阿里巴巴普惠体 3.0"/>
+              </a:rPr>
+              <a:t>写 50 行</a:t>
+            </a:r>
+          </a:p>
+          <a:p>
+            <a:r>
+              <a:t>ChatClient 配置</a:t>
+            </a:r>
+          </a:p>
+        </p:txBody>
+      </p:sp>
+      <p:sp>
+        <p:nvSpPr>
+          <p:cNvPr id="9" name="TextBox 8"/>
+          <p:cNvSpPr txBox="1"/>
+          <p:nvPr/>
+        </p:nvSpPr>
+        <p:spPr>
+          <a:xfrm>
+            <a:off x="838047" y="4069080"/>
+            <a:ext cx="3017520" cy="365760"/>
+          </a:xfrm>
+          <a:prstGeom prst="rect">
+            <a:avLst/>
+          </a:prstGeom>
+          <a:noFill/>
+        </p:spPr>
+        <p:txBody>
+          <a:bodyPr wrap="square">
+            <a:spAutoFit/>
+          </a:bodyPr>
+          <a:lstStyle/>
+          <a:p>
+            <a:pPr algn="ctr"/>
+            <a:r>
+              <a:rPr sz="1400" b="1">
+                <a:solidFill>
+                  <a:srgbClr val="E5E7EB"/>
+                </a:solidFill>
+                <a:latin typeface="阿里巴巴普惠体 3.0"/>
+              </a:rPr>
+              <a:t>5 天</a:t>
+            </a:r>
+          </a:p>
+        </p:txBody>
+      </p:sp>
+      <p:sp>
+        <p:nvSpPr>
+          <p:cNvPr id="10" name="Rounded Rectangle 9"/>
+          <p:cNvSpPr/>
+          <p:nvPr/>
+        </p:nvSpPr>
+        <p:spPr>
+          <a:xfrm>
+            <a:off x="4404207" y="1828800"/>
+            <a:ext cx="3383280" cy="2743200"/>
+          </a:xfrm>
+          <a:prstGeom prst="roundRect">
+            <a:avLst/>
+          </a:prstGeom>
+          <a:solidFill>
+            <a:srgbClr val="FFFFFF"/>
+          </a:solidFill>
+          <a:ln w="19050">
+            <a:solidFill>
+              <a:srgbClr val="007396"/>
+            </a:solidFill>
+          </a:ln>
+        </p:spPr>
+        <p:style>
+          <a:lnRef idx="1">
+            <a:schemeClr val="accent1"/>
+          </a:lnRef>
+          <a:fillRef idx="3">
+            <a:schemeClr val="accent1"/>
+          </a:fillRef>
+          <a:effectRef idx="2">
+            <a:schemeClr val="accent1"/>
+          </a:effectRef>
+          <a:fontRef idx="minor">
+            <a:schemeClr val="lt1"/>
+          </a:fontRef>
+        </p:style>
+        <p:txBody>
+          <a:bodyPr rtlCol="0" anchor="ctr"/>
+          <a:lstStyle/>
+          <a:p>
+            <a:pPr algn="ctr"/>
+          </a:p>
+        </p:txBody>
+      </p:sp>
+      <p:sp>
+        <p:nvSpPr>
+          <p:cNvPr id="11" name="TextBox 10"/>
+          <p:cNvSpPr txBox="1"/>
+          <p:nvPr/>
+        </p:nvSpPr>
+        <p:spPr>
+          <a:xfrm>
+            <a:off x="4587087" y="1920240"/>
+            <a:ext cx="1280160" cy="1280160"/>
+          </a:xfrm>
+          <a:prstGeom prst="rect">
+            <a:avLst/>
+          </a:prstGeom>
+          <a:noFill/>
+        </p:spPr>
+        <p:txBody>
+          <a:bodyPr wrap="square">
+            <a:spAutoFit/>
+          </a:bodyPr>
+          <a:lstStyle/>
+          <a:p>
+            <a:pPr algn="ctr"/>
+            <a:r>
+              <a:rPr sz="7200" b="1">
                 <a:solidFill>
                   <a:srgbClr val="007396"/>
                 </a:solidFill>
+                <a:latin typeface="Inter"/>
+              </a:rPr>
+              <a:t>2</a:t>
+            </a:r>
+          </a:p>
+        </p:txBody>
+      </p:sp>
+      <p:sp>
+        <p:nvSpPr>
+          <p:cNvPr id="12" name="TextBox 11"/>
+          <p:cNvSpPr txBox="1"/>
+          <p:nvPr/>
+        </p:nvSpPr>
+        <p:spPr>
+          <a:xfrm>
+            <a:off x="4587087" y="3200400"/>
+            <a:ext cx="3017520" cy="457200"/>
+          </a:xfrm>
+          <a:prstGeom prst="rect">
+            <a:avLst/>
+          </a:prstGeom>
+          <a:noFill/>
+        </p:spPr>
+        <p:txBody>
+          <a:bodyPr wrap="square">
+            <a:spAutoFit/>
+          </a:bodyPr>
+          <a:lstStyle/>
+          <a:p>
+            <a:pPr algn="ctr"/>
+            <a:r>
+              <a:rPr sz="2000" b="1">
+                <a:solidFill>
+                  <a:srgbClr val="007396"/>
+                </a:solidFill>
                 <a:latin typeface="阿里巴巴普惠体 3.0"/>
               </a:rPr>
-              <a:t>📦 6 大功能模块</a:t>
-            </a:r>
-          </a:p>
-          <a:p>
-            <a:r>
-              <a:t>一站集成</a:t>
-            </a:r>
-          </a:p>
-        </p:txBody>
-      </p:sp>
-      <p:sp>
-        <p:nvSpPr>
-          <p:cNvPr id="7" name="Rounded Rectangle 6"/>
+              <a:t>灵梭 starter</a:t>
+            </a:r>
+          </a:p>
+        </p:txBody>
+      </p:sp>
+      <p:sp>
+        <p:nvSpPr>
+          <p:cNvPr id="13" name="TextBox 12"/>
+          <p:cNvSpPr txBox="1"/>
+          <p:nvPr/>
+        </p:nvSpPr>
+        <p:spPr>
+          <a:xfrm>
+            <a:off x="4587087" y="3657600"/>
+            <a:ext cx="3017520" cy="548640"/>
+          </a:xfrm>
+          <a:prstGeom prst="rect">
+            <a:avLst/>
+          </a:prstGeom>
+          <a:noFill/>
+        </p:spPr>
+        <p:txBody>
+          <a:bodyPr wrap="square">
+            <a:spAutoFit/>
+          </a:bodyPr>
+          <a:lstStyle/>
+          <a:p>
+            <a:pPr algn="ctr"/>
+            <a:r>
+              <a:rPr sz="1300" b="0">
+                <a:solidFill>
+                  <a:srgbClr val="6B7280"/>
+                </a:solidFill>
+                <a:latin typeface="阿里巴巴普惠体 3.0"/>
+              </a:rPr>
+              <a:t>1 个 @Bean</a:t>
+            </a:r>
+          </a:p>
+          <a:p>
+            <a:r>
+              <a:t>完成 RAG + MCP</a:t>
+            </a:r>
+          </a:p>
+        </p:txBody>
+      </p:sp>
+      <p:sp>
+        <p:nvSpPr>
+          <p:cNvPr id="14" name="TextBox 13"/>
+          <p:cNvSpPr txBox="1"/>
+          <p:nvPr/>
+        </p:nvSpPr>
+        <p:spPr>
+          <a:xfrm>
+            <a:off x="4587087" y="4069080"/>
+            <a:ext cx="3017520" cy="365760"/>
+          </a:xfrm>
+          <a:prstGeom prst="rect">
+            <a:avLst/>
+          </a:prstGeom>
+          <a:noFill/>
+        </p:spPr>
+        <p:txBody>
+          <a:bodyPr wrap="square">
+            <a:spAutoFit/>
+          </a:bodyPr>
+          <a:lstStyle/>
+          <a:p>
+            <a:pPr algn="ctr"/>
+            <a:r>
+              <a:rPr sz="1400" b="1">
+                <a:solidFill>
+                  <a:srgbClr val="007396"/>
+                </a:solidFill>
+                <a:latin typeface="阿里巴巴普惠体 3.0"/>
+              </a:rPr>
+              <a:t>1 天</a:t>
+            </a:r>
+          </a:p>
+        </p:txBody>
+      </p:sp>
+      <p:sp>
+        <p:nvSpPr>
+          <p:cNvPr id="15" name="Rounded Rectangle 14"/>
           <p:cNvSpPr/>
           <p:nvPr/>
         </p:nvSpPr>
         <p:spPr>
           <a:xfrm>
-            <a:off x="11658600" y="2194560"/>
-            <a:ext cx="4114800" cy="1188720"/>
+            <a:off x="8153247" y="1828800"/>
+            <a:ext cx="3383280" cy="2743200"/>
           </a:xfrm>
           <a:prstGeom prst="roundRect">
             <a:avLst/>
@@ -9386,210 +10340,180 @@
       </p:sp>
       <p:sp>
         <p:nvSpPr>
-          <p:cNvPr id="8" name="TextBox 7"/>
-          <p:cNvSpPr txBox="1"/>
-          <p:nvPr/>
-        </p:nvSpPr>
-        <p:spPr>
-          <a:xfrm>
-            <a:off x="11658600" y="2377440"/>
-            <a:ext cx="4114800" cy="822960"/>
-          </a:xfrm>
-          <a:prstGeom prst="rect">
-            <a:avLst/>
-          </a:prstGeom>
-          <a:noFill/>
-        </p:spPr>
-        <p:txBody>
-          <a:bodyPr wrap="square">
-            <a:spAutoFit/>
-          </a:bodyPr>
-          <a:lstStyle/>
-          <a:p>
-            <a:pPr algn="ctr"/>
-            <a:r>
-              <a:rPr sz="1600" b="1">
+          <p:cNvPr id="16" name="TextBox 15"/>
+          <p:cNvSpPr txBox="1"/>
+          <p:nvPr/>
+        </p:nvSpPr>
+        <p:spPr>
+          <a:xfrm>
+            <a:off x="8336127" y="1920240"/>
+            <a:ext cx="1280160" cy="1280160"/>
+          </a:xfrm>
+          <a:prstGeom prst="rect">
+            <a:avLst/>
+          </a:prstGeom>
+          <a:noFill/>
+        </p:spPr>
+        <p:txBody>
+          <a:bodyPr wrap="square">
+            <a:spAutoFit/>
+          </a:bodyPr>
+          <a:lstStyle/>
+          <a:p>
+            <a:pPr algn="ctr"/>
+            <a:r>
+              <a:rPr sz="7200" b="1">
                 <a:solidFill>
                   <a:srgbClr val="F59E0B"/>
                 </a:solidFill>
+                <a:latin typeface="Inter"/>
+              </a:rPr>
+              <a:t>3</a:t>
+            </a:r>
+          </a:p>
+        </p:txBody>
+      </p:sp>
+      <p:sp>
+        <p:nvSpPr>
+          <p:cNvPr id="17" name="TextBox 16"/>
+          <p:cNvSpPr txBox="1"/>
+          <p:nvPr/>
+        </p:nvSpPr>
+        <p:spPr>
+          <a:xfrm>
+            <a:off x="8336127" y="3200400"/>
+            <a:ext cx="3017520" cy="457200"/>
+          </a:xfrm>
+          <a:prstGeom prst="rect">
+            <a:avLst/>
+          </a:prstGeom>
+          <a:noFill/>
+        </p:spPr>
+        <p:txBody>
+          <a:bodyPr wrap="square">
+            <a:spAutoFit/>
+          </a:bodyPr>
+          <a:lstStyle/>
+          <a:p>
+            <a:pPr algn="ctr"/>
+            <a:r>
+              <a:rPr sz="2000" b="1">
+                <a:solidFill>
+                  <a:srgbClr val="F59E0B"/>
+                </a:solidFill>
                 <a:latin typeface="阿里巴巴普惠体 3.0"/>
               </a:rPr>
-              <a:t>🔌 MCP 可热插拔</a:t>
-            </a:r>
-          </a:p>
-          <a:p>
-            <a:r>
-              <a:t>8+ 服务</a:t>
-            </a:r>
-          </a:p>
-        </p:txBody>
-      </p:sp>
-      <p:sp>
-        <p:nvSpPr>
-          <p:cNvPr id="9" name="Rounded Rectangle 8"/>
-          <p:cNvSpPr/>
-          <p:nvPr/>
-        </p:nvSpPr>
-        <p:spPr>
-          <a:xfrm>
-            <a:off x="7315200" y="3611880"/>
-            <a:ext cx="4114800" cy="1188720"/>
-          </a:xfrm>
-          <a:prstGeom prst="roundRect">
-            <a:avLst/>
-          </a:prstGeom>
-          <a:solidFill>
-            <a:srgbClr val="FFFFFF"/>
-          </a:solidFill>
-          <a:ln w="38100">
-            <a:solidFill>
-              <a:srgbClr val="F59E0B"/>
-            </a:solidFill>
-          </a:ln>
-        </p:spPr>
-        <p:style>
-          <a:lnRef idx="1">
-            <a:schemeClr val="accent1"/>
-          </a:lnRef>
-          <a:fillRef idx="3">
-            <a:schemeClr val="accent1"/>
-          </a:fillRef>
-          <a:effectRef idx="2">
-            <a:schemeClr val="accent1"/>
-          </a:effectRef>
-          <a:fontRef idx="minor">
-            <a:schemeClr val="lt1"/>
-          </a:fontRef>
-        </p:style>
-        <p:txBody>
-          <a:bodyPr rtlCol="0" anchor="ctr"/>
-          <a:lstStyle/>
-          <a:p>
-            <a:pPr algn="ctr"/>
-          </a:p>
-        </p:txBody>
-      </p:sp>
-      <p:sp>
-        <p:nvSpPr>
-          <p:cNvPr id="10" name="TextBox 9"/>
-          <p:cNvSpPr txBox="1"/>
-          <p:nvPr/>
-        </p:nvSpPr>
-        <p:spPr>
-          <a:xfrm>
-            <a:off x="7315200" y="3794760"/>
-            <a:ext cx="4114800" cy="822960"/>
-          </a:xfrm>
-          <a:prstGeom prst="rect">
-            <a:avLst/>
-          </a:prstGeom>
-          <a:noFill/>
-        </p:spPr>
-        <p:txBody>
-          <a:bodyPr wrap="square">
-            <a:spAutoFit/>
-          </a:bodyPr>
-          <a:lstStyle/>
-          <a:p>
-            <a:pPr algn="ctr"/>
-            <a:r>
-              <a:rPr sz="1600" b="1">
+              <a:t>.st 模板</a:t>
+            </a:r>
+          </a:p>
+        </p:txBody>
+      </p:sp>
+      <p:sp>
+        <p:nvSpPr>
+          <p:cNvPr id="18" name="TextBox 17"/>
+          <p:cNvSpPr txBox="1"/>
+          <p:nvPr/>
+        </p:nvSpPr>
+        <p:spPr>
+          <a:xfrm>
+            <a:off x="8336127" y="3657600"/>
+            <a:ext cx="3017520" cy="548640"/>
+          </a:xfrm>
+          <a:prstGeom prst="rect">
+            <a:avLst/>
+          </a:prstGeom>
+          <a:noFill/>
+        </p:spPr>
+        <p:txBody>
+          <a:bodyPr wrap="square">
+            <a:spAutoFit/>
+          </a:bodyPr>
+          <a:lstStyle/>
+          <a:p>
+            <a:pPr algn="ctr"/>
+            <a:r>
+              <a:rPr sz="1300" b="0">
+                <a:solidFill>
+                  <a:srgbClr val="6B7280"/>
+                </a:solidFill>
+                <a:latin typeface="阿里巴巴普惠体 3.0"/>
+              </a:rPr>
+              <a:t>改 1 行字</a:t>
+            </a:r>
+          </a:p>
+          <a:p>
+            <a:r>
+              <a:t>AI 行为变</a:t>
+            </a:r>
+          </a:p>
+        </p:txBody>
+      </p:sp>
+      <p:sp>
+        <p:nvSpPr>
+          <p:cNvPr id="19" name="TextBox 18"/>
+          <p:cNvSpPr txBox="1"/>
+          <p:nvPr/>
+        </p:nvSpPr>
+        <p:spPr>
+          <a:xfrm>
+            <a:off x="8336127" y="4069080"/>
+            <a:ext cx="3017520" cy="365760"/>
+          </a:xfrm>
+          <a:prstGeom prst="rect">
+            <a:avLst/>
+          </a:prstGeom>
+          <a:noFill/>
+        </p:spPr>
+        <p:txBody>
+          <a:bodyPr wrap="square">
+            <a:spAutoFit/>
+          </a:bodyPr>
+          <a:lstStyle/>
+          <a:p>
+            <a:pPr algn="ctr"/>
+            <a:r>
+              <a:rPr sz="1400" b="1">
                 <a:solidFill>
                   <a:srgbClr val="F59E0B"/>
                 </a:solidFill>
                 <a:latin typeface="阿里巴巴普惠体 3.0"/>
               </a:rPr>
-              <a:t>🧠 Skill 模板</a:t>
-            </a:r>
-          </a:p>
-          <a:p>
-            <a:r>
-              <a:t>改 .st 即生效</a:t>
-            </a:r>
-          </a:p>
-        </p:txBody>
-      </p:sp>
-      <p:sp>
-        <p:nvSpPr>
-          <p:cNvPr id="11" name="Rounded Rectangle 10"/>
-          <p:cNvSpPr/>
-          <p:nvPr/>
-        </p:nvSpPr>
-        <p:spPr>
-          <a:xfrm>
-            <a:off x="11658600" y="3611880"/>
-            <a:ext cx="4114800" cy="1188720"/>
-          </a:xfrm>
-          <a:prstGeom prst="roundRect">
-            <a:avLst/>
-          </a:prstGeom>
-          <a:solidFill>
-            <a:srgbClr val="FFFFFF"/>
-          </a:solidFill>
-          <a:ln w="12700">
-            <a:solidFill>
-              <a:srgbClr val="E5E7EB"/>
-            </a:solidFill>
-          </a:ln>
-        </p:spPr>
-        <p:style>
-          <a:lnRef idx="1">
-            <a:schemeClr val="accent1"/>
-          </a:lnRef>
-          <a:fillRef idx="3">
-            <a:schemeClr val="accent1"/>
-          </a:fillRef>
-          <a:effectRef idx="2">
-            <a:schemeClr val="accent1"/>
-          </a:effectRef>
-          <a:fontRef idx="minor">
-            <a:schemeClr val="lt1"/>
-          </a:fontRef>
-        </p:style>
-        <p:txBody>
-          <a:bodyPr rtlCol="0" anchor="ctr"/>
-          <a:lstStyle/>
-          <a:p>
-            <a:pPr algn="ctr"/>
-          </a:p>
-        </p:txBody>
-      </p:sp>
-      <p:sp>
-        <p:nvSpPr>
-          <p:cNvPr id="12" name="TextBox 11"/>
-          <p:cNvSpPr txBox="1"/>
-          <p:nvPr/>
-        </p:nvSpPr>
-        <p:spPr>
-          <a:xfrm>
-            <a:off x="11658600" y="3794760"/>
-            <a:ext cx="4114800" cy="822960"/>
-          </a:xfrm>
-          <a:prstGeom prst="rect">
-            <a:avLst/>
-          </a:prstGeom>
-          <a:noFill/>
-        </p:spPr>
-        <p:txBody>
-          <a:bodyPr wrap="square">
-            <a:spAutoFit/>
-          </a:bodyPr>
-          <a:lstStyle/>
-          <a:p>
-            <a:pPr algn="ctr"/>
-            <a:r>
-              <a:rPr sz="1600" b="1">
-                <a:solidFill>
-                  <a:srgbClr val="007396"/>
-                </a:solidFill>
-                <a:latin typeface="阿里巴巴普惠体 3.0"/>
-              </a:rPr>
-              <a:t>💬 流式对话 + 思维链</a:t>
-            </a:r>
-          </a:p>
-          <a:p>
-            <a:r>
-              <a:t>SSE + 可折叠</a:t>
+              <a:t>10 分钟</a:t>
+            </a:r>
+          </a:p>
+        </p:txBody>
+      </p:sp>
+      <p:sp>
+        <p:nvSpPr>
+          <p:cNvPr id="21" name="TextBox 20"/>
+          <p:cNvSpPr txBox="1"/>
+          <p:nvPr/>
+        </p:nvSpPr>
+        <p:spPr>
+          <a:xfrm>
+            <a:off x="10607040" y="6446520"/>
+            <a:ext cx="1280160" cy="274320"/>
+          </a:xfrm>
+          <a:prstGeom prst="rect">
+            <a:avLst/>
+          </a:prstGeom>
+          <a:noFill/>
+        </p:spPr>
+        <p:txBody>
+          <a:bodyPr wrap="square">
+            <a:spAutoFit/>
+          </a:bodyPr>
+          <a:lstStyle/>
+          <a:p>
+            <a:pPr algn="ctr"/>
+            <a:r>
+              <a:rPr sz="1000" b="0">
+                <a:solidFill>
+                  <a:srgbClr val="6B7280"/>
+                </a:solidFill>
+                <a:latin typeface="Inter"/>
+              </a:rPr>
+              <a:t>04 / 12</a:t>
             </a:r>
           </a:p>
         </p:txBody>
@@ -9642,7 +10566,7 @@
             <p:tnCond val="0"/>
           </p:cond>
           <p:par>
-            <p:cTn id="8" nodeType="withEffect" dur="500" begin="700ms" fill="hold">
+            <p:cTn id="10" nodeType="withEffect" dur="500" begin="400ms" fill="hold">
               <p:animEffect presetClass="entr" presetId="10" dur="500"/>
             </p:cTn>
           </p:par>
@@ -9659,7 +10583,7 @@
             <p:tnCond val="0"/>
           </p:cond>
           <p:par>
-            <p:cTn id="10" nodeType="withEffect" dur="500" begin="1000ms" fill="hold">
+            <p:cTn id="11" nodeType="withEffect" dur="500" begin="700ms" fill="hold">
               <p:animEffect presetClass="entr" presetId="10" dur="500"/>
             </p:cTn>
           </p:par>
@@ -9676,7 +10600,7 @@
             <p:tnCond val="0"/>
           </p:cond>
           <p:par>
-            <p:cTn id="12" nodeType="withEffect" dur="500" begin="1300ms" fill="hold">
+            <p:cTn id="15" nodeType="withEffect" dur="500" begin="700ms" fill="hold">
               <p:animEffect presetClass="entr" presetId="10" dur="500"/>
             </p:cTn>
           </p:par>
@@ -9693,7 +10617,41 @@
             <p:tnCond val="0"/>
           </p:cond>
           <p:par>
-            <p:cTn id="10" nodeType="withEffect" dur="1500" begin="2500ms" fill="hold" repeatCount="indefinite">
+            <p:cTn id="16" nodeType="withEffect" dur="500" begin="1000ms" fill="hold">
+              <p:animEffect presetClass="entr" presetId="10" dur="500"/>
+            </p:cTn>
+          </p:par>
+        </p:par>
+      </p:par>
+    </p:tnLst>
+  </p:timing>
+  <p:timing>
+    <p:tnLst>
+      <p:par>
+        <p:pPr/>
+        <p:par>
+          <p:cond>
+            <p:tnCond val="0"/>
+          </p:cond>
+          <p:par>
+            <p:cTn id="20" nodeType="withEffect" dur="500" begin="1000ms" fill="hold">
+              <p:animEffect presetClass="entr" presetId="10" dur="500"/>
+            </p:cTn>
+          </p:par>
+        </p:par>
+      </p:par>
+    </p:tnLst>
+  </p:timing>
+  <p:timing>
+    <p:tnLst>
+      <p:par>
+        <p:pPr/>
+        <p:par>
+          <p:cond>
+            <p:tnCond val="0"/>
+          </p:cond>
+          <p:par>
+            <p:cTn id="16" nodeType="withEffect" dur="1500" begin="2000ms" fill="hold" repeatCount="indefinite">
               <p:animEffect presetClass="emph" presetId="26" dur="1500"/>
             </p:cTn>
           </p:par>
@@ -10478,6 +11436,41 @@
                 <a:latin typeface="阿里巴巴普惠体 3.0"/>
               </a:rPr>
               <a:t>★ 改一个 .st 文件,AI 行为就变</a:t>
+            </a:r>
+          </a:p>
+        </p:txBody>
+      </p:sp>
+      <p:sp>
+        <p:nvSpPr>
+          <p:cNvPr id="22" name="TextBox 21"/>
+          <p:cNvSpPr txBox="1"/>
+          <p:nvPr/>
+        </p:nvSpPr>
+        <p:spPr>
+          <a:xfrm>
+            <a:off x="10607040" y="6446520"/>
+            <a:ext cx="1280160" cy="274320"/>
+          </a:xfrm>
+          <a:prstGeom prst="rect">
+            <a:avLst/>
+          </a:prstGeom>
+          <a:noFill/>
+        </p:spPr>
+        <p:txBody>
+          <a:bodyPr wrap="square">
+            <a:spAutoFit/>
+          </a:bodyPr>
+          <a:lstStyle/>
+          <a:p>
+            <a:pPr algn="ctr"/>
+            <a:r>
+              <a:rPr sz="1000" b="0">
+                <a:solidFill>
+                  <a:srgbClr val="6B7280"/>
+                </a:solidFill>
+                <a:latin typeface="Inter"/>
+              </a:rPr>
+              <a:t>05 / 12</a:t>
             </a:r>
           </a:p>
         </p:txBody>
@@ -10646,7 +11639,7 @@
       <p:grpSpPr/>
       <p:pic>
         <p:nvPicPr>
-          <p:cNvPr id="13" name="Picture 12" descr="p5a-calcite-federation.png"/>
+          <p:cNvPr id="20" name="Picture 19" descr="p5a-calcite-federation.png"/>
           <p:cNvPicPr>
             <a:picLocks noChangeAspect="1"/>
           </p:cNvPicPr>
@@ -10654,7 +11647,7 @@
         </p:nvPicPr>
         <p:blipFill>
           <a:blip r:embed="rId2">
-            <a:alphaModFix amt="55000"/>
+            <a:alphaModFix amt="100000"/>
           </a:blip>
           <a:stretch>
             <a:fillRect/>
@@ -10662,8 +11655,8 @@
         </p:blipFill>
         <p:spPr>
           <a:xfrm>
-            <a:off x="274320" y="2194560"/>
-            <a:ext cx="4114800" cy="3657600"/>
+            <a:off x="365760" y="4846320"/>
+            <a:ext cx="2286000" cy="1828800"/>
           </a:xfrm>
           <a:prstGeom prst="rect">
             <a:avLst/>
@@ -10678,7 +11671,7 @@
         </p:nvSpPr>
         <p:spPr>
           <a:xfrm>
-            <a:off x="457200" y="365760"/>
+            <a:off x="457200" y="274320"/>
             <a:ext cx="11277295" cy="365760"/>
           </a:xfrm>
           <a:prstGeom prst="rect">
@@ -10713,7 +11706,7 @@
         </p:nvSpPr>
         <p:spPr>
           <a:xfrm>
-            <a:off x="457200" y="777240"/>
+            <a:off x="457200" y="640080"/>
             <a:ext cx="11277295" cy="640080"/>
           </a:xfrm>
           <a:prstGeom prst="rect">
@@ -10729,13 +11722,13 @@
           <a:p>
             <a:pPr algn="ctr"/>
             <a:r>
-              <a:rPr sz="3200" b="1">
+              <a:rPr sz="2800" b="1">
                 <a:solidFill>
                   <a:srgbClr val="1F2937"/>
                 </a:solidFill>
                 <a:latin typeface="阿里巴巴普惠体 3.0"/>
               </a:rPr>
-              <a:t>JSON CRUD + Calcite 联邦 + Amis 低代码</a:t>
+              <a:t>从 JDBC 散弹到 Calcite 联邦</a:t>
             </a:r>
           </a:p>
         </p:txBody>
@@ -10748,7 +11741,7 @@
         </p:nvSpPr>
         <p:spPr>
           <a:xfrm>
-            <a:off x="457200" y="1325880"/>
+            <a:off x="457200" y="1280160"/>
             <a:ext cx="11277295" cy="365760"/>
           </a:xfrm>
           <a:prstGeom prst="rect">
@@ -10764,13 +11757,13 @@
           <a:p>
             <a:pPr algn="ctr"/>
             <a:r>
-              <a:rPr sz="1600" b="1">
+              <a:rPr sz="1500" b="1">
                 <a:solidFill>
                   <a:srgbClr val="F59E0B"/>
                 </a:solidFill>
                 <a:latin typeface="阿里巴巴普惠体 3.0"/>
               </a:rPr>
-              <a:t>★ 一套协议 5 method,跨库即写即用,数据不出企业</a:t>
+              <a:t>★ 1 套协议代替 5 套 ORM,数据库迁移零改代码</a:t>
             </a:r>
           </a:p>
         </p:txBody>
@@ -10783,8 +11776,388 @@
         </p:nvSpPr>
         <p:spPr>
           <a:xfrm>
-            <a:off x="7315200" y="2194560"/>
-            <a:ext cx="4114800" cy="1188720"/>
+            <a:off x="655167" y="1828800"/>
+            <a:ext cx="3383280" cy="2743200"/>
+          </a:xfrm>
+          <a:prstGeom prst="roundRect">
+            <a:avLst/>
+          </a:prstGeom>
+          <a:solidFill>
+            <a:srgbClr val="FFFFFF"/>
+          </a:solidFill>
+          <a:ln w="19050">
+            <a:solidFill>
+              <a:srgbClr val="E5E7EB"/>
+            </a:solidFill>
+          </a:ln>
+        </p:spPr>
+        <p:style>
+          <a:lnRef idx="1">
+            <a:schemeClr val="accent1"/>
+          </a:lnRef>
+          <a:fillRef idx="3">
+            <a:schemeClr val="accent1"/>
+          </a:fillRef>
+          <a:effectRef idx="2">
+            <a:schemeClr val="accent1"/>
+          </a:effectRef>
+          <a:fontRef idx="minor">
+            <a:schemeClr val="lt1"/>
+          </a:fontRef>
+        </p:style>
+        <p:txBody>
+          <a:bodyPr rtlCol="0" anchor="ctr"/>
+          <a:lstStyle/>
+          <a:p>
+            <a:pPr algn="ctr"/>
+          </a:p>
+        </p:txBody>
+      </p:sp>
+      <p:sp>
+        <p:nvSpPr>
+          <p:cNvPr id="6" name="TextBox 5"/>
+          <p:cNvSpPr txBox="1"/>
+          <p:nvPr/>
+        </p:nvSpPr>
+        <p:spPr>
+          <a:xfrm>
+            <a:off x="838047" y="1920240"/>
+            <a:ext cx="1280160" cy="1280160"/>
+          </a:xfrm>
+          <a:prstGeom prst="rect">
+            <a:avLst/>
+          </a:prstGeom>
+          <a:noFill/>
+        </p:spPr>
+        <p:txBody>
+          <a:bodyPr wrap="square">
+            <a:spAutoFit/>
+          </a:bodyPr>
+          <a:lstStyle/>
+          <a:p>
+            <a:pPr algn="ctr"/>
+            <a:r>
+              <a:rPr sz="7200" b="1">
+                <a:solidFill>
+                  <a:srgbClr val="E5E7EB"/>
+                </a:solidFill>
+                <a:latin typeface="Inter"/>
+              </a:rPr>
+              <a:t>1</a:t>
+            </a:r>
+          </a:p>
+        </p:txBody>
+      </p:sp>
+      <p:sp>
+        <p:nvSpPr>
+          <p:cNvPr id="7" name="TextBox 6"/>
+          <p:cNvSpPr txBox="1"/>
+          <p:nvPr/>
+        </p:nvSpPr>
+        <p:spPr>
+          <a:xfrm>
+            <a:off x="838047" y="3200400"/>
+            <a:ext cx="3017520" cy="457200"/>
+          </a:xfrm>
+          <a:prstGeom prst="rect">
+            <a:avLst/>
+          </a:prstGeom>
+          <a:noFill/>
+        </p:spPr>
+        <p:txBody>
+          <a:bodyPr wrap="square">
+            <a:spAutoFit/>
+          </a:bodyPr>
+          <a:lstStyle/>
+          <a:p>
+            <a:pPr algn="ctr"/>
+            <a:r>
+              <a:rPr sz="2000" b="1">
+                <a:solidFill>
+                  <a:srgbClr val="E5E7EB"/>
+                </a:solidFill>
+                <a:latin typeface="阿里巴巴普惠体 3.0"/>
+              </a:rPr>
+              <a:t>裸 JDBC / MyBatis</a:t>
+            </a:r>
+          </a:p>
+        </p:txBody>
+      </p:sp>
+      <p:sp>
+        <p:nvSpPr>
+          <p:cNvPr id="8" name="TextBox 7"/>
+          <p:cNvSpPr txBox="1"/>
+          <p:nvPr/>
+        </p:nvSpPr>
+        <p:spPr>
+          <a:xfrm>
+            <a:off x="838047" y="3657600"/>
+            <a:ext cx="3017520" cy="548640"/>
+          </a:xfrm>
+          <a:prstGeom prst="rect">
+            <a:avLst/>
+          </a:prstGeom>
+          <a:noFill/>
+        </p:spPr>
+        <p:txBody>
+          <a:bodyPr wrap="square">
+            <a:spAutoFit/>
+          </a:bodyPr>
+          <a:lstStyle/>
+          <a:p>
+            <a:pPr algn="ctr"/>
+            <a:r>
+              <a:rPr sz="1300" b="0">
+                <a:solidFill>
+                  <a:srgbClr val="6B7280"/>
+                </a:solidFill>
+                <a:latin typeface="阿里巴巴普惠体 3.0"/>
+              </a:rPr>
+              <a:t>维护 N 套 CRUD</a:t>
+            </a:r>
+          </a:p>
+          <a:p>
+            <a:r>
+              <a:t>N 套 ORM 配置</a:t>
+            </a:r>
+          </a:p>
+        </p:txBody>
+      </p:sp>
+      <p:sp>
+        <p:nvSpPr>
+          <p:cNvPr id="9" name="TextBox 8"/>
+          <p:cNvSpPr txBox="1"/>
+          <p:nvPr/>
+        </p:nvSpPr>
+        <p:spPr>
+          <a:xfrm>
+            <a:off x="838047" y="4069080"/>
+            <a:ext cx="3017520" cy="365760"/>
+          </a:xfrm>
+          <a:prstGeom prst="rect">
+            <a:avLst/>
+          </a:prstGeom>
+          <a:noFill/>
+        </p:spPr>
+        <p:txBody>
+          <a:bodyPr wrap="square">
+            <a:spAutoFit/>
+          </a:bodyPr>
+          <a:lstStyle/>
+          <a:p>
+            <a:pPr algn="ctr"/>
+            <a:r>
+              <a:rPr sz="1400" b="1">
+                <a:solidFill>
+                  <a:srgbClr val="E5E7EB"/>
+                </a:solidFill>
+                <a:latin typeface="阿里巴巴普惠体 3.0"/>
+              </a:rPr>
+              <a:t>30 天</a:t>
+            </a:r>
+          </a:p>
+        </p:txBody>
+      </p:sp>
+      <p:sp>
+        <p:nvSpPr>
+          <p:cNvPr id="10" name="Rounded Rectangle 9"/>
+          <p:cNvSpPr/>
+          <p:nvPr/>
+        </p:nvSpPr>
+        <p:spPr>
+          <a:xfrm>
+            <a:off x="4404207" y="1828800"/>
+            <a:ext cx="3383280" cy="2743200"/>
+          </a:xfrm>
+          <a:prstGeom prst="roundRect">
+            <a:avLst/>
+          </a:prstGeom>
+          <a:solidFill>
+            <a:srgbClr val="FFFFFF"/>
+          </a:solidFill>
+          <a:ln w="19050">
+            <a:solidFill>
+              <a:srgbClr val="6B46C1"/>
+            </a:solidFill>
+          </a:ln>
+        </p:spPr>
+        <p:style>
+          <a:lnRef idx="1">
+            <a:schemeClr val="accent1"/>
+          </a:lnRef>
+          <a:fillRef idx="3">
+            <a:schemeClr val="accent1"/>
+          </a:fillRef>
+          <a:effectRef idx="2">
+            <a:schemeClr val="accent1"/>
+          </a:effectRef>
+          <a:fontRef idx="minor">
+            <a:schemeClr val="lt1"/>
+          </a:fontRef>
+        </p:style>
+        <p:txBody>
+          <a:bodyPr rtlCol="0" anchor="ctr"/>
+          <a:lstStyle/>
+          <a:p>
+            <a:pPr algn="ctr"/>
+          </a:p>
+        </p:txBody>
+      </p:sp>
+      <p:sp>
+        <p:nvSpPr>
+          <p:cNvPr id="11" name="TextBox 10"/>
+          <p:cNvSpPr txBox="1"/>
+          <p:nvPr/>
+        </p:nvSpPr>
+        <p:spPr>
+          <a:xfrm>
+            <a:off x="4587087" y="1920240"/>
+            <a:ext cx="1280160" cy="1280160"/>
+          </a:xfrm>
+          <a:prstGeom prst="rect">
+            <a:avLst/>
+          </a:prstGeom>
+          <a:noFill/>
+        </p:spPr>
+        <p:txBody>
+          <a:bodyPr wrap="square">
+            <a:spAutoFit/>
+          </a:bodyPr>
+          <a:lstStyle/>
+          <a:p>
+            <a:pPr algn="ctr"/>
+            <a:r>
+              <a:rPr sz="7200" b="1">
+                <a:solidFill>
+                  <a:srgbClr val="6B46C1"/>
+                </a:solidFill>
+                <a:latin typeface="Inter"/>
+              </a:rPr>
+              <a:t>2</a:t>
+            </a:r>
+          </a:p>
+        </p:txBody>
+      </p:sp>
+      <p:sp>
+        <p:nvSpPr>
+          <p:cNvPr id="12" name="TextBox 11"/>
+          <p:cNvSpPr txBox="1"/>
+          <p:nvPr/>
+        </p:nvSpPr>
+        <p:spPr>
+          <a:xfrm>
+            <a:off x="4587087" y="3200400"/>
+            <a:ext cx="3017520" cy="457200"/>
+          </a:xfrm>
+          <a:prstGeom prst="rect">
+            <a:avLst/>
+          </a:prstGeom>
+          <a:noFill/>
+        </p:spPr>
+        <p:txBody>
+          <a:bodyPr wrap="square">
+            <a:spAutoFit/>
+          </a:bodyPr>
+          <a:lstStyle/>
+          <a:p>
+            <a:pPr algn="ctr"/>
+            <a:r>
+              <a:rPr sz="2000" b="1">
+                <a:solidFill>
+                  <a:srgbClr val="6B46C1"/>
+                </a:solidFill>
+                <a:latin typeface="阿里巴巴普惠体 3.0"/>
+              </a:rPr>
+              <a:t>SQL 工坊 starter</a:t>
+            </a:r>
+          </a:p>
+        </p:txBody>
+      </p:sp>
+      <p:sp>
+        <p:nvSpPr>
+          <p:cNvPr id="13" name="TextBox 12"/>
+          <p:cNvSpPr txBox="1"/>
+          <p:nvPr/>
+        </p:nvSpPr>
+        <p:spPr>
+          <a:xfrm>
+            <a:off x="4587087" y="3657600"/>
+            <a:ext cx="3017520" cy="548640"/>
+          </a:xfrm>
+          <a:prstGeom prst="rect">
+            <a:avLst/>
+          </a:prstGeom>
+          <a:noFill/>
+        </p:spPr>
+        <p:txBody>
+          <a:bodyPr wrap="square">
+            <a:spAutoFit/>
+          </a:bodyPr>
+          <a:lstStyle/>
+          <a:p>
+            <a:pPr algn="ctr"/>
+            <a:r>
+              <a:rPr sz="1300" b="0">
+                <a:solidFill>
+                  <a:srgbClr val="6B7280"/>
+                </a:solidFill>
+                <a:latin typeface="阿里巴巴普惠体 3.0"/>
+              </a:rPr>
+              <a:t>1 套 JSON 协议</a:t>
+            </a:r>
+          </a:p>
+          <a:p>
+            <a:r>
+              <a:t>跨库自动 JOIN</a:t>
+            </a:r>
+          </a:p>
+        </p:txBody>
+      </p:sp>
+      <p:sp>
+        <p:nvSpPr>
+          <p:cNvPr id="14" name="TextBox 13"/>
+          <p:cNvSpPr txBox="1"/>
+          <p:nvPr/>
+        </p:nvSpPr>
+        <p:spPr>
+          <a:xfrm>
+            <a:off x="4587087" y="4069080"/>
+            <a:ext cx="3017520" cy="365760"/>
+          </a:xfrm>
+          <a:prstGeom prst="rect">
+            <a:avLst/>
+          </a:prstGeom>
+          <a:noFill/>
+        </p:spPr>
+        <p:txBody>
+          <a:bodyPr wrap="square">
+            <a:spAutoFit/>
+          </a:bodyPr>
+          <a:lstStyle/>
+          <a:p>
+            <a:pPr algn="ctr"/>
+            <a:r>
+              <a:rPr sz="1400" b="1">
+                <a:solidFill>
+                  <a:srgbClr val="6B46C1"/>
+                </a:solidFill>
+                <a:latin typeface="阿里巴巴普惠体 3.0"/>
+              </a:rPr>
+              <a:t>1 天</a:t>
+            </a:r>
+          </a:p>
+        </p:txBody>
+      </p:sp>
+      <p:sp>
+        <p:nvSpPr>
+          <p:cNvPr id="15" name="Rounded Rectangle 14"/>
+          <p:cNvSpPr/>
+          <p:nvPr/>
+        </p:nvSpPr>
+        <p:spPr>
+          <a:xfrm>
+            <a:off x="8153247" y="1828800"/>
+            <a:ext cx="3383280" cy="2743200"/>
           </a:xfrm>
           <a:prstGeom prst="roundRect">
             <a:avLst/>
@@ -10822,295 +12195,180 @@
       </p:sp>
       <p:sp>
         <p:nvSpPr>
-          <p:cNvPr id="6" name="TextBox 5"/>
-          <p:cNvSpPr txBox="1"/>
-          <p:nvPr/>
-        </p:nvSpPr>
-        <p:spPr>
-          <a:xfrm>
-            <a:off x="7315200" y="2377440"/>
-            <a:ext cx="4114800" cy="822960"/>
-          </a:xfrm>
-          <a:prstGeom prst="rect">
-            <a:avLst/>
-          </a:prstGeom>
-          <a:noFill/>
-        </p:spPr>
-        <p:txBody>
-          <a:bodyPr wrap="square">
-            <a:spAutoFit/>
-          </a:bodyPr>
-          <a:lstStyle/>
-          <a:p>
-            <a:pPr algn="ctr"/>
-            <a:r>
-              <a:rPr sz="1600" b="1">
+          <p:cNvPr id="16" name="TextBox 15"/>
+          <p:cNvSpPr txBox="1"/>
+          <p:nvPr/>
+        </p:nvSpPr>
+        <p:spPr>
+          <a:xfrm>
+            <a:off x="8336127" y="1920240"/>
+            <a:ext cx="1280160" cy="1280160"/>
+          </a:xfrm>
+          <a:prstGeom prst="rect">
+            <a:avLst/>
+          </a:prstGeom>
+          <a:noFill/>
+        </p:spPr>
+        <p:txBody>
+          <a:bodyPr wrap="square">
+            <a:spAutoFit/>
+          </a:bodyPr>
+          <a:lstStyle/>
+          <a:p>
+            <a:pPr algn="ctr"/>
+            <a:r>
+              <a:rPr sz="7200" b="1">
                 <a:solidFill>
                   <a:srgbClr val="F59E0B"/>
                 </a:solidFill>
+                <a:latin typeface="Inter"/>
+              </a:rPr>
+              <a:t>3</a:t>
+            </a:r>
+          </a:p>
+        </p:txBody>
+      </p:sp>
+      <p:sp>
+        <p:nvSpPr>
+          <p:cNvPr id="17" name="TextBox 16"/>
+          <p:cNvSpPr txBox="1"/>
+          <p:nvPr/>
+        </p:nvSpPr>
+        <p:spPr>
+          <a:xfrm>
+            <a:off x="8336127" y="3200400"/>
+            <a:ext cx="3017520" cy="457200"/>
+          </a:xfrm>
+          <a:prstGeom prst="rect">
+            <a:avLst/>
+          </a:prstGeom>
+          <a:noFill/>
+        </p:spPr>
+        <p:txBody>
+          <a:bodyPr wrap="square">
+            <a:spAutoFit/>
+          </a:bodyPr>
+          <a:lstStyle/>
+          <a:p>
+            <a:pPr algn="ctr"/>
+            <a:r>
+              <a:rPr sz="2000" b="1">
+                <a:solidFill>
+                  <a:srgbClr val="F59E0B"/>
+                </a:solidFill>
                 <a:latin typeface="阿里巴巴普惠体 3.0"/>
               </a:rPr>
-              <a:t>🔌 JSON CRUD</a:t>
-            </a:r>
-          </a:p>
-          <a:p>
-            <a:r>
-              <a:t>一套协议 5 method</a:t>
-            </a:r>
-          </a:p>
-        </p:txBody>
-      </p:sp>
-      <p:sp>
-        <p:nvSpPr>
-          <p:cNvPr id="7" name="Rounded Rectangle 6"/>
-          <p:cNvSpPr/>
-          <p:nvPr/>
-        </p:nvSpPr>
-        <p:spPr>
-          <a:xfrm>
-            <a:off x="11658600" y="2194560"/>
-            <a:ext cx="4114800" cy="1188720"/>
-          </a:xfrm>
-          <a:prstGeom prst="roundRect">
-            <a:avLst/>
-          </a:prstGeom>
-          <a:solidFill>
-            <a:srgbClr val="FFFFFF"/>
-          </a:solidFill>
-          <a:ln w="38100">
-            <a:solidFill>
-              <a:srgbClr val="F59E0B"/>
-            </a:solidFill>
-          </a:ln>
-        </p:spPr>
-        <p:style>
-          <a:lnRef idx="1">
-            <a:schemeClr val="accent1"/>
-          </a:lnRef>
-          <a:fillRef idx="3">
-            <a:schemeClr val="accent1"/>
-          </a:fillRef>
-          <a:effectRef idx="2">
-            <a:schemeClr val="accent1"/>
-          </a:effectRef>
-          <a:fontRef idx="minor">
-            <a:schemeClr val="lt1"/>
-          </a:fontRef>
-        </p:style>
-        <p:txBody>
-          <a:bodyPr rtlCol="0" anchor="ctr"/>
-          <a:lstStyle/>
-          <a:p>
-            <a:pPr algn="ctr"/>
-          </a:p>
-        </p:txBody>
-      </p:sp>
-      <p:sp>
-        <p:nvSpPr>
-          <p:cNvPr id="8" name="TextBox 7"/>
-          <p:cNvSpPr txBox="1"/>
-          <p:nvPr/>
-        </p:nvSpPr>
-        <p:spPr>
-          <a:xfrm>
-            <a:off x="11658600" y="2377440"/>
-            <a:ext cx="4114800" cy="822960"/>
-          </a:xfrm>
-          <a:prstGeom prst="rect">
-            <a:avLst/>
-          </a:prstGeom>
-          <a:noFill/>
-        </p:spPr>
-        <p:txBody>
-          <a:bodyPr wrap="square">
-            <a:spAutoFit/>
-          </a:bodyPr>
-          <a:lstStyle/>
-          <a:p>
-            <a:pPr algn="ctr"/>
-            <a:r>
-              <a:rPr sz="1600" b="1">
+              <a:t>sql-forge-mcp</a:t>
+            </a:r>
+          </a:p>
+        </p:txBody>
+      </p:sp>
+      <p:sp>
+        <p:nvSpPr>
+          <p:cNvPr id="18" name="TextBox 17"/>
+          <p:cNvSpPr txBox="1"/>
+          <p:nvPr/>
+        </p:nvSpPr>
+        <p:spPr>
+          <a:xfrm>
+            <a:off x="8336127" y="3657600"/>
+            <a:ext cx="3017520" cy="548640"/>
+          </a:xfrm>
+          <a:prstGeom prst="rect">
+            <a:avLst/>
+          </a:prstGeom>
+          <a:noFill/>
+        </p:spPr>
+        <p:txBody>
+          <a:bodyPr wrap="square">
+            <a:spAutoFit/>
+          </a:bodyPr>
+          <a:lstStyle/>
+          <a:p>
+            <a:pPr algn="ctr"/>
+            <a:r>
+              <a:rPr sz="1300" b="0">
+                <a:solidFill>
+                  <a:srgbClr val="6B7280"/>
+                </a:solidFill>
+                <a:latin typeface="阿里巴巴普惠体 3.0"/>
+              </a:rPr>
+              <a:t>AI 5 受限通道</a:t>
+            </a:r>
+          </a:p>
+          <a:p>
+            <a:r>
+              <a:t>数据不出企业</a:t>
+            </a:r>
+          </a:p>
+        </p:txBody>
+      </p:sp>
+      <p:sp>
+        <p:nvSpPr>
+          <p:cNvPr id="19" name="TextBox 18"/>
+          <p:cNvSpPr txBox="1"/>
+          <p:nvPr/>
+        </p:nvSpPr>
+        <p:spPr>
+          <a:xfrm>
+            <a:off x="8336127" y="4069080"/>
+            <a:ext cx="3017520" cy="365760"/>
+          </a:xfrm>
+          <a:prstGeom prst="rect">
+            <a:avLst/>
+          </a:prstGeom>
+          <a:noFill/>
+        </p:spPr>
+        <p:txBody>
+          <a:bodyPr wrap="square">
+            <a:spAutoFit/>
+          </a:bodyPr>
+          <a:lstStyle/>
+          <a:p>
+            <a:pPr algn="ctr"/>
+            <a:r>
+              <a:rPr sz="1400" b="1">
                 <a:solidFill>
                   <a:srgbClr val="F59E0B"/>
                 </a:solidFill>
                 <a:latin typeface="阿里巴巴普惠体 3.0"/>
               </a:rPr>
-              <a:t>🌐 Calcite 联邦</a:t>
-            </a:r>
-          </a:p>
-          <a:p>
-            <a:r>
-              <a:t>跨 MySQL+PG+H2</a:t>
-            </a:r>
-          </a:p>
-        </p:txBody>
-      </p:sp>
-      <p:sp>
-        <p:nvSpPr>
-          <p:cNvPr id="9" name="Rounded Rectangle 8"/>
-          <p:cNvSpPr/>
-          <p:nvPr/>
-        </p:nvSpPr>
-        <p:spPr>
-          <a:xfrm>
-            <a:off x="7315200" y="3611880"/>
-            <a:ext cx="4114800" cy="1188720"/>
-          </a:xfrm>
-          <a:prstGeom prst="roundRect">
-            <a:avLst/>
-          </a:prstGeom>
-          <a:solidFill>
-            <a:srgbClr val="FFFFFF"/>
-          </a:solidFill>
-          <a:ln w="38100">
-            <a:solidFill>
-              <a:srgbClr val="F59E0B"/>
-            </a:solidFill>
-          </a:ln>
-        </p:spPr>
-        <p:style>
-          <a:lnRef idx="1">
-            <a:schemeClr val="accent1"/>
-          </a:lnRef>
-          <a:fillRef idx="3">
-            <a:schemeClr val="accent1"/>
-          </a:fillRef>
-          <a:effectRef idx="2">
-            <a:schemeClr val="accent1"/>
-          </a:effectRef>
-          <a:fontRef idx="minor">
-            <a:schemeClr val="lt1"/>
-          </a:fontRef>
-        </p:style>
-        <p:txBody>
-          <a:bodyPr rtlCol="0" anchor="ctr"/>
-          <a:lstStyle/>
-          <a:p>
-            <a:pPr algn="ctr"/>
-          </a:p>
-        </p:txBody>
-      </p:sp>
-      <p:sp>
-        <p:nvSpPr>
-          <p:cNvPr id="10" name="TextBox 9"/>
-          <p:cNvSpPr txBox="1"/>
-          <p:nvPr/>
-        </p:nvSpPr>
-        <p:spPr>
-          <a:xfrm>
-            <a:off x="7315200" y="3794760"/>
-            <a:ext cx="4114800" cy="822960"/>
-          </a:xfrm>
-          <a:prstGeom prst="rect">
-            <a:avLst/>
-          </a:prstGeom>
-          <a:noFill/>
-        </p:spPr>
-        <p:txBody>
-          <a:bodyPr wrap="square">
-            <a:spAutoFit/>
-          </a:bodyPr>
-          <a:lstStyle/>
-          <a:p>
-            <a:pPr algn="ctr"/>
-            <a:r>
-              <a:rPr sz="1600" b="1">
-                <a:solidFill>
-                  <a:srgbClr val="F59E0B"/>
-                </a:solidFill>
-                <a:latin typeface="阿里巴巴普惠体 3.0"/>
-              </a:rPr>
-              <a:t>🎨 Amis 低代码</a:t>
-            </a:r>
-          </a:p>
-          <a:p>
-            <a:r>
-              <a:t>JSON 模板 + Console</a:t>
-            </a:r>
-          </a:p>
-        </p:txBody>
-      </p:sp>
-      <p:sp>
-        <p:nvSpPr>
-          <p:cNvPr id="11" name="Rounded Rectangle 10"/>
-          <p:cNvSpPr/>
-          <p:nvPr/>
-        </p:nvSpPr>
-        <p:spPr>
-          <a:xfrm>
-            <a:off x="11658600" y="3611880"/>
-            <a:ext cx="4114800" cy="1188720"/>
-          </a:xfrm>
-          <a:prstGeom prst="roundRect">
-            <a:avLst/>
-          </a:prstGeom>
-          <a:solidFill>
-            <a:srgbClr val="FFFFFF"/>
-          </a:solidFill>
-          <a:ln w="12700">
-            <a:solidFill>
-              <a:srgbClr val="E5E7EB"/>
-            </a:solidFill>
-          </a:ln>
-        </p:spPr>
-        <p:style>
-          <a:lnRef idx="1">
-            <a:schemeClr val="accent1"/>
-          </a:lnRef>
-          <a:fillRef idx="3">
-            <a:schemeClr val="accent1"/>
-          </a:fillRef>
-          <a:effectRef idx="2">
-            <a:schemeClr val="accent1"/>
-          </a:effectRef>
-          <a:fontRef idx="minor">
-            <a:schemeClr val="lt1"/>
-          </a:fontRef>
-        </p:style>
-        <p:txBody>
-          <a:bodyPr rtlCol="0" anchor="ctr"/>
-          <a:lstStyle/>
-          <a:p>
-            <a:pPr algn="ctr"/>
-          </a:p>
-        </p:txBody>
-      </p:sp>
-      <p:sp>
-        <p:nvSpPr>
-          <p:cNvPr id="12" name="TextBox 11"/>
-          <p:cNvSpPr txBox="1"/>
-          <p:nvPr/>
-        </p:nvSpPr>
-        <p:spPr>
-          <a:xfrm>
-            <a:off x="11658600" y="3794760"/>
-            <a:ext cx="4114800" cy="822960"/>
-          </a:xfrm>
-          <a:prstGeom prst="rect">
-            <a:avLst/>
-          </a:prstGeom>
-          <a:noFill/>
-        </p:spPr>
-        <p:txBody>
-          <a:bodyPr wrap="square">
-            <a:spAutoFit/>
-          </a:bodyPr>
-          <a:lstStyle/>
-          <a:p>
-            <a:pPr algn="ctr"/>
-            <a:r>
-              <a:rPr sz="1600" b="1">
-                <a:solidFill>
-                  <a:srgbClr val="007396"/>
-                </a:solidFill>
-                <a:latin typeface="阿里巴巴普惠体 3.0"/>
-              </a:rPr>
-              <a:t>🔒 MCP 5 受限工具</a:t>
-            </a:r>
-          </a:p>
-          <a:p>
-            <a:r>
-              <a:t>数据不出企业</a:t>
+              <a:t>0 直连</a:t>
+            </a:r>
+          </a:p>
+        </p:txBody>
+      </p:sp>
+      <p:sp>
+        <p:nvSpPr>
+          <p:cNvPr id="21" name="TextBox 20"/>
+          <p:cNvSpPr txBox="1"/>
+          <p:nvPr/>
+        </p:nvSpPr>
+        <p:spPr>
+          <a:xfrm>
+            <a:off x="10607040" y="6446520"/>
+            <a:ext cx="1280160" cy="274320"/>
+          </a:xfrm>
+          <a:prstGeom prst="rect">
+            <a:avLst/>
+          </a:prstGeom>
+          <a:noFill/>
+        </p:spPr>
+        <p:txBody>
+          <a:bodyPr wrap="square">
+            <a:spAutoFit/>
+          </a:bodyPr>
+          <a:lstStyle/>
+          <a:p>
+            <a:pPr algn="ctr"/>
+            <a:r>
+              <a:rPr sz="1000" b="0">
+                <a:solidFill>
+                  <a:srgbClr val="6B7280"/>
+                </a:solidFill>
+                <a:latin typeface="Inter"/>
+              </a:rPr>
+              <a:t>06 / 12</a:t>
             </a:r>
           </a:p>
         </p:txBody>
@@ -11163,7 +12421,7 @@
             <p:tnCond val="0"/>
           </p:cond>
           <p:par>
-            <p:cTn id="8" nodeType="withEffect" dur="500" begin="700ms" fill="hold">
+            <p:cTn id="10" nodeType="withEffect" dur="500" begin="400ms" fill="hold">
               <p:animEffect presetClass="entr" presetId="10" dur="500"/>
             </p:cTn>
           </p:par>
@@ -11180,7 +12438,7 @@
             <p:tnCond val="0"/>
           </p:cond>
           <p:par>
-            <p:cTn id="10" nodeType="withEffect" dur="500" begin="1000ms" fill="hold">
+            <p:cTn id="11" nodeType="withEffect" dur="500" begin="700ms" fill="hold">
               <p:animEffect presetClass="entr" presetId="10" dur="500"/>
             </p:cTn>
           </p:par>
@@ -11197,7 +12455,7 @@
             <p:tnCond val="0"/>
           </p:cond>
           <p:par>
-            <p:cTn id="12" nodeType="withEffect" dur="500" begin="1300ms" fill="hold">
+            <p:cTn id="15" nodeType="withEffect" dur="500" begin="700ms" fill="hold">
               <p:animEffect presetClass="entr" presetId="10" dur="500"/>
             </p:cTn>
           </p:par>
@@ -11214,7 +12472,41 @@
             <p:tnCond val="0"/>
           </p:cond>
           <p:par>
-            <p:cTn id="12" nodeType="withEffect" dur="1500" begin="2500ms" fill="hold" repeatCount="indefinite">
+            <p:cTn id="16" nodeType="withEffect" dur="500" begin="1000ms" fill="hold">
+              <p:animEffect presetClass="entr" presetId="10" dur="500"/>
+            </p:cTn>
+          </p:par>
+        </p:par>
+      </p:par>
+    </p:tnLst>
+  </p:timing>
+  <p:timing>
+    <p:tnLst>
+      <p:par>
+        <p:pPr/>
+        <p:par>
+          <p:cond>
+            <p:tnCond val="0"/>
+          </p:cond>
+          <p:par>
+            <p:cTn id="20" nodeType="withEffect" dur="500" begin="1000ms" fill="hold">
+              <p:animEffect presetClass="entr" presetId="10" dur="500"/>
+            </p:cTn>
+          </p:par>
+        </p:par>
+      </p:par>
+    </p:tnLst>
+  </p:timing>
+  <p:timing>
+    <p:tnLst>
+      <p:par>
+        <p:pPr/>
+        <p:par>
+          <p:cond>
+            <p:tnCond val="0"/>
+          </p:cond>
+          <p:par>
+            <p:cTn id="16" nodeType="withEffect" dur="1500" begin="2000ms" fill="hold" repeatCount="indefinite">
               <p:animEffect presetClass="emph" presetId="26" dur="1500"/>
             </p:cTn>
           </p:par>
@@ -12101,6 +13393,41 @@
                 <a:latin typeface="阿里巴巴普惠体 3.0"/>
               </a:rPr>
               <a:t>★ AI 通过 5 个受限通道安全对话业务库,数据不出企业</a:t>
+            </a:r>
+          </a:p>
+        </p:txBody>
+      </p:sp>
+      <p:sp>
+        <p:nvSpPr>
+          <p:cNvPr id="24" name="TextBox 23"/>
+          <p:cNvSpPr txBox="1"/>
+          <p:nvPr/>
+        </p:nvSpPr>
+        <p:spPr>
+          <a:xfrm>
+            <a:off x="10607040" y="6446520"/>
+            <a:ext cx="1280160" cy="274320"/>
+          </a:xfrm>
+          <a:prstGeom prst="rect">
+            <a:avLst/>
+          </a:prstGeom>
+          <a:noFill/>
+        </p:spPr>
+        <p:txBody>
+          <a:bodyPr wrap="square">
+            <a:spAutoFit/>
+          </a:bodyPr>
+          <a:lstStyle/>
+          <a:p>
+            <a:pPr algn="ctr"/>
+            <a:r>
+              <a:rPr sz="1000" b="0">
+                <a:solidFill>
+                  <a:srgbClr val="6B7280"/>
+                </a:solidFill>
+                <a:latin typeface="Inter"/>
+              </a:rPr>
+              <a:t>07 / 12</a:t>
             </a:r>
           </a:p>
         </p:txBody>
@@ -13172,6 +14499,41 @@
           </a:p>
         </p:txBody>
       </p:sp>
+      <p:sp>
+        <p:nvSpPr>
+          <p:cNvPr id="24" name="TextBox 23"/>
+          <p:cNvSpPr txBox="1"/>
+          <p:nvPr/>
+        </p:nvSpPr>
+        <p:spPr>
+          <a:xfrm>
+            <a:off x="10607040" y="6446520"/>
+            <a:ext cx="1280160" cy="274320"/>
+          </a:xfrm>
+          <a:prstGeom prst="rect">
+            <a:avLst/>
+          </a:prstGeom>
+          <a:noFill/>
+        </p:spPr>
+        <p:txBody>
+          <a:bodyPr wrap="square">
+            <a:spAutoFit/>
+          </a:bodyPr>
+          <a:lstStyle/>
+          <a:p>
+            <a:pPr algn="ctr"/>
+            <a:r>
+              <a:rPr sz="1000" b="0">
+                <a:solidFill>
+                  <a:srgbClr val="6B7280"/>
+                </a:solidFill>
+                <a:latin typeface="Inter"/>
+              </a:rPr>
+              <a:t>08 / 12</a:t>
+            </a:r>
+          </a:p>
+        </p:txBody>
+      </p:sp>
     </p:spTree>
   </p:cSld>
   <p:clrMapOvr>
@@ -14116,6 +15478,41 @@
                 <a:latin typeface="阿里巴巴普惠体 3.0"/>
               </a:rPr>
               <a:t>▼ 接下来看 40 秒真实录屏</a:t>
+            </a:r>
+          </a:p>
+        </p:txBody>
+      </p:sp>
+      <p:sp>
+        <p:nvSpPr>
+          <p:cNvPr id="24" name="TextBox 23"/>
+          <p:cNvSpPr txBox="1"/>
+          <p:nvPr/>
+        </p:nvSpPr>
+        <p:spPr>
+          <a:xfrm>
+            <a:off x="10607040" y="6446520"/>
+            <a:ext cx="1280160" cy="274320"/>
+          </a:xfrm>
+          <a:prstGeom prst="rect">
+            <a:avLst/>
+          </a:prstGeom>
+          <a:noFill/>
+        </p:spPr>
+        <p:txBody>
+          <a:bodyPr wrap="square">
+            <a:spAutoFit/>
+          </a:bodyPr>
+          <a:lstStyle/>
+          <a:p>
+            <a:pPr algn="ctr"/>
+            <a:r>
+              <a:rPr sz="1000" b="0">
+                <a:solidFill>
+                  <a:srgbClr val="6B7280"/>
+                </a:solidFill>
+                <a:latin typeface="Inter"/>
+              </a:rPr>
+              <a:t>09 / 12</a:t>
             </a:r>
           </a:p>
         </p:txBody>

--- a/docs/ppt/javabrain.pptx
+++ b/docs/ppt/javabrain.pptx
@@ -3564,7 +3564,24 @@
             <p:tnCond val="0"/>
           </p:cond>
           <p:par>
-            <p:cTn id="4" nodeType="withEffect" dur="500" begin="0ms" fill="hold">
+            <p:cTn id="3" nodeType="withEffect" dur="800" begin="0ms" fill="hold">
+              <p:animEffect presetClass="entr" presetId="23" dur="800"/>
+            </p:cTn>
+          </p:par>
+        </p:par>
+      </p:par>
+    </p:tnLst>
+  </p:timing>
+  <p:timing>
+    <p:tnLst>
+      <p:par>
+        <p:pPr/>
+        <p:par>
+          <p:cond>
+            <p:tnCond val="0"/>
+          </p:cond>
+          <p:par>
+            <p:cTn id="4" nodeType="withEffect" dur="500" begin="600ms" fill="hold">
               <p:animEffect presetClass="entr" presetId="10" dur="500"/>
             </p:cTn>
           </p:par>
@@ -3581,7 +3598,7 @@
             <p:tnCond val="0"/>
           </p:cond>
           <p:par>
-            <p:cTn id="5" nodeType="withEffect" dur="500" begin="400ms" fill="hold">
+            <p:cTn id="5" nodeType="withEffect" dur="500" begin="1000ms" fill="hold">
               <p:animEffect presetClass="entr" presetId="10" dur="500"/>
             </p:cTn>
           </p:par>
@@ -3598,7 +3615,7 @@
             <p:tnCond val="0"/>
           </p:cond>
           <p:par>
-            <p:cTn id="6" nodeType="withEffect" dur="500" begin="800ms" fill="hold">
+            <p:cTn id="6" nodeType="withEffect" dur="500" begin="1400ms" fill="hold">
               <p:animEffect presetClass="entr" presetId="10" dur="500"/>
             </p:cTn>
           </p:par>
@@ -3615,7 +3632,7 @@
             <p:tnCond val="0"/>
           </p:cond>
           <p:par>
-            <p:cTn id="9" nodeType="withEffect" dur="500" begin="1000ms" fill="hold">
+            <p:cTn id="9" nodeType="withEffect" dur="500" begin="1600ms" fill="hold">
               <p:animEffect presetClass="entr" presetId="10" dur="500"/>
             </p:cTn>
           </p:par>
@@ -3632,8 +3649,8 @@
             <p:tnCond val="0"/>
           </p:cond>
           <p:par>
-            <p:cTn id="12" nodeType="withEffect" dur="500" begin="1400ms" fill="hold">
-              <p:animEffect presetClass="entr" presetId="10" dur="500"/>
+            <p:cTn id="12" nodeType="withEffect" dur="600" begin="2000ms" fill="hold">
+              <p:animEffect presetClass="entr" presetId="23" dur="600"/>
             </p:cTn>
           </p:par>
         </p:par>
@@ -4934,8 +4951,8 @@
             <p:tnCond val="0"/>
           </p:cond>
           <p:par>
-            <p:cTn id="5" nodeType="withEffect" dur="500" begin="0ms" fill="hold">
-              <p:animEffect presetClass="entr" presetId="10" dur="500"/>
+            <p:cTn id="5" nodeType="withEffect" dur="400" begin="0ms" fill="hold">
+              <p:animEffect presetClass="entr" presetId="10" dur="400"/>
             </p:cTn>
           </p:par>
         </p:par>
@@ -4951,8 +4968,8 @@
             <p:tnCond val="0"/>
           </p:cond>
           <p:par>
-            <p:cTn id="6" nodeType="withEffect" dur="500" begin="400ms" fill="hold">
-              <p:animEffect presetClass="entr" presetId="10" dur="500"/>
+            <p:cTn id="6" nodeType="withEffect" dur="400" begin="225ms" fill="hold">
+              <p:animEffect presetClass="entr" presetId="10" dur="400"/>
             </p:cTn>
           </p:par>
         </p:par>
@@ -4968,8 +4985,8 @@
             <p:tnCond val="0"/>
           </p:cond>
           <p:par>
-            <p:cTn id="7" nodeType="withEffect" dur="500" begin="800ms" fill="hold">
-              <p:animEffect presetClass="entr" presetId="10" dur="500"/>
+            <p:cTn id="7" nodeType="withEffect" dur="400" begin="450ms" fill="hold">
+              <p:animEffect presetClass="entr" presetId="10" dur="400"/>
             </p:cTn>
           </p:par>
         </p:par>
@@ -4985,8 +5002,8 @@
             <p:tnCond val="0"/>
           </p:cond>
           <p:par>
-            <p:cTn id="8" nodeType="withEffect" dur="500" begin="1200ms" fill="hold">
-              <p:animEffect presetClass="entr" presetId="10" dur="500"/>
+            <p:cTn id="8" nodeType="withEffect" dur="400" begin="675ms" fill="hold">
+              <p:animEffect presetClass="entr" presetId="10" dur="400"/>
             </p:cTn>
           </p:par>
         </p:par>
@@ -5002,8 +5019,8 @@
             <p:tnCond val="0"/>
           </p:cond>
           <p:par>
-            <p:cTn id="10" nodeType="withEffect" dur="500" begin="1800ms" fill="hold">
-              <p:animEffect presetClass="entr" presetId="10" dur="500"/>
+            <p:cTn id="10" nodeType="withEffect" dur="400" begin="1200ms" fill="hold">
+              <p:animEffect presetClass="entr" presetId="10" dur="400"/>
             </p:cTn>
           </p:par>
         </p:par>
@@ -5019,8 +5036,8 @@
             <p:tnCond val="0"/>
           </p:cond>
           <p:par>
-            <p:cTn id="13" nodeType="withEffect" dur="500" begin="2050ms" fill="hold">
-              <p:animEffect presetClass="entr" presetId="10" dur="500"/>
+            <p:cTn id="13" nodeType="withEffect" dur="400" begin="1400ms" fill="hold">
+              <p:animEffect presetClass="entr" presetId="10" dur="400"/>
             </p:cTn>
           </p:par>
         </p:par>
@@ -5036,8 +5053,8 @@
             <p:tnCond val="0"/>
           </p:cond>
           <p:par>
-            <p:cTn id="16" nodeType="withEffect" dur="500" begin="2300ms" fill="hold">
-              <p:animEffect presetClass="entr" presetId="10" dur="500"/>
+            <p:cTn id="16" nodeType="withEffect" dur="400" begin="1600ms" fill="hold">
+              <p:animEffect presetClass="entr" presetId="10" dur="400"/>
             </p:cTn>
           </p:par>
         </p:par>
@@ -5053,8 +5070,8 @@
             <p:tnCond val="0"/>
           </p:cond>
           <p:par>
-            <p:cTn id="21" nodeType="withEffect" dur="500" begin="3000ms" fill="hold">
-              <p:animEffect presetClass="entr" presetId="10" dur="500"/>
+            <p:cTn id="21" nodeType="withEffect" dur="400" begin="2100ms" fill="hold">
+              <p:animEffect presetClass="entr" presetId="10" dur="400"/>
             </p:cTn>
           </p:par>
         </p:par>
@@ -5070,8 +5087,8 @@
             <p:tnCond val="0"/>
           </p:cond>
           <p:par>
-            <p:cTn id="24" nodeType="withEffect" dur="500" begin="3500ms" fill="hold">
-              <p:animEffect presetClass="entr" presetId="10" dur="500"/>
+            <p:cTn id="24" nodeType="withEffect" dur="400" begin="2300ms" fill="hold">
+              <p:animEffect presetClass="entr" presetId="10" dur="400"/>
             </p:cTn>
           </p:par>
         </p:par>
@@ -5087,8 +5104,8 @@
             <p:tnCond val="0"/>
           </p:cond>
           <p:par>
-            <p:cTn id="27" nodeType="withEffect" dur="500" begin="4000ms" fill="hold">
-              <p:animEffect presetClass="entr" presetId="10" dur="500"/>
+            <p:cTn id="27" nodeType="withEffect" dur="400" begin="2500ms" fill="hold">
+              <p:animEffect presetClass="entr" presetId="10" dur="400"/>
             </p:cTn>
           </p:par>
         </p:par>
@@ -5104,8 +5121,8 @@
             <p:tnCond val="0"/>
           </p:cond>
           <p:par>
-            <p:cTn id="30" nodeType="withEffect" dur="500" begin="4500ms" fill="hold">
-              <p:animEffect presetClass="entr" presetId="10" dur="500"/>
+            <p:cTn id="30" nodeType="withEffect" dur="400" begin="2700ms" fill="hold">
+              <p:animEffect presetClass="entr" presetId="10" dur="400"/>
             </p:cTn>
           </p:par>
         </p:par>
@@ -5121,8 +5138,8 @@
             <p:tnCond val="0"/>
           </p:cond>
           <p:par>
-            <p:cTn id="33" nodeType="withEffect" dur="500" begin="5000ms" fill="hold">
-              <p:animEffect presetClass="entr" presetId="10" dur="500"/>
+            <p:cTn id="33" nodeType="withEffect" dur="400" begin="2900ms" fill="hold">
+              <p:animEffect presetClass="entr" presetId="10" dur="400"/>
             </p:cTn>
           </p:par>
         </p:par>
@@ -5169,7 +5186,7 @@
       <p:grpSpPr/>
       <p:pic>
         <p:nvPicPr>
-          <p:cNvPr id="2" name="Picture 1" descr="p9-bg-timeline.png"/>
+          <p:cNvPr id="3" name="Picture 2" descr="p9_dual_timeline.png"/>
           <p:cNvPicPr>
             <a:picLocks noChangeAspect="1"/>
           </p:cNvPicPr>
@@ -5185,8 +5202,8 @@
         </p:blipFill>
         <p:spPr>
           <a:xfrm>
-            <a:off x="8686800" y="228600"/>
-            <a:ext cx="3200400" cy="594360"/>
+            <a:off x="457200" y="868680"/>
+            <a:ext cx="11277295" cy="1097280"/>
           </a:xfrm>
           <a:prstGeom prst="rect">
             <a:avLst/>
@@ -5195,7 +5212,7 @@
       </p:pic>
       <p:sp>
         <p:nvSpPr>
-          <p:cNvPr id="3" name="TextBox 2"/>
+          <p:cNvPr id="2" name="TextBox 1"/>
           <p:cNvSpPr txBox="1"/>
           <p:nvPr/>
         </p:nvSpPr>
@@ -5236,8 +5253,8 @@
         </p:nvSpPr>
         <p:spPr>
           <a:xfrm>
-            <a:off x="274320" y="960120"/>
-            <a:ext cx="5669280" cy="365760"/>
+            <a:off x="274320" y="2194560"/>
+            <a:ext cx="6949440" cy="365760"/>
           </a:xfrm>
           <a:prstGeom prst="rect">
             <a:avLst/>
@@ -5258,7 +5275,7 @@
                 </a:solidFill>
                 <a:latin typeface="阿里巴巴普惠体 3.0"/>
               </a:rPr>
-              <a:t>灵梭 · AI 赋能中心</a:t>
+              <a:t>灵梭 · AI 赋能中心 (主线 60%)</a:t>
             </a:r>
           </a:p>
         </p:txBody>
@@ -5271,8 +5288,8 @@
         </p:nvSpPr>
         <p:spPr>
           <a:xfrm>
-            <a:off x="274320" y="1463040"/>
-            <a:ext cx="5669280" cy="731520"/>
+            <a:off x="274320" y="2697480"/>
+            <a:ext cx="6949440" cy="457200"/>
           </a:xfrm>
           <a:prstGeom prst="roundRect">
             <a:avLst/>
@@ -5316,23 +5333,23 @@
         </p:nvSpPr>
         <p:spPr>
           <a:xfrm>
-            <a:off x="457200" y="1508760"/>
-            <a:ext cx="5486400" cy="320040"/>
-          </a:xfrm>
-          <a:prstGeom prst="rect">
-            <a:avLst/>
-          </a:prstGeom>
-          <a:noFill/>
-        </p:spPr>
-        <p:txBody>
-          <a:bodyPr wrap="square">
-            <a:spAutoFit/>
-          </a:bodyPr>
-          <a:lstStyle/>
-          <a:p>
-            <a:pPr algn="ctr"/>
-            <a:r>
-              <a:rPr sz="1500" b="1">
+            <a:off x="457200" y="2734056"/>
+            <a:ext cx="6766560" cy="228600"/>
+          </a:xfrm>
+          <a:prstGeom prst="rect">
+            <a:avLst/>
+          </a:prstGeom>
+          <a:noFill/>
+        </p:spPr>
+        <p:txBody>
+          <a:bodyPr wrap="square">
+            <a:spAutoFit/>
+          </a:bodyPr>
+          <a:lstStyle/>
+          <a:p>
+            <a:pPr algn="ctr"/>
+            <a:r>
+              <a:rPr sz="1300" b="1">
                 <a:solidFill>
                   <a:srgbClr val="007396"/>
                 </a:solidFill>
@@ -5351,23 +5368,23 @@
         </p:nvSpPr>
         <p:spPr>
           <a:xfrm>
-            <a:off x="457200" y="1847088"/>
-            <a:ext cx="5486400" cy="320040"/>
-          </a:xfrm>
-          <a:prstGeom prst="rect">
-            <a:avLst/>
-          </a:prstGeom>
-          <a:noFill/>
-        </p:spPr>
-        <p:txBody>
-          <a:bodyPr wrap="square">
-            <a:spAutoFit/>
-          </a:bodyPr>
-          <a:lstStyle/>
-          <a:p>
-            <a:pPr algn="ctr"/>
-            <a:r>
-              <a:rPr sz="1300" b="0">
+            <a:off x="457200" y="2953512"/>
+            <a:ext cx="6766560" cy="201168"/>
+          </a:xfrm>
+          <a:prstGeom prst="rect">
+            <a:avLst/>
+          </a:prstGeom>
+          <a:noFill/>
+        </p:spPr>
+        <p:txBody>
+          <a:bodyPr wrap="square">
+            <a:spAutoFit/>
+          </a:bodyPr>
+          <a:lstStyle/>
+          <a:p>
+            <a:pPr algn="ctr"/>
+            <a:r>
+              <a:rPr sz="1100" b="0">
                 <a:solidFill>
                   <a:srgbClr val="6B7280"/>
                 </a:solidFill>
@@ -5386,8 +5403,8 @@
         </p:nvSpPr>
         <p:spPr>
           <a:xfrm>
-            <a:off x="274320" y="2331720"/>
-            <a:ext cx="5669280" cy="731520"/>
+            <a:off x="274320" y="3246120"/>
+            <a:ext cx="6949440" cy="457200"/>
           </a:xfrm>
           <a:prstGeom prst="roundRect">
             <a:avLst/>
@@ -5431,23 +5448,23 @@
         </p:nvSpPr>
         <p:spPr>
           <a:xfrm>
-            <a:off x="457200" y="2377439"/>
-            <a:ext cx="5486400" cy="320040"/>
-          </a:xfrm>
-          <a:prstGeom prst="rect">
-            <a:avLst/>
-          </a:prstGeom>
-          <a:noFill/>
-        </p:spPr>
-        <p:txBody>
-          <a:bodyPr wrap="square">
-            <a:spAutoFit/>
-          </a:bodyPr>
-          <a:lstStyle/>
-          <a:p>
-            <a:pPr algn="ctr"/>
-            <a:r>
-              <a:rPr sz="1500" b="1">
+            <a:off x="457200" y="3282696"/>
+            <a:ext cx="6766560" cy="228600"/>
+          </a:xfrm>
+          <a:prstGeom prst="rect">
+            <a:avLst/>
+          </a:prstGeom>
+          <a:noFill/>
+        </p:spPr>
+        <p:txBody>
+          <a:bodyPr wrap="square">
+            <a:spAutoFit/>
+          </a:bodyPr>
+          <a:lstStyle/>
+          <a:p>
+            <a:pPr algn="ctr"/>
+            <a:r>
+              <a:rPr sz="1300" b="1">
                 <a:solidFill>
                   <a:srgbClr val="007396"/>
                 </a:solidFill>
@@ -5466,23 +5483,23 @@
         </p:nvSpPr>
         <p:spPr>
           <a:xfrm>
-            <a:off x="457200" y="2715768"/>
-            <a:ext cx="5486400" cy="320040"/>
-          </a:xfrm>
-          <a:prstGeom prst="rect">
-            <a:avLst/>
-          </a:prstGeom>
-          <a:noFill/>
-        </p:spPr>
-        <p:txBody>
-          <a:bodyPr wrap="square">
-            <a:spAutoFit/>
-          </a:bodyPr>
-          <a:lstStyle/>
-          <a:p>
-            <a:pPr algn="ctr"/>
-            <a:r>
-              <a:rPr sz="1300" b="0">
+            <a:off x="457200" y="3502152"/>
+            <a:ext cx="6766560" cy="201168"/>
+          </a:xfrm>
+          <a:prstGeom prst="rect">
+            <a:avLst/>
+          </a:prstGeom>
+          <a:noFill/>
+        </p:spPr>
+        <p:txBody>
+          <a:bodyPr wrap="square">
+            <a:spAutoFit/>
+          </a:bodyPr>
+          <a:lstStyle/>
+          <a:p>
+            <a:pPr algn="ctr"/>
+            <a:r>
+              <a:rPr sz="1100" b="0">
                 <a:solidFill>
                   <a:srgbClr val="6B7280"/>
                 </a:solidFill>
@@ -5501,8 +5518,8 @@
         </p:nvSpPr>
         <p:spPr>
           <a:xfrm>
-            <a:off x="274320" y="3200400"/>
-            <a:ext cx="5669280" cy="731520"/>
+            <a:off x="274320" y="3794760"/>
+            <a:ext cx="6949440" cy="457200"/>
           </a:xfrm>
           <a:prstGeom prst="roundRect">
             <a:avLst/>
@@ -5546,23 +5563,23 @@
         </p:nvSpPr>
         <p:spPr>
           <a:xfrm>
-            <a:off x="457200" y="3246120"/>
-            <a:ext cx="5486400" cy="320040"/>
-          </a:xfrm>
-          <a:prstGeom prst="rect">
-            <a:avLst/>
-          </a:prstGeom>
-          <a:noFill/>
-        </p:spPr>
-        <p:txBody>
-          <a:bodyPr wrap="square">
-            <a:spAutoFit/>
-          </a:bodyPr>
-          <a:lstStyle/>
-          <a:p>
-            <a:pPr algn="ctr"/>
-            <a:r>
-              <a:rPr sz="1500" b="1">
+            <a:off x="457200" y="3831336"/>
+            <a:ext cx="6766560" cy="228600"/>
+          </a:xfrm>
+          <a:prstGeom prst="rect">
+            <a:avLst/>
+          </a:prstGeom>
+          <a:noFill/>
+        </p:spPr>
+        <p:txBody>
+          <a:bodyPr wrap="square">
+            <a:spAutoFit/>
+          </a:bodyPr>
+          <a:lstStyle/>
+          <a:p>
+            <a:pPr algn="ctr"/>
+            <a:r>
+              <a:rPr sz="1300" b="1">
                 <a:solidFill>
                   <a:srgbClr val="007396"/>
                 </a:solidFill>
@@ -5581,23 +5598,23 @@
         </p:nvSpPr>
         <p:spPr>
           <a:xfrm>
-            <a:off x="457200" y="3584448"/>
-            <a:ext cx="5486400" cy="320040"/>
-          </a:xfrm>
-          <a:prstGeom prst="rect">
-            <a:avLst/>
-          </a:prstGeom>
-          <a:noFill/>
-        </p:spPr>
-        <p:txBody>
-          <a:bodyPr wrap="square">
-            <a:spAutoFit/>
-          </a:bodyPr>
-          <a:lstStyle/>
-          <a:p>
-            <a:pPr algn="ctr"/>
-            <a:r>
-              <a:rPr sz="1300" b="0">
+            <a:off x="457200" y="4050792"/>
+            <a:ext cx="6766560" cy="201168"/>
+          </a:xfrm>
+          <a:prstGeom prst="rect">
+            <a:avLst/>
+          </a:prstGeom>
+          <a:noFill/>
+        </p:spPr>
+        <p:txBody>
+          <a:bodyPr wrap="square">
+            <a:spAutoFit/>
+          </a:bodyPr>
+          <a:lstStyle/>
+          <a:p>
+            <a:pPr algn="ctr"/>
+            <a:r>
+              <a:rPr sz="1100" b="0">
                 <a:solidFill>
                   <a:srgbClr val="6B7280"/>
                 </a:solidFill>
@@ -5616,8 +5633,8 @@
         </p:nvSpPr>
         <p:spPr>
           <a:xfrm>
-            <a:off x="274320" y="4069079"/>
-            <a:ext cx="5669280" cy="731520"/>
+            <a:off x="274320" y="4343400"/>
+            <a:ext cx="6949440" cy="457200"/>
           </a:xfrm>
           <a:prstGeom prst="roundRect">
             <a:avLst/>
@@ -5661,23 +5678,23 @@
         </p:nvSpPr>
         <p:spPr>
           <a:xfrm>
-            <a:off x="457200" y="4114799"/>
-            <a:ext cx="5486400" cy="320040"/>
-          </a:xfrm>
-          <a:prstGeom prst="rect">
-            <a:avLst/>
-          </a:prstGeom>
-          <a:noFill/>
-        </p:spPr>
-        <p:txBody>
-          <a:bodyPr wrap="square">
-            <a:spAutoFit/>
-          </a:bodyPr>
-          <a:lstStyle/>
-          <a:p>
-            <a:pPr algn="ctr"/>
-            <a:r>
-              <a:rPr sz="1500" b="1">
+            <a:off x="457200" y="4379976"/>
+            <a:ext cx="6766560" cy="228600"/>
+          </a:xfrm>
+          <a:prstGeom prst="rect">
+            <a:avLst/>
+          </a:prstGeom>
+          <a:noFill/>
+        </p:spPr>
+        <p:txBody>
+          <a:bodyPr wrap="square">
+            <a:spAutoFit/>
+          </a:bodyPr>
+          <a:lstStyle/>
+          <a:p>
+            <a:pPr algn="ctr"/>
+            <a:r>
+              <a:rPr sz="1300" b="1">
                 <a:solidFill>
                   <a:srgbClr val="007396"/>
                 </a:solidFill>
@@ -5696,23 +5713,23 @@
         </p:nvSpPr>
         <p:spPr>
           <a:xfrm>
-            <a:off x="457200" y="4453127"/>
-            <a:ext cx="5486400" cy="320040"/>
-          </a:xfrm>
-          <a:prstGeom prst="rect">
-            <a:avLst/>
-          </a:prstGeom>
-          <a:noFill/>
-        </p:spPr>
-        <p:txBody>
-          <a:bodyPr wrap="square">
-            <a:spAutoFit/>
-          </a:bodyPr>
-          <a:lstStyle/>
-          <a:p>
-            <a:pPr algn="ctr"/>
-            <a:r>
-              <a:rPr sz="1300" b="0">
+            <a:off x="457200" y="4599432"/>
+            <a:ext cx="6766560" cy="201168"/>
+          </a:xfrm>
+          <a:prstGeom prst="rect">
+            <a:avLst/>
+          </a:prstGeom>
+          <a:noFill/>
+        </p:spPr>
+        <p:txBody>
+          <a:bodyPr wrap="square">
+            <a:spAutoFit/>
+          </a:bodyPr>
+          <a:lstStyle/>
+          <a:p>
+            <a:pPr algn="ctr"/>
+            <a:r>
+              <a:rPr sz="1100" b="0">
                 <a:solidFill>
                   <a:srgbClr val="6B7280"/>
                 </a:solidFill>
@@ -5731,29 +5748,29 @@
         </p:nvSpPr>
         <p:spPr>
           <a:xfrm>
-            <a:off x="6248095" y="960120"/>
-            <a:ext cx="5669280" cy="365760"/>
-          </a:xfrm>
-          <a:prstGeom prst="rect">
-            <a:avLst/>
-          </a:prstGeom>
-          <a:noFill/>
-        </p:spPr>
-        <p:txBody>
-          <a:bodyPr wrap="square">
-            <a:spAutoFit/>
-          </a:bodyPr>
-          <a:lstStyle/>
-          <a:p>
-            <a:pPr algn="ctr"/>
-            <a:r>
-              <a:rPr sz="1800" b="1">
+            <a:off x="7406640" y="2194560"/>
+            <a:ext cx="4572000" cy="365760"/>
+          </a:xfrm>
+          <a:prstGeom prst="rect">
+            <a:avLst/>
+          </a:prstGeom>
+          <a:noFill/>
+        </p:spPr>
+        <p:txBody>
+          <a:bodyPr wrap="square">
+            <a:spAutoFit/>
+          </a:bodyPr>
+          <a:lstStyle/>
+          <a:p>
+            <a:pPr algn="ctr"/>
+            <a:r>
+              <a:rPr sz="1600" b="1">
                 <a:solidFill>
                   <a:srgbClr val="6B46C1"/>
                 </a:solidFill>
                 <a:latin typeface="阿里巴巴普惠体 3.0"/>
               </a:rPr>
-              <a:t>SQL工坊 · 数据管理引擎</a:t>
+              <a:t>SQL工坊 · 数据引擎</a:t>
             </a:r>
           </a:p>
         </p:txBody>
@@ -5766,8 +5783,8 @@
         </p:nvSpPr>
         <p:spPr>
           <a:xfrm>
-            <a:off x="6248095" y="1463040"/>
-            <a:ext cx="5669280" cy="731520"/>
+            <a:off x="7406640" y="2697480"/>
+            <a:ext cx="4572000" cy="457200"/>
           </a:xfrm>
           <a:prstGeom prst="roundRect">
             <a:avLst/>
@@ -5811,23 +5828,23 @@
         </p:nvSpPr>
         <p:spPr>
           <a:xfrm>
-            <a:off x="6430975" y="1508760"/>
-            <a:ext cx="5486400" cy="320040"/>
-          </a:xfrm>
-          <a:prstGeom prst="rect">
-            <a:avLst/>
-          </a:prstGeom>
-          <a:noFill/>
-        </p:spPr>
-        <p:txBody>
-          <a:bodyPr wrap="square">
-            <a:spAutoFit/>
-          </a:bodyPr>
-          <a:lstStyle/>
-          <a:p>
-            <a:pPr algn="ctr"/>
-            <a:r>
-              <a:rPr sz="1500" b="1">
+            <a:off x="7589520" y="2734056"/>
+            <a:ext cx="4389120" cy="228600"/>
+          </a:xfrm>
+          <a:prstGeom prst="rect">
+            <a:avLst/>
+          </a:prstGeom>
+          <a:noFill/>
+        </p:spPr>
+        <p:txBody>
+          <a:bodyPr wrap="square">
+            <a:spAutoFit/>
+          </a:bodyPr>
+          <a:lstStyle/>
+          <a:p>
+            <a:pPr algn="ctr"/>
+            <a:r>
+              <a:rPr sz="1200" b="1">
                 <a:solidFill>
                   <a:srgbClr val="6B46C1"/>
                 </a:solidFill>
@@ -5846,29 +5863,29 @@
         </p:nvSpPr>
         <p:spPr>
           <a:xfrm>
-            <a:off x="6430975" y="1847088"/>
-            <a:ext cx="5486400" cy="320040"/>
-          </a:xfrm>
-          <a:prstGeom prst="rect">
-            <a:avLst/>
-          </a:prstGeom>
-          <a:noFill/>
-        </p:spPr>
-        <p:txBody>
-          <a:bodyPr wrap="square">
-            <a:spAutoFit/>
-          </a:bodyPr>
-          <a:lstStyle/>
-          <a:p>
-            <a:pPr algn="ctr"/>
-            <a:r>
-              <a:rPr sz="1300" b="0">
+            <a:off x="7589520" y="2953512"/>
+            <a:ext cx="4389120" cy="201168"/>
+          </a:xfrm>
+          <a:prstGeom prst="rect">
+            <a:avLst/>
+          </a:prstGeom>
+          <a:noFill/>
+        </p:spPr>
+        <p:txBody>
+          <a:bodyPr wrap="square">
+            <a:spAutoFit/>
+          </a:bodyPr>
+          <a:lstStyle/>
+          <a:p>
+            <a:pPr algn="ctr"/>
+            <a:r>
+              <a:rPr sz="1000" b="0">
                 <a:solidFill>
                   <a:srgbClr val="6B7280"/>
                 </a:solidFill>
                 <a:latin typeface="阿里巴巴普惠体 3.0"/>
               </a:rPr>
-              <a:t>准确率 &gt;95% + 本地代码大模型 + Explain 优化</a:t>
+              <a:t>准确率 &gt;95% · 本地代码大模型</a:t>
             </a:r>
           </a:p>
         </p:txBody>
@@ -5881,8 +5898,8 @@
         </p:nvSpPr>
         <p:spPr>
           <a:xfrm>
-            <a:off x="6248095" y="2331720"/>
-            <a:ext cx="5669280" cy="731520"/>
+            <a:off x="7406640" y="3246120"/>
+            <a:ext cx="4572000" cy="457200"/>
           </a:xfrm>
           <a:prstGeom prst="roundRect">
             <a:avLst/>
@@ -5926,23 +5943,23 @@
         </p:nvSpPr>
         <p:spPr>
           <a:xfrm>
-            <a:off x="6430975" y="2377439"/>
-            <a:ext cx="5486400" cy="320040"/>
-          </a:xfrm>
-          <a:prstGeom prst="rect">
-            <a:avLst/>
-          </a:prstGeom>
-          <a:noFill/>
-        </p:spPr>
-        <p:txBody>
-          <a:bodyPr wrap="square">
-            <a:spAutoFit/>
-          </a:bodyPr>
-          <a:lstStyle/>
-          <a:p>
-            <a:pPr algn="ctr"/>
-            <a:r>
-              <a:rPr sz="1500" b="1">
+            <a:off x="7589520" y="3282696"/>
+            <a:ext cx="4389120" cy="228600"/>
+          </a:xfrm>
+          <a:prstGeom prst="rect">
+            <a:avLst/>
+          </a:prstGeom>
+          <a:noFill/>
+        </p:spPr>
+        <p:txBody>
+          <a:bodyPr wrap="square">
+            <a:spAutoFit/>
+          </a:bodyPr>
+          <a:lstStyle/>
+          <a:p>
+            <a:pPr algn="ctr"/>
+            <a:r>
+              <a:rPr sz="1200" b="1">
                 <a:solidFill>
                   <a:srgbClr val="6B46C1"/>
                 </a:solidFill>
@@ -5961,29 +5978,29 @@
         </p:nvSpPr>
         <p:spPr>
           <a:xfrm>
-            <a:off x="6430975" y="2715768"/>
-            <a:ext cx="5486400" cy="320040"/>
-          </a:xfrm>
-          <a:prstGeom prst="rect">
-            <a:avLst/>
-          </a:prstGeom>
-          <a:noFill/>
-        </p:spPr>
-        <p:txBody>
-          <a:bodyPr wrap="square">
-            <a:spAutoFit/>
-          </a:bodyPr>
-          <a:lstStyle/>
-          <a:p>
-            <a:pPr algn="ctr"/>
-            <a:r>
-              <a:rPr sz="1300" b="0">
+            <a:off x="7589520" y="3502152"/>
+            <a:ext cx="4389120" cy="201168"/>
+          </a:xfrm>
+          <a:prstGeom prst="rect">
+            <a:avLst/>
+          </a:prstGeom>
+          <a:noFill/>
+        </p:spPr>
+        <p:txBody>
+          <a:bodyPr wrap="square">
+            <a:spAutoFit/>
+          </a:bodyPr>
+          <a:lstStyle/>
+          <a:p>
+            <a:pPr algn="ctr"/>
+            <a:r>
+              <a:rPr sz="1000" b="0">
                 <a:solidFill>
                   <a:srgbClr val="6B7280"/>
                 </a:solidFill>
                 <a:latin typeface="阿里巴巴普惠体 3.0"/>
               </a:rPr>
-              <a:t>Flink 实时流 + Iceberg / Hudi 湖仓格式</a:t>
+              <a:t>Flink + Iceberg/Hudi</a:t>
             </a:r>
           </a:p>
         </p:txBody>
@@ -5996,8 +6013,8 @@
         </p:nvSpPr>
         <p:spPr>
           <a:xfrm>
-            <a:off x="6248095" y="3200400"/>
-            <a:ext cx="5669280" cy="731520"/>
+            <a:off x="7406640" y="3794760"/>
+            <a:ext cx="4572000" cy="457200"/>
           </a:xfrm>
           <a:prstGeom prst="roundRect">
             <a:avLst/>
@@ -6041,23 +6058,23 @@
         </p:nvSpPr>
         <p:spPr>
           <a:xfrm>
-            <a:off x="6430975" y="3246120"/>
-            <a:ext cx="5486400" cy="320040"/>
-          </a:xfrm>
-          <a:prstGeom prst="rect">
-            <a:avLst/>
-          </a:prstGeom>
-          <a:noFill/>
-        </p:spPr>
-        <p:txBody>
-          <a:bodyPr wrap="square">
-            <a:spAutoFit/>
-          </a:bodyPr>
-          <a:lstStyle/>
-          <a:p>
-            <a:pPr algn="ctr"/>
-            <a:r>
-              <a:rPr sz="1500" b="1">
+            <a:off x="7589520" y="3831336"/>
+            <a:ext cx="4389120" cy="228600"/>
+          </a:xfrm>
+          <a:prstGeom prst="rect">
+            <a:avLst/>
+          </a:prstGeom>
+          <a:noFill/>
+        </p:spPr>
+        <p:txBody>
+          <a:bodyPr wrap="square">
+            <a:spAutoFit/>
+          </a:bodyPr>
+          <a:lstStyle/>
+          <a:p>
+            <a:pPr algn="ctr"/>
+            <a:r>
+              <a:rPr sz="1200" b="1">
                 <a:solidFill>
                   <a:srgbClr val="6B46C1"/>
                 </a:solidFill>
@@ -6076,29 +6093,29 @@
         </p:nvSpPr>
         <p:spPr>
           <a:xfrm>
-            <a:off x="6430975" y="3584448"/>
-            <a:ext cx="5486400" cy="320040"/>
-          </a:xfrm>
-          <a:prstGeom prst="rect">
-            <a:avLst/>
-          </a:prstGeom>
-          <a:noFill/>
-        </p:spPr>
-        <p:txBody>
-          <a:bodyPr wrap="square">
-            <a:spAutoFit/>
-          </a:bodyPr>
-          <a:lstStyle/>
-          <a:p>
-            <a:pPr algn="ctr"/>
-            <a:r>
-              <a:rPr sz="1300" b="0">
+            <a:off x="7589520" y="4050792"/>
+            <a:ext cx="4389120" cy="201168"/>
+          </a:xfrm>
+          <a:prstGeom prst="rect">
+            <a:avLst/>
+          </a:prstGeom>
+          <a:noFill/>
+        </p:spPr>
+        <p:txBody>
+          <a:bodyPr wrap="square">
+            <a:spAutoFit/>
+          </a:bodyPr>
+          <a:lstStyle/>
+          <a:p>
+            <a:pPr algn="ctr"/>
+            <a:r>
+              <a:rPr sz="1000" b="0">
                 <a:solidFill>
                   <a:srgbClr val="6B7280"/>
                 </a:solidFill>
                 <a:latin typeface="阿里巴巴普惠体 3.0"/>
               </a:rPr>
-              <a:t>血缘分析 + 动态脱敏 + 自动化审计</a:t>
+              <a:t>血缘 + 脱敏 + 审计</a:t>
             </a:r>
           </a:p>
         </p:txBody>
@@ -6111,8 +6128,8 @@
         </p:nvSpPr>
         <p:spPr>
           <a:xfrm>
-            <a:off x="6248095" y="4069079"/>
-            <a:ext cx="5669280" cy="731520"/>
+            <a:off x="7406640" y="4343400"/>
+            <a:ext cx="4572000" cy="457200"/>
           </a:xfrm>
           <a:prstGeom prst="roundRect">
             <a:avLst/>
@@ -6156,23 +6173,23 @@
         </p:nvSpPr>
         <p:spPr>
           <a:xfrm>
-            <a:off x="6430975" y="4114799"/>
-            <a:ext cx="5486400" cy="320040"/>
-          </a:xfrm>
-          <a:prstGeom prst="rect">
-            <a:avLst/>
-          </a:prstGeom>
-          <a:noFill/>
-        </p:spPr>
-        <p:txBody>
-          <a:bodyPr wrap="square">
-            <a:spAutoFit/>
-          </a:bodyPr>
-          <a:lstStyle/>
-          <a:p>
-            <a:pPr algn="ctr"/>
-            <a:r>
-              <a:rPr sz="1500" b="1">
+            <a:off x="7589520" y="4379976"/>
+            <a:ext cx="4389120" cy="228600"/>
+          </a:xfrm>
+          <a:prstGeom prst="rect">
+            <a:avLst/>
+          </a:prstGeom>
+          <a:noFill/>
+        </p:spPr>
+        <p:txBody>
+          <a:bodyPr wrap="square">
+            <a:spAutoFit/>
+          </a:bodyPr>
+          <a:lstStyle/>
+          <a:p>
+            <a:pPr algn="ctr"/>
+            <a:r>
+              <a:rPr sz="1200" b="1">
                 <a:solidFill>
                   <a:srgbClr val="6B46C1"/>
                 </a:solidFill>
@@ -6191,29 +6208,29 @@
         </p:nvSpPr>
         <p:spPr>
           <a:xfrm>
-            <a:off x="6430975" y="4453127"/>
-            <a:ext cx="5486400" cy="320040"/>
-          </a:xfrm>
-          <a:prstGeom prst="rect">
-            <a:avLst/>
-          </a:prstGeom>
-          <a:noFill/>
-        </p:spPr>
-        <p:txBody>
-          <a:bodyPr wrap="square">
-            <a:spAutoFit/>
-          </a:bodyPr>
-          <a:lstStyle/>
-          <a:p>
-            <a:pPr algn="ctr"/>
-            <a:r>
-              <a:rPr sz="1300" b="0">
+            <a:off x="7589520" y="4599432"/>
+            <a:ext cx="4389120" cy="201168"/>
+          </a:xfrm>
+          <a:prstGeom prst="rect">
+            <a:avLst/>
+          </a:prstGeom>
+          <a:noFill/>
+        </p:spPr>
+        <p:txBody>
+          <a:bodyPr wrap="square">
+            <a:spAutoFit/>
+          </a:bodyPr>
+          <a:lstStyle/>
+          <a:p>
+            <a:pPr algn="ctr"/>
+            <a:r>
+              <a:rPr sz="1000" b="0">
                 <a:solidFill>
                   <a:srgbClr val="6B7280"/>
                 </a:solidFill>
                 <a:latin typeface="阿里巴巴普惠体 3.0"/>
               </a:rPr>
-              <a:t>计算/存储分离 + 自动扩缩容</a:t>
+              <a:t>计算/存储分离</a:t>
             </a:r>
           </a:p>
         </p:txBody>
@@ -6507,7 +6524,7 @@
             <p:tnCond val="0"/>
           </p:cond>
           <p:par>
-            <p:cTn id="4" nodeType="withEffect" dur="500" begin="0ms" fill="hold">
+            <p:cTn id="3" nodeType="withEffect" dur="500" begin="0ms" fill="hold">
               <p:animEffect presetClass="entr" presetId="10" dur="500"/>
             </p:cTn>
           </p:par>
@@ -7127,7 +7144,7 @@
                 </a:solidFill>
                 <a:latin typeface="阿里巴巴普惠体 3.0"/>
               </a:rPr>
-              <a:t>感谢 [团队名] · 联系: [邮箱]</a:t>
+              <a:t>感谢聆听 · Star 支持: github.com/wb04307201/spring-ai-loom-agent</a:t>
             </a:r>
           </a:p>
         </p:txBody>
@@ -7172,6 +7189,23 @@
   <p:clrMapOvr>
     <a:masterClrMapping/>
   </p:clrMapOvr>
+  <p:timing>
+    <p:tnLst>
+      <p:par>
+        <p:pPr/>
+        <p:par>
+          <p:cond>
+            <p:tnCond val="0"/>
+          </p:cond>
+          <p:par>
+            <p:cTn id="3" nodeType="withEffect" dur="8000" begin="0ms" fill="hold" repeatCount="indefinite">
+              <p:animEffect presetClass="emph" presetId="8" dur="8000"/>
+            </p:cTn>
+          </p:par>
+        </p:par>
+      </p:par>
+    </p:tnLst>
+  </p:timing>
   <p:timing>
     <p:tnLst>
       <p:par>
@@ -7266,7 +7300,7 @@
             <p:tnCond val="0"/>
           </p:cond>
           <p:par>
-            <p:cTn id="10" nodeType="withEffect" dur="500" begin="10000ms" fill="hold">
+            <p:cTn id="10" nodeType="withEffect" dur="500" begin="4000ms" fill="hold">
               <p:animEffect presetClass="entr" presetId="10" dur="500"/>
             </p:cTn>
           </p:par>
@@ -7504,7 +7538,7 @@
       </p:sp>
       <p:pic>
         <p:nvPicPr>
-          <p:cNvPr id="7" name="Picture 6" descr="p2-red-1-overwork.png"/>
+          <p:cNvPr id="7" name="Picture 6" descr="p2-red-1-hourglass.png"/>
           <p:cNvPicPr>
             <a:picLocks noChangeAspect="1"/>
           </p:cNvPicPr>
@@ -7643,7 +7677,7 @@
       </p:sp>
       <p:pic>
         <p:nvPicPr>
-          <p:cNvPr id="11" name="Picture 10" descr="p2-red-2-bureaucracy.png"/>
+          <p:cNvPr id="11" name="Picture 10" descr="p2-red-2-bifurcation.png"/>
           <p:cNvPicPr>
             <a:picLocks noChangeAspect="1"/>
           </p:cNvPicPr>
@@ -7921,7 +7955,7 @@
       </p:sp>
       <p:pic>
         <p:nvPicPr>
-          <p:cNvPr id="19" name="Picture 18" descr="p2-green-3-dashboard.png"/>
+          <p:cNvPr id="19" name="Picture 18" descr="p2-green-1-lightning.png"/>
           <p:cNvPicPr>
             <a:picLocks noChangeAspect="1"/>
           </p:cNvPicPr>
@@ -8060,7 +8094,7 @@
       </p:sp>
       <p:pic>
         <p:nvPicPr>
-          <p:cNvPr id="23" name="Picture 22" descr="p2-green-2-rocket.png"/>
+          <p:cNvPr id="23" name="Picture 22" descr="p2-green-2-stopwatch.png"/>
           <p:cNvPicPr>
             <a:picLocks noChangeAspect="1"/>
           </p:cNvPicPr>
@@ -8199,7 +8233,7 @@
       </p:sp>
       <p:pic>
         <p:nvPicPr>
-          <p:cNvPr id="27" name="Picture 26" descr="p2-green-1-final.png"/>
+          <p:cNvPr id="27" name="Picture 26" descr="p2-green-3-puzzle.png"/>
           <p:cNvPicPr>
             <a:picLocks noChangeAspect="1"/>
           </p:cNvPicPr>
@@ -8728,6 +8762,32 @@
         <p:nvPr/>
       </p:nvGrpSpPr>
       <p:grpSpPr/>
+      <p:pic>
+        <p:nvPicPr>
+          <p:cNvPr id="3" name="Picture 2" descr="p3_dependency.png"/>
+          <p:cNvPicPr>
+            <a:picLocks noChangeAspect="1"/>
+          </p:cNvPicPr>
+          <p:nvPr/>
+        </p:nvPicPr>
+        <p:blipFill>
+          <a:blip r:embed="rId2">
+            <a:alphaModFix amt="100000"/>
+          </a:blip>
+          <a:stretch>
+            <a:fillRect/>
+          </a:stretch>
+        </p:blipFill>
+        <p:spPr>
+          <a:xfrm>
+            <a:off x="3200400" y="914400"/>
+            <a:ext cx="5790895" cy="2743200"/>
+          </a:xfrm>
+          <a:prstGeom prst="rect">
+            <a:avLst/>
+          </a:prstGeom>
+        </p:spPr>
+      </p:pic>
       <p:sp>
         <p:nvSpPr>
           <p:cNvPr id="2" name="TextBox 1"/>
@@ -8765,229 +8825,14 @@
       </p:sp>
       <p:sp>
         <p:nvSpPr>
-          <p:cNvPr id="3" name="Rounded Rectangle 2"/>
-          <p:cNvSpPr/>
-          <p:nvPr/>
-        </p:nvSpPr>
-        <p:spPr>
-          <a:xfrm>
-            <a:off x="4312767" y="1371600"/>
-            <a:ext cx="822960" cy="822960"/>
-          </a:xfrm>
-          <a:prstGeom prst="roundRect">
-            <a:avLst/>
-          </a:prstGeom>
-          <a:solidFill>
-            <a:srgbClr val="007396"/>
-          </a:solidFill>
-          <a:ln>
-            <a:noFill/>
-          </a:ln>
-        </p:spPr>
-        <p:style>
-          <a:lnRef idx="1">
-            <a:schemeClr val="accent1"/>
-          </a:lnRef>
-          <a:fillRef idx="3">
-            <a:schemeClr val="accent1"/>
-          </a:fillRef>
-          <a:effectRef idx="2">
-            <a:schemeClr val="accent1"/>
-          </a:effectRef>
-          <a:fontRef idx="minor">
-            <a:schemeClr val="lt1"/>
-          </a:fontRef>
-        </p:style>
-        <p:txBody>
-          <a:bodyPr rtlCol="0" anchor="ctr"/>
-          <a:lstStyle/>
-          <a:p>
-            <a:pPr algn="ctr"/>
-          </a:p>
-        </p:txBody>
-      </p:sp>
-      <p:sp>
-        <p:nvSpPr>
-          <p:cNvPr id="4" name="Oval 3"/>
-          <p:cNvSpPr/>
-          <p:nvPr/>
-        </p:nvSpPr>
-        <p:spPr>
-          <a:xfrm>
-            <a:off x="4395063" y="1305763"/>
-            <a:ext cx="131673" cy="131673"/>
-          </a:xfrm>
-          <a:prstGeom prst="ellipse">
-            <a:avLst/>
-          </a:prstGeom>
-          <a:solidFill>
-            <a:srgbClr val="007396"/>
-          </a:solidFill>
-          <a:ln>
-            <a:noFill/>
-          </a:ln>
-        </p:spPr>
-        <p:style>
-          <a:lnRef idx="1">
-            <a:schemeClr val="accent1"/>
-          </a:lnRef>
-          <a:fillRef idx="3">
-            <a:schemeClr val="accent1"/>
-          </a:fillRef>
-          <a:effectRef idx="2">
-            <a:schemeClr val="accent1"/>
-          </a:effectRef>
-          <a:fontRef idx="minor">
-            <a:schemeClr val="lt1"/>
-          </a:fontRef>
-        </p:style>
-        <p:txBody>
-          <a:bodyPr rtlCol="0" anchor="ctr"/>
-          <a:lstStyle/>
-          <a:p>
-            <a:pPr algn="ctr"/>
-          </a:p>
-        </p:txBody>
-      </p:sp>
-      <p:sp>
-        <p:nvSpPr>
-          <p:cNvPr id="5" name="Oval 4"/>
-          <p:cNvSpPr/>
-          <p:nvPr/>
-        </p:nvSpPr>
-        <p:spPr>
-          <a:xfrm>
-            <a:off x="4576114" y="1305763"/>
-            <a:ext cx="131673" cy="131673"/>
-          </a:xfrm>
-          <a:prstGeom prst="ellipse">
-            <a:avLst/>
-          </a:prstGeom>
-          <a:solidFill>
-            <a:srgbClr val="007396"/>
-          </a:solidFill>
-          <a:ln>
-            <a:noFill/>
-          </a:ln>
-        </p:spPr>
-        <p:style>
-          <a:lnRef idx="1">
-            <a:schemeClr val="accent1"/>
-          </a:lnRef>
-          <a:fillRef idx="3">
-            <a:schemeClr val="accent1"/>
-          </a:fillRef>
-          <a:effectRef idx="2">
-            <a:schemeClr val="accent1"/>
-          </a:effectRef>
-          <a:fontRef idx="minor">
-            <a:schemeClr val="lt1"/>
-          </a:fontRef>
-        </p:style>
-        <p:txBody>
-          <a:bodyPr rtlCol="0" anchor="ctr"/>
-          <a:lstStyle/>
-          <a:p>
-            <a:pPr algn="ctr"/>
-          </a:p>
-        </p:txBody>
-      </p:sp>
-      <p:sp>
-        <p:nvSpPr>
-          <p:cNvPr id="6" name="Oval 5"/>
-          <p:cNvSpPr/>
-          <p:nvPr/>
-        </p:nvSpPr>
-        <p:spPr>
-          <a:xfrm>
-            <a:off x="4740706" y="1305763"/>
-            <a:ext cx="131673" cy="131673"/>
-          </a:xfrm>
-          <a:prstGeom prst="ellipse">
-            <a:avLst/>
-          </a:prstGeom>
-          <a:solidFill>
-            <a:srgbClr val="007396"/>
-          </a:solidFill>
-          <a:ln>
-            <a:noFill/>
-          </a:ln>
-        </p:spPr>
-        <p:style>
-          <a:lnRef idx="1">
-            <a:schemeClr val="accent1"/>
-          </a:lnRef>
-          <a:fillRef idx="3">
-            <a:schemeClr val="accent1"/>
-          </a:fillRef>
-          <a:effectRef idx="2">
-            <a:schemeClr val="accent1"/>
-          </a:effectRef>
-          <a:fontRef idx="minor">
-            <a:schemeClr val="lt1"/>
-          </a:fontRef>
-        </p:style>
-        <p:txBody>
-          <a:bodyPr rtlCol="0" anchor="ctr"/>
-          <a:lstStyle/>
-          <a:p>
-            <a:pPr algn="ctr"/>
-          </a:p>
-        </p:txBody>
-      </p:sp>
-      <p:sp>
-        <p:nvSpPr>
-          <p:cNvPr id="7" name="Oval 6"/>
-          <p:cNvSpPr/>
-          <p:nvPr/>
-        </p:nvSpPr>
-        <p:spPr>
-          <a:xfrm>
-            <a:off x="4921757" y="1305763"/>
-            <a:ext cx="131673" cy="131673"/>
-          </a:xfrm>
-          <a:prstGeom prst="ellipse">
-            <a:avLst/>
-          </a:prstGeom>
-          <a:solidFill>
-            <a:srgbClr val="007396"/>
-          </a:solidFill>
-          <a:ln>
-            <a:noFill/>
-          </a:ln>
-        </p:spPr>
-        <p:style>
-          <a:lnRef idx="1">
-            <a:schemeClr val="accent1"/>
-          </a:lnRef>
-          <a:fillRef idx="3">
-            <a:schemeClr val="accent1"/>
-          </a:fillRef>
-          <a:effectRef idx="2">
-            <a:schemeClr val="accent1"/>
-          </a:effectRef>
-          <a:fontRef idx="minor">
-            <a:schemeClr val="lt1"/>
-          </a:fontRef>
-        </p:style>
-        <p:txBody>
-          <a:bodyPr rtlCol="0" anchor="ctr"/>
-          <a:lstStyle/>
-          <a:p>
-            <a:pPr algn="ctr"/>
-          </a:p>
-        </p:txBody>
-      </p:sp>
-      <p:sp>
-        <p:nvSpPr>
-          <p:cNvPr id="8" name="TextBox 7"/>
-          <p:cNvSpPr txBox="1"/>
-          <p:nvPr/>
-        </p:nvSpPr>
-        <p:spPr>
-          <a:xfrm>
-            <a:off x="4038447" y="2240279"/>
-            <a:ext cx="1371600" cy="274320"/>
+          <p:cNvPr id="4" name="TextBox 3"/>
+          <p:cNvSpPr txBox="1"/>
+          <p:nvPr/>
+        </p:nvSpPr>
+        <p:spPr>
+          <a:xfrm>
+            <a:off x="3200400" y="3657600"/>
+            <a:ext cx="1828800" cy="274320"/>
           </a:xfrm>
           <a:prstGeom prst="rect">
             <a:avLst/>
@@ -9008,236 +8853,21 @@
                 </a:solidFill>
                 <a:latin typeface="阿里巴巴普惠体 3.0"/>
               </a:rPr>
-              <a:t>灵梭</a:t>
-            </a:r>
-          </a:p>
-        </p:txBody>
-      </p:sp>
-      <p:sp>
-        <p:nvSpPr>
-          <p:cNvPr id="9" name="Rounded Rectangle 8"/>
-          <p:cNvSpPr/>
-          <p:nvPr/>
-        </p:nvSpPr>
-        <p:spPr>
-          <a:xfrm>
-            <a:off x="5684367" y="1371600"/>
-            <a:ext cx="822960" cy="822960"/>
-          </a:xfrm>
-          <a:prstGeom prst="roundRect">
-            <a:avLst/>
-          </a:prstGeom>
-          <a:solidFill>
-            <a:srgbClr val="6B46C1"/>
-          </a:solidFill>
-          <a:ln>
-            <a:noFill/>
-          </a:ln>
-        </p:spPr>
-        <p:style>
-          <a:lnRef idx="1">
-            <a:schemeClr val="accent1"/>
-          </a:lnRef>
-          <a:fillRef idx="3">
-            <a:schemeClr val="accent1"/>
-          </a:fillRef>
-          <a:effectRef idx="2">
-            <a:schemeClr val="accent1"/>
-          </a:effectRef>
-          <a:fontRef idx="minor">
-            <a:schemeClr val="lt1"/>
-          </a:fontRef>
-        </p:style>
-        <p:txBody>
-          <a:bodyPr rtlCol="0" anchor="ctr"/>
-          <a:lstStyle/>
-          <a:p>
-            <a:pPr algn="ctr"/>
-          </a:p>
-        </p:txBody>
-      </p:sp>
-      <p:sp>
-        <p:nvSpPr>
-          <p:cNvPr id="10" name="Oval 9"/>
-          <p:cNvSpPr/>
-          <p:nvPr/>
-        </p:nvSpPr>
-        <p:spPr>
-          <a:xfrm>
-            <a:off x="5766663" y="1305763"/>
-            <a:ext cx="131673" cy="131673"/>
-          </a:xfrm>
-          <a:prstGeom prst="ellipse">
-            <a:avLst/>
-          </a:prstGeom>
-          <a:solidFill>
-            <a:srgbClr val="6B46C1"/>
-          </a:solidFill>
-          <a:ln>
-            <a:noFill/>
-          </a:ln>
-        </p:spPr>
-        <p:style>
-          <a:lnRef idx="1">
-            <a:schemeClr val="accent1"/>
-          </a:lnRef>
-          <a:fillRef idx="3">
-            <a:schemeClr val="accent1"/>
-          </a:fillRef>
-          <a:effectRef idx="2">
-            <a:schemeClr val="accent1"/>
-          </a:effectRef>
-          <a:fontRef idx="minor">
-            <a:schemeClr val="lt1"/>
-          </a:fontRef>
-        </p:style>
-        <p:txBody>
-          <a:bodyPr rtlCol="0" anchor="ctr"/>
-          <a:lstStyle/>
-          <a:p>
-            <a:pPr algn="ctr"/>
-          </a:p>
-        </p:txBody>
-      </p:sp>
-      <p:sp>
-        <p:nvSpPr>
-          <p:cNvPr id="11" name="Oval 10"/>
-          <p:cNvSpPr/>
-          <p:nvPr/>
-        </p:nvSpPr>
-        <p:spPr>
-          <a:xfrm>
-            <a:off x="5947714" y="1305763"/>
-            <a:ext cx="131673" cy="131673"/>
-          </a:xfrm>
-          <a:prstGeom prst="ellipse">
-            <a:avLst/>
-          </a:prstGeom>
-          <a:solidFill>
-            <a:srgbClr val="6B46C1"/>
-          </a:solidFill>
-          <a:ln>
-            <a:noFill/>
-          </a:ln>
-        </p:spPr>
-        <p:style>
-          <a:lnRef idx="1">
-            <a:schemeClr val="accent1"/>
-          </a:lnRef>
-          <a:fillRef idx="3">
-            <a:schemeClr val="accent1"/>
-          </a:fillRef>
-          <a:effectRef idx="2">
-            <a:schemeClr val="accent1"/>
-          </a:effectRef>
-          <a:fontRef idx="minor">
-            <a:schemeClr val="lt1"/>
-          </a:fontRef>
-        </p:style>
-        <p:txBody>
-          <a:bodyPr rtlCol="0" anchor="ctr"/>
-          <a:lstStyle/>
-          <a:p>
-            <a:pPr algn="ctr"/>
-          </a:p>
-        </p:txBody>
-      </p:sp>
-      <p:sp>
-        <p:nvSpPr>
-          <p:cNvPr id="12" name="Oval 11"/>
-          <p:cNvSpPr/>
-          <p:nvPr/>
-        </p:nvSpPr>
-        <p:spPr>
-          <a:xfrm>
-            <a:off x="6112306" y="1305763"/>
-            <a:ext cx="131673" cy="131673"/>
-          </a:xfrm>
-          <a:prstGeom prst="ellipse">
-            <a:avLst/>
-          </a:prstGeom>
-          <a:solidFill>
-            <a:srgbClr val="6B46C1"/>
-          </a:solidFill>
-          <a:ln>
-            <a:noFill/>
-          </a:ln>
-        </p:spPr>
-        <p:style>
-          <a:lnRef idx="1">
-            <a:schemeClr val="accent1"/>
-          </a:lnRef>
-          <a:fillRef idx="3">
-            <a:schemeClr val="accent1"/>
-          </a:fillRef>
-          <a:effectRef idx="2">
-            <a:schemeClr val="accent1"/>
-          </a:effectRef>
-          <a:fontRef idx="minor">
-            <a:schemeClr val="lt1"/>
-          </a:fontRef>
-        </p:style>
-        <p:txBody>
-          <a:bodyPr rtlCol="0" anchor="ctr"/>
-          <a:lstStyle/>
-          <a:p>
-            <a:pPr algn="ctr"/>
-          </a:p>
-        </p:txBody>
-      </p:sp>
-      <p:sp>
-        <p:nvSpPr>
-          <p:cNvPr id="13" name="Oval 12"/>
-          <p:cNvSpPr/>
-          <p:nvPr/>
-        </p:nvSpPr>
-        <p:spPr>
-          <a:xfrm>
-            <a:off x="6293357" y="1305763"/>
-            <a:ext cx="131673" cy="131673"/>
-          </a:xfrm>
-          <a:prstGeom prst="ellipse">
-            <a:avLst/>
-          </a:prstGeom>
-          <a:solidFill>
-            <a:srgbClr val="6B46C1"/>
-          </a:solidFill>
-          <a:ln>
-            <a:noFill/>
-          </a:ln>
-        </p:spPr>
-        <p:style>
-          <a:lnRef idx="1">
-            <a:schemeClr val="accent1"/>
-          </a:lnRef>
-          <a:fillRef idx="3">
-            <a:schemeClr val="accent1"/>
-          </a:fillRef>
-          <a:effectRef idx="2">
-            <a:schemeClr val="accent1"/>
-          </a:effectRef>
-          <a:fontRef idx="minor">
-            <a:schemeClr val="lt1"/>
-          </a:fontRef>
-        </p:style>
-        <p:txBody>
-          <a:bodyPr rtlCol="0" anchor="ctr"/>
-          <a:lstStyle/>
-          <a:p>
-            <a:pPr algn="ctr"/>
-          </a:p>
-        </p:txBody>
-      </p:sp>
-      <p:sp>
-        <p:nvSpPr>
-          <p:cNvPr id="14" name="TextBox 13"/>
-          <p:cNvSpPr txBox="1"/>
-          <p:nvPr/>
-        </p:nvSpPr>
-        <p:spPr>
-          <a:xfrm>
-            <a:off x="5410047" y="2240279"/>
-            <a:ext cx="1371600" cy="274320"/>
+              <a:t>灵梭 (AI 编排)</a:t>
+            </a:r>
+          </a:p>
+        </p:txBody>
+      </p:sp>
+      <p:sp>
+        <p:nvSpPr>
+          <p:cNvPr id="5" name="TextBox 4"/>
+          <p:cNvSpPr txBox="1"/>
+          <p:nvPr/>
+        </p:nvSpPr>
+        <p:spPr>
+          <a:xfrm>
+            <a:off x="5212080" y="3657600"/>
+            <a:ext cx="1828800" cy="274320"/>
           </a:xfrm>
           <a:prstGeom prst="rect">
             <a:avLst/>
@@ -9258,236 +8888,21 @@
                 </a:solidFill>
                 <a:latin typeface="阿里巴巴普惠体 3.0"/>
               </a:rPr>
-              <a:t>SQL工坊</a:t>
-            </a:r>
-          </a:p>
-        </p:txBody>
-      </p:sp>
-      <p:sp>
-        <p:nvSpPr>
-          <p:cNvPr id="15" name="Rounded Rectangle 14"/>
-          <p:cNvSpPr/>
-          <p:nvPr/>
-        </p:nvSpPr>
-        <p:spPr>
-          <a:xfrm>
-            <a:off x="7055967" y="1371600"/>
-            <a:ext cx="822960" cy="822960"/>
-          </a:xfrm>
-          <a:prstGeom prst="roundRect">
-            <a:avLst/>
-          </a:prstGeom>
-          <a:solidFill>
-            <a:srgbClr val="10B981"/>
-          </a:solidFill>
-          <a:ln>
-            <a:noFill/>
-          </a:ln>
-        </p:spPr>
-        <p:style>
-          <a:lnRef idx="1">
-            <a:schemeClr val="accent1"/>
-          </a:lnRef>
-          <a:fillRef idx="3">
-            <a:schemeClr val="accent1"/>
-          </a:fillRef>
-          <a:effectRef idx="2">
-            <a:schemeClr val="accent1"/>
-          </a:effectRef>
-          <a:fontRef idx="minor">
-            <a:schemeClr val="lt1"/>
-          </a:fontRef>
-        </p:style>
-        <p:txBody>
-          <a:bodyPr rtlCol="0" anchor="ctr"/>
-          <a:lstStyle/>
-          <a:p>
-            <a:pPr algn="ctr"/>
-          </a:p>
-        </p:txBody>
-      </p:sp>
-      <p:sp>
-        <p:nvSpPr>
-          <p:cNvPr id="16" name="Oval 15"/>
-          <p:cNvSpPr/>
-          <p:nvPr/>
-        </p:nvSpPr>
-        <p:spPr>
-          <a:xfrm>
-            <a:off x="7138263" y="1305763"/>
-            <a:ext cx="131673" cy="131673"/>
-          </a:xfrm>
-          <a:prstGeom prst="ellipse">
-            <a:avLst/>
-          </a:prstGeom>
-          <a:solidFill>
-            <a:srgbClr val="10B981"/>
-          </a:solidFill>
-          <a:ln>
-            <a:noFill/>
-          </a:ln>
-        </p:spPr>
-        <p:style>
-          <a:lnRef idx="1">
-            <a:schemeClr val="accent1"/>
-          </a:lnRef>
-          <a:fillRef idx="3">
-            <a:schemeClr val="accent1"/>
-          </a:fillRef>
-          <a:effectRef idx="2">
-            <a:schemeClr val="accent1"/>
-          </a:effectRef>
-          <a:fontRef idx="minor">
-            <a:schemeClr val="lt1"/>
-          </a:fontRef>
-        </p:style>
-        <p:txBody>
-          <a:bodyPr rtlCol="0" anchor="ctr"/>
-          <a:lstStyle/>
-          <a:p>
-            <a:pPr algn="ctr"/>
-          </a:p>
-        </p:txBody>
-      </p:sp>
-      <p:sp>
-        <p:nvSpPr>
-          <p:cNvPr id="17" name="Oval 16"/>
-          <p:cNvSpPr/>
-          <p:nvPr/>
-        </p:nvSpPr>
-        <p:spPr>
-          <a:xfrm>
-            <a:off x="7319314" y="1305763"/>
-            <a:ext cx="131673" cy="131673"/>
-          </a:xfrm>
-          <a:prstGeom prst="ellipse">
-            <a:avLst/>
-          </a:prstGeom>
-          <a:solidFill>
-            <a:srgbClr val="10B981"/>
-          </a:solidFill>
-          <a:ln>
-            <a:noFill/>
-          </a:ln>
-        </p:spPr>
-        <p:style>
-          <a:lnRef idx="1">
-            <a:schemeClr val="accent1"/>
-          </a:lnRef>
-          <a:fillRef idx="3">
-            <a:schemeClr val="accent1"/>
-          </a:fillRef>
-          <a:effectRef idx="2">
-            <a:schemeClr val="accent1"/>
-          </a:effectRef>
-          <a:fontRef idx="minor">
-            <a:schemeClr val="lt1"/>
-          </a:fontRef>
-        </p:style>
-        <p:txBody>
-          <a:bodyPr rtlCol="0" anchor="ctr"/>
-          <a:lstStyle/>
-          <a:p>
-            <a:pPr algn="ctr"/>
-          </a:p>
-        </p:txBody>
-      </p:sp>
-      <p:sp>
-        <p:nvSpPr>
-          <p:cNvPr id="18" name="Oval 17"/>
-          <p:cNvSpPr/>
-          <p:nvPr/>
-        </p:nvSpPr>
-        <p:spPr>
-          <a:xfrm>
-            <a:off x="7483906" y="1305763"/>
-            <a:ext cx="131673" cy="131673"/>
-          </a:xfrm>
-          <a:prstGeom prst="ellipse">
-            <a:avLst/>
-          </a:prstGeom>
-          <a:solidFill>
-            <a:srgbClr val="10B981"/>
-          </a:solidFill>
-          <a:ln>
-            <a:noFill/>
-          </a:ln>
-        </p:spPr>
-        <p:style>
-          <a:lnRef idx="1">
-            <a:schemeClr val="accent1"/>
-          </a:lnRef>
-          <a:fillRef idx="3">
-            <a:schemeClr val="accent1"/>
-          </a:fillRef>
-          <a:effectRef idx="2">
-            <a:schemeClr val="accent1"/>
-          </a:effectRef>
-          <a:fontRef idx="minor">
-            <a:schemeClr val="lt1"/>
-          </a:fontRef>
-        </p:style>
-        <p:txBody>
-          <a:bodyPr rtlCol="0" anchor="ctr"/>
-          <a:lstStyle/>
-          <a:p>
-            <a:pPr algn="ctr"/>
-          </a:p>
-        </p:txBody>
-      </p:sp>
-      <p:sp>
-        <p:nvSpPr>
-          <p:cNvPr id="19" name="Oval 18"/>
-          <p:cNvSpPr/>
-          <p:nvPr/>
-        </p:nvSpPr>
-        <p:spPr>
-          <a:xfrm>
-            <a:off x="7664958" y="1305763"/>
-            <a:ext cx="131673" cy="131673"/>
-          </a:xfrm>
-          <a:prstGeom prst="ellipse">
-            <a:avLst/>
-          </a:prstGeom>
-          <a:solidFill>
-            <a:srgbClr val="10B981"/>
-          </a:solidFill>
-          <a:ln>
-            <a:noFill/>
-          </a:ln>
-        </p:spPr>
-        <p:style>
-          <a:lnRef idx="1">
-            <a:schemeClr val="accent1"/>
-          </a:lnRef>
-          <a:fillRef idx="3">
-            <a:schemeClr val="accent1"/>
-          </a:fillRef>
-          <a:effectRef idx="2">
-            <a:schemeClr val="accent1"/>
-          </a:effectRef>
-          <a:fontRef idx="minor">
-            <a:schemeClr val="lt1"/>
-          </a:fontRef>
-        </p:style>
-        <p:txBody>
-          <a:bodyPr rtlCol="0" anchor="ctr"/>
-          <a:lstStyle/>
-          <a:p>
-            <a:pPr algn="ctr"/>
-          </a:p>
-        </p:txBody>
-      </p:sp>
-      <p:sp>
-        <p:nvSpPr>
-          <p:cNvPr id="20" name="TextBox 19"/>
-          <p:cNvSpPr txBox="1"/>
-          <p:nvPr/>
-        </p:nvSpPr>
-        <p:spPr>
-          <a:xfrm>
-            <a:off x="6781647" y="2240279"/>
-            <a:ext cx="1371600" cy="274320"/>
+              <a:t>SQL工坊 (数据底座)</a:t>
+            </a:r>
+          </a:p>
+        </p:txBody>
+      </p:sp>
+      <p:sp>
+        <p:nvSpPr>
+          <p:cNvPr id="6" name="TextBox 5"/>
+          <p:cNvSpPr txBox="1"/>
+          <p:nvPr/>
+        </p:nvSpPr>
+        <p:spPr>
+          <a:xfrm>
+            <a:off x="7132320" y="3657600"/>
+            <a:ext cx="1828800" cy="274320"/>
           </a:xfrm>
           <a:prstGeom prst="rect">
             <a:avLst/>
@@ -9508,14 +8923,14 @@
                 </a:solidFill>
                 <a:latin typeface="阿里巴巴普惠体 3.0"/>
               </a:rPr>
-              <a:t>SQL工坊 MCP</a:t>
-            </a:r>
-          </a:p>
-        </p:txBody>
-      </p:sp>
-      <p:sp>
-        <p:nvSpPr>
-          <p:cNvPr id="21" name="TextBox 20"/>
+              <a:t>SQL工坊 MCP (桥)</a:t>
+            </a:r>
+          </a:p>
+        </p:txBody>
+      </p:sp>
+      <p:sp>
+        <p:nvSpPr>
+          <p:cNvPr id="7" name="TextBox 6"/>
           <p:cNvSpPr txBox="1"/>
           <p:nvPr/>
         </p:nvSpPr>
@@ -9543,14 +8958,14 @@
                 </a:solidFill>
                 <a:latin typeface="阿里巴巴普惠体 3.0"/>
               </a:rPr>
-              <a:t>✓ 灵梭:Spring Boot AI 加速器,零配置接入 RAG / MCP / Skill</a:t>
-            </a:r>
-          </a:p>
-        </p:txBody>
-      </p:sp>
-      <p:sp>
-        <p:nvSpPr>
-          <p:cNvPr id="22" name="TextBox 21"/>
+              <a:t>★ 灵梭杀手锏:零配置接入 RAG / MCP / Skill · 50 行配置 → 1 行模板</a:t>
+            </a:r>
+          </a:p>
+        </p:txBody>
+      </p:sp>
+      <p:sp>
+        <p:nvSpPr>
+          <p:cNvPr id="8" name="TextBox 7"/>
           <p:cNvSpPr txBox="1"/>
           <p:nvPr/>
         </p:nvSpPr>
@@ -9578,14 +8993,14 @@
                 </a:solidFill>
                 <a:latin typeface="阿里巴巴普惠体 3.0"/>
               </a:rPr>
-              <a:t>✓ SQL工坊:JSON CRUD + Calcite 联邦 + Amis 低代码,数据开发效率 +300%</a:t>
-            </a:r>
-          </a:p>
-        </p:txBody>
-      </p:sp>
-      <p:sp>
-        <p:nvSpPr>
-          <p:cNvPr id="23" name="TextBox 22"/>
+              <a:t>★ SQL工坊杀手锏:JSON CRUD + Calcite 联邦 + Amis 低代码 · 开发效率 +300%</a:t>
+            </a:r>
+          </a:p>
+        </p:txBody>
+      </p:sp>
+      <p:sp>
+        <p:nvSpPr>
+          <p:cNvPr id="9" name="TextBox 8"/>
           <p:cNvSpPr txBox="1"/>
           <p:nvPr/>
         </p:nvSpPr>
@@ -9609,18 +9024,18 @@
             <a:r>
               <a:rPr sz="1600" b="0">
                 <a:solidFill>
-                  <a:srgbClr val="6B7280"/>
+                  <a:srgbClr val="6B46C1"/>
                 </a:solidFill>
                 <a:latin typeface="阿里巴巴普惠体 3.0"/>
               </a:rPr>
-              <a:t>✓ SQL工坊 MCP:打通 AI ↔ 业务数据库,数据不出企业</a:t>
-            </a:r>
-          </a:p>
-        </p:txBody>
-      </p:sp>
-      <p:sp>
-        <p:nvSpPr>
-          <p:cNvPr id="24" name="TextBox 23"/>
+              <a:t>★ SQL工坊 MCP 杀手锏:5 受限通道 · 数据不出企业 · 私有化部署</a:t>
+            </a:r>
+          </a:p>
+        </p:txBody>
+      </p:sp>
+      <p:sp>
+        <p:nvSpPr>
+          <p:cNvPr id="10" name="TextBox 9"/>
           <p:cNvSpPr txBox="1"/>
           <p:nvPr/>
         </p:nvSpPr>
@@ -9644,18 +9059,18 @@
             <a:r>
               <a:rPr sz="1600" b="0">
                 <a:solidFill>
-                  <a:srgbClr val="1F2937"/>
+                  <a:srgbClr val="10B981"/>
                 </a:solidFill>
                 <a:latin typeface="阿里巴巴普惠体 3.0"/>
               </a:rPr>
-              <a:t>✓ 3 个依赖库可单独引入;SQL工坊还可单独服务对接外部项目</a:t>
-            </a:r>
-          </a:p>
-        </p:txBody>
-      </p:sp>
-      <p:sp>
-        <p:nvSpPr>
-          <p:cNvPr id="25" name="TextBox 24"/>
+              <a:t>★ 全部杀手锏:3 个依赖库可独立按需引入 · 不绑死 Spring Boot 生态</a:t>
+            </a:r>
+          </a:p>
+        </p:txBody>
+      </p:sp>
+      <p:sp>
+        <p:nvSpPr>
+          <p:cNvPr id="11" name="TextBox 10"/>
           <p:cNvSpPr txBox="1"/>
           <p:nvPr/>
         </p:nvSpPr>
@@ -9736,7 +9151,7 @@
             <p:tnCond val="0"/>
           </p:cond>
           <p:par>
-            <p:cTn id="22" nodeType="withEffect" dur="500" begin="1200ms" fill="hold">
+            <p:cTn id="8" nodeType="withEffect" dur="500" begin="1200ms" fill="hold">
               <p:animEffect presetClass="entr" presetId="10" dur="500"/>
             </p:cTn>
           </p:par>
@@ -9753,7 +9168,7 @@
             <p:tnCond val="0"/>
           </p:cond>
           <p:par>
-            <p:cTn id="22" nodeType="withEffect" dur="1500" begin="2000ms" fill="hold" repeatCount="indefinite">
+            <p:cTn id="8" nodeType="withEffect" dur="1500" begin="2000ms" fill="hold" repeatCount="indefinite">
               <p:animEffect presetClass="emph" presetId="26" dur="1500"/>
             </p:cTn>
           </p:par>
@@ -9800,8 +9215,8 @@
         </p:blipFill>
         <p:spPr>
           <a:xfrm>
-            <a:off x="365760" y="4846320"/>
-            <a:ext cx="2286000" cy="1828800"/>
+            <a:off x="182880" y="4663440"/>
+            <a:ext cx="3017520" cy="2194560"/>
           </a:xfrm>
           <a:prstGeom prst="rect">
             <a:avLst/>
@@ -10732,9 +10147,9 @@
           <a:solidFill>
             <a:srgbClr val="FFFFFF"/>
           </a:solidFill>
-          <a:ln w="12700">
+          <a:ln w="38100">
             <a:solidFill>
-              <a:srgbClr val="E5E7EB"/>
+              <a:srgbClr val="F59E0B"/>
             </a:solidFill>
           </a:ln>
         </p:spPr>
@@ -10786,11 +10201,11 @@
             <a:r>
               <a:rPr sz="2000" b="1">
                 <a:solidFill>
-                  <a:srgbClr val="007396"/>
+                  <a:srgbClr val="F59E0B"/>
                 </a:solidFill>
                 <a:latin typeface="阿里巴巴普惠体 3.0"/>
               </a:rPr>
-              <a:t>📚 RAG 知识库</a:t>
+              <a:t>📚 RAG 知识库 ★</a:t>
             </a:r>
           </a:p>
         </p:txBody>
@@ -10826,6 +10241,11 @@
                 <a:latin typeface="阿里巴巴普惠体 3.0"/>
               </a:rPr>
               <a:t>Tika + JVector</a:t>
+            </a:r>
+          </a:p>
+          <a:p>
+            <a:r>
+              <a:t>文档向量化检索</a:t>
             </a:r>
           </a:p>
         </p:txBody>
@@ -10943,6 +10363,11 @@
               <a:t>8+ 服务可热插拔</a:t>
             </a:r>
           </a:p>
+          <a:p>
+            <a:r>
+              <a:t>工具热加载</a:t>
+            </a:r>
+          </a:p>
         </p:txBody>
       </p:sp>
       <p:sp>
@@ -11058,6 +10483,11 @@
               <a:t>.st 模板即提示词</a:t>
             </a:r>
           </a:p>
+          <a:p>
+            <a:r>
+              <a:t>改 1 行 AI 行为变</a:t>
+            </a:r>
+          </a:p>
         </p:txBody>
       </p:sp>
       <p:sp>
@@ -11135,7 +10565,7 @@
                 </a:solidFill>
                 <a:latin typeface="阿里巴巴普惠体 3.0"/>
               </a:rPr>
-              <a:t>📁 文件管理</a:t>
+              <a:t>💬 对话 UI</a:t>
             </a:r>
           </a:p>
         </p:txBody>
@@ -11170,7 +10600,12 @@
                 </a:solidFill>
                 <a:latin typeface="阿里巴巴普惠体 3.0"/>
               </a:rPr>
-              <a:t>磁盘 + H2 元数据</a:t>
+              <a:t>SSE + 思维链折叠</a:t>
+            </a:r>
+          </a:p>
+          <a:p>
+            <a:r>
+              <a:t>流式输出</a:t>
             </a:r>
           </a:p>
         </p:txBody>
@@ -11250,7 +10685,7 @@
                 </a:solidFill>
                 <a:latin typeface="阿里巴巴普惠体 3.0"/>
               </a:rPr>
-              <a:t>💬 对话 UI</a:t>
+              <a:t>📁 文件管理</a:t>
             </a:r>
           </a:p>
         </p:txBody>
@@ -11285,7 +10720,12 @@
                 </a:solidFill>
                 <a:latin typeface="阿里巴巴普惠体 3.0"/>
               </a:rPr>
-              <a:t>SSE + 思维链折叠</a:t>
+              <a:t>磁盘 + H2 元数据</a:t>
+            </a:r>
+          </a:p>
+          <a:p>
+            <a:r>
+              <a:t>会话持久化</a:t>
             </a:r>
           </a:p>
         </p:txBody>
@@ -11401,6 +10841,11 @@
                 <a:latin typeface="阿里巴巴普惠体 3.0"/>
               </a:rPr>
               <a:t>时间 / Git / Maven</a:t>
+            </a:r>
+          </a:p>
+          <a:p>
+            <a:r>
+              <a:t>沙箱执行</a:t>
             </a:r>
           </a:p>
         </p:txBody>
@@ -11655,8 +11100,8 @@
         </p:blipFill>
         <p:spPr>
           <a:xfrm>
-            <a:off x="365760" y="4846320"/>
-            <a:ext cx="2286000" cy="1828800"/>
+            <a:off x="182880" y="4663440"/>
+            <a:ext cx="3017520" cy="2194560"/>
           </a:xfrm>
           <a:prstGeom prst="rect">
             <a:avLst/>
@@ -13193,7 +12638,7 @@
             <a:r>
               <a:rPr sz="1800" b="1">
                 <a:solidFill>
-                  <a:srgbClr val="007396"/>
+                  <a:srgbClr val="6B7280"/>
                 </a:solidFill>
                 <a:latin typeface="阿里巴巴普惠体 3.0"/>
               </a:rPr>
@@ -13273,7 +12718,7 @@
             <a:r>
               <a:rPr sz="1800" b="1">
                 <a:solidFill>
-                  <a:srgbClr val="007396"/>
+                  <a:srgbClr val="6B7280"/>
                 </a:solidFill>
                 <a:latin typeface="阿里巴巴普惠体 3.0"/>
               </a:rPr>
@@ -13353,7 +12798,7 @@
             <a:r>
               <a:rPr sz="1800" b="1">
                 <a:solidFill>
-                  <a:srgbClr val="007396"/>
+                  <a:srgbClr val="6B7280"/>
                 </a:solidFill>
                 <a:latin typeface="阿里巴巴普惠体 3.0"/>
               </a:rPr>
@@ -14565,7 +14010,7 @@
             <p:tnCond val="0"/>
           </p:cond>
           <p:par>
-            <p:cTn id="8" nodeType="withEffect" dur="500" begin="1000ms" fill="hold">
+            <p:cTn id="8" nodeType="withEffect" dur="500" begin="400ms" fill="hold">
               <p:animEffect presetClass="entr" presetId="10" dur="500"/>
             </p:cTn>
           </p:par>
@@ -14582,7 +14027,7 @@
             <p:tnCond val="0"/>
           </p:cond>
           <p:par>
-            <p:cTn id="11" nodeType="withEffect" dur="500" begin="2000ms" fill="hold">
+            <p:cTn id="11" nodeType="withEffect" dur="500" begin="800ms" fill="hold">
               <p:animEffect presetClass="entr" presetId="10" dur="500"/>
             </p:cTn>
           </p:par>
@@ -14599,7 +14044,7 @@
             <p:tnCond val="0"/>
           </p:cond>
           <p:par>
-            <p:cTn id="14" nodeType="withEffect" dur="500" begin="3000ms" fill="hold">
+            <p:cTn id="14" nodeType="withEffect" dur="500" begin="1200ms" fill="hold">
               <p:animEffect presetClass="entr" presetId="10" dur="500"/>
             </p:cTn>
           </p:par>
@@ -14616,7 +14061,7 @@
             <p:tnCond val="0"/>
           </p:cond>
           <p:par>
-            <p:cTn id="17" nodeType="withEffect" dur="500" begin="4000ms" fill="hold">
+            <p:cTn id="17" nodeType="withEffect" dur="500" begin="1600ms" fill="hold">
               <p:animEffect presetClass="entr" presetId="10" dur="500"/>
             </p:cTn>
           </p:par>
@@ -14633,7 +14078,7 @@
             <p:tnCond val="0"/>
           </p:cond>
           <p:par>
-            <p:cTn id="17" nodeType="withEffect" dur="1500" begin="4500ms" fill="hold" repeatCount="indefinite">
+            <p:cTn id="17" nodeType="withEffect" dur="1500" begin="2500ms" fill="hold" repeatCount="indefinite">
               <p:animEffect presetClass="emph" presetId="26" dur="1500"/>
             </p:cTn>
           </p:par>
@@ -15548,7 +14993,7 @@
             <p:tnCond val="0"/>
           </p:cond>
           <p:par>
-            <p:cTn id="8" nodeType="withEffect" dur="500" begin="1000ms" fill="hold">
+            <p:cTn id="8" nodeType="withEffect" dur="500" begin="400ms" fill="hold">
               <p:animEffect presetClass="entr" presetId="10" dur="500"/>
             </p:cTn>
           </p:par>
@@ -15565,7 +15010,7 @@
             <p:tnCond val="0"/>
           </p:cond>
           <p:par>
-            <p:cTn id="11" nodeType="withEffect" dur="500" begin="2000ms" fill="hold">
+            <p:cTn id="11" nodeType="withEffect" dur="500" begin="800ms" fill="hold">
               <p:animEffect presetClass="entr" presetId="10" dur="500"/>
             </p:cTn>
           </p:par>
@@ -15582,7 +15027,7 @@
             <p:tnCond val="0"/>
           </p:cond>
           <p:par>
-            <p:cTn id="14" nodeType="withEffect" dur="500" begin="3000ms" fill="hold">
+            <p:cTn id="14" nodeType="withEffect" dur="500" begin="1200ms" fill="hold">
               <p:animEffect presetClass="entr" presetId="10" dur="500"/>
             </p:cTn>
           </p:par>
@@ -15599,7 +15044,7 @@
             <p:tnCond val="0"/>
           </p:cond>
           <p:par>
-            <p:cTn id="17" nodeType="withEffect" dur="500" begin="4000ms" fill="hold">
+            <p:cTn id="17" nodeType="withEffect" dur="500" begin="1600ms" fill="hold">
               <p:animEffect presetClass="entr" presetId="10" dur="500"/>
             </p:cTn>
           </p:par>
@@ -15616,7 +15061,7 @@
             <p:tnCond val="0"/>
           </p:cond>
           <p:par>
-            <p:cTn id="17" nodeType="withEffect" dur="1500" begin="4500ms" fill="hold" repeatCount="indefinite">
+            <p:cTn id="17" nodeType="withEffect" dur="1500" begin="2500ms" fill="hold" repeatCount="indefinite">
               <p:animEffect presetClass="emph" presetId="26" dur="1500"/>
             </p:cTn>
           </p:par>

--- a/docs/ppt/javabrain.pptx
+++ b/docs/ppt/javabrain.pptx
@@ -3569,13 +3569,6 @@
             </p:cTn>
           </p:par>
         </p:par>
-      </p:par>
-    </p:tnLst>
-  </p:timing>
-  <p:timing>
-    <p:tnLst>
-      <p:par>
-        <p:pPr/>
         <p:par>
           <p:cond>
             <p:tnCond val="0"/>
@@ -3586,13 +3579,6 @@
             </p:cTn>
           </p:par>
         </p:par>
-      </p:par>
-    </p:tnLst>
-  </p:timing>
-  <p:timing>
-    <p:tnLst>
-      <p:par>
-        <p:pPr/>
         <p:par>
           <p:cond>
             <p:tnCond val="0"/>
@@ -3603,13 +3589,6 @@
             </p:cTn>
           </p:par>
         </p:par>
-      </p:par>
-    </p:tnLst>
-  </p:timing>
-  <p:timing>
-    <p:tnLst>
-      <p:par>
-        <p:pPr/>
         <p:par>
           <p:cond>
             <p:tnCond val="0"/>
@@ -3620,13 +3599,6 @@
             </p:cTn>
           </p:par>
         </p:par>
-      </p:par>
-    </p:tnLst>
-  </p:timing>
-  <p:timing>
-    <p:tnLst>
-      <p:par>
-        <p:pPr/>
         <p:par>
           <p:cond>
             <p:tnCond val="0"/>
@@ -3637,13 +3609,6 @@
             </p:cTn>
           </p:par>
         </p:par>
-      </p:par>
-    </p:tnLst>
-  </p:timing>
-  <p:timing>
-    <p:tnLst>
-      <p:par>
-        <p:pPr/>
         <p:par>
           <p:cond>
             <p:tnCond val="0"/>
@@ -4956,13 +4921,6 @@
             </p:cTn>
           </p:par>
         </p:par>
-      </p:par>
-    </p:tnLst>
-  </p:timing>
-  <p:timing>
-    <p:tnLst>
-      <p:par>
-        <p:pPr/>
         <p:par>
           <p:cond>
             <p:tnCond val="0"/>
@@ -4973,13 +4931,6 @@
             </p:cTn>
           </p:par>
         </p:par>
-      </p:par>
-    </p:tnLst>
-  </p:timing>
-  <p:timing>
-    <p:tnLst>
-      <p:par>
-        <p:pPr/>
         <p:par>
           <p:cond>
             <p:tnCond val="0"/>
@@ -4990,13 +4941,6 @@
             </p:cTn>
           </p:par>
         </p:par>
-      </p:par>
-    </p:tnLst>
-  </p:timing>
-  <p:timing>
-    <p:tnLst>
-      <p:par>
-        <p:pPr/>
         <p:par>
           <p:cond>
             <p:tnCond val="0"/>
@@ -5007,13 +4951,6 @@
             </p:cTn>
           </p:par>
         </p:par>
-      </p:par>
-    </p:tnLst>
-  </p:timing>
-  <p:timing>
-    <p:tnLst>
-      <p:par>
-        <p:pPr/>
         <p:par>
           <p:cond>
             <p:tnCond val="0"/>
@@ -5024,13 +4961,6 @@
             </p:cTn>
           </p:par>
         </p:par>
-      </p:par>
-    </p:tnLst>
-  </p:timing>
-  <p:timing>
-    <p:tnLst>
-      <p:par>
-        <p:pPr/>
         <p:par>
           <p:cond>
             <p:tnCond val="0"/>
@@ -5041,13 +4971,6 @@
             </p:cTn>
           </p:par>
         </p:par>
-      </p:par>
-    </p:tnLst>
-  </p:timing>
-  <p:timing>
-    <p:tnLst>
-      <p:par>
-        <p:pPr/>
         <p:par>
           <p:cond>
             <p:tnCond val="0"/>
@@ -5058,13 +4981,6 @@
             </p:cTn>
           </p:par>
         </p:par>
-      </p:par>
-    </p:tnLst>
-  </p:timing>
-  <p:timing>
-    <p:tnLst>
-      <p:par>
-        <p:pPr/>
         <p:par>
           <p:cond>
             <p:tnCond val="0"/>
@@ -5075,13 +4991,6 @@
             </p:cTn>
           </p:par>
         </p:par>
-      </p:par>
-    </p:tnLst>
-  </p:timing>
-  <p:timing>
-    <p:tnLst>
-      <p:par>
-        <p:pPr/>
         <p:par>
           <p:cond>
             <p:tnCond val="0"/>
@@ -5092,13 +5001,6 @@
             </p:cTn>
           </p:par>
         </p:par>
-      </p:par>
-    </p:tnLst>
-  </p:timing>
-  <p:timing>
-    <p:tnLst>
-      <p:par>
-        <p:pPr/>
         <p:par>
           <p:cond>
             <p:tnCond val="0"/>
@@ -5109,13 +5011,6 @@
             </p:cTn>
           </p:par>
         </p:par>
-      </p:par>
-    </p:tnLst>
-  </p:timing>
-  <p:timing>
-    <p:tnLst>
-      <p:par>
-        <p:pPr/>
         <p:par>
           <p:cond>
             <p:tnCond val="0"/>
@@ -5126,13 +5021,6 @@
             </p:cTn>
           </p:par>
         </p:par>
-      </p:par>
-    </p:tnLst>
-  </p:timing>
-  <p:timing>
-    <p:tnLst>
-      <p:par>
-        <p:pPr/>
         <p:par>
           <p:cond>
             <p:tnCond val="0"/>
@@ -5143,13 +5031,6 @@
             </p:cTn>
           </p:par>
         </p:par>
-      </p:par>
-    </p:tnLst>
-  </p:timing>
-  <p:timing>
-    <p:tnLst>
-      <p:par>
-        <p:pPr/>
         <p:par>
           <p:cond>
             <p:tnCond val="0"/>
@@ -6529,13 +6410,6 @@
             </p:cTn>
           </p:par>
         </p:par>
-      </p:par>
-    </p:tnLst>
-  </p:timing>
-  <p:timing>
-    <p:tnLst>
-      <p:par>
-        <p:pPr/>
         <p:par>
           <p:cond>
             <p:tnCond val="0"/>
@@ -6546,13 +6420,6 @@
             </p:cTn>
           </p:par>
         </p:par>
-      </p:par>
-    </p:tnLst>
-  </p:timing>
-  <p:timing>
-    <p:tnLst>
-      <p:par>
-        <p:pPr/>
         <p:par>
           <p:cond>
             <p:tnCond val="0"/>
@@ -6563,13 +6430,6 @@
             </p:cTn>
           </p:par>
         </p:par>
-      </p:par>
-    </p:tnLst>
-  </p:timing>
-  <p:timing>
-    <p:tnLst>
-      <p:par>
-        <p:pPr/>
         <p:par>
           <p:cond>
             <p:tnCond val="0"/>
@@ -6580,13 +6440,6 @@
             </p:cTn>
           </p:par>
         </p:par>
-      </p:par>
-    </p:tnLst>
-  </p:timing>
-  <p:timing>
-    <p:tnLst>
-      <p:par>
-        <p:pPr/>
         <p:par>
           <p:cond>
             <p:tnCond val="0"/>
@@ -6597,13 +6450,6 @@
             </p:cTn>
           </p:par>
         </p:par>
-      </p:par>
-    </p:tnLst>
-  </p:timing>
-  <p:timing>
-    <p:tnLst>
-      <p:par>
-        <p:pPr/>
         <p:par>
           <p:cond>
             <p:tnCond val="0"/>
@@ -6614,13 +6460,6 @@
             </p:cTn>
           </p:par>
         </p:par>
-      </p:par>
-    </p:tnLst>
-  </p:timing>
-  <p:timing>
-    <p:tnLst>
-      <p:par>
-        <p:pPr/>
         <p:par>
           <p:cond>
             <p:tnCond val="0"/>
@@ -6631,13 +6470,6 @@
             </p:cTn>
           </p:par>
         </p:par>
-      </p:par>
-    </p:tnLst>
-  </p:timing>
-  <p:timing>
-    <p:tnLst>
-      <p:par>
-        <p:pPr/>
         <p:par>
           <p:cond>
             <p:tnCond val="0"/>
@@ -6648,13 +6480,6 @@
             </p:cTn>
           </p:par>
         </p:par>
-      </p:par>
-    </p:tnLst>
-  </p:timing>
-  <p:timing>
-    <p:tnLst>
-      <p:par>
-        <p:pPr/>
         <p:par>
           <p:cond>
             <p:tnCond val="0"/>
@@ -6665,13 +6490,6 @@
             </p:cTn>
           </p:par>
         </p:par>
-      </p:par>
-    </p:tnLst>
-  </p:timing>
-  <p:timing>
-    <p:tnLst>
-      <p:par>
-        <p:pPr/>
         <p:par>
           <p:cond>
             <p:tnCond val="0"/>
@@ -6682,13 +6500,6 @@
             </p:cTn>
           </p:par>
         </p:par>
-      </p:par>
-    </p:tnLst>
-  </p:timing>
-  <p:timing>
-    <p:tnLst>
-      <p:par>
-        <p:pPr/>
         <p:par>
           <p:cond>
             <p:tnCond val="0"/>
@@ -6699,13 +6510,6 @@
             </p:cTn>
           </p:par>
         </p:par>
-      </p:par>
-    </p:tnLst>
-  </p:timing>
-  <p:timing>
-    <p:tnLst>
-      <p:par>
-        <p:pPr/>
         <p:par>
           <p:cond>
             <p:tnCond val="0"/>
@@ -6716,13 +6520,6 @@
             </p:cTn>
           </p:par>
         </p:par>
-      </p:par>
-    </p:tnLst>
-  </p:timing>
-  <p:timing>
-    <p:tnLst>
-      <p:par>
-        <p:pPr/>
         <p:par>
           <p:cond>
             <p:tnCond val="0"/>
@@ -7203,13 +7000,6 @@
             </p:cTn>
           </p:par>
         </p:par>
-      </p:par>
-    </p:tnLst>
-  </p:timing>
-  <p:timing>
-    <p:tnLst>
-      <p:par>
-        <p:pPr/>
         <p:par>
           <p:cond>
             <p:tnCond val="0"/>
@@ -7220,13 +7010,6 @@
             </p:cTn>
           </p:par>
         </p:par>
-      </p:par>
-    </p:tnLst>
-  </p:timing>
-  <p:timing>
-    <p:tnLst>
-      <p:par>
-        <p:pPr/>
         <p:par>
           <p:cond>
             <p:tnCond val="0"/>
@@ -7237,13 +7020,6 @@
             </p:cTn>
           </p:par>
         </p:par>
-      </p:par>
-    </p:tnLst>
-  </p:timing>
-  <p:timing>
-    <p:tnLst>
-      <p:par>
-        <p:pPr/>
         <p:par>
           <p:cond>
             <p:tnCond val="0"/>
@@ -7254,13 +7030,6 @@
             </p:cTn>
           </p:par>
         </p:par>
-      </p:par>
-    </p:tnLst>
-  </p:timing>
-  <p:timing>
-    <p:tnLst>
-      <p:par>
-        <p:pPr/>
         <p:par>
           <p:cond>
             <p:tnCond val="0"/>
@@ -7271,13 +7040,6 @@
             </p:cTn>
           </p:par>
         </p:par>
-      </p:par>
-    </p:tnLst>
-  </p:timing>
-  <p:timing>
-    <p:tnLst>
-      <p:par>
-        <p:pPr/>
         <p:par>
           <p:cond>
             <p:tnCond val="0"/>
@@ -7288,13 +7050,6 @@
             </p:cTn>
           </p:par>
         </p:par>
-      </p:par>
-    </p:tnLst>
-  </p:timing>
-  <p:timing>
-    <p:tnLst>
-      <p:par>
-        <p:pPr/>
         <p:par>
           <p:cond>
             <p:tnCond val="0"/>
@@ -8619,13 +8374,6 @@
             </p:cTn>
           </p:par>
         </p:par>
-      </p:par>
-    </p:tnLst>
-  </p:timing>
-  <p:timing>
-    <p:tnLst>
-      <p:par>
-        <p:pPr/>
         <p:par>
           <p:cond>
             <p:tnCond val="0"/>
@@ -8636,13 +8384,6 @@
             </p:cTn>
           </p:par>
         </p:par>
-      </p:par>
-    </p:tnLst>
-  </p:timing>
-  <p:timing>
-    <p:tnLst>
-      <p:par>
-        <p:pPr/>
         <p:par>
           <p:cond>
             <p:tnCond val="0"/>
@@ -8653,13 +8394,6 @@
             </p:cTn>
           </p:par>
         </p:par>
-      </p:par>
-    </p:tnLst>
-  </p:timing>
-  <p:timing>
-    <p:tnLst>
-      <p:par>
-        <p:pPr/>
         <p:par>
           <p:cond>
             <p:tnCond val="0"/>
@@ -8670,13 +8404,6 @@
             </p:cTn>
           </p:par>
         </p:par>
-      </p:par>
-    </p:tnLst>
-  </p:timing>
-  <p:timing>
-    <p:tnLst>
-      <p:par>
-        <p:pPr/>
         <p:par>
           <p:cond>
             <p:tnCond val="0"/>
@@ -8687,13 +8414,6 @@
             </p:cTn>
           </p:par>
         </p:par>
-      </p:par>
-    </p:tnLst>
-  </p:timing>
-  <p:timing>
-    <p:tnLst>
-      <p:par>
-        <p:pPr/>
         <p:par>
           <p:cond>
             <p:tnCond val="0"/>
@@ -8704,13 +8424,6 @@
             </p:cTn>
           </p:par>
         </p:par>
-      </p:par>
-    </p:tnLst>
-  </p:timing>
-  <p:timing>
-    <p:tnLst>
-      <p:par>
-        <p:pPr/>
         <p:par>
           <p:cond>
             <p:tnCond val="0"/>
@@ -8721,13 +8434,6 @@
             </p:cTn>
           </p:par>
         </p:par>
-      </p:par>
-    </p:tnLst>
-  </p:timing>
-  <p:timing>
-    <p:tnLst>
-      <p:par>
-        <p:pPr/>
         <p:par>
           <p:cond>
             <p:tnCond val="0"/>
@@ -9122,13 +8828,6 @@
             </p:cTn>
           </p:par>
         </p:par>
-      </p:par>
-    </p:tnLst>
-  </p:timing>
-  <p:timing>
-    <p:tnLst>
-      <p:par>
-        <p:pPr/>
         <p:par>
           <p:cond>
             <p:tnCond val="0"/>
@@ -9139,13 +8838,6 @@
             </p:cTn>
           </p:par>
         </p:par>
-      </p:par>
-    </p:tnLst>
-  </p:timing>
-  <p:timing>
-    <p:tnLst>
-      <p:par>
-        <p:pPr/>
         <p:par>
           <p:cond>
             <p:tnCond val="0"/>
@@ -9156,13 +8848,6 @@
             </p:cTn>
           </p:par>
         </p:par>
-      </p:par>
-    </p:tnLst>
-  </p:timing>
-  <p:timing>
-    <p:tnLst>
-      <p:par>
-        <p:pPr/>
         <p:par>
           <p:cond>
             <p:tnCond val="0"/>
@@ -9952,13 +9637,6 @@
             </p:cTn>
           </p:par>
         </p:par>
-      </p:par>
-    </p:tnLst>
-  </p:timing>
-  <p:timing>
-    <p:tnLst>
-      <p:par>
-        <p:pPr/>
         <p:par>
           <p:cond>
             <p:tnCond val="0"/>
@@ -9969,13 +9647,6 @@
             </p:cTn>
           </p:par>
         </p:par>
-      </p:par>
-    </p:tnLst>
-  </p:timing>
-  <p:timing>
-    <p:tnLst>
-      <p:par>
-        <p:pPr/>
         <p:par>
           <p:cond>
             <p:tnCond val="0"/>
@@ -9986,13 +9657,6 @@
             </p:cTn>
           </p:par>
         </p:par>
-      </p:par>
-    </p:tnLst>
-  </p:timing>
-  <p:timing>
-    <p:tnLst>
-      <p:par>
-        <p:pPr/>
         <p:par>
           <p:cond>
             <p:tnCond val="0"/>
@@ -10003,13 +9667,6 @@
             </p:cTn>
           </p:par>
         </p:par>
-      </p:par>
-    </p:tnLst>
-  </p:timing>
-  <p:timing>
-    <p:tnLst>
-      <p:par>
-        <p:pPr/>
         <p:par>
           <p:cond>
             <p:tnCond val="0"/>
@@ -10020,13 +9677,6 @@
             </p:cTn>
           </p:par>
         </p:par>
-      </p:par>
-    </p:tnLst>
-  </p:timing>
-  <p:timing>
-    <p:tnLst>
-      <p:par>
-        <p:pPr/>
         <p:par>
           <p:cond>
             <p:tnCond val="0"/>
@@ -10037,13 +9687,6 @@
             </p:cTn>
           </p:par>
         </p:par>
-      </p:par>
-    </p:tnLst>
-  </p:timing>
-  <p:timing>
-    <p:tnLst>
-      <p:par>
-        <p:pPr/>
         <p:par>
           <p:cond>
             <p:tnCond val="0"/>
@@ -10054,13 +9697,6 @@
             </p:cTn>
           </p:par>
         </p:par>
-      </p:par>
-    </p:tnLst>
-  </p:timing>
-  <p:timing>
-    <p:tnLst>
-      <p:par>
-        <p:pPr/>
         <p:par>
           <p:cond>
             <p:tnCond val="0"/>
@@ -10939,13 +10575,6 @@
             </p:cTn>
           </p:par>
         </p:par>
-      </p:par>
-    </p:tnLst>
-  </p:timing>
-  <p:timing>
-    <p:tnLst>
-      <p:par>
-        <p:pPr/>
         <p:par>
           <p:cond>
             <p:tnCond val="0"/>
@@ -10956,13 +10585,6 @@
             </p:cTn>
           </p:par>
         </p:par>
-      </p:par>
-    </p:tnLst>
-  </p:timing>
-  <p:timing>
-    <p:tnLst>
-      <p:par>
-        <p:pPr/>
         <p:par>
           <p:cond>
             <p:tnCond val="0"/>
@@ -10973,13 +10595,6 @@
             </p:cTn>
           </p:par>
         </p:par>
-      </p:par>
-    </p:tnLst>
-  </p:timing>
-  <p:timing>
-    <p:tnLst>
-      <p:par>
-        <p:pPr/>
         <p:par>
           <p:cond>
             <p:tnCond val="0"/>
@@ -10990,13 +10605,6 @@
             </p:cTn>
           </p:par>
         </p:par>
-      </p:par>
-    </p:tnLst>
-  </p:timing>
-  <p:timing>
-    <p:tnLst>
-      <p:par>
-        <p:pPr/>
         <p:par>
           <p:cond>
             <p:tnCond val="0"/>
@@ -11007,13 +10615,6 @@
             </p:cTn>
           </p:par>
         </p:par>
-      </p:par>
-    </p:tnLst>
-  </p:timing>
-  <p:timing>
-    <p:tnLst>
-      <p:par>
-        <p:pPr/>
         <p:par>
           <p:cond>
             <p:tnCond val="0"/>
@@ -11024,13 +10625,6 @@
             </p:cTn>
           </p:par>
         </p:par>
-      </p:par>
-    </p:tnLst>
-  </p:timing>
-  <p:timing>
-    <p:tnLst>
-      <p:par>
-        <p:pPr/>
         <p:par>
           <p:cond>
             <p:tnCond val="0"/>
@@ -11041,13 +10635,6 @@
             </p:cTn>
           </p:par>
         </p:par>
-      </p:par>
-    </p:tnLst>
-  </p:timing>
-  <p:timing>
-    <p:tnLst>
-      <p:par>
-        <p:pPr/>
         <p:par>
           <p:cond>
             <p:tnCond val="0"/>
@@ -11837,13 +11424,6 @@
             </p:cTn>
           </p:par>
         </p:par>
-      </p:par>
-    </p:tnLst>
-  </p:timing>
-  <p:timing>
-    <p:tnLst>
-      <p:par>
-        <p:pPr/>
         <p:par>
           <p:cond>
             <p:tnCond val="0"/>
@@ -11854,13 +11434,6 @@
             </p:cTn>
           </p:par>
         </p:par>
-      </p:par>
-    </p:tnLst>
-  </p:timing>
-  <p:timing>
-    <p:tnLst>
-      <p:par>
-        <p:pPr/>
         <p:par>
           <p:cond>
             <p:tnCond val="0"/>
@@ -11871,13 +11444,6 @@
             </p:cTn>
           </p:par>
         </p:par>
-      </p:par>
-    </p:tnLst>
-  </p:timing>
-  <p:timing>
-    <p:tnLst>
-      <p:par>
-        <p:pPr/>
         <p:par>
           <p:cond>
             <p:tnCond val="0"/>
@@ -11888,13 +11454,6 @@
             </p:cTn>
           </p:par>
         </p:par>
-      </p:par>
-    </p:tnLst>
-  </p:timing>
-  <p:timing>
-    <p:tnLst>
-      <p:par>
-        <p:pPr/>
         <p:par>
           <p:cond>
             <p:tnCond val="0"/>
@@ -11905,13 +11464,6 @@
             </p:cTn>
           </p:par>
         </p:par>
-      </p:par>
-    </p:tnLst>
-  </p:timing>
-  <p:timing>
-    <p:tnLst>
-      <p:par>
-        <p:pPr/>
         <p:par>
           <p:cond>
             <p:tnCond val="0"/>
@@ -11922,13 +11474,6 @@
             </p:cTn>
           </p:par>
         </p:par>
-      </p:par>
-    </p:tnLst>
-  </p:timing>
-  <p:timing>
-    <p:tnLst>
-      <p:par>
-        <p:pPr/>
         <p:par>
           <p:cond>
             <p:tnCond val="0"/>
@@ -11939,13 +11484,6 @@
             </p:cTn>
           </p:par>
         </p:par>
-      </p:par>
-    </p:tnLst>
-  </p:timing>
-  <p:timing>
-    <p:tnLst>
-      <p:par>
-        <p:pPr/>
         <p:par>
           <p:cond>
             <p:tnCond val="0"/>
@@ -12896,13 +12434,6 @@
             </p:cTn>
           </p:par>
         </p:par>
-      </p:par>
-    </p:tnLst>
-  </p:timing>
-  <p:timing>
-    <p:tnLst>
-      <p:par>
-        <p:pPr/>
         <p:par>
           <p:cond>
             <p:tnCond val="0"/>
@@ -12913,13 +12444,6 @@
             </p:cTn>
           </p:par>
         </p:par>
-      </p:par>
-    </p:tnLst>
-  </p:timing>
-  <p:timing>
-    <p:tnLst>
-      <p:par>
-        <p:pPr/>
         <p:par>
           <p:cond>
             <p:tnCond val="0"/>
@@ -12930,13 +12454,6 @@
             </p:cTn>
           </p:par>
         </p:par>
-      </p:par>
-    </p:tnLst>
-  </p:timing>
-  <p:timing>
-    <p:tnLst>
-      <p:par>
-        <p:pPr/>
         <p:par>
           <p:cond>
             <p:tnCond val="0"/>
@@ -12947,13 +12464,6 @@
             </p:cTn>
           </p:par>
         </p:par>
-      </p:par>
-    </p:tnLst>
-  </p:timing>
-  <p:timing>
-    <p:tnLst>
-      <p:par>
-        <p:pPr/>
         <p:par>
           <p:cond>
             <p:tnCond val="0"/>
@@ -12964,13 +12474,6 @@
             </p:cTn>
           </p:par>
         </p:par>
-      </p:par>
-    </p:tnLst>
-  </p:timing>
-  <p:timing>
-    <p:tnLst>
-      <p:par>
-        <p:pPr/>
         <p:par>
           <p:cond>
             <p:tnCond val="0"/>
@@ -12981,13 +12484,6 @@
             </p:cTn>
           </p:par>
         </p:par>
-      </p:par>
-    </p:tnLst>
-  </p:timing>
-  <p:timing>
-    <p:tnLst>
-      <p:par>
-        <p:pPr/>
         <p:par>
           <p:cond>
             <p:tnCond val="0"/>
@@ -12998,13 +12494,6 @@
             </p:cTn>
           </p:par>
         </p:par>
-      </p:par>
-    </p:tnLst>
-  </p:timing>
-  <p:timing>
-    <p:tnLst>
-      <p:par>
-        <p:pPr/>
         <p:par>
           <p:cond>
             <p:tnCond val="0"/>
@@ -13015,13 +12504,6 @@
             </p:cTn>
           </p:par>
         </p:par>
-      </p:par>
-    </p:tnLst>
-  </p:timing>
-  <p:timing>
-    <p:tnLst>
-      <p:par>
-        <p:pPr/>
         <p:par>
           <p:cond>
             <p:tnCond val="0"/>
@@ -13032,13 +12514,6 @@
             </p:cTn>
           </p:par>
         </p:par>
-      </p:par>
-    </p:tnLst>
-  </p:timing>
-  <p:timing>
-    <p:tnLst>
-      <p:par>
-        <p:pPr/>
         <p:par>
           <p:cond>
             <p:tnCond val="0"/>
@@ -13049,13 +12524,6 @@
             </p:cTn>
           </p:par>
         </p:par>
-      </p:par>
-    </p:tnLst>
-  </p:timing>
-  <p:timing>
-    <p:tnLst>
-      <p:par>
-        <p:pPr/>
         <p:par>
           <p:cond>
             <p:tnCond val="0"/>
@@ -13066,13 +12534,6 @@
             </p:cTn>
           </p:par>
         </p:par>
-      </p:par>
-    </p:tnLst>
-  </p:timing>
-  <p:timing>
-    <p:tnLst>
-      <p:par>
-        <p:pPr/>
         <p:par>
           <p:cond>
             <p:tnCond val="0"/>
@@ -13083,13 +12544,6 @@
             </p:cTn>
           </p:par>
         </p:par>
-      </p:par>
-    </p:tnLst>
-  </p:timing>
-  <p:timing>
-    <p:tnLst>
-      <p:par>
-        <p:pPr/>
         <p:par>
           <p:cond>
             <p:tnCond val="0"/>
@@ -13998,13 +13452,6 @@
             </p:cTn>
           </p:par>
         </p:par>
-      </p:par>
-    </p:tnLst>
-  </p:timing>
-  <p:timing>
-    <p:tnLst>
-      <p:par>
-        <p:pPr/>
         <p:par>
           <p:cond>
             <p:tnCond val="0"/>
@@ -14015,13 +13462,6 @@
             </p:cTn>
           </p:par>
         </p:par>
-      </p:par>
-    </p:tnLst>
-  </p:timing>
-  <p:timing>
-    <p:tnLst>
-      <p:par>
-        <p:pPr/>
         <p:par>
           <p:cond>
             <p:tnCond val="0"/>
@@ -14032,13 +13472,6 @@
             </p:cTn>
           </p:par>
         </p:par>
-      </p:par>
-    </p:tnLst>
-  </p:timing>
-  <p:timing>
-    <p:tnLst>
-      <p:par>
-        <p:pPr/>
         <p:par>
           <p:cond>
             <p:tnCond val="0"/>
@@ -14049,13 +13482,6 @@
             </p:cTn>
           </p:par>
         </p:par>
-      </p:par>
-    </p:tnLst>
-  </p:timing>
-  <p:timing>
-    <p:tnLst>
-      <p:par>
-        <p:pPr/>
         <p:par>
           <p:cond>
             <p:tnCond val="0"/>
@@ -14066,13 +13492,6 @@
             </p:cTn>
           </p:par>
         </p:par>
-      </p:par>
-    </p:tnLst>
-  </p:timing>
-  <p:timing>
-    <p:tnLst>
-      <p:par>
-        <p:pPr/>
         <p:par>
           <p:cond>
             <p:tnCond val="0"/>
@@ -14981,13 +14400,6 @@
             </p:cTn>
           </p:par>
         </p:par>
-      </p:par>
-    </p:tnLst>
-  </p:timing>
-  <p:timing>
-    <p:tnLst>
-      <p:par>
-        <p:pPr/>
         <p:par>
           <p:cond>
             <p:tnCond val="0"/>
@@ -14998,13 +14410,6 @@
             </p:cTn>
           </p:par>
         </p:par>
-      </p:par>
-    </p:tnLst>
-  </p:timing>
-  <p:timing>
-    <p:tnLst>
-      <p:par>
-        <p:pPr/>
         <p:par>
           <p:cond>
             <p:tnCond val="0"/>
@@ -15015,13 +14420,6 @@
             </p:cTn>
           </p:par>
         </p:par>
-      </p:par>
-    </p:tnLst>
-  </p:timing>
-  <p:timing>
-    <p:tnLst>
-      <p:par>
-        <p:pPr/>
         <p:par>
           <p:cond>
             <p:tnCond val="0"/>
@@ -15032,13 +14430,6 @@
             </p:cTn>
           </p:par>
         </p:par>
-      </p:par>
-    </p:tnLst>
-  </p:timing>
-  <p:timing>
-    <p:tnLst>
-      <p:par>
-        <p:pPr/>
         <p:par>
           <p:cond>
             <p:tnCond val="0"/>
@@ -15049,13 +14440,6 @@
             </p:cTn>
           </p:par>
         </p:par>
-      </p:par>
-    </p:tnLst>
-  </p:timing>
-  <p:timing>
-    <p:tnLst>
-      <p:par>
-        <p:pPr/>
         <p:par>
           <p:cond>
             <p:tnCond val="0"/>

--- a/docs/ppt/javabrain.pptx
+++ b/docs/ppt/javabrain.pptx
@@ -8486,8 +8486,8 @@
         </p:blipFill>
         <p:spPr>
           <a:xfrm>
-            <a:off x="3200400" y="914400"/>
-            <a:ext cx="5790895" cy="2743200"/>
+            <a:off x="3200400" y="1005840"/>
+            <a:ext cx="5790895" cy="2011680"/>
           </a:xfrm>
           <a:prstGeom prst="rect">
             <a:avLst/>
@@ -8537,7 +8537,7 @@
         </p:nvSpPr>
         <p:spPr>
           <a:xfrm>
-            <a:off x="3200400" y="3657600"/>
+            <a:off x="3200400" y="3017520"/>
             <a:ext cx="1828800" cy="274320"/>
           </a:xfrm>
           <a:prstGeom prst="rect">
@@ -8572,7 +8572,7 @@
         </p:nvSpPr>
         <p:spPr>
           <a:xfrm>
-            <a:off x="5212080" y="3657600"/>
+            <a:off x="5212080" y="3017520"/>
             <a:ext cx="1828800" cy="274320"/>
           </a:xfrm>
           <a:prstGeom prst="rect">
@@ -8607,7 +8607,7 @@
         </p:nvSpPr>
         <p:spPr>
           <a:xfrm>
-            <a:off x="7132320" y="3657600"/>
+            <a:off x="7132320" y="3017520"/>
             <a:ext cx="1828800" cy="274320"/>
           </a:xfrm>
           <a:prstGeom prst="rect">
@@ -8642,7 +8642,7 @@
         </p:nvSpPr>
         <p:spPr>
           <a:xfrm>
-            <a:off x="640080" y="3200400"/>
+            <a:off x="640080" y="3611880"/>
             <a:ext cx="10881360" cy="457200"/>
           </a:xfrm>
           <a:prstGeom prst="rect">
@@ -8677,7 +8677,7 @@
         </p:nvSpPr>
         <p:spPr>
           <a:xfrm>
-            <a:off x="640080" y="3703320"/>
+            <a:off x="640080" y="4114800"/>
             <a:ext cx="10881360" cy="457200"/>
           </a:xfrm>
           <a:prstGeom prst="rect">
@@ -8712,7 +8712,7 @@
         </p:nvSpPr>
         <p:spPr>
           <a:xfrm>
-            <a:off x="640080" y="4206240"/>
+            <a:off x="640080" y="4617720"/>
             <a:ext cx="10881360" cy="457200"/>
           </a:xfrm>
           <a:prstGeom prst="rect">
@@ -8747,7 +8747,7 @@
         </p:nvSpPr>
         <p:spPr>
           <a:xfrm>
-            <a:off x="640080" y="4709160"/>
+            <a:off x="640080" y="5120640"/>
             <a:ext cx="10881360" cy="457200"/>
           </a:xfrm>
           <a:prstGeom prst="rect">

--- a/docs/ppt/javabrain.pptx
+++ b/docs/ppt/javabrain.pptx
@@ -3517,7 +3517,7 @@
       </p:sp>
       <p:sp>
         <p:nvSpPr>
-          <p:cNvPr id="13" name="TextBox 12"/>
+          <p:cNvPr id="1012" name="TextBox 1011"/>
           <p:cNvSpPr txBox="1"/>
           <p:nvPr/>
         </p:nvSpPr>
@@ -3558,67 +3558,40 @@
   <p:timing>
     <p:tnLst>
       <p:par>
-        <p:pPr/>
-        <p:par>
-          <p:cond>
-            <p:tnCond val="0"/>
-          </p:cond>
-          <p:par>
-            <p:cTn id="3" nodeType="withEffect" dur="800" begin="0ms" fill="hold">
-              <p:animEffect presetClass="entr" presetId="23" dur="800"/>
-            </p:cTn>
-          </p:par>
-        </p:par>
-        <p:par>
-          <p:cond>
-            <p:tnCond val="0"/>
-          </p:cond>
-          <p:par>
-            <p:cTn id="4" nodeType="withEffect" dur="500" begin="600ms" fill="hold">
-              <p:animEffect presetClass="entr" presetId="10" dur="500"/>
-            </p:cTn>
-          </p:par>
-        </p:par>
-        <p:par>
-          <p:cond>
-            <p:tnCond val="0"/>
-          </p:cond>
-          <p:par>
-            <p:cTn id="5" nodeType="withEffect" dur="500" begin="1000ms" fill="hold">
-              <p:animEffect presetClass="entr" presetId="10" dur="500"/>
-            </p:cTn>
-          </p:par>
-        </p:par>
-        <p:par>
-          <p:cond>
-            <p:tnCond val="0"/>
-          </p:cond>
-          <p:par>
-            <p:cTn id="6" nodeType="withEffect" dur="500" begin="1400ms" fill="hold">
-              <p:animEffect presetClass="entr" presetId="10" dur="500"/>
-            </p:cTn>
-          </p:par>
-        </p:par>
-        <p:par>
-          <p:cond>
-            <p:tnCond val="0"/>
-          </p:cond>
-          <p:par>
-            <p:cTn id="9" nodeType="withEffect" dur="500" begin="1600ms" fill="hold">
-              <p:animEffect presetClass="entr" presetId="10" dur="500"/>
-            </p:cTn>
-          </p:par>
-        </p:par>
-        <p:par>
-          <p:cond>
-            <p:tnCond val="0"/>
-          </p:cond>
-          <p:par>
-            <p:cTn id="12" nodeType="withEffect" dur="600" begin="2000ms" fill="hold">
-              <p:animEffect presetClass="entr" presetId="23" dur="600"/>
-            </p:cTn>
-          </p:par>
-        </p:par>
+        <p:cTn id="1" nodeType="tmRoot" pres="1">
+          <p:tnLst>
+            <p:par>
+              <p:cTn id="1002" nodeType="withEffect" dur="800" begin="0ms" fill="hold">
+                <p:animEffect presetClass="entr" presetId="23" dur="800"/>
+              </p:cTn>
+            </p:par>
+            <p:par>
+              <p:cTn id="1003" nodeType="withEffect" dur="500" begin="600ms" fill="hold">
+                <p:animEffect presetClass="entr" presetId="10" dur="500"/>
+              </p:cTn>
+            </p:par>
+            <p:par>
+              <p:cTn id="1004" nodeType="withEffect" dur="500" begin="1000ms" fill="hold">
+                <p:animEffect presetClass="entr" presetId="10" dur="500"/>
+              </p:cTn>
+            </p:par>
+            <p:par>
+              <p:cTn id="1005" nodeType="withEffect" dur="500" begin="1400ms" fill="hold">
+                <p:animEffect presetClass="entr" presetId="10" dur="500"/>
+              </p:cTn>
+            </p:par>
+            <p:par>
+              <p:cTn id="1008" nodeType="withEffect" dur="500" begin="1600ms" fill="hold">
+                <p:animEffect presetClass="entr" presetId="10" dur="500"/>
+              </p:cTn>
+            </p:par>
+            <p:par>
+              <p:cTn id="1011" nodeType="withEffect" dur="600" begin="2000ms" fill="hold">
+                <p:animEffect presetClass="entr" presetId="23" dur="600"/>
+              </p:cTn>
+            </p:par>
+          </p:tnLst>
+        </p:cTn>
       </p:par>
     </p:tnLst>
   </p:timing>
@@ -4869,7 +4842,7 @@
       </p:sp>
       <p:sp>
         <p:nvSpPr>
-          <p:cNvPr id="35" name="TextBox 34"/>
+          <p:cNvPr id="1033" name="TextBox 1032"/>
           <p:cNvSpPr txBox="1"/>
           <p:nvPr/>
         </p:nvSpPr>
@@ -4910,137 +4883,75 @@
   <p:timing>
     <p:tnLst>
       <p:par>
-        <p:pPr/>
-        <p:par>
-          <p:cond>
-            <p:tnCond val="0"/>
-          </p:cond>
-          <p:par>
-            <p:cTn id="5" nodeType="withEffect" dur="400" begin="0ms" fill="hold">
-              <p:animEffect presetClass="entr" presetId="10" dur="400"/>
-            </p:cTn>
-          </p:par>
-        </p:par>
-        <p:par>
-          <p:cond>
-            <p:tnCond val="0"/>
-          </p:cond>
-          <p:par>
-            <p:cTn id="6" nodeType="withEffect" dur="400" begin="225ms" fill="hold">
-              <p:animEffect presetClass="entr" presetId="10" dur="400"/>
-            </p:cTn>
-          </p:par>
-        </p:par>
-        <p:par>
-          <p:cond>
-            <p:tnCond val="0"/>
-          </p:cond>
-          <p:par>
-            <p:cTn id="7" nodeType="withEffect" dur="400" begin="450ms" fill="hold">
-              <p:animEffect presetClass="entr" presetId="10" dur="400"/>
-            </p:cTn>
-          </p:par>
-        </p:par>
-        <p:par>
-          <p:cond>
-            <p:tnCond val="0"/>
-          </p:cond>
-          <p:par>
-            <p:cTn id="8" nodeType="withEffect" dur="400" begin="675ms" fill="hold">
-              <p:animEffect presetClass="entr" presetId="10" dur="400"/>
-            </p:cTn>
-          </p:par>
-        </p:par>
-        <p:par>
-          <p:cond>
-            <p:tnCond val="0"/>
-          </p:cond>
-          <p:par>
-            <p:cTn id="10" nodeType="withEffect" dur="400" begin="1200ms" fill="hold">
-              <p:animEffect presetClass="entr" presetId="10" dur="400"/>
-            </p:cTn>
-          </p:par>
-        </p:par>
-        <p:par>
-          <p:cond>
-            <p:tnCond val="0"/>
-          </p:cond>
-          <p:par>
-            <p:cTn id="13" nodeType="withEffect" dur="400" begin="1400ms" fill="hold">
-              <p:animEffect presetClass="entr" presetId="10" dur="400"/>
-            </p:cTn>
-          </p:par>
-        </p:par>
-        <p:par>
-          <p:cond>
-            <p:tnCond val="0"/>
-          </p:cond>
-          <p:par>
-            <p:cTn id="16" nodeType="withEffect" dur="400" begin="1600ms" fill="hold">
-              <p:animEffect presetClass="entr" presetId="10" dur="400"/>
-            </p:cTn>
-          </p:par>
-        </p:par>
-        <p:par>
-          <p:cond>
-            <p:tnCond val="0"/>
-          </p:cond>
-          <p:par>
-            <p:cTn id="21" nodeType="withEffect" dur="400" begin="2100ms" fill="hold">
-              <p:animEffect presetClass="entr" presetId="10" dur="400"/>
-            </p:cTn>
-          </p:par>
-        </p:par>
-        <p:par>
-          <p:cond>
-            <p:tnCond val="0"/>
-          </p:cond>
-          <p:par>
-            <p:cTn id="24" nodeType="withEffect" dur="400" begin="2300ms" fill="hold">
-              <p:animEffect presetClass="entr" presetId="10" dur="400"/>
-            </p:cTn>
-          </p:par>
-        </p:par>
-        <p:par>
-          <p:cond>
-            <p:tnCond val="0"/>
-          </p:cond>
-          <p:par>
-            <p:cTn id="27" nodeType="withEffect" dur="400" begin="2500ms" fill="hold">
-              <p:animEffect presetClass="entr" presetId="10" dur="400"/>
-            </p:cTn>
-          </p:par>
-        </p:par>
-        <p:par>
-          <p:cond>
-            <p:tnCond val="0"/>
-          </p:cond>
-          <p:par>
-            <p:cTn id="30" nodeType="withEffect" dur="400" begin="2700ms" fill="hold">
-              <p:animEffect presetClass="entr" presetId="10" dur="400"/>
-            </p:cTn>
-          </p:par>
-        </p:par>
-        <p:par>
-          <p:cond>
-            <p:tnCond val="0"/>
-          </p:cond>
-          <p:par>
-            <p:cTn id="33" nodeType="withEffect" dur="400" begin="2900ms" fill="hold">
-              <p:animEffect presetClass="entr" presetId="10" dur="400"/>
-            </p:cTn>
-          </p:par>
-        </p:par>
-        <p:par>
-          <p:cond>
-            <p:tnCond val="0"/>
-          </p:cond>
-          <p:par>
-            <p:cTn id="8" nodeType="withEffect" dur="1500" begin="12000ms" fill="hold" repeatCount="indefinite">
-              <p:animEffect presetClass="emph" presetId="26" dur="1500"/>
-            </p:cTn>
-          </p:par>
-        </p:par>
+        <p:cTn id="1" nodeType="tmRoot" pres="1">
+          <p:tnLst>
+            <p:par>
+              <p:cTn id="1004" nodeType="withEffect" dur="400" begin="0ms" fill="hold">
+                <p:animEffect presetClass="entr" presetId="10" dur="400"/>
+              </p:cTn>
+            </p:par>
+            <p:par>
+              <p:cTn id="1005" nodeType="withEffect" dur="400" begin="225ms" fill="hold">
+                <p:animEffect presetClass="entr" presetId="10" dur="400"/>
+              </p:cTn>
+            </p:par>
+            <p:par>
+              <p:cTn id="1006" nodeType="withEffect" dur="400" begin="450ms" fill="hold">
+                <p:animEffect presetClass="entr" presetId="10" dur="400"/>
+              </p:cTn>
+            </p:par>
+            <p:par>
+              <p:cTn id="1007" nodeType="withEffect" dur="400" begin="675ms" fill="hold">
+                <p:animEffect presetClass="entr" presetId="10" dur="400"/>
+              </p:cTn>
+            </p:par>
+            <p:par>
+              <p:cTn id="1009" nodeType="withEffect" dur="400" begin="1200ms" fill="hold">
+                <p:animEffect presetClass="entr" presetId="10" dur="400"/>
+              </p:cTn>
+            </p:par>
+            <p:par>
+              <p:cTn id="1012" nodeType="withEffect" dur="400" begin="1400ms" fill="hold">
+                <p:animEffect presetClass="entr" presetId="10" dur="400"/>
+              </p:cTn>
+            </p:par>
+            <p:par>
+              <p:cTn id="1015" nodeType="withEffect" dur="400" begin="1600ms" fill="hold">
+                <p:animEffect presetClass="entr" presetId="10" dur="400"/>
+              </p:cTn>
+            </p:par>
+            <p:par>
+              <p:cTn id="1020" nodeType="withEffect" dur="400" begin="2100ms" fill="hold">
+                <p:animEffect presetClass="entr" presetId="10" dur="400"/>
+              </p:cTn>
+            </p:par>
+            <p:par>
+              <p:cTn id="1023" nodeType="withEffect" dur="400" begin="2300ms" fill="hold">
+                <p:animEffect presetClass="entr" presetId="10" dur="400"/>
+              </p:cTn>
+            </p:par>
+            <p:par>
+              <p:cTn id="1026" nodeType="withEffect" dur="400" begin="2500ms" fill="hold">
+                <p:animEffect presetClass="entr" presetId="10" dur="400"/>
+              </p:cTn>
+            </p:par>
+            <p:par>
+              <p:cTn id="1029" nodeType="withEffect" dur="400" begin="2700ms" fill="hold">
+                <p:animEffect presetClass="entr" presetId="10" dur="400"/>
+              </p:cTn>
+            </p:par>
+            <p:par>
+              <p:cTn id="1032" nodeType="withEffect" dur="400" begin="2900ms" fill="hold">
+                <p:animEffect presetClass="entr" presetId="10" dur="400"/>
+              </p:cTn>
+            </p:par>
+            <p:par>
+              <p:cTn id="1007" nodeType="withEffect" dur="1500" begin="12000ms" fill="hold" repeatCount="indefinite">
+                <p:animEffect presetClass="emph" presetId="26" dur="1500"/>
+              </p:cTn>
+            </p:par>
+          </p:tnLst>
+        </p:cTn>
       </p:par>
     </p:tnLst>
   </p:timing>
@@ -6358,7 +6269,7 @@
       </p:sp>
       <p:sp>
         <p:nvSpPr>
-          <p:cNvPr id="36" name="TextBox 35"/>
+          <p:cNvPr id="1035" name="TextBox 1034"/>
           <p:cNvSpPr txBox="1"/>
           <p:nvPr/>
         </p:nvSpPr>
@@ -6399,137 +6310,75 @@
   <p:timing>
     <p:tnLst>
       <p:par>
-        <p:pPr/>
-        <p:par>
-          <p:cond>
-            <p:tnCond val="0"/>
-          </p:cond>
-          <p:par>
-            <p:cTn id="3" nodeType="withEffect" dur="500" begin="0ms" fill="hold">
-              <p:animEffect presetClass="entr" presetId="10" dur="500"/>
-            </p:cTn>
-          </p:par>
-        </p:par>
-        <p:par>
-          <p:cond>
-            <p:tnCond val="0"/>
-          </p:cond>
-          <p:par>
-            <p:cTn id="6" nodeType="withEffect" dur="500" begin="400ms" fill="hold">
-              <p:animEffect presetClass="entr" presetId="10" dur="500"/>
-            </p:cTn>
-          </p:par>
-        </p:par>
-        <p:par>
-          <p:cond>
-            <p:tnCond val="0"/>
-          </p:cond>
-          <p:par>
-            <p:cTn id="9" nodeType="withEffect" dur="500" begin="600ms" fill="hold">
-              <p:animEffect presetClass="entr" presetId="10" dur="500"/>
-            </p:cTn>
-          </p:par>
-        </p:par>
-        <p:par>
-          <p:cond>
-            <p:tnCond val="0"/>
-          </p:cond>
-          <p:par>
-            <p:cTn id="12" nodeType="withEffect" dur="500" begin="800ms" fill="hold">
-              <p:animEffect presetClass="entr" presetId="10" dur="500"/>
-            </p:cTn>
-          </p:par>
-        </p:par>
-        <p:par>
-          <p:cond>
-            <p:tnCond val="0"/>
-          </p:cond>
-          <p:par>
-            <p:cTn id="15" nodeType="withEffect" dur="500" begin="1000ms" fill="hold">
-              <p:animEffect presetClass="entr" presetId="10" dur="500"/>
-            </p:cTn>
-          </p:par>
-        </p:par>
-        <p:par>
-          <p:cond>
-            <p:tnCond val="0"/>
-          </p:cond>
-          <p:par>
-            <p:cTn id="19" nodeType="withEffect" dur="500" begin="1200ms" fill="hold">
-              <p:animEffect presetClass="entr" presetId="10" dur="500"/>
-            </p:cTn>
-          </p:par>
-        </p:par>
-        <p:par>
-          <p:cond>
-            <p:tnCond val="0"/>
-          </p:cond>
-          <p:par>
-            <p:cTn id="22" nodeType="withEffect" dur="500" begin="1400ms" fill="hold">
-              <p:animEffect presetClass="entr" presetId="10" dur="500"/>
-            </p:cTn>
-          </p:par>
-        </p:par>
-        <p:par>
-          <p:cond>
-            <p:tnCond val="0"/>
-          </p:cond>
-          <p:par>
-            <p:cTn id="25" nodeType="withEffect" dur="500" begin="1600ms" fill="hold">
-              <p:animEffect presetClass="entr" presetId="10" dur="500"/>
-            </p:cTn>
-          </p:par>
-        </p:par>
-        <p:par>
-          <p:cond>
-            <p:tnCond val="0"/>
-          </p:cond>
-          <p:par>
-            <p:cTn id="28" nodeType="withEffect" dur="500" begin="1800ms" fill="hold">
-              <p:animEffect presetClass="entr" presetId="10" dur="500"/>
-            </p:cTn>
-          </p:par>
-        </p:par>
-        <p:par>
-          <p:cond>
-            <p:tnCond val="0"/>
-          </p:cond>
-          <p:par>
-            <p:cTn id="31" nodeType="withEffect" dur="500" begin="2000ms" fill="hold">
-              <p:animEffect presetClass="entr" presetId="10" dur="500"/>
-            </p:cTn>
-          </p:par>
-        </p:par>
-        <p:par>
-          <p:cond>
-            <p:tnCond val="0"/>
-          </p:cond>
-          <p:par>
-            <p:cTn id="33" nodeType="withEffect" dur="500" begin="2300ms" fill="hold">
-              <p:animEffect presetClass="entr" presetId="10" dur="500"/>
-            </p:cTn>
-          </p:par>
-        </p:par>
-        <p:par>
-          <p:cond>
-            <p:tnCond val="0"/>
-          </p:cond>
-          <p:par>
-            <p:cTn id="35" nodeType="withEffect" dur="500" begin="2600ms" fill="hold">
-              <p:animEffect presetClass="entr" presetId="10" dur="500"/>
-            </p:cTn>
-          </p:par>
-        </p:par>
-        <p:par>
-          <p:cond>
-            <p:tnCond val="0"/>
-          </p:cond>
-          <p:par>
-            <p:cTn id="33" nodeType="withEffect" dur="1500" begin="3500ms" fill="hold" repeatCount="indefinite">
-              <p:animEffect presetClass="emph" presetId="26" dur="1500"/>
-            </p:cTn>
-          </p:par>
-        </p:par>
+        <p:cTn id="1" nodeType="tmRoot" pres="1">
+          <p:tnLst>
+            <p:par>
+              <p:cTn id="1002" nodeType="withEffect" dur="500" begin="0ms" fill="hold">
+                <p:animEffect presetClass="entr" presetId="10" dur="500"/>
+              </p:cTn>
+            </p:par>
+            <p:par>
+              <p:cTn id="1005" nodeType="withEffect" dur="500" begin="400ms" fill="hold">
+                <p:animEffect presetClass="entr" presetId="10" dur="500"/>
+              </p:cTn>
+            </p:par>
+            <p:par>
+              <p:cTn id="1008" nodeType="withEffect" dur="500" begin="600ms" fill="hold">
+                <p:animEffect presetClass="entr" presetId="10" dur="500"/>
+              </p:cTn>
+            </p:par>
+            <p:par>
+              <p:cTn id="1011" nodeType="withEffect" dur="500" begin="800ms" fill="hold">
+                <p:animEffect presetClass="entr" presetId="10" dur="500"/>
+              </p:cTn>
+            </p:par>
+            <p:par>
+              <p:cTn id="1014" nodeType="withEffect" dur="500" begin="1000ms" fill="hold">
+                <p:animEffect presetClass="entr" presetId="10" dur="500"/>
+              </p:cTn>
+            </p:par>
+            <p:par>
+              <p:cTn id="1018" nodeType="withEffect" dur="500" begin="1200ms" fill="hold">
+                <p:animEffect presetClass="entr" presetId="10" dur="500"/>
+              </p:cTn>
+            </p:par>
+            <p:par>
+              <p:cTn id="1021" nodeType="withEffect" dur="500" begin="1400ms" fill="hold">
+                <p:animEffect presetClass="entr" presetId="10" dur="500"/>
+              </p:cTn>
+            </p:par>
+            <p:par>
+              <p:cTn id="1024" nodeType="withEffect" dur="500" begin="1600ms" fill="hold">
+                <p:animEffect presetClass="entr" presetId="10" dur="500"/>
+              </p:cTn>
+            </p:par>
+            <p:par>
+              <p:cTn id="1027" nodeType="withEffect" dur="500" begin="1800ms" fill="hold">
+                <p:animEffect presetClass="entr" presetId="10" dur="500"/>
+              </p:cTn>
+            </p:par>
+            <p:par>
+              <p:cTn id="1030" nodeType="withEffect" dur="500" begin="2000ms" fill="hold">
+                <p:animEffect presetClass="entr" presetId="10" dur="500"/>
+              </p:cTn>
+            </p:par>
+            <p:par>
+              <p:cTn id="1032" nodeType="withEffect" dur="500" begin="2300ms" fill="hold">
+                <p:animEffect presetClass="entr" presetId="10" dur="500"/>
+              </p:cTn>
+            </p:par>
+            <p:par>
+              <p:cTn id="1034" nodeType="withEffect" dur="500" begin="2600ms" fill="hold">
+                <p:animEffect presetClass="entr" presetId="10" dur="500"/>
+              </p:cTn>
+            </p:par>
+            <p:par>
+              <p:cTn id="1032" nodeType="withEffect" dur="1500" begin="3500ms" fill="hold" repeatCount="indefinite">
+                <p:animEffect presetClass="emph" presetId="26" dur="1500"/>
+              </p:cTn>
+            </p:par>
+          </p:tnLst>
+        </p:cTn>
       </p:par>
     </p:tnLst>
   </p:timing>
@@ -6948,7 +6797,7 @@
       </p:sp>
       <p:sp>
         <p:nvSpPr>
-          <p:cNvPr id="13" name="TextBox 12"/>
+          <p:cNvPr id="1010" name="TextBox 1009"/>
           <p:cNvSpPr txBox="1"/>
           <p:nvPr/>
         </p:nvSpPr>
@@ -6989,77 +6838,45 @@
   <p:timing>
     <p:tnLst>
       <p:par>
-        <p:pPr/>
-        <p:par>
-          <p:cond>
-            <p:tnCond val="0"/>
-          </p:cond>
-          <p:par>
-            <p:cTn id="3" nodeType="withEffect" dur="8000" begin="0ms" fill="hold" repeatCount="indefinite">
-              <p:animEffect presetClass="emph" presetId="8" dur="8000"/>
-            </p:cTn>
-          </p:par>
-        </p:par>
-        <p:par>
-          <p:cond>
-            <p:tnCond val="0"/>
-          </p:cond>
-          <p:par>
-            <p:cTn id="4" nodeType="withEffect" dur="500" begin="0ms" fill="hold">
-              <p:animEffect presetClass="entr" presetId="10" dur="500"/>
-            </p:cTn>
-          </p:par>
-        </p:par>
-        <p:par>
-          <p:cond>
-            <p:tnCond val="0"/>
-          </p:cond>
-          <p:par>
-            <p:cTn id="5" nodeType="withEffect" dur="500" begin="600ms" fill="hold">
-              <p:animEffect presetClass="entr" presetId="10" dur="500"/>
-            </p:cTn>
-          </p:par>
-        </p:par>
-        <p:par>
-          <p:cond>
-            <p:tnCond val="0"/>
-          </p:cond>
-          <p:par>
-            <p:cTn id="6" nodeType="withEffect" dur="500" begin="1200ms" fill="hold">
-              <p:animEffect presetClass="entr" presetId="10" dur="500"/>
-            </p:cTn>
-          </p:par>
-        </p:par>
-        <p:par>
-          <p:cond>
-            <p:tnCond val="0"/>
-          </p:cond>
-          <p:par>
-            <p:cTn id="7" nodeType="withEffect" dur="500" begin="1800ms" fill="hold">
-              <p:animEffect presetClass="entr" presetId="10" dur="500"/>
-            </p:cTn>
-          </p:par>
-        </p:par>
-        <p:par>
-          <p:cond>
-            <p:tnCond val="0"/>
-          </p:cond>
-          <p:par>
-            <p:cTn id="8" nodeType="withEffect" dur="1500" begin="6000ms" fill="hold" repeatCount="indefinite">
-              <p:animEffect presetClass="emph" presetId="26" dur="1500"/>
-            </p:cTn>
-          </p:par>
-        </p:par>
-        <p:par>
-          <p:cond>
-            <p:tnCond val="0"/>
-          </p:cond>
-          <p:par>
-            <p:cTn id="10" nodeType="withEffect" dur="500" begin="4000ms" fill="hold">
-              <p:animEffect presetClass="entr" presetId="10" dur="500"/>
-            </p:cTn>
-          </p:par>
-        </p:par>
+        <p:cTn id="1" nodeType="tmRoot" pres="1">
+          <p:tnLst>
+            <p:par>
+              <p:cTn id="1002" nodeType="withEffect" dur="8000" begin="0ms" fill="hold" repeatCount="indefinite">
+                <p:animEffect presetClass="emph" presetId="8" dur="8000"/>
+              </p:cTn>
+            </p:par>
+            <p:par>
+              <p:cTn id="1003" nodeType="withEffect" dur="500" begin="0ms" fill="hold">
+                <p:animEffect presetClass="entr" presetId="10" dur="500"/>
+              </p:cTn>
+            </p:par>
+            <p:par>
+              <p:cTn id="1004" nodeType="withEffect" dur="500" begin="600ms" fill="hold">
+                <p:animEffect presetClass="entr" presetId="10" dur="500"/>
+              </p:cTn>
+            </p:par>
+            <p:par>
+              <p:cTn id="1005" nodeType="withEffect" dur="500" begin="1200ms" fill="hold">
+                <p:animEffect presetClass="entr" presetId="10" dur="500"/>
+              </p:cTn>
+            </p:par>
+            <p:par>
+              <p:cTn id="1006" nodeType="withEffect" dur="500" begin="1800ms" fill="hold">
+                <p:animEffect presetClass="entr" presetId="10" dur="500"/>
+              </p:cTn>
+            </p:par>
+            <p:par>
+              <p:cTn id="1007" nodeType="withEffect" dur="1500" begin="6000ms" fill="hold" repeatCount="indefinite">
+                <p:animEffect presetClass="emph" presetId="26" dur="1500"/>
+              </p:cTn>
+            </p:par>
+            <p:par>
+              <p:cTn id="1009" nodeType="withEffect" dur="500" begin="4000ms" fill="hold">
+                <p:animEffect presetClass="entr" presetId="10" dur="500"/>
+              </p:cTn>
+            </p:par>
+          </p:tnLst>
+        </p:cTn>
       </p:par>
     </p:tnLst>
   </p:timing>
@@ -8322,7 +8139,7 @@
       </p:sp>
       <p:sp>
         <p:nvSpPr>
-          <p:cNvPr id="36" name="TextBox 35"/>
+          <p:cNvPr id="1035" name="TextBox 1034"/>
           <p:cNvSpPr txBox="1"/>
           <p:nvPr/>
         </p:nvSpPr>
@@ -8363,87 +8180,50 @@
   <p:timing>
     <p:tnLst>
       <p:par>
-        <p:pPr/>
-        <p:par>
-          <p:cond>
-            <p:tnCond val="0"/>
-          </p:cond>
-          <p:par>
-            <p:cTn id="8" nodeType="withEffect" dur="500" begin="0ms" fill="hold">
-              <p:animEffect presetClass="entr" presetId="10" dur="500"/>
-            </p:cTn>
-          </p:par>
-        </p:par>
-        <p:par>
-          <p:cond>
-            <p:tnCond val="0"/>
-          </p:cond>
-          <p:par>
-            <p:cTn id="9" nodeType="withEffect" dur="500" begin="350ms" fill="hold">
-              <p:animEffect presetClass="entr" presetId="10" dur="500"/>
-            </p:cTn>
-          </p:par>
-        </p:par>
-        <p:par>
-          <p:cond>
-            <p:tnCond val="0"/>
-          </p:cond>
-          <p:par>
-            <p:cTn id="10" nodeType="withEffect" dur="500" begin="700ms" fill="hold">
-              <p:animEffect presetClass="entr" presetId="10" dur="500"/>
-            </p:cTn>
-          </p:par>
-        </p:par>
-        <p:par>
-          <p:cond>
-            <p:tnCond val="0"/>
-          </p:cond>
-          <p:par>
-            <p:cTn id="11" nodeType="withEffect" dur="500" begin="1050ms" fill="hold">
-              <p:animEffect presetClass="entr" presetId="10" dur="500"/>
-            </p:cTn>
-          </p:par>
-        </p:par>
-        <p:par>
-          <p:cond>
-            <p:tnCond val="0"/>
-          </p:cond>
-          <p:par>
-            <p:cTn id="12" nodeType="withEffect" dur="500" begin="1400ms" fill="hold">
-              <p:animEffect presetClass="entr" presetId="10" dur="500"/>
-            </p:cTn>
-          </p:par>
-        </p:par>
-        <p:par>
-          <p:cond>
-            <p:tnCond val="0"/>
-          </p:cond>
-          <p:par>
-            <p:cTn id="13" nodeType="withEffect" dur="500" begin="1750ms" fill="hold">
-              <p:animEffect presetClass="entr" presetId="10" dur="500"/>
-            </p:cTn>
-          </p:par>
-        </p:par>
-        <p:par>
-          <p:cond>
-            <p:tnCond val="0"/>
-          </p:cond>
-          <p:par>
-            <p:cTn id="35" nodeType="withEffect" dur="1500" begin="3500ms" fill="hold" repeatCount="indefinite">
-              <p:animEffect presetClass="emph" presetId="26" dur="1500"/>
-            </p:cTn>
-          </p:par>
-        </p:par>
-        <p:par>
-          <p:cond>
-            <p:tnCond val="0"/>
-          </p:cond>
-          <p:par>
-            <p:cTn id="32" nodeType="withEffect" dur="500" begin="2200ms" fill="hold">
-              <p:animEffect presetClass="entr" presetId="10" dur="500"/>
-            </p:cTn>
-          </p:par>
-        </p:par>
+        <p:cTn id="1" nodeType="tmRoot" pres="1">
+          <p:tnLst>
+            <p:par>
+              <p:cTn id="1007" nodeType="withEffect" dur="500" begin="0ms" fill="hold">
+                <p:animEffect presetClass="entr" presetId="10" dur="500"/>
+              </p:cTn>
+            </p:par>
+            <p:par>
+              <p:cTn id="1008" nodeType="withEffect" dur="500" begin="350ms" fill="hold">
+                <p:animEffect presetClass="entr" presetId="10" dur="500"/>
+              </p:cTn>
+            </p:par>
+            <p:par>
+              <p:cTn id="1009" nodeType="withEffect" dur="500" begin="700ms" fill="hold">
+                <p:animEffect presetClass="entr" presetId="10" dur="500"/>
+              </p:cTn>
+            </p:par>
+            <p:par>
+              <p:cTn id="1010" nodeType="withEffect" dur="500" begin="1050ms" fill="hold">
+                <p:animEffect presetClass="entr" presetId="10" dur="500"/>
+              </p:cTn>
+            </p:par>
+            <p:par>
+              <p:cTn id="1011" nodeType="withEffect" dur="500" begin="1400ms" fill="hold">
+                <p:animEffect presetClass="entr" presetId="10" dur="500"/>
+              </p:cTn>
+            </p:par>
+            <p:par>
+              <p:cTn id="1012" nodeType="withEffect" dur="500" begin="1750ms" fill="hold">
+                <p:animEffect presetClass="entr" presetId="10" dur="500"/>
+              </p:cTn>
+            </p:par>
+            <p:par>
+              <p:cTn id="1034" nodeType="withEffect" dur="1500" begin="3500ms" fill="hold" repeatCount="indefinite">
+                <p:animEffect presetClass="emph" presetId="26" dur="1500"/>
+              </p:cTn>
+            </p:par>
+            <p:par>
+              <p:cTn id="1031" nodeType="withEffect" dur="500" begin="2200ms" fill="hold">
+                <p:animEffect presetClass="entr" presetId="10" dur="500"/>
+              </p:cTn>
+            </p:par>
+          </p:tnLst>
+        </p:cTn>
       </p:par>
     </p:tnLst>
   </p:timing>
@@ -8776,7 +8556,7 @@
       </p:sp>
       <p:sp>
         <p:nvSpPr>
-          <p:cNvPr id="11" name="TextBox 10"/>
+          <p:cNvPr id="1008" name="TextBox 1007"/>
           <p:cNvSpPr txBox="1"/>
           <p:nvPr/>
         </p:nvSpPr>
@@ -8817,47 +8597,30 @@
   <p:timing>
     <p:tnLst>
       <p:par>
-        <p:pPr/>
-        <p:par>
-          <p:cond>
-            <p:tnCond val="0"/>
-          </p:cond>
-          <p:par>
-            <p:cTn id="3" nodeType="withEffect" dur="500" begin="0ms" fill="hold">
-              <p:animEffect presetClass="entr" presetId="10" dur="500"/>
-            </p:cTn>
-          </p:par>
-        </p:par>
-        <p:par>
-          <p:cond>
-            <p:tnCond val="0"/>
-          </p:cond>
-          <p:par>
-            <p:cTn id="4" nodeType="withEffect" dur="500" begin="600ms" fill="hold">
-              <p:animEffect presetClass="entr" presetId="10" dur="500"/>
-            </p:cTn>
-          </p:par>
-        </p:par>
-        <p:par>
-          <p:cond>
-            <p:tnCond val="0"/>
-          </p:cond>
-          <p:par>
-            <p:cTn id="8" nodeType="withEffect" dur="500" begin="1200ms" fill="hold">
-              <p:animEffect presetClass="entr" presetId="10" dur="500"/>
-            </p:cTn>
-          </p:par>
-        </p:par>
-        <p:par>
-          <p:cond>
-            <p:tnCond val="0"/>
-          </p:cond>
-          <p:par>
-            <p:cTn id="8" nodeType="withEffect" dur="1500" begin="2000ms" fill="hold" repeatCount="indefinite">
-              <p:animEffect presetClass="emph" presetId="26" dur="1500"/>
-            </p:cTn>
-          </p:par>
-        </p:par>
+        <p:cTn id="1" nodeType="tmRoot" pres="1">
+          <p:tnLst>
+            <p:par>
+              <p:cTn id="1002" nodeType="withEffect" dur="500" begin="0ms" fill="hold">
+                <p:animEffect presetClass="entr" presetId="10" dur="500"/>
+              </p:cTn>
+            </p:par>
+            <p:par>
+              <p:cTn id="1003" nodeType="withEffect" dur="500" begin="600ms" fill="hold">
+                <p:animEffect presetClass="entr" presetId="10" dur="500"/>
+              </p:cTn>
+            </p:par>
+            <p:par>
+              <p:cTn id="1007" nodeType="withEffect" dur="500" begin="1200ms" fill="hold">
+                <p:animEffect presetClass="entr" presetId="10" dur="500"/>
+              </p:cTn>
+            </p:par>
+            <p:par>
+              <p:cTn id="1007" nodeType="withEffect" dur="1500" begin="2000ms" fill="hold" repeatCount="indefinite">
+                <p:animEffect presetClass="emph" presetId="26" dur="1500"/>
+              </p:cTn>
+            </p:par>
+          </p:tnLst>
+        </p:cTn>
       </p:par>
     </p:tnLst>
   </p:timing>
@@ -9585,7 +9348,7 @@
       </p:sp>
       <p:sp>
         <p:nvSpPr>
-          <p:cNvPr id="21" name="TextBox 20"/>
+          <p:cNvPr id="1020" name="TextBox 1019"/>
           <p:cNvSpPr txBox="1"/>
           <p:nvPr/>
         </p:nvSpPr>
@@ -9626,87 +9389,50 @@
   <p:timing>
     <p:tnLst>
       <p:par>
-        <p:pPr/>
-        <p:par>
-          <p:cond>
-            <p:tnCond val="0"/>
-          </p:cond>
-          <p:par>
-            <p:cTn id="4" nodeType="withEffect" dur="500" begin="0ms" fill="hold">
-              <p:animEffect presetClass="entr" presetId="10" dur="500"/>
-            </p:cTn>
-          </p:par>
-        </p:par>
-        <p:par>
-          <p:cond>
-            <p:tnCond val="0"/>
-          </p:cond>
-          <p:par>
-            <p:cTn id="6" nodeType="withEffect" dur="500" begin="400ms" fill="hold">
-              <p:animEffect presetClass="entr" presetId="10" dur="500"/>
-            </p:cTn>
-          </p:par>
-        </p:par>
-        <p:par>
-          <p:cond>
-            <p:tnCond val="0"/>
-          </p:cond>
-          <p:par>
-            <p:cTn id="10" nodeType="withEffect" dur="500" begin="400ms" fill="hold">
-              <p:animEffect presetClass="entr" presetId="10" dur="500"/>
-            </p:cTn>
-          </p:par>
-        </p:par>
-        <p:par>
-          <p:cond>
-            <p:tnCond val="0"/>
-          </p:cond>
-          <p:par>
-            <p:cTn id="11" nodeType="withEffect" dur="500" begin="700ms" fill="hold">
-              <p:animEffect presetClass="entr" presetId="10" dur="500"/>
-            </p:cTn>
-          </p:par>
-        </p:par>
-        <p:par>
-          <p:cond>
-            <p:tnCond val="0"/>
-          </p:cond>
-          <p:par>
-            <p:cTn id="15" nodeType="withEffect" dur="500" begin="700ms" fill="hold">
-              <p:animEffect presetClass="entr" presetId="10" dur="500"/>
-            </p:cTn>
-          </p:par>
-        </p:par>
-        <p:par>
-          <p:cond>
-            <p:tnCond val="0"/>
-          </p:cond>
-          <p:par>
-            <p:cTn id="16" nodeType="withEffect" dur="500" begin="1000ms" fill="hold">
-              <p:animEffect presetClass="entr" presetId="10" dur="500"/>
-            </p:cTn>
-          </p:par>
-        </p:par>
-        <p:par>
-          <p:cond>
-            <p:tnCond val="0"/>
-          </p:cond>
-          <p:par>
-            <p:cTn id="20" nodeType="withEffect" dur="500" begin="1000ms" fill="hold">
-              <p:animEffect presetClass="entr" presetId="10" dur="500"/>
-            </p:cTn>
-          </p:par>
-        </p:par>
-        <p:par>
-          <p:cond>
-            <p:tnCond val="0"/>
-          </p:cond>
-          <p:par>
-            <p:cTn id="16" nodeType="withEffect" dur="1500" begin="2000ms" fill="hold" repeatCount="indefinite">
-              <p:animEffect presetClass="emph" presetId="26" dur="1500"/>
-            </p:cTn>
-          </p:par>
-        </p:par>
+        <p:cTn id="1" nodeType="tmRoot" pres="1">
+          <p:tnLst>
+            <p:par>
+              <p:cTn id="1003" nodeType="withEffect" dur="500" begin="0ms" fill="hold">
+                <p:animEffect presetClass="entr" presetId="10" dur="500"/>
+              </p:cTn>
+            </p:par>
+            <p:par>
+              <p:cTn id="1005" nodeType="withEffect" dur="500" begin="400ms" fill="hold">
+                <p:animEffect presetClass="entr" presetId="10" dur="500"/>
+              </p:cTn>
+            </p:par>
+            <p:par>
+              <p:cTn id="1009" nodeType="withEffect" dur="500" begin="400ms" fill="hold">
+                <p:animEffect presetClass="entr" presetId="10" dur="500"/>
+              </p:cTn>
+            </p:par>
+            <p:par>
+              <p:cTn id="1010" nodeType="withEffect" dur="500" begin="700ms" fill="hold">
+                <p:animEffect presetClass="entr" presetId="10" dur="500"/>
+              </p:cTn>
+            </p:par>
+            <p:par>
+              <p:cTn id="1014" nodeType="withEffect" dur="500" begin="700ms" fill="hold">
+                <p:animEffect presetClass="entr" presetId="10" dur="500"/>
+              </p:cTn>
+            </p:par>
+            <p:par>
+              <p:cTn id="1015" nodeType="withEffect" dur="500" begin="1000ms" fill="hold">
+                <p:animEffect presetClass="entr" presetId="10" dur="500"/>
+              </p:cTn>
+            </p:par>
+            <p:par>
+              <p:cTn id="1019" nodeType="withEffect" dur="500" begin="1000ms" fill="hold">
+                <p:animEffect presetClass="entr" presetId="10" dur="500"/>
+              </p:cTn>
+            </p:par>
+            <p:par>
+              <p:cTn id="1015" nodeType="withEffect" dur="1500" begin="2000ms" fill="hold" repeatCount="indefinite">
+                <p:animEffect presetClass="emph" presetId="26" dur="1500"/>
+              </p:cTn>
+            </p:par>
+          </p:tnLst>
+        </p:cTn>
       </p:par>
     </p:tnLst>
   </p:timing>
@@ -10523,7 +10249,7 @@
       </p:sp>
       <p:sp>
         <p:nvSpPr>
-          <p:cNvPr id="22" name="TextBox 21"/>
+          <p:cNvPr id="1019" name="TextBox 1018"/>
           <p:cNvSpPr txBox="1"/>
           <p:nvPr/>
         </p:nvSpPr>
@@ -10564,87 +10290,50 @@
   <p:timing>
     <p:tnLst>
       <p:par>
-        <p:pPr/>
-        <p:par>
-          <p:cond>
-            <p:tnCond val="0"/>
-          </p:cond>
-          <p:par>
-            <p:cTn id="4" nodeType="withEffect" dur="500" begin="0ms" fill="hold">
-              <p:animEffect presetClass="entr" presetId="10" dur="500"/>
-            </p:cTn>
-          </p:par>
-        </p:par>
-        <p:par>
-          <p:cond>
-            <p:tnCond val="0"/>
-          </p:cond>
-          <p:par>
-            <p:cTn id="7" nodeType="withEffect" dur="500" begin="200ms" fill="hold">
-              <p:animEffect presetClass="entr" presetId="10" dur="500"/>
-            </p:cTn>
-          </p:par>
-        </p:par>
-        <p:par>
-          <p:cond>
-            <p:tnCond val="0"/>
-          </p:cond>
-          <p:par>
-            <p:cTn id="10" nodeType="withEffect" dur="500" begin="400ms" fill="hold">
-              <p:animEffect presetClass="entr" presetId="10" dur="500"/>
-            </p:cTn>
-          </p:par>
-        </p:par>
-        <p:par>
-          <p:cond>
-            <p:tnCond val="0"/>
-          </p:cond>
-          <p:par>
-            <p:cTn id="13" nodeType="withEffect" dur="500" begin="600ms" fill="hold">
-              <p:animEffect presetClass="entr" presetId="10" dur="500"/>
-            </p:cTn>
-          </p:par>
-        </p:par>
-        <p:par>
-          <p:cond>
-            <p:tnCond val="0"/>
-          </p:cond>
-          <p:par>
-            <p:cTn id="16" nodeType="withEffect" dur="500" begin="800ms" fill="hold">
-              <p:animEffect presetClass="entr" presetId="10" dur="500"/>
-            </p:cTn>
-          </p:par>
-        </p:par>
-        <p:par>
-          <p:cond>
-            <p:tnCond val="0"/>
-          </p:cond>
-          <p:par>
-            <p:cTn id="19" nodeType="withEffect" dur="500" begin="1000ms" fill="hold">
-              <p:animEffect presetClass="entr" presetId="10" dur="500"/>
-            </p:cTn>
-          </p:par>
-        </p:par>
-        <p:par>
-          <p:cond>
-            <p:tnCond val="0"/>
-          </p:cond>
-          <p:par>
-            <p:cTn id="7" nodeType="withEffect" dur="1500" begin="10000ms" fill="hold" repeatCount="indefinite">
-              <p:animEffect presetClass="emph" presetId="26" dur="1500"/>
-            </p:cTn>
-          </p:par>
-        </p:par>
-        <p:par>
-          <p:cond>
-            <p:tnCond val="0"/>
-          </p:cond>
-          <p:par>
-            <p:cTn id="10" nodeType="withEffect" dur="1500" begin="12000ms" fill="hold" repeatCount="indefinite">
-              <p:animEffect presetClass="emph" presetId="26" dur="1500"/>
-            </p:cTn>
-          </p:par>
-        </p:par>
+        <p:cTn id="1" nodeType="tmRoot" pres="1">
+          <p:tnLst>
+            <p:par>
+              <p:cTn id="1003" nodeType="withEffect" dur="500" begin="0ms" fill="hold">
+                <p:animEffect presetClass="entr" presetId="10" dur="500"/>
+              </p:cTn>
+            </p:par>
+            <p:par>
+              <p:cTn id="1006" nodeType="withEffect" dur="500" begin="200ms" fill="hold">
+                <p:animEffect presetClass="entr" presetId="10" dur="500"/>
+              </p:cTn>
+            </p:par>
+            <p:par>
+              <p:cTn id="1009" nodeType="withEffect" dur="500" begin="400ms" fill="hold">
+                <p:animEffect presetClass="entr" presetId="10" dur="500"/>
+              </p:cTn>
+            </p:par>
+            <p:par>
+              <p:cTn id="1012" nodeType="withEffect" dur="500" begin="600ms" fill="hold">
+                <p:animEffect presetClass="entr" presetId="10" dur="500"/>
+              </p:cTn>
+            </p:par>
+            <p:par>
+              <p:cTn id="1015" nodeType="withEffect" dur="500" begin="800ms" fill="hold">
+                <p:animEffect presetClass="entr" presetId="10" dur="500"/>
+              </p:cTn>
+            </p:par>
+            <p:par>
+              <p:cTn id="1018" nodeType="withEffect" dur="500" begin="1000ms" fill="hold">
+                <p:animEffect presetClass="entr" presetId="10" dur="500"/>
+              </p:cTn>
+            </p:par>
+            <p:par>
+              <p:cTn id="1006" nodeType="withEffect" dur="1500" begin="10000ms" fill="hold" repeatCount="indefinite">
+                <p:animEffect presetClass="emph" presetId="26" dur="1500"/>
+              </p:cTn>
+            </p:par>
+            <p:par>
+              <p:cTn id="1009" nodeType="withEffect" dur="1500" begin="12000ms" fill="hold" repeatCount="indefinite">
+                <p:animEffect presetClass="emph" presetId="26" dur="1500"/>
+              </p:cTn>
+            </p:par>
+          </p:tnLst>
+        </p:cTn>
       </p:par>
     </p:tnLst>
   </p:timing>
@@ -11372,7 +11061,7 @@
       </p:sp>
       <p:sp>
         <p:nvSpPr>
-          <p:cNvPr id="21" name="TextBox 20"/>
+          <p:cNvPr id="1020" name="TextBox 1019"/>
           <p:cNvSpPr txBox="1"/>
           <p:nvPr/>
         </p:nvSpPr>
@@ -11413,87 +11102,50 @@
   <p:timing>
     <p:tnLst>
       <p:par>
-        <p:pPr/>
-        <p:par>
-          <p:cond>
-            <p:tnCond val="0"/>
-          </p:cond>
-          <p:par>
-            <p:cTn id="4" nodeType="withEffect" dur="500" begin="0ms" fill="hold">
-              <p:animEffect presetClass="entr" presetId="10" dur="500"/>
-            </p:cTn>
-          </p:par>
-        </p:par>
-        <p:par>
-          <p:cond>
-            <p:tnCond val="0"/>
-          </p:cond>
-          <p:par>
-            <p:cTn id="6" nodeType="withEffect" dur="500" begin="400ms" fill="hold">
-              <p:animEffect presetClass="entr" presetId="10" dur="500"/>
-            </p:cTn>
-          </p:par>
-        </p:par>
-        <p:par>
-          <p:cond>
-            <p:tnCond val="0"/>
-          </p:cond>
-          <p:par>
-            <p:cTn id="10" nodeType="withEffect" dur="500" begin="400ms" fill="hold">
-              <p:animEffect presetClass="entr" presetId="10" dur="500"/>
-            </p:cTn>
-          </p:par>
-        </p:par>
-        <p:par>
-          <p:cond>
-            <p:tnCond val="0"/>
-          </p:cond>
-          <p:par>
-            <p:cTn id="11" nodeType="withEffect" dur="500" begin="700ms" fill="hold">
-              <p:animEffect presetClass="entr" presetId="10" dur="500"/>
-            </p:cTn>
-          </p:par>
-        </p:par>
-        <p:par>
-          <p:cond>
-            <p:tnCond val="0"/>
-          </p:cond>
-          <p:par>
-            <p:cTn id="15" nodeType="withEffect" dur="500" begin="700ms" fill="hold">
-              <p:animEffect presetClass="entr" presetId="10" dur="500"/>
-            </p:cTn>
-          </p:par>
-        </p:par>
-        <p:par>
-          <p:cond>
-            <p:tnCond val="0"/>
-          </p:cond>
-          <p:par>
-            <p:cTn id="16" nodeType="withEffect" dur="500" begin="1000ms" fill="hold">
-              <p:animEffect presetClass="entr" presetId="10" dur="500"/>
-            </p:cTn>
-          </p:par>
-        </p:par>
-        <p:par>
-          <p:cond>
-            <p:tnCond val="0"/>
-          </p:cond>
-          <p:par>
-            <p:cTn id="20" nodeType="withEffect" dur="500" begin="1000ms" fill="hold">
-              <p:animEffect presetClass="entr" presetId="10" dur="500"/>
-            </p:cTn>
-          </p:par>
-        </p:par>
-        <p:par>
-          <p:cond>
-            <p:tnCond val="0"/>
-          </p:cond>
-          <p:par>
-            <p:cTn id="16" nodeType="withEffect" dur="1500" begin="2000ms" fill="hold" repeatCount="indefinite">
-              <p:animEffect presetClass="emph" presetId="26" dur="1500"/>
-            </p:cTn>
-          </p:par>
-        </p:par>
+        <p:cTn id="1" nodeType="tmRoot" pres="1">
+          <p:tnLst>
+            <p:par>
+              <p:cTn id="1003" nodeType="withEffect" dur="500" begin="0ms" fill="hold">
+                <p:animEffect presetClass="entr" presetId="10" dur="500"/>
+              </p:cTn>
+            </p:par>
+            <p:par>
+              <p:cTn id="1005" nodeType="withEffect" dur="500" begin="400ms" fill="hold">
+                <p:animEffect presetClass="entr" presetId="10" dur="500"/>
+              </p:cTn>
+            </p:par>
+            <p:par>
+              <p:cTn id="1009" nodeType="withEffect" dur="500" begin="400ms" fill="hold">
+                <p:animEffect presetClass="entr" presetId="10" dur="500"/>
+              </p:cTn>
+            </p:par>
+            <p:par>
+              <p:cTn id="1010" nodeType="withEffect" dur="500" begin="700ms" fill="hold">
+                <p:animEffect presetClass="entr" presetId="10" dur="500"/>
+              </p:cTn>
+            </p:par>
+            <p:par>
+              <p:cTn id="1014" nodeType="withEffect" dur="500" begin="700ms" fill="hold">
+                <p:animEffect presetClass="entr" presetId="10" dur="500"/>
+              </p:cTn>
+            </p:par>
+            <p:par>
+              <p:cTn id="1015" nodeType="withEffect" dur="500" begin="1000ms" fill="hold">
+                <p:animEffect presetClass="entr" presetId="10" dur="500"/>
+              </p:cTn>
+            </p:par>
+            <p:par>
+              <p:cTn id="1019" nodeType="withEffect" dur="500" begin="1000ms" fill="hold">
+                <p:animEffect presetClass="entr" presetId="10" dur="500"/>
+              </p:cTn>
+            </p:par>
+            <p:par>
+              <p:cTn id="1015" nodeType="withEffect" dur="1500" begin="2000ms" fill="hold" repeatCount="indefinite">
+                <p:animEffect presetClass="emph" presetId="26" dur="1500"/>
+              </p:cTn>
+            </p:par>
+          </p:tnLst>
+        </p:cTn>
       </p:par>
     </p:tnLst>
   </p:timing>
@@ -12382,7 +12034,7 @@
       </p:sp>
       <p:sp>
         <p:nvSpPr>
-          <p:cNvPr id="24" name="TextBox 23"/>
+          <p:cNvPr id="1022" name="TextBox 1021"/>
           <p:cNvSpPr txBox="1"/>
           <p:nvPr/>
         </p:nvSpPr>
@@ -12423,137 +12075,75 @@
   <p:timing>
     <p:tnLst>
       <p:par>
-        <p:pPr/>
-        <p:par>
-          <p:cond>
-            <p:tnCond val="0"/>
-          </p:cond>
-          <p:par>
-            <p:cTn id="4" nodeType="withEffect" dur="500" begin="0ms" fill="hold">
-              <p:animEffect presetClass="entr" presetId="10" dur="500"/>
-            </p:cTn>
-          </p:par>
-        </p:par>
-        <p:par>
-          <p:cond>
-            <p:tnCond val="0"/>
-          </p:cond>
-          <p:par>
-            <p:cTn id="6" nodeType="withEffect" dur="500" begin="200ms" fill="hold">
-              <p:animEffect presetClass="entr" presetId="10" dur="500"/>
-            </p:cTn>
-          </p:par>
-        </p:par>
-        <p:par>
-          <p:cond>
-            <p:tnCond val="0"/>
-          </p:cond>
-          <p:par>
-            <p:cTn id="8" nodeType="withEffect" dur="500" begin="400ms" fill="hold">
-              <p:animEffect presetClass="entr" presetId="10" dur="500"/>
-            </p:cTn>
-          </p:par>
-        </p:par>
-        <p:par>
-          <p:cond>
-            <p:tnCond val="0"/>
-          </p:cond>
-          <p:par>
-            <p:cTn id="10" nodeType="withEffect" dur="500" begin="600ms" fill="hold">
-              <p:animEffect presetClass="entr" presetId="10" dur="500"/>
-            </p:cTn>
-          </p:par>
-        </p:par>
-        <p:par>
-          <p:cond>
-            <p:tnCond val="0"/>
-          </p:cond>
-          <p:par>
-            <p:cTn id="12" nodeType="withEffect" dur="500" begin="1000ms" fill="hold">
-              <p:animEffect presetClass="entr" presetId="10" dur="500"/>
-            </p:cTn>
-          </p:par>
-        </p:par>
-        <p:par>
-          <p:cond>
-            <p:tnCond val="0"/>
-          </p:cond>
-          <p:par>
-            <p:cTn id="14" nodeType="withEffect" dur="500" begin="1200ms" fill="hold">
-              <p:animEffect presetClass="entr" presetId="10" dur="500"/>
-            </p:cTn>
-          </p:par>
-        </p:par>
-        <p:par>
-          <p:cond>
-            <p:tnCond val="0"/>
-          </p:cond>
-          <p:par>
-            <p:cTn id="16" nodeType="withEffect" dur="500" begin="1400ms" fill="hold">
-              <p:animEffect presetClass="entr" presetId="10" dur="500"/>
-            </p:cTn>
-          </p:par>
-        </p:par>
-        <p:par>
-          <p:cond>
-            <p:tnCond val="0"/>
-          </p:cond>
-          <p:par>
-            <p:cTn id="18" nodeType="withEffect" dur="500" begin="1600ms" fill="hold">
-              <p:animEffect presetClass="entr" presetId="10" dur="500"/>
-            </p:cTn>
-          </p:par>
-        </p:par>
-        <p:par>
-          <p:cond>
-            <p:tnCond val="0"/>
-          </p:cond>
-          <p:par>
-            <p:cTn id="20" nodeType="withEffect" dur="500" begin="1800ms" fill="hold">
-              <p:animEffect presetClass="entr" presetId="10" dur="500"/>
-            </p:cTn>
-          </p:par>
-        </p:par>
-        <p:par>
-          <p:cond>
-            <p:tnCond val="0"/>
-          </p:cond>
-          <p:par>
-            <p:cTn id="22" nodeType="withEffect" dur="500" begin="2000ms" fill="hold">
-              <p:animEffect presetClass="entr" presetId="10" dur="500"/>
-            </p:cTn>
-          </p:par>
-        </p:par>
-        <p:par>
-          <p:cond>
-            <p:tnCond val="0"/>
-          </p:cond>
-          <p:par>
-            <p:cTn id="12" nodeType="withEffect" dur="1500" begin="15000ms" fill="hold" repeatCount="indefinite">
-              <p:animEffect presetClass="emph" presetId="26" dur="1500"/>
-            </p:cTn>
-          </p:par>
-        </p:par>
-        <p:par>
-          <p:cond>
-            <p:tnCond val="0"/>
-          </p:cond>
-          <p:par>
-            <p:cTn id="14" nodeType="withEffect" dur="1500" begin="17000ms" fill="hold" repeatCount="indefinite">
-              <p:animEffect presetClass="emph" presetId="26" dur="1500"/>
-            </p:cTn>
-          </p:par>
-        </p:par>
-        <p:par>
-          <p:cond>
-            <p:tnCond val="0"/>
-          </p:cond>
-          <p:par>
-            <p:cTn id="16" nodeType="withEffect" dur="1500" begin="19000ms" fill="hold" repeatCount="indefinite">
-              <p:animEffect presetClass="emph" presetId="26" dur="1500"/>
-            </p:cTn>
-          </p:par>
-        </p:par>
+        <p:cTn id="1" nodeType="tmRoot" pres="1">
+          <p:tnLst>
+            <p:par>
+              <p:cTn id="1003" nodeType="withEffect" dur="500" begin="0ms" fill="hold">
+                <p:animEffect presetClass="entr" presetId="10" dur="500"/>
+              </p:cTn>
+            </p:par>
+            <p:par>
+              <p:cTn id="1005" nodeType="withEffect" dur="500" begin="200ms" fill="hold">
+                <p:animEffect presetClass="entr" presetId="10" dur="500"/>
+              </p:cTn>
+            </p:par>
+            <p:par>
+              <p:cTn id="1007" nodeType="withEffect" dur="500" begin="400ms" fill="hold">
+                <p:animEffect presetClass="entr" presetId="10" dur="500"/>
+              </p:cTn>
+            </p:par>
+            <p:par>
+              <p:cTn id="1009" nodeType="withEffect" dur="500" begin="600ms" fill="hold">
+                <p:animEffect presetClass="entr" presetId="10" dur="500"/>
+              </p:cTn>
+            </p:par>
+            <p:par>
+              <p:cTn id="1011" nodeType="withEffect" dur="500" begin="1000ms" fill="hold">
+                <p:animEffect presetClass="entr" presetId="10" dur="500"/>
+              </p:cTn>
+            </p:par>
+            <p:par>
+              <p:cTn id="1013" nodeType="withEffect" dur="500" begin="1200ms" fill="hold">
+                <p:animEffect presetClass="entr" presetId="10" dur="500"/>
+              </p:cTn>
+            </p:par>
+            <p:par>
+              <p:cTn id="1015" nodeType="withEffect" dur="500" begin="1400ms" fill="hold">
+                <p:animEffect presetClass="entr" presetId="10" dur="500"/>
+              </p:cTn>
+            </p:par>
+            <p:par>
+              <p:cTn id="1017" nodeType="withEffect" dur="500" begin="1600ms" fill="hold">
+                <p:animEffect presetClass="entr" presetId="10" dur="500"/>
+              </p:cTn>
+            </p:par>
+            <p:par>
+              <p:cTn id="1019" nodeType="withEffect" dur="500" begin="1800ms" fill="hold">
+                <p:animEffect presetClass="entr" presetId="10" dur="500"/>
+              </p:cTn>
+            </p:par>
+            <p:par>
+              <p:cTn id="1021" nodeType="withEffect" dur="500" begin="2000ms" fill="hold">
+                <p:animEffect presetClass="entr" presetId="10" dur="500"/>
+              </p:cTn>
+            </p:par>
+            <p:par>
+              <p:cTn id="1011" nodeType="withEffect" dur="1500" begin="15000ms" fill="hold" repeatCount="indefinite">
+                <p:animEffect presetClass="emph" presetId="26" dur="1500"/>
+              </p:cTn>
+            </p:par>
+            <p:par>
+              <p:cTn id="1013" nodeType="withEffect" dur="1500" begin="17000ms" fill="hold" repeatCount="indefinite">
+                <p:animEffect presetClass="emph" presetId="26" dur="1500"/>
+              </p:cTn>
+            </p:par>
+            <p:par>
+              <p:cTn id="1015" nodeType="withEffect" dur="1500" begin="19000ms" fill="hold" repeatCount="indefinite">
+                <p:animEffect presetClass="emph" presetId="26" dur="1500"/>
+              </p:cTn>
+            </p:par>
+          </p:tnLst>
+        </p:cTn>
       </p:par>
     </p:tnLst>
   </p:timing>
@@ -13400,7 +12990,7 @@
       </p:sp>
       <p:sp>
         <p:nvSpPr>
-          <p:cNvPr id="24" name="TextBox 23"/>
+          <p:cNvPr id="1017" name="TextBox 1016"/>
           <p:cNvSpPr txBox="1"/>
           <p:nvPr/>
         </p:nvSpPr>
@@ -13441,67 +13031,40 @@
   <p:timing>
     <p:tnLst>
       <p:par>
-        <p:pPr/>
-        <p:par>
-          <p:cond>
-            <p:tnCond val="0"/>
-          </p:cond>
-          <p:par>
-            <p:cTn id="5" nodeType="withEffect" dur="500" begin="0ms" fill="hold">
-              <p:animEffect presetClass="entr" presetId="10" dur="500"/>
-            </p:cTn>
-          </p:par>
-        </p:par>
-        <p:par>
-          <p:cond>
-            <p:tnCond val="0"/>
-          </p:cond>
-          <p:par>
-            <p:cTn id="8" nodeType="withEffect" dur="500" begin="400ms" fill="hold">
-              <p:animEffect presetClass="entr" presetId="10" dur="500"/>
-            </p:cTn>
-          </p:par>
-        </p:par>
-        <p:par>
-          <p:cond>
-            <p:tnCond val="0"/>
-          </p:cond>
-          <p:par>
-            <p:cTn id="11" nodeType="withEffect" dur="500" begin="800ms" fill="hold">
-              <p:animEffect presetClass="entr" presetId="10" dur="500"/>
-            </p:cTn>
-          </p:par>
-        </p:par>
-        <p:par>
-          <p:cond>
-            <p:tnCond val="0"/>
-          </p:cond>
-          <p:par>
-            <p:cTn id="14" nodeType="withEffect" dur="500" begin="1200ms" fill="hold">
-              <p:animEffect presetClass="entr" presetId="10" dur="500"/>
-            </p:cTn>
-          </p:par>
-        </p:par>
-        <p:par>
-          <p:cond>
-            <p:tnCond val="0"/>
-          </p:cond>
-          <p:par>
-            <p:cTn id="17" nodeType="withEffect" dur="500" begin="1600ms" fill="hold">
-              <p:animEffect presetClass="entr" presetId="10" dur="500"/>
-            </p:cTn>
-          </p:par>
-        </p:par>
-        <p:par>
-          <p:cond>
-            <p:tnCond val="0"/>
-          </p:cond>
-          <p:par>
-            <p:cTn id="17" nodeType="withEffect" dur="1500" begin="2500ms" fill="hold" repeatCount="indefinite">
-              <p:animEffect presetClass="emph" presetId="26" dur="1500"/>
-            </p:cTn>
-          </p:par>
-        </p:par>
+        <p:cTn id="1" nodeType="tmRoot" pres="1">
+          <p:tnLst>
+            <p:par>
+              <p:cTn id="1004" nodeType="withEffect" dur="500" begin="0ms" fill="hold">
+                <p:animEffect presetClass="entr" presetId="10" dur="500"/>
+              </p:cTn>
+            </p:par>
+            <p:par>
+              <p:cTn id="1007" nodeType="withEffect" dur="500" begin="400ms" fill="hold">
+                <p:animEffect presetClass="entr" presetId="10" dur="500"/>
+              </p:cTn>
+            </p:par>
+            <p:par>
+              <p:cTn id="1010" nodeType="withEffect" dur="500" begin="800ms" fill="hold">
+                <p:animEffect presetClass="entr" presetId="10" dur="500"/>
+              </p:cTn>
+            </p:par>
+            <p:par>
+              <p:cTn id="1013" nodeType="withEffect" dur="500" begin="1200ms" fill="hold">
+                <p:animEffect presetClass="entr" presetId="10" dur="500"/>
+              </p:cTn>
+            </p:par>
+            <p:par>
+              <p:cTn id="1016" nodeType="withEffect" dur="500" begin="1600ms" fill="hold">
+                <p:animEffect presetClass="entr" presetId="10" dur="500"/>
+              </p:cTn>
+            </p:par>
+            <p:par>
+              <p:cTn id="1016" nodeType="withEffect" dur="1500" begin="2500ms" fill="hold" repeatCount="indefinite">
+                <p:animEffect presetClass="emph" presetId="26" dur="1500"/>
+              </p:cTn>
+            </p:par>
+          </p:tnLst>
+        </p:cTn>
       </p:par>
     </p:tnLst>
   </p:timing>
@@ -14348,7 +13911,7 @@
       </p:sp>
       <p:sp>
         <p:nvSpPr>
-          <p:cNvPr id="24" name="TextBox 23"/>
+          <p:cNvPr id="1017" name="TextBox 1016"/>
           <p:cNvSpPr txBox="1"/>
           <p:nvPr/>
         </p:nvSpPr>
@@ -14389,67 +13952,40 @@
   <p:timing>
     <p:tnLst>
       <p:par>
-        <p:pPr/>
-        <p:par>
-          <p:cond>
-            <p:tnCond val="0"/>
-          </p:cond>
-          <p:par>
-            <p:cTn id="5" nodeType="withEffect" dur="500" begin="0ms" fill="hold">
-              <p:animEffect presetClass="entr" presetId="10" dur="500"/>
-            </p:cTn>
-          </p:par>
-        </p:par>
-        <p:par>
-          <p:cond>
-            <p:tnCond val="0"/>
-          </p:cond>
-          <p:par>
-            <p:cTn id="8" nodeType="withEffect" dur="500" begin="400ms" fill="hold">
-              <p:animEffect presetClass="entr" presetId="10" dur="500"/>
-            </p:cTn>
-          </p:par>
-        </p:par>
-        <p:par>
-          <p:cond>
-            <p:tnCond val="0"/>
-          </p:cond>
-          <p:par>
-            <p:cTn id="11" nodeType="withEffect" dur="500" begin="800ms" fill="hold">
-              <p:animEffect presetClass="entr" presetId="10" dur="500"/>
-            </p:cTn>
-          </p:par>
-        </p:par>
-        <p:par>
-          <p:cond>
-            <p:tnCond val="0"/>
-          </p:cond>
-          <p:par>
-            <p:cTn id="14" nodeType="withEffect" dur="500" begin="1200ms" fill="hold">
-              <p:animEffect presetClass="entr" presetId="10" dur="500"/>
-            </p:cTn>
-          </p:par>
-        </p:par>
-        <p:par>
-          <p:cond>
-            <p:tnCond val="0"/>
-          </p:cond>
-          <p:par>
-            <p:cTn id="17" nodeType="withEffect" dur="500" begin="1600ms" fill="hold">
-              <p:animEffect presetClass="entr" presetId="10" dur="500"/>
-            </p:cTn>
-          </p:par>
-        </p:par>
-        <p:par>
-          <p:cond>
-            <p:tnCond val="0"/>
-          </p:cond>
-          <p:par>
-            <p:cTn id="17" nodeType="withEffect" dur="1500" begin="2500ms" fill="hold" repeatCount="indefinite">
-              <p:animEffect presetClass="emph" presetId="26" dur="1500"/>
-            </p:cTn>
-          </p:par>
-        </p:par>
+        <p:cTn id="1" nodeType="tmRoot" pres="1">
+          <p:tnLst>
+            <p:par>
+              <p:cTn id="1004" nodeType="withEffect" dur="500" begin="0ms" fill="hold">
+                <p:animEffect presetClass="entr" presetId="10" dur="500"/>
+              </p:cTn>
+            </p:par>
+            <p:par>
+              <p:cTn id="1007" nodeType="withEffect" dur="500" begin="400ms" fill="hold">
+                <p:animEffect presetClass="entr" presetId="10" dur="500"/>
+              </p:cTn>
+            </p:par>
+            <p:par>
+              <p:cTn id="1010" nodeType="withEffect" dur="500" begin="800ms" fill="hold">
+                <p:animEffect presetClass="entr" presetId="10" dur="500"/>
+              </p:cTn>
+            </p:par>
+            <p:par>
+              <p:cTn id="1013" nodeType="withEffect" dur="500" begin="1200ms" fill="hold">
+                <p:animEffect presetClass="entr" presetId="10" dur="500"/>
+              </p:cTn>
+            </p:par>
+            <p:par>
+              <p:cTn id="1016" nodeType="withEffect" dur="500" begin="1600ms" fill="hold">
+                <p:animEffect presetClass="entr" presetId="10" dur="500"/>
+              </p:cTn>
+            </p:par>
+            <p:par>
+              <p:cTn id="1016" nodeType="withEffect" dur="1500" begin="2500ms" fill="hold" repeatCount="indefinite">
+                <p:animEffect presetClass="emph" presetId="26" dur="1500"/>
+              </p:cTn>
+            </p:par>
+          </p:tnLst>
+        </p:cTn>
       </p:par>
     </p:tnLst>
   </p:timing>

--- a/docs/ppt/javabrain.pptx
+++ b/docs/ppt/javabrain.pptx
@@ -4976,32 +4976,6 @@
         <p:nvPr/>
       </p:nvGrpSpPr>
       <p:grpSpPr/>
-      <p:pic>
-        <p:nvPicPr>
-          <p:cNvPr id="3" name="Picture 2" descr="p9_dual_timeline.png"/>
-          <p:cNvPicPr>
-            <a:picLocks noChangeAspect="1"/>
-          </p:cNvPicPr>
-          <p:nvPr/>
-        </p:nvPicPr>
-        <p:blipFill>
-          <a:blip r:embed="rId2">
-            <a:alphaModFix amt="100000"/>
-          </a:blip>
-          <a:stretch>
-            <a:fillRect/>
-          </a:stretch>
-        </p:blipFill>
-        <p:spPr>
-          <a:xfrm>
-            <a:off x="457200" y="868680"/>
-            <a:ext cx="11277295" cy="1097280"/>
-          </a:xfrm>
-          <a:prstGeom prst="rect">
-            <a:avLst/>
-          </a:prstGeom>
-        </p:spPr>
-      </p:pic>
       <p:sp>
         <p:nvSpPr>
           <p:cNvPr id="2" name="TextBox 1"/>
@@ -5032,66 +5006,66 @@
                 </a:solidFill>
                 <a:latin typeface="阿里巴巴普惠体 3.0"/>
               </a:rPr>
-              <a:t>JavaBrain 路线图</a:t>
-            </a:r>
-          </a:p>
-        </p:txBody>
-      </p:sp>
-      <p:sp>
-        <p:nvSpPr>
-          <p:cNvPr id="4" name="TextBox 3"/>
-          <p:cNvSpPr txBox="1"/>
-          <p:nvPr/>
-        </p:nvSpPr>
-        <p:spPr>
-          <a:xfrm>
-            <a:off x="274320" y="2194560"/>
-            <a:ext cx="6949440" cy="365760"/>
-          </a:xfrm>
-          <a:prstGeom prst="rect">
-            <a:avLst/>
-          </a:prstGeom>
-          <a:noFill/>
-        </p:spPr>
-        <p:txBody>
-          <a:bodyPr wrap="square">
-            <a:spAutoFit/>
-          </a:bodyPr>
-          <a:lstStyle/>
-          <a:p>
-            <a:pPr algn="ctr"/>
-            <a:r>
-              <a:rPr sz="1800" b="1">
-                <a:solidFill>
-                  <a:srgbClr val="007396"/>
+              <a:t>从工具到同事 · 4 阶段信任阶梯</a:t>
+            </a:r>
+          </a:p>
+        </p:txBody>
+      </p:sp>
+      <p:sp>
+        <p:nvSpPr>
+          <p:cNvPr id="3" name="TextBox 2"/>
+          <p:cNvSpPr txBox="1"/>
+          <p:nvPr/>
+        </p:nvSpPr>
+        <p:spPr>
+          <a:xfrm>
+            <a:off x="457200" y="868680"/>
+            <a:ext cx="11277295" cy="365760"/>
+          </a:xfrm>
+          <a:prstGeom prst="rect">
+            <a:avLst/>
+          </a:prstGeom>
+          <a:noFill/>
+        </p:spPr>
+        <p:txBody>
+          <a:bodyPr wrap="square">
+            <a:spAutoFit/>
+          </a:bodyPr>
+          <a:lstStyle/>
+          <a:p>
+            <a:pPr algn="ctr"/>
+            <a:r>
+              <a:rPr sz="1400" b="0">
+                <a:solidFill>
+                  <a:srgbClr val="6B7280"/>
                 </a:solidFill>
                 <a:latin typeface="阿里巴巴普惠体 3.0"/>
               </a:rPr>
-              <a:t>灵梭 · AI 赋能中心 (主线 60%)</a:t>
-            </a:r>
-          </a:p>
-        </p:txBody>
-      </p:sp>
-      <p:sp>
-        <p:nvSpPr>
-          <p:cNvPr id="5" name="Rounded Rectangle 4"/>
+              <a:t>JavaBrain 的目标:成为您可托付的数据同事</a:t>
+            </a:r>
+          </a:p>
+        </p:txBody>
+      </p:sp>
+      <p:sp>
+        <p:nvSpPr>
+          <p:cNvPr id="4" name="Rounded Rectangle 3"/>
           <p:cNvSpPr/>
           <p:nvPr/>
         </p:nvSpPr>
         <p:spPr>
           <a:xfrm>
-            <a:off x="274320" y="2697480"/>
-            <a:ext cx="6949440" cy="457200"/>
+            <a:off x="457200" y="1371600"/>
+            <a:ext cx="2697480" cy="3200400"/>
           </a:xfrm>
           <a:prstGeom prst="roundRect">
             <a:avLst/>
           </a:prstGeom>
           <a:solidFill>
-            <a:srgbClr val="FFFFFF"/>
+            <a:srgbClr val="F3F4F6"/>
           </a:solidFill>
-          <a:ln w="19050">
+          <a:ln w="25400">
             <a:solidFill>
-              <a:srgbClr val="007396"/>
+              <a:srgbClr val="6B7280"/>
             </a:solidFill>
           </a:ln>
         </p:spPr>
@@ -5119,35 +5093,70 @@
       </p:sp>
       <p:sp>
         <p:nvSpPr>
+          <p:cNvPr id="5" name="TextBox 4"/>
+          <p:cNvSpPr txBox="1"/>
+          <p:nvPr/>
+        </p:nvSpPr>
+        <p:spPr>
+          <a:xfrm>
+            <a:off x="594360" y="1463040"/>
+            <a:ext cx="2423160" cy="822960"/>
+          </a:xfrm>
+          <a:prstGeom prst="rect">
+            <a:avLst/>
+          </a:prstGeom>
+          <a:noFill/>
+        </p:spPr>
+        <p:txBody>
+          <a:bodyPr wrap="square">
+            <a:spAutoFit/>
+          </a:bodyPr>
+          <a:lstStyle/>
+          <a:p>
+            <a:pPr algn="ctr"/>
+            <a:r>
+              <a:rPr sz="6000" b="1">
+                <a:solidFill>
+                  <a:srgbClr val="6B7280"/>
+                </a:solidFill>
+                <a:latin typeface="Inter"/>
+              </a:rPr>
+              <a:t>1</a:t>
+            </a:r>
+          </a:p>
+        </p:txBody>
+      </p:sp>
+      <p:sp>
+        <p:nvSpPr>
           <p:cNvPr id="6" name="TextBox 5"/>
           <p:cNvSpPr txBox="1"/>
           <p:nvPr/>
         </p:nvSpPr>
         <p:spPr>
           <a:xfrm>
-            <a:off x="457200" y="2734056"/>
-            <a:ext cx="6766560" cy="228600"/>
-          </a:xfrm>
-          <a:prstGeom prst="rect">
-            <a:avLst/>
-          </a:prstGeom>
-          <a:noFill/>
-        </p:spPr>
-        <p:txBody>
-          <a:bodyPr wrap="square">
-            <a:spAutoFit/>
-          </a:bodyPr>
-          <a:lstStyle/>
-          <a:p>
-            <a:pPr algn="ctr"/>
-            <a:r>
-              <a:rPr sz="1300" b="1">
-                <a:solidFill>
-                  <a:srgbClr val="007396"/>
+            <a:off x="594360" y="2331720"/>
+            <a:ext cx="2423160" cy="457200"/>
+          </a:xfrm>
+          <a:prstGeom prst="rect">
+            <a:avLst/>
+          </a:prstGeom>
+          <a:noFill/>
+        </p:spPr>
+        <p:txBody>
+          <a:bodyPr wrap="square">
+            <a:spAutoFit/>
+          </a:bodyPr>
+          <a:lstStyle/>
+          <a:p>
+            <a:pPr algn="ctr"/>
+            <a:r>
+              <a:rPr sz="2200" b="1">
+                <a:solidFill>
+                  <a:srgbClr val="6B7280"/>
                 </a:solidFill>
                 <a:latin typeface="阿里巴巴普惠体 3.0"/>
               </a:rPr>
-              <a:t>1. Agentic Workflow</a:t>
+              <a:t>可用</a:t>
             </a:r>
           </a:p>
         </p:txBody>
@@ -5160,54 +5169,52 @@
         </p:nvSpPr>
         <p:spPr>
           <a:xfrm>
-            <a:off x="457200" y="2953512"/>
-            <a:ext cx="6766560" cy="201168"/>
-          </a:xfrm>
-          <a:prstGeom prst="rect">
-            <a:avLst/>
-          </a:prstGeom>
-          <a:noFill/>
-        </p:spPr>
-        <p:txBody>
-          <a:bodyPr wrap="square">
-            <a:spAutoFit/>
-          </a:bodyPr>
-          <a:lstStyle/>
-          <a:p>
-            <a:pPr algn="ctr"/>
-            <a:r>
-              <a:rPr sz="1100" b="0">
-                <a:solidFill>
-                  <a:srgbClr val="6B7280"/>
+            <a:off x="594360" y="2788920"/>
+            <a:ext cx="2423160" cy="457200"/>
+          </a:xfrm>
+          <a:prstGeom prst="rect">
+            <a:avLst/>
+          </a:prstGeom>
+          <a:noFill/>
+        </p:spPr>
+        <p:txBody>
+          <a:bodyPr wrap="square">
+            <a:spAutoFit/>
+          </a:bodyPr>
+          <a:lstStyle/>
+          <a:p>
+            <a:pPr algn="ctr"/>
+            <a:r>
+              <a:rPr sz="1200" b="0">
+                <a:solidFill>
+                  <a:srgbClr val="1F2937"/>
                 </a:solidFill>
                 <a:latin typeface="阿里巴巴普惠体 3.0"/>
               </a:rPr>
-              <a:t>智能体工作流:自动拆解 + 多步推理 + 反思重试</a:t>
-            </a:r>
-          </a:p>
-        </p:txBody>
-      </p:sp>
-      <p:sp>
-        <p:nvSpPr>
-          <p:cNvPr id="8" name="Rounded Rectangle 7"/>
+              <a:t>AI 能干活</a:t>
+            </a:r>
+          </a:p>
+        </p:txBody>
+      </p:sp>
+      <p:sp>
+        <p:nvSpPr>
+          <p:cNvPr id="8" name="Rectangle 7"/>
           <p:cNvSpPr/>
           <p:nvPr/>
         </p:nvSpPr>
         <p:spPr>
           <a:xfrm>
-            <a:off x="274320" y="3246120"/>
-            <a:ext cx="6949440" cy="457200"/>
-          </a:xfrm>
-          <a:prstGeom prst="roundRect">
+            <a:off x="914400" y="3291840"/>
+            <a:ext cx="1783080" cy="18288"/>
+          </a:xfrm>
+          <a:prstGeom prst="rect">
             <a:avLst/>
           </a:prstGeom>
           <a:solidFill>
-            <a:srgbClr val="FFFFFF"/>
+            <a:srgbClr val="6B7280"/>
           </a:solidFill>
-          <a:ln w="19050">
-            <a:solidFill>
-              <a:srgbClr val="007396"/>
-            </a:solidFill>
+          <a:ln>
+            <a:noFill/>
           </a:ln>
         </p:spPr>
         <p:style>
@@ -5240,29 +5247,29 @@
         </p:nvSpPr>
         <p:spPr>
           <a:xfrm>
-            <a:off x="457200" y="3282696"/>
-            <a:ext cx="6766560" cy="228600"/>
-          </a:xfrm>
-          <a:prstGeom prst="rect">
-            <a:avLst/>
-          </a:prstGeom>
-          <a:noFill/>
-        </p:spPr>
-        <p:txBody>
-          <a:bodyPr wrap="square">
-            <a:spAutoFit/>
-          </a:bodyPr>
-          <a:lstStyle/>
-          <a:p>
-            <a:pPr algn="ctr"/>
-            <a:r>
-              <a:rPr sz="1300" b="1">
-                <a:solidFill>
-                  <a:srgbClr val="007396"/>
+            <a:off x="594360" y="3429000"/>
+            <a:ext cx="2423160" cy="274320"/>
+          </a:xfrm>
+          <a:prstGeom prst="rect">
+            <a:avLst/>
+          </a:prstGeom>
+          <a:noFill/>
+        </p:spPr>
+        <p:txBody>
+          <a:bodyPr wrap="square">
+            <a:spAutoFit/>
+          </a:bodyPr>
+          <a:lstStyle/>
+          <a:p>
+            <a:pPr algn="ctr"/>
+            <a:r>
+              <a:rPr sz="1100" b="0">
+                <a:solidFill>
+                  <a:srgbClr val="1F2937"/>
                 </a:solidFill>
                 <a:latin typeface="阿里巴巴普惠体 3.0"/>
               </a:rPr>
-              <a:t>2. Graph-RAG + 实时认知</a:t>
+              <a:t>✓ NL2SQL 出报告</a:t>
             </a:r>
           </a:p>
         </p:txBody>
@@ -5275,8 +5282,8 @@
         </p:nvSpPr>
         <p:spPr>
           <a:xfrm>
-            <a:off x="457200" y="3502152"/>
-            <a:ext cx="6766560" cy="201168"/>
+            <a:off x="594360" y="3749039"/>
+            <a:ext cx="2423160" cy="274320"/>
           </a:xfrm>
           <a:prstGeom prst="rect">
             <a:avLst/>
@@ -5293,33 +5300,68 @@
             <a:r>
               <a:rPr sz="1100" b="0">
                 <a:solidFill>
-                  <a:srgbClr val="6B7280"/>
+                  <a:srgbClr val="1F2937"/>
                 </a:solidFill>
                 <a:latin typeface="阿里巴巴普惠体 3.0"/>
               </a:rPr>
-              <a:t>知识图谱融合 + 毫秒级增量更新</a:t>
-            </a:r>
-          </a:p>
-        </p:txBody>
-      </p:sp>
-      <p:sp>
-        <p:nvSpPr>
-          <p:cNvPr id="11" name="Rounded Rectangle 10"/>
+              <a:t>✓ CRUD 自动生成</a:t>
+            </a:r>
+          </a:p>
+        </p:txBody>
+      </p:sp>
+      <p:sp>
+        <p:nvSpPr>
+          <p:cNvPr id="11" name="TextBox 10"/>
+          <p:cNvSpPr txBox="1"/>
+          <p:nvPr/>
+        </p:nvSpPr>
+        <p:spPr>
+          <a:xfrm>
+            <a:off x="594360" y="4069080"/>
+            <a:ext cx="2423160" cy="274320"/>
+          </a:xfrm>
+          <a:prstGeom prst="rect">
+            <a:avLst/>
+          </a:prstGeom>
+          <a:noFill/>
+        </p:spPr>
+        <p:txBody>
+          <a:bodyPr wrap="square">
+            <a:spAutoFit/>
+          </a:bodyPr>
+          <a:lstStyle/>
+          <a:p>
+            <a:pPr algn="ctr"/>
+            <a:r>
+              <a:rPr sz="1100" b="0">
+                <a:solidFill>
+                  <a:srgbClr val="1F2937"/>
+                </a:solidFill>
+                <a:latin typeface="阿里巴巴普惠体 3.0"/>
+              </a:rPr>
+              <a:t>✓ 0 漂移 0 错误</a:t>
+            </a:r>
+          </a:p>
+        </p:txBody>
+      </p:sp>
+      <p:sp>
+        <p:nvSpPr>
+          <p:cNvPr id="12" name="Rounded Rectangle 11"/>
           <p:cNvSpPr/>
           <p:nvPr/>
         </p:nvSpPr>
         <p:spPr>
           <a:xfrm>
-            <a:off x="274320" y="3794760"/>
-            <a:ext cx="6949440" cy="457200"/>
+            <a:off x="3291840" y="1371600"/>
+            <a:ext cx="2697480" cy="3200400"/>
           </a:xfrm>
           <a:prstGeom prst="roundRect">
             <a:avLst/>
           </a:prstGeom>
           <a:solidFill>
-            <a:srgbClr val="FFFFFF"/>
+            <a:srgbClr val="E0F2FE"/>
           </a:solidFill>
-          <a:ln w="19050">
+          <a:ln w="25400">
             <a:solidFill>
               <a:srgbClr val="007396"/>
             </a:solidFill>
@@ -5349,95 +5391,128 @@
       </p:sp>
       <p:sp>
         <p:nvSpPr>
-          <p:cNvPr id="12" name="TextBox 11"/>
-          <p:cNvSpPr txBox="1"/>
-          <p:nvPr/>
-        </p:nvSpPr>
-        <p:spPr>
-          <a:xfrm>
-            <a:off x="457200" y="3831336"/>
-            <a:ext cx="6766560" cy="228600"/>
-          </a:xfrm>
-          <a:prstGeom prst="rect">
-            <a:avLst/>
-          </a:prstGeom>
-          <a:noFill/>
-        </p:spPr>
-        <p:txBody>
-          <a:bodyPr wrap="square">
-            <a:spAutoFit/>
-          </a:bodyPr>
-          <a:lstStyle/>
-          <a:p>
-            <a:pPr algn="ctr"/>
-            <a:r>
-              <a:rPr sz="1300" b="1">
+          <p:cNvPr id="13" name="TextBox 12"/>
+          <p:cNvSpPr txBox="1"/>
+          <p:nvPr/>
+        </p:nvSpPr>
+        <p:spPr>
+          <a:xfrm>
+            <a:off x="3429000" y="1463040"/>
+            <a:ext cx="2423160" cy="822960"/>
+          </a:xfrm>
+          <a:prstGeom prst="rect">
+            <a:avLst/>
+          </a:prstGeom>
+          <a:noFill/>
+        </p:spPr>
+        <p:txBody>
+          <a:bodyPr wrap="square">
+            <a:spAutoFit/>
+          </a:bodyPr>
+          <a:lstStyle/>
+          <a:p>
+            <a:pPr algn="ctr"/>
+            <a:r>
+              <a:rPr sz="6000" b="1">
                 <a:solidFill>
                   <a:srgbClr val="007396"/>
                 </a:solidFill>
+                <a:latin typeface="Inter"/>
+              </a:rPr>
+              <a:t>2</a:t>
+            </a:r>
+          </a:p>
+        </p:txBody>
+      </p:sp>
+      <p:sp>
+        <p:nvSpPr>
+          <p:cNvPr id="14" name="TextBox 13"/>
+          <p:cNvSpPr txBox="1"/>
+          <p:nvPr/>
+        </p:nvSpPr>
+        <p:spPr>
+          <a:xfrm>
+            <a:off x="3429000" y="2331720"/>
+            <a:ext cx="2423160" cy="457200"/>
+          </a:xfrm>
+          <a:prstGeom prst="rect">
+            <a:avLst/>
+          </a:prstGeom>
+          <a:noFill/>
+        </p:spPr>
+        <p:txBody>
+          <a:bodyPr wrap="square">
+            <a:spAutoFit/>
+          </a:bodyPr>
+          <a:lstStyle/>
+          <a:p>
+            <a:pPr algn="ctr"/>
+            <a:r>
+              <a:rPr sz="2200" b="1">
+                <a:solidFill>
+                  <a:srgbClr val="007396"/>
+                </a:solidFill>
                 <a:latin typeface="阿里巴巴普惠体 3.0"/>
               </a:rPr>
-              <a:t>3. 多模态交互</a:t>
-            </a:r>
-          </a:p>
-        </p:txBody>
-      </p:sp>
-      <p:sp>
-        <p:nvSpPr>
-          <p:cNvPr id="13" name="TextBox 12"/>
-          <p:cNvSpPr txBox="1"/>
-          <p:nvPr/>
-        </p:nvSpPr>
-        <p:spPr>
-          <a:xfrm>
-            <a:off x="457200" y="4050792"/>
-            <a:ext cx="6766560" cy="201168"/>
-          </a:xfrm>
-          <a:prstGeom prst="rect">
-            <a:avLst/>
-          </a:prstGeom>
-          <a:noFill/>
-        </p:spPr>
-        <p:txBody>
-          <a:bodyPr wrap="square">
-            <a:spAutoFit/>
-          </a:bodyPr>
-          <a:lstStyle/>
-          <a:p>
-            <a:pPr algn="ctr"/>
-            <a:r>
-              <a:rPr sz="1100" b="0">
-                <a:solidFill>
-                  <a:srgbClr val="6B7280"/>
+              <a:t>可控</a:t>
+            </a:r>
+          </a:p>
+        </p:txBody>
+      </p:sp>
+      <p:sp>
+        <p:nvSpPr>
+          <p:cNvPr id="15" name="TextBox 14"/>
+          <p:cNvSpPr txBox="1"/>
+          <p:nvPr/>
+        </p:nvSpPr>
+        <p:spPr>
+          <a:xfrm>
+            <a:off x="3429000" y="2788920"/>
+            <a:ext cx="2423160" cy="457200"/>
+          </a:xfrm>
+          <a:prstGeom prst="rect">
+            <a:avLst/>
+          </a:prstGeom>
+          <a:noFill/>
+        </p:spPr>
+        <p:txBody>
+          <a:bodyPr wrap="square">
+            <a:spAutoFit/>
+          </a:bodyPr>
+          <a:lstStyle/>
+          <a:p>
+            <a:pPr algn="ctr"/>
+            <a:r>
+              <a:rPr sz="1200" b="0">
+                <a:solidFill>
+                  <a:srgbClr val="1F2937"/>
                 </a:solidFill>
                 <a:latin typeface="阿里巴巴普惠体 3.0"/>
               </a:rPr>
-              <a:t>语音 / 图像 / AI 悬浮球</a:t>
-            </a:r>
-          </a:p>
-        </p:txBody>
-      </p:sp>
-      <p:sp>
-        <p:nvSpPr>
-          <p:cNvPr id="14" name="Rounded Rectangle 13"/>
+              <a:t>AI 听指挥</a:t>
+            </a:r>
+          </a:p>
+        </p:txBody>
+      </p:sp>
+      <p:sp>
+        <p:nvSpPr>
+          <p:cNvPr id="16" name="Rectangle 15"/>
           <p:cNvSpPr/>
           <p:nvPr/>
         </p:nvSpPr>
         <p:spPr>
           <a:xfrm>
-            <a:off x="274320" y="4343400"/>
-            <a:ext cx="6949440" cy="457200"/>
-          </a:xfrm>
-          <a:prstGeom prst="roundRect">
+            <a:off x="3749039" y="3291840"/>
+            <a:ext cx="1783080" cy="18288"/>
+          </a:xfrm>
+          <a:prstGeom prst="rect">
             <a:avLst/>
           </a:prstGeom>
           <a:solidFill>
-            <a:srgbClr val="FFFFFF"/>
+            <a:srgbClr val="007396"/>
           </a:solidFill>
-          <a:ln w="19050">
-            <a:solidFill>
-              <a:srgbClr val="007396"/>
-            </a:solidFill>
+          <a:ln>
+            <a:noFill/>
           </a:ln>
         </p:spPr>
         <p:style>
@@ -5464,49 +5539,49 @@
       </p:sp>
       <p:sp>
         <p:nvSpPr>
-          <p:cNvPr id="15" name="TextBox 14"/>
-          <p:cNvSpPr txBox="1"/>
-          <p:nvPr/>
-        </p:nvSpPr>
-        <p:spPr>
-          <a:xfrm>
-            <a:off x="457200" y="4379976"/>
-            <a:ext cx="6766560" cy="228600"/>
-          </a:xfrm>
-          <a:prstGeom prst="rect">
-            <a:avLst/>
-          </a:prstGeom>
-          <a:noFill/>
-        </p:spPr>
-        <p:txBody>
-          <a:bodyPr wrap="square">
-            <a:spAutoFit/>
-          </a:bodyPr>
-          <a:lstStyle/>
-          <a:p>
-            <a:pPr algn="ctr"/>
-            <a:r>
-              <a:rPr sz="1300" b="1">
-                <a:solidFill>
-                  <a:srgbClr val="007396"/>
+          <p:cNvPr id="17" name="TextBox 16"/>
+          <p:cNvSpPr txBox="1"/>
+          <p:nvPr/>
+        </p:nvSpPr>
+        <p:spPr>
+          <a:xfrm>
+            <a:off x="3429000" y="3429000"/>
+            <a:ext cx="2423160" cy="274320"/>
+          </a:xfrm>
+          <a:prstGeom prst="rect">
+            <a:avLst/>
+          </a:prstGeom>
+          <a:noFill/>
+        </p:spPr>
+        <p:txBody>
+          <a:bodyPr wrap="square">
+            <a:spAutoFit/>
+          </a:bodyPr>
+          <a:lstStyle/>
+          <a:p>
+            <a:pPr algn="ctr"/>
+            <a:r>
+              <a:rPr sz="1100" b="0">
+                <a:solidFill>
+                  <a:srgbClr val="1F2937"/>
                 </a:solidFill>
                 <a:latin typeface="阿里巴巴普惠体 3.0"/>
               </a:rPr>
-              <a:t>4. Skill 插件生态市场</a:t>
-            </a:r>
-          </a:p>
-        </p:txBody>
-      </p:sp>
-      <p:sp>
-        <p:nvSpPr>
-          <p:cNvPr id="16" name="TextBox 15"/>
-          <p:cNvSpPr txBox="1"/>
-          <p:nvPr/>
-        </p:nvSpPr>
-        <p:spPr>
-          <a:xfrm>
-            <a:off x="457200" y="4599432"/>
-            <a:ext cx="6766560" cy="201168"/>
+              <a:t>✓ 5 受限通道</a:t>
+            </a:r>
+          </a:p>
+        </p:txBody>
+      </p:sp>
+      <p:sp>
+        <p:nvSpPr>
+          <p:cNvPr id="18" name="TextBox 17"/>
+          <p:cNvSpPr txBox="1"/>
+          <p:nvPr/>
+        </p:nvSpPr>
+        <p:spPr>
+          <a:xfrm>
+            <a:off x="3429000" y="3749039"/>
+            <a:ext cx="2423160" cy="274320"/>
           </a:xfrm>
           <a:prstGeom prst="rect">
             <a:avLst/>
@@ -5523,68 +5598,68 @@
             <a:r>
               <a:rPr sz="1100" b="0">
                 <a:solidFill>
-                  <a:srgbClr val="6B7280"/>
+                  <a:srgbClr val="1F2937"/>
                 </a:solidFill>
                 <a:latin typeface="阿里巴巴普惠体 3.0"/>
               </a:rPr>
-              <a:t>标准化打包 + 私有 Skill 市场</a:t>
-            </a:r>
-          </a:p>
-        </p:txBody>
-      </p:sp>
-      <p:sp>
-        <p:nvSpPr>
-          <p:cNvPr id="17" name="TextBox 16"/>
-          <p:cNvSpPr txBox="1"/>
-          <p:nvPr/>
-        </p:nvSpPr>
-        <p:spPr>
-          <a:xfrm>
-            <a:off x="7406640" y="2194560"/>
-            <a:ext cx="4572000" cy="365760"/>
-          </a:xfrm>
-          <a:prstGeom prst="rect">
-            <a:avLst/>
-          </a:prstGeom>
-          <a:noFill/>
-        </p:spPr>
-        <p:txBody>
-          <a:bodyPr wrap="square">
-            <a:spAutoFit/>
-          </a:bodyPr>
-          <a:lstStyle/>
-          <a:p>
-            <a:pPr algn="ctr"/>
-            <a:r>
-              <a:rPr sz="1600" b="1">
-                <a:solidFill>
-                  <a:srgbClr val="6B46C1"/>
+              <a:t>✓ DDL 黑名单</a:t>
+            </a:r>
+          </a:p>
+        </p:txBody>
+      </p:sp>
+      <p:sp>
+        <p:nvSpPr>
+          <p:cNvPr id="19" name="TextBox 18"/>
+          <p:cNvSpPr txBox="1"/>
+          <p:nvPr/>
+        </p:nvSpPr>
+        <p:spPr>
+          <a:xfrm>
+            <a:off x="3429000" y="4069080"/>
+            <a:ext cx="2423160" cy="274320"/>
+          </a:xfrm>
+          <a:prstGeom prst="rect">
+            <a:avLst/>
+          </a:prstGeom>
+          <a:noFill/>
+        </p:spPr>
+        <p:txBody>
+          <a:bodyPr wrap="square">
+            <a:spAutoFit/>
+          </a:bodyPr>
+          <a:lstStyle/>
+          <a:p>
+            <a:pPr algn="ctr"/>
+            <a:r>
+              <a:rPr sz="1100" b="0">
+                <a:solidFill>
+                  <a:srgbClr val="1F2937"/>
                 </a:solidFill>
                 <a:latin typeface="阿里巴巴普惠体 3.0"/>
               </a:rPr>
-              <a:t>SQL工坊 · 数据引擎</a:t>
-            </a:r>
-          </a:p>
-        </p:txBody>
-      </p:sp>
-      <p:sp>
-        <p:nvSpPr>
-          <p:cNvPr id="18" name="Rounded Rectangle 17"/>
+              <a:t>✓ 写操作审计</a:t>
+            </a:r>
+          </a:p>
+        </p:txBody>
+      </p:sp>
+      <p:sp>
+        <p:nvSpPr>
+          <p:cNvPr id="20" name="Rounded Rectangle 19"/>
           <p:cNvSpPr/>
           <p:nvPr/>
         </p:nvSpPr>
         <p:spPr>
           <a:xfrm>
-            <a:off x="7406640" y="2697480"/>
-            <a:ext cx="4572000" cy="457200"/>
+            <a:off x="6126480" y="1371600"/>
+            <a:ext cx="2697480" cy="3200400"/>
           </a:xfrm>
           <a:prstGeom prst="roundRect">
             <a:avLst/>
           </a:prstGeom>
           <a:solidFill>
-            <a:srgbClr val="FFFFFF"/>
+            <a:srgbClr val="EDE9FE"/>
           </a:solidFill>
-          <a:ln w="19050">
+          <a:ln w="25400">
             <a:solidFill>
               <a:srgbClr val="6B46C1"/>
             </a:solidFill>
@@ -5614,95 +5689,128 @@
       </p:sp>
       <p:sp>
         <p:nvSpPr>
-          <p:cNvPr id="19" name="TextBox 18"/>
-          <p:cNvSpPr txBox="1"/>
-          <p:nvPr/>
-        </p:nvSpPr>
-        <p:spPr>
-          <a:xfrm>
-            <a:off x="7589520" y="2734056"/>
-            <a:ext cx="4389120" cy="228600"/>
-          </a:xfrm>
-          <a:prstGeom prst="rect">
-            <a:avLst/>
-          </a:prstGeom>
-          <a:noFill/>
-        </p:spPr>
-        <p:txBody>
-          <a:bodyPr wrap="square">
-            <a:spAutoFit/>
-          </a:bodyPr>
-          <a:lstStyle/>
-          <a:p>
-            <a:pPr algn="ctr"/>
-            <a:r>
-              <a:rPr sz="1200" b="1">
+          <p:cNvPr id="21" name="TextBox 20"/>
+          <p:cNvSpPr txBox="1"/>
+          <p:nvPr/>
+        </p:nvSpPr>
+        <p:spPr>
+          <a:xfrm>
+            <a:off x="6263640" y="1463040"/>
+            <a:ext cx="2423160" cy="822960"/>
+          </a:xfrm>
+          <a:prstGeom prst="rect">
+            <a:avLst/>
+          </a:prstGeom>
+          <a:noFill/>
+        </p:spPr>
+        <p:txBody>
+          <a:bodyPr wrap="square">
+            <a:spAutoFit/>
+          </a:bodyPr>
+          <a:lstStyle/>
+          <a:p>
+            <a:pPr algn="ctr"/>
+            <a:r>
+              <a:rPr sz="6000" b="1">
                 <a:solidFill>
                   <a:srgbClr val="6B46C1"/>
                 </a:solidFill>
+                <a:latin typeface="Inter"/>
+              </a:rPr>
+              <a:t>3</a:t>
+            </a:r>
+          </a:p>
+        </p:txBody>
+      </p:sp>
+      <p:sp>
+        <p:nvSpPr>
+          <p:cNvPr id="22" name="TextBox 21"/>
+          <p:cNvSpPr txBox="1"/>
+          <p:nvPr/>
+        </p:nvSpPr>
+        <p:spPr>
+          <a:xfrm>
+            <a:off x="6263640" y="2331720"/>
+            <a:ext cx="2423160" cy="457200"/>
+          </a:xfrm>
+          <a:prstGeom prst="rect">
+            <a:avLst/>
+          </a:prstGeom>
+          <a:noFill/>
+        </p:spPr>
+        <p:txBody>
+          <a:bodyPr wrap="square">
+            <a:spAutoFit/>
+          </a:bodyPr>
+          <a:lstStyle/>
+          <a:p>
+            <a:pPr algn="ctr"/>
+            <a:r>
+              <a:rPr sz="2200" b="1">
+                <a:solidFill>
+                  <a:srgbClr val="6B46C1"/>
+                </a:solidFill>
                 <a:latin typeface="阿里巴巴普惠体 3.0"/>
               </a:rPr>
-              <a:t>1. Text-to-SQL 终极形态</a:t>
-            </a:r>
-          </a:p>
-        </p:txBody>
-      </p:sp>
-      <p:sp>
-        <p:nvSpPr>
-          <p:cNvPr id="20" name="TextBox 19"/>
-          <p:cNvSpPr txBox="1"/>
-          <p:nvPr/>
-        </p:nvSpPr>
-        <p:spPr>
-          <a:xfrm>
-            <a:off x="7589520" y="2953512"/>
-            <a:ext cx="4389120" cy="201168"/>
-          </a:xfrm>
-          <a:prstGeom prst="rect">
-            <a:avLst/>
-          </a:prstGeom>
-          <a:noFill/>
-        </p:spPr>
-        <p:txBody>
-          <a:bodyPr wrap="square">
-            <a:spAutoFit/>
-          </a:bodyPr>
-          <a:lstStyle/>
-          <a:p>
-            <a:pPr algn="ctr"/>
-            <a:r>
-              <a:rPr sz="1000" b="0">
-                <a:solidFill>
-                  <a:srgbClr val="6B7280"/>
+              <a:t>可信</a:t>
+            </a:r>
+          </a:p>
+        </p:txBody>
+      </p:sp>
+      <p:sp>
+        <p:nvSpPr>
+          <p:cNvPr id="23" name="TextBox 22"/>
+          <p:cNvSpPr txBox="1"/>
+          <p:nvPr/>
+        </p:nvSpPr>
+        <p:spPr>
+          <a:xfrm>
+            <a:off x="6263640" y="2788920"/>
+            <a:ext cx="2423160" cy="457200"/>
+          </a:xfrm>
+          <a:prstGeom prst="rect">
+            <a:avLst/>
+          </a:prstGeom>
+          <a:noFill/>
+        </p:spPr>
+        <p:txBody>
+          <a:bodyPr wrap="square">
+            <a:spAutoFit/>
+          </a:bodyPr>
+          <a:lstStyle/>
+          <a:p>
+            <a:pPr algn="ctr"/>
+            <a:r>
+              <a:rPr sz="1200" b="0">
+                <a:solidFill>
+                  <a:srgbClr val="1F2937"/>
                 </a:solidFill>
                 <a:latin typeface="阿里巴巴普惠体 3.0"/>
               </a:rPr>
-              <a:t>准确率 &gt;95% · 本地代码大模型</a:t>
-            </a:r>
-          </a:p>
-        </p:txBody>
-      </p:sp>
-      <p:sp>
-        <p:nvSpPr>
-          <p:cNvPr id="21" name="Rounded Rectangle 20"/>
+              <a:t>数据不出企业</a:t>
+            </a:r>
+          </a:p>
+        </p:txBody>
+      </p:sp>
+      <p:sp>
+        <p:nvSpPr>
+          <p:cNvPr id="24" name="Rectangle 23"/>
           <p:cNvSpPr/>
           <p:nvPr/>
         </p:nvSpPr>
         <p:spPr>
           <a:xfrm>
-            <a:off x="7406640" y="3246120"/>
-            <a:ext cx="4572000" cy="457200"/>
-          </a:xfrm>
-          <a:prstGeom prst="roundRect">
+            <a:off x="6583680" y="3291840"/>
+            <a:ext cx="1783080" cy="18288"/>
+          </a:xfrm>
+          <a:prstGeom prst="rect">
             <a:avLst/>
           </a:prstGeom>
           <a:solidFill>
-            <a:srgbClr val="FFFFFF"/>
+            <a:srgbClr val="6B46C1"/>
           </a:solidFill>
-          <a:ln w="19050">
-            <a:solidFill>
-              <a:srgbClr val="6B46C1"/>
-            </a:solidFill>
+          <a:ln>
+            <a:noFill/>
           </a:ln>
         </p:spPr>
         <p:style>
@@ -5729,94 +5837,129 @@
       </p:sp>
       <p:sp>
         <p:nvSpPr>
-          <p:cNvPr id="22" name="TextBox 21"/>
-          <p:cNvSpPr txBox="1"/>
-          <p:nvPr/>
-        </p:nvSpPr>
-        <p:spPr>
-          <a:xfrm>
-            <a:off x="7589520" y="3282696"/>
-            <a:ext cx="4389120" cy="228600"/>
-          </a:xfrm>
-          <a:prstGeom prst="rect">
-            <a:avLst/>
-          </a:prstGeom>
-          <a:noFill/>
-        </p:spPr>
-        <p:txBody>
-          <a:bodyPr wrap="square">
-            <a:spAutoFit/>
-          </a:bodyPr>
-          <a:lstStyle/>
-          <a:p>
-            <a:pPr algn="ctr"/>
-            <a:r>
-              <a:rPr sz="1200" b="1">
-                <a:solidFill>
-                  <a:srgbClr val="6B46C1"/>
+          <p:cNvPr id="25" name="TextBox 24"/>
+          <p:cNvSpPr txBox="1"/>
+          <p:nvPr/>
+        </p:nvSpPr>
+        <p:spPr>
+          <a:xfrm>
+            <a:off x="6263640" y="3429000"/>
+            <a:ext cx="2423160" cy="274320"/>
+          </a:xfrm>
+          <a:prstGeom prst="rect">
+            <a:avLst/>
+          </a:prstGeom>
+          <a:noFill/>
+        </p:spPr>
+        <p:txBody>
+          <a:bodyPr wrap="square">
+            <a:spAutoFit/>
+          </a:bodyPr>
+          <a:lstStyle/>
+          <a:p>
+            <a:pPr algn="ctr"/>
+            <a:r>
+              <a:rPr sz="1100" b="0">
+                <a:solidFill>
+                  <a:srgbClr val="1F2937"/>
                 </a:solidFill>
                 <a:latin typeface="阿里巴巴普惠体 3.0"/>
               </a:rPr>
-              <a:t>2. HTAP 湖仓一体</a:t>
-            </a:r>
-          </a:p>
-        </p:txBody>
-      </p:sp>
-      <p:sp>
-        <p:nvSpPr>
-          <p:cNvPr id="23" name="TextBox 22"/>
-          <p:cNvSpPr txBox="1"/>
-          <p:nvPr/>
-        </p:nvSpPr>
-        <p:spPr>
-          <a:xfrm>
-            <a:off x="7589520" y="3502152"/>
-            <a:ext cx="4389120" cy="201168"/>
-          </a:xfrm>
-          <a:prstGeom prst="rect">
-            <a:avLst/>
-          </a:prstGeom>
-          <a:noFill/>
-        </p:spPr>
-        <p:txBody>
-          <a:bodyPr wrap="square">
-            <a:spAutoFit/>
-          </a:bodyPr>
-          <a:lstStyle/>
-          <a:p>
-            <a:pPr algn="ctr"/>
-            <a:r>
-              <a:rPr sz="1000" b="0">
-                <a:solidFill>
-                  <a:srgbClr val="6B7280"/>
+              <a:t>✓ 全链路私有化</a:t>
+            </a:r>
+          </a:p>
+        </p:txBody>
+      </p:sp>
+      <p:sp>
+        <p:nvSpPr>
+          <p:cNvPr id="26" name="TextBox 25"/>
+          <p:cNvSpPr txBox="1"/>
+          <p:nvPr/>
+        </p:nvSpPr>
+        <p:spPr>
+          <a:xfrm>
+            <a:off x="6263640" y="3749039"/>
+            <a:ext cx="2423160" cy="274320"/>
+          </a:xfrm>
+          <a:prstGeom prst="rect">
+            <a:avLst/>
+          </a:prstGeom>
+          <a:noFill/>
+        </p:spPr>
+        <p:txBody>
+          <a:bodyPr wrap="square">
+            <a:spAutoFit/>
+          </a:bodyPr>
+          <a:lstStyle/>
+          <a:p>
+            <a:pPr algn="ctr"/>
+            <a:r>
+              <a:rPr sz="1100" b="0">
+                <a:solidFill>
+                  <a:srgbClr val="1F2937"/>
                 </a:solidFill>
                 <a:latin typeface="阿里巴巴普惠体 3.0"/>
               </a:rPr>
-              <a:t>Flink + Iceberg/Hudi</a:t>
-            </a:r>
-          </a:p>
-        </p:txBody>
-      </p:sp>
-      <p:sp>
-        <p:nvSpPr>
-          <p:cNvPr id="24" name="Rounded Rectangle 23"/>
+              <a:t>✓ 本地 Qwen</a:t>
+            </a:r>
+          </a:p>
+        </p:txBody>
+      </p:sp>
+      <p:sp>
+        <p:nvSpPr>
+          <p:cNvPr id="27" name="TextBox 26"/>
+          <p:cNvSpPr txBox="1"/>
+          <p:nvPr/>
+        </p:nvSpPr>
+        <p:spPr>
+          <a:xfrm>
+            <a:off x="6263640" y="4069080"/>
+            <a:ext cx="2423160" cy="274320"/>
+          </a:xfrm>
+          <a:prstGeom prst="rect">
+            <a:avLst/>
+          </a:prstGeom>
+          <a:noFill/>
+        </p:spPr>
+        <p:txBody>
+          <a:bodyPr wrap="square">
+            <a:spAutoFit/>
+          </a:bodyPr>
+          <a:lstStyle/>
+          <a:p>
+            <a:pPr algn="ctr"/>
+            <a:r>
+              <a:rPr sz="1100" b="0">
+                <a:solidFill>
+                  <a:srgbClr val="1F2937"/>
+                </a:solidFill>
+                <a:latin typeface="阿里巴巴普惠体 3.0"/>
+              </a:rPr>
+              <a:t>✓ 无第三方回传</a:t>
+            </a:r>
+          </a:p>
+        </p:txBody>
+      </p:sp>
+      <p:sp>
+        <p:nvSpPr>
+          <p:cNvPr id="28" name="Rounded Rectangle 27"/>
           <p:cNvSpPr/>
           <p:nvPr/>
         </p:nvSpPr>
         <p:spPr>
           <a:xfrm>
-            <a:off x="7406640" y="3794760"/>
-            <a:ext cx="4572000" cy="457200"/>
+            <a:off x="8961120" y="1371600"/>
+            <a:ext cx="2697480" cy="3200400"/>
           </a:xfrm>
           <a:prstGeom prst="roundRect">
             <a:avLst/>
           </a:prstGeom>
           <a:solidFill>
-            <a:srgbClr val="FFFFFF"/>
+            <a:srgbClr val="FEF3C7"/>
           </a:solidFill>
-          <a:ln w="19050">
+          <a:ln w="25400">
             <a:solidFill>
-              <a:srgbClr val="6B46C1"/>
+              <a:srgbClr val="F59E0B"/>
             </a:solidFill>
           </a:ln>
         </p:spPr>
@@ -5844,95 +5987,128 @@
       </p:sp>
       <p:sp>
         <p:nvSpPr>
-          <p:cNvPr id="25" name="TextBox 24"/>
-          <p:cNvSpPr txBox="1"/>
-          <p:nvPr/>
-        </p:nvSpPr>
-        <p:spPr>
-          <a:xfrm>
-            <a:off x="7589520" y="3831336"/>
-            <a:ext cx="4389120" cy="228600"/>
-          </a:xfrm>
-          <a:prstGeom prst="rect">
-            <a:avLst/>
-          </a:prstGeom>
-          <a:noFill/>
-        </p:spPr>
-        <p:txBody>
-          <a:bodyPr wrap="square">
-            <a:spAutoFit/>
-          </a:bodyPr>
-          <a:lstStyle/>
-          <a:p>
-            <a:pPr algn="ctr"/>
-            <a:r>
-              <a:rPr sz="1200" b="1">
-                <a:solidFill>
-                  <a:srgbClr val="6B46C1"/>
+          <p:cNvPr id="29" name="TextBox 28"/>
+          <p:cNvSpPr txBox="1"/>
+          <p:nvPr/>
+        </p:nvSpPr>
+        <p:spPr>
+          <a:xfrm>
+            <a:off x="9098280" y="1463040"/>
+            <a:ext cx="2423160" cy="822960"/>
+          </a:xfrm>
+          <a:prstGeom prst="rect">
+            <a:avLst/>
+          </a:prstGeom>
+          <a:noFill/>
+        </p:spPr>
+        <p:txBody>
+          <a:bodyPr wrap="square">
+            <a:spAutoFit/>
+          </a:bodyPr>
+          <a:lstStyle/>
+          <a:p>
+            <a:pPr algn="ctr"/>
+            <a:r>
+              <a:rPr sz="6000" b="1">
+                <a:solidFill>
+                  <a:srgbClr val="F59E0B"/>
+                </a:solidFill>
+                <a:latin typeface="Inter"/>
+              </a:rPr>
+              <a:t>4</a:t>
+            </a:r>
+          </a:p>
+        </p:txBody>
+      </p:sp>
+      <p:sp>
+        <p:nvSpPr>
+          <p:cNvPr id="30" name="TextBox 29"/>
+          <p:cNvSpPr txBox="1"/>
+          <p:nvPr/>
+        </p:nvSpPr>
+        <p:spPr>
+          <a:xfrm>
+            <a:off x="9098280" y="2331720"/>
+            <a:ext cx="2423160" cy="457200"/>
+          </a:xfrm>
+          <a:prstGeom prst="rect">
+            <a:avLst/>
+          </a:prstGeom>
+          <a:noFill/>
+        </p:spPr>
+        <p:txBody>
+          <a:bodyPr wrap="square">
+            <a:spAutoFit/>
+          </a:bodyPr>
+          <a:lstStyle/>
+          <a:p>
+            <a:pPr algn="ctr"/>
+            <a:r>
+              <a:rPr sz="2200" b="1">
+                <a:solidFill>
+                  <a:srgbClr val="F59E0B"/>
                 </a:solidFill>
                 <a:latin typeface="阿里巴巴普惠体 3.0"/>
               </a:rPr>
-              <a:t>3. 智能数据治理</a:t>
-            </a:r>
-          </a:p>
-        </p:txBody>
-      </p:sp>
-      <p:sp>
-        <p:nvSpPr>
-          <p:cNvPr id="26" name="TextBox 25"/>
-          <p:cNvSpPr txBox="1"/>
-          <p:nvPr/>
-        </p:nvSpPr>
-        <p:spPr>
-          <a:xfrm>
-            <a:off x="7589520" y="4050792"/>
-            <a:ext cx="4389120" cy="201168"/>
-          </a:xfrm>
-          <a:prstGeom prst="rect">
-            <a:avLst/>
-          </a:prstGeom>
-          <a:noFill/>
-        </p:spPr>
-        <p:txBody>
-          <a:bodyPr wrap="square">
-            <a:spAutoFit/>
-          </a:bodyPr>
-          <a:lstStyle/>
-          <a:p>
-            <a:pPr algn="ctr"/>
-            <a:r>
-              <a:rPr sz="1000" b="0">
-                <a:solidFill>
-                  <a:srgbClr val="6B7280"/>
+              <a:t>可托付</a:t>
+            </a:r>
+          </a:p>
+        </p:txBody>
+      </p:sp>
+      <p:sp>
+        <p:nvSpPr>
+          <p:cNvPr id="31" name="TextBox 30"/>
+          <p:cNvSpPr txBox="1"/>
+          <p:nvPr/>
+        </p:nvSpPr>
+        <p:spPr>
+          <a:xfrm>
+            <a:off x="9098280" y="2788920"/>
+            <a:ext cx="2423160" cy="457200"/>
+          </a:xfrm>
+          <a:prstGeom prst="rect">
+            <a:avLst/>
+          </a:prstGeom>
+          <a:noFill/>
+        </p:spPr>
+        <p:txBody>
+          <a:bodyPr wrap="square">
+            <a:spAutoFit/>
+          </a:bodyPr>
+          <a:lstStyle/>
+          <a:p>
+            <a:pPr algn="ctr"/>
+            <a:r>
+              <a:rPr sz="1200" b="0">
+                <a:solidFill>
+                  <a:srgbClr val="1F2937"/>
                 </a:solidFill>
                 <a:latin typeface="阿里巴巴普惠体 3.0"/>
               </a:rPr>
-              <a:t>血缘 + 脱敏 + 审计</a:t>
-            </a:r>
-          </a:p>
-        </p:txBody>
-      </p:sp>
-      <p:sp>
-        <p:nvSpPr>
-          <p:cNvPr id="27" name="Rounded Rectangle 26"/>
+              <a:t>AI 主动拆解复杂任务</a:t>
+            </a:r>
+          </a:p>
+        </p:txBody>
+      </p:sp>
+      <p:sp>
+        <p:nvSpPr>
+          <p:cNvPr id="32" name="Rectangle 31"/>
           <p:cNvSpPr/>
           <p:nvPr/>
         </p:nvSpPr>
         <p:spPr>
           <a:xfrm>
-            <a:off x="7406640" y="4343400"/>
-            <a:ext cx="4572000" cy="457200"/>
-          </a:xfrm>
-          <a:prstGeom prst="roundRect">
+            <a:off x="9418320" y="3291840"/>
+            <a:ext cx="1783080" cy="18288"/>
+          </a:xfrm>
+          <a:prstGeom prst="rect">
             <a:avLst/>
           </a:prstGeom>
           <a:solidFill>
-            <a:srgbClr val="FFFFFF"/>
+            <a:srgbClr val="F59E0B"/>
           </a:solidFill>
-          <a:ln w="19050">
-            <a:solidFill>
-              <a:srgbClr val="6B46C1"/>
-            </a:solidFill>
+          <a:ln>
+            <a:noFill/>
           </a:ln>
         </p:spPr>
         <p:style>
@@ -5959,95 +6135,128 @@
       </p:sp>
       <p:sp>
         <p:nvSpPr>
-          <p:cNvPr id="28" name="TextBox 27"/>
-          <p:cNvSpPr txBox="1"/>
-          <p:nvPr/>
-        </p:nvSpPr>
-        <p:spPr>
-          <a:xfrm>
-            <a:off x="7589520" y="4379976"/>
-            <a:ext cx="4389120" cy="228600"/>
-          </a:xfrm>
-          <a:prstGeom prst="rect">
-            <a:avLst/>
-          </a:prstGeom>
-          <a:noFill/>
-        </p:spPr>
-        <p:txBody>
-          <a:bodyPr wrap="square">
-            <a:spAutoFit/>
-          </a:bodyPr>
-          <a:lstStyle/>
-          <a:p>
-            <a:pPr algn="ctr"/>
-            <a:r>
-              <a:rPr sz="1200" b="1">
-                <a:solidFill>
-                  <a:srgbClr val="6B46C1"/>
+          <p:cNvPr id="33" name="TextBox 32"/>
+          <p:cNvSpPr txBox="1"/>
+          <p:nvPr/>
+        </p:nvSpPr>
+        <p:spPr>
+          <a:xfrm>
+            <a:off x="9098280" y="3429000"/>
+            <a:ext cx="2423160" cy="274320"/>
+          </a:xfrm>
+          <a:prstGeom prst="rect">
+            <a:avLst/>
+          </a:prstGeom>
+          <a:noFill/>
+        </p:spPr>
+        <p:txBody>
+          <a:bodyPr wrap="square">
+            <a:spAutoFit/>
+          </a:bodyPr>
+          <a:lstStyle/>
+          <a:p>
+            <a:pPr algn="ctr"/>
+            <a:r>
+              <a:rPr sz="1100" b="0">
+                <a:solidFill>
+                  <a:srgbClr val="1F2937"/>
                 </a:solidFill>
                 <a:latin typeface="阿里巴巴普惠体 3.0"/>
               </a:rPr>
-              <a:t>4. Serverless 弹性</a:t>
-            </a:r>
-          </a:p>
-        </p:txBody>
-      </p:sp>
-      <p:sp>
-        <p:nvSpPr>
-          <p:cNvPr id="29" name="TextBox 28"/>
-          <p:cNvSpPr txBox="1"/>
-          <p:nvPr/>
-        </p:nvSpPr>
-        <p:spPr>
-          <a:xfrm>
-            <a:off x="7589520" y="4599432"/>
-            <a:ext cx="4389120" cy="201168"/>
-          </a:xfrm>
-          <a:prstGeom prst="rect">
-            <a:avLst/>
-          </a:prstGeom>
-          <a:noFill/>
-        </p:spPr>
-        <p:txBody>
-          <a:bodyPr wrap="square">
-            <a:spAutoFit/>
-          </a:bodyPr>
-          <a:lstStyle/>
-          <a:p>
-            <a:pPr algn="ctr"/>
-            <a:r>
-              <a:rPr sz="1000" b="0">
-                <a:solidFill>
-                  <a:srgbClr val="6B7280"/>
+              <a:t>✓ Agentic Workflow</a:t>
+            </a:r>
+          </a:p>
+        </p:txBody>
+      </p:sp>
+      <p:sp>
+        <p:nvSpPr>
+          <p:cNvPr id="34" name="TextBox 33"/>
+          <p:cNvSpPr txBox="1"/>
+          <p:nvPr/>
+        </p:nvSpPr>
+        <p:spPr>
+          <a:xfrm>
+            <a:off x="9098280" y="3749039"/>
+            <a:ext cx="2423160" cy="274320"/>
+          </a:xfrm>
+          <a:prstGeom prst="rect">
+            <a:avLst/>
+          </a:prstGeom>
+          <a:noFill/>
+        </p:spPr>
+        <p:txBody>
+          <a:bodyPr wrap="square">
+            <a:spAutoFit/>
+          </a:bodyPr>
+          <a:lstStyle/>
+          <a:p>
+            <a:pPr algn="ctr"/>
+            <a:r>
+              <a:rPr sz="1100" b="0">
+                <a:solidFill>
+                  <a:srgbClr val="1F2937"/>
                 </a:solidFill>
                 <a:latin typeface="阿里巴巴普惠体 3.0"/>
               </a:rPr>
-              <a:t>计算/存储分离</a:t>
-            </a:r>
-          </a:p>
-        </p:txBody>
-      </p:sp>
-      <p:sp>
-        <p:nvSpPr>
-          <p:cNvPr id="30" name="Rounded Rectangle 29"/>
+              <a:t>✓ 多步推理</a:t>
+            </a:r>
+          </a:p>
+        </p:txBody>
+      </p:sp>
+      <p:sp>
+        <p:nvSpPr>
+          <p:cNvPr id="35" name="TextBox 34"/>
+          <p:cNvSpPr txBox="1"/>
+          <p:nvPr/>
+        </p:nvSpPr>
+        <p:spPr>
+          <a:xfrm>
+            <a:off x="9098280" y="4069080"/>
+            <a:ext cx="2423160" cy="274320"/>
+          </a:xfrm>
+          <a:prstGeom prst="rect">
+            <a:avLst/>
+          </a:prstGeom>
+          <a:noFill/>
+        </p:spPr>
+        <p:txBody>
+          <a:bodyPr wrap="square">
+            <a:spAutoFit/>
+          </a:bodyPr>
+          <a:lstStyle/>
+          <a:p>
+            <a:pPr algn="ctr"/>
+            <a:r>
+              <a:rPr sz="1100" b="0">
+                <a:solidFill>
+                  <a:srgbClr val="1F2937"/>
+                </a:solidFill>
+                <a:latin typeface="阿里巴巴普惠体 3.0"/>
+              </a:rPr>
+              <a:t>✓ 反思重试</a:t>
+            </a:r>
+          </a:p>
+        </p:txBody>
+      </p:sp>
+      <p:sp>
+        <p:nvSpPr>
+          <p:cNvPr id="36" name="Right Arrow 35"/>
           <p:cNvSpPr/>
           <p:nvPr/>
         </p:nvSpPr>
         <p:spPr>
           <a:xfrm>
-            <a:off x="1828800" y="5120640"/>
-            <a:ext cx="8534095" cy="320040"/>
-          </a:xfrm>
-          <a:prstGeom prst="roundRect">
+            <a:off x="3163824" y="2862072"/>
+            <a:ext cx="118872" cy="219456"/>
+          </a:xfrm>
+          <a:prstGeom prst="rightArrow">
             <a:avLst/>
           </a:prstGeom>
           <a:solidFill>
-            <a:srgbClr val="FEF3C7"/>
+            <a:srgbClr val="F59E0B"/>
           </a:solidFill>
-          <a:ln w="19050">
-            <a:solidFill>
-              <a:srgbClr val="F59E0B"/>
-            </a:solidFill>
+          <a:ln>
+            <a:noFill/>
           </a:ln>
         </p:spPr>
         <p:style>
@@ -6074,60 +6283,23 @@
       </p:sp>
       <p:sp>
         <p:nvSpPr>
-          <p:cNvPr id="31" name="TextBox 30"/>
-          <p:cNvSpPr txBox="1"/>
-          <p:nvPr/>
-        </p:nvSpPr>
-        <p:spPr>
-          <a:xfrm>
-            <a:off x="1828800" y="5138927"/>
-            <a:ext cx="8534095" cy="301752"/>
-          </a:xfrm>
-          <a:prstGeom prst="rect">
-            <a:avLst/>
-          </a:prstGeom>
-          <a:noFill/>
-        </p:spPr>
-        <p:txBody>
-          <a:bodyPr wrap="square">
-            <a:spAutoFit/>
-          </a:bodyPr>
-          <a:lstStyle/>
-          <a:p>
-            <a:pPr algn="ctr"/>
-            <a:r>
-              <a:rPr sz="1500" b="1">
-                <a:solidFill>
-                  <a:srgbClr val="F59E0B"/>
-                </a:solidFill>
-                <a:latin typeface="阿里巴巴普惠体 3.0"/>
-              </a:rPr>
-              <a:t>★ 让 AI 懂数据,让数据懂 AI</a:t>
-            </a:r>
-          </a:p>
-        </p:txBody>
-      </p:sp>
-      <p:sp>
-        <p:nvSpPr>
-          <p:cNvPr id="32" name="Rounded Rectangle 31"/>
+          <p:cNvPr id="37" name="Right Arrow 36"/>
           <p:cNvSpPr/>
           <p:nvPr/>
         </p:nvSpPr>
         <p:spPr>
           <a:xfrm>
-            <a:off x="1828800" y="5504688"/>
-            <a:ext cx="8534095" cy="320040"/>
-          </a:xfrm>
-          <a:prstGeom prst="roundRect">
+            <a:off x="5998464" y="2862072"/>
+            <a:ext cx="118872" cy="219456"/>
+          </a:xfrm>
+          <a:prstGeom prst="rightArrow">
             <a:avLst/>
           </a:prstGeom>
           <a:solidFill>
-            <a:srgbClr val="FEF3C7"/>
+            <a:srgbClr val="F59E0B"/>
           </a:solidFill>
-          <a:ln w="19050">
-            <a:solidFill>
-              <a:srgbClr val="F59E0B"/>
-            </a:solidFill>
+          <a:ln>
+            <a:noFill/>
           </a:ln>
         </p:spPr>
         <p:style>
@@ -6154,60 +6326,23 @@
       </p:sp>
       <p:sp>
         <p:nvSpPr>
-          <p:cNvPr id="33" name="TextBox 32"/>
-          <p:cNvSpPr txBox="1"/>
-          <p:nvPr/>
-        </p:nvSpPr>
-        <p:spPr>
-          <a:xfrm>
-            <a:off x="1828800" y="5522975"/>
-            <a:ext cx="8534095" cy="301752"/>
-          </a:xfrm>
-          <a:prstGeom prst="rect">
-            <a:avLst/>
-          </a:prstGeom>
-          <a:noFill/>
-        </p:spPr>
-        <p:txBody>
-          <a:bodyPr wrap="square">
-            <a:spAutoFit/>
-          </a:bodyPr>
-          <a:lstStyle/>
-          <a:p>
-            <a:pPr algn="ctr"/>
-            <a:r>
-              <a:rPr sz="1500" b="1">
-                <a:solidFill>
-                  <a:srgbClr val="F59E0B"/>
-                </a:solidFill>
-                <a:latin typeface="阿里巴巴普惠体 3.0"/>
-              </a:rPr>
-              <a:t>★ 终极形态:对话式数据分析 (CDA) 标杆</a:t>
-            </a:r>
-          </a:p>
-        </p:txBody>
-      </p:sp>
-      <p:sp>
-        <p:nvSpPr>
-          <p:cNvPr id="34" name="Rounded Rectangle 33"/>
+          <p:cNvPr id="38" name="Right Arrow 37"/>
           <p:cNvSpPr/>
           <p:nvPr/>
         </p:nvSpPr>
         <p:spPr>
           <a:xfrm>
-            <a:off x="1828800" y="5888736"/>
-            <a:ext cx="8534095" cy="320040"/>
-          </a:xfrm>
-          <a:prstGeom prst="roundRect">
+            <a:off x="8833104" y="2862072"/>
+            <a:ext cx="118872" cy="219456"/>
+          </a:xfrm>
+          <a:prstGeom prst="rightArrow">
             <a:avLst/>
           </a:prstGeom>
           <a:solidFill>
-            <a:srgbClr val="FEF3C7"/>
+            <a:srgbClr val="F59E0B"/>
           </a:solidFill>
-          <a:ln w="19050">
-            <a:solidFill>
-              <a:srgbClr val="F59E0B"/>
-            </a:solidFill>
+          <a:ln>
+            <a:noFill/>
           </a:ln>
         </p:spPr>
         <p:style>
@@ -6234,42 +6369,87 @@
       </p:sp>
       <p:sp>
         <p:nvSpPr>
-          <p:cNvPr id="35" name="TextBox 34"/>
-          <p:cNvSpPr txBox="1"/>
-          <p:nvPr/>
-        </p:nvSpPr>
-        <p:spPr>
-          <a:xfrm>
-            <a:off x="1828800" y="5907023"/>
-            <a:ext cx="8534095" cy="301752"/>
-          </a:xfrm>
-          <a:prstGeom prst="rect">
-            <a:avLst/>
-          </a:prstGeom>
-          <a:noFill/>
-        </p:spPr>
-        <p:txBody>
-          <a:bodyPr wrap="square">
-            <a:spAutoFit/>
-          </a:bodyPr>
-          <a:lstStyle/>
-          <a:p>
-            <a:pPr algn="ctr"/>
-            <a:r>
-              <a:rPr sz="1500" b="1">
+          <p:cNvPr id="39" name="Rounded Rectangle 38"/>
+          <p:cNvSpPr/>
+          <p:nvPr/>
+        </p:nvSpPr>
+        <p:spPr>
+          <a:xfrm>
+            <a:off x="914400" y="4846320"/>
+            <a:ext cx="10362895" cy="640080"/>
+          </a:xfrm>
+          <a:prstGeom prst="roundRect">
+            <a:avLst/>
+          </a:prstGeom>
+          <a:solidFill>
+            <a:srgbClr val="FEF3C7"/>
+          </a:solidFill>
+          <a:ln w="38100">
+            <a:solidFill>
+              <a:srgbClr val="F59E0B"/>
+            </a:solidFill>
+          </a:ln>
+        </p:spPr>
+        <p:style>
+          <a:lnRef idx="1">
+            <a:schemeClr val="accent1"/>
+          </a:lnRef>
+          <a:fillRef idx="3">
+            <a:schemeClr val="accent1"/>
+          </a:fillRef>
+          <a:effectRef idx="2">
+            <a:schemeClr val="accent1"/>
+          </a:effectRef>
+          <a:fontRef idx="minor">
+            <a:schemeClr val="lt1"/>
+          </a:fontRef>
+        </p:style>
+        <p:txBody>
+          <a:bodyPr rtlCol="0" anchor="ctr"/>
+          <a:lstStyle/>
+          <a:p>
+            <a:pPr algn="ctr"/>
+          </a:p>
+        </p:txBody>
+      </p:sp>
+      <p:sp>
+        <p:nvSpPr>
+          <p:cNvPr id="40" name="TextBox 39"/>
+          <p:cNvSpPr txBox="1"/>
+          <p:nvPr/>
+        </p:nvSpPr>
+        <p:spPr>
+          <a:xfrm>
+            <a:off x="914400" y="4892040"/>
+            <a:ext cx="10362895" cy="548640"/>
+          </a:xfrm>
+          <a:prstGeom prst="rect">
+            <a:avLst/>
+          </a:prstGeom>
+          <a:noFill/>
+        </p:spPr>
+        <p:txBody>
+          <a:bodyPr wrap="square">
+            <a:spAutoFit/>
+          </a:bodyPr>
+          <a:lstStyle/>
+          <a:p>
+            <a:pPr algn="ctr"/>
+            <a:r>
+              <a:rPr sz="2000" b="1">
                 <a:solidFill>
                   <a:srgbClr val="F59E0B"/>
                 </a:solidFill>
                 <a:latin typeface="阿里巴巴普惠体 3.0"/>
               </a:rPr>
-              <a:t>★ 零代码 AI 应用工厂 (Amis + Skill 绑定)</a:t>
-            </a:r>
-          </a:p>
-        </p:txBody>
-      </p:sp>
-      <p:sp>
-        <p:nvSpPr>
-          <p:cNvPr id="1035" name="TextBox 1034"/>
+              <a:t>★ JavaBrain 不只是工具,而是你可托付的数据同事</a:t>
+            </a:r>
+          </a:p>
+        </p:txBody>
+      </p:sp>
+      <p:sp>
+        <p:nvSpPr>
+          <p:cNvPr id="1040" name="TextBox 1039"/>
           <p:cNvSpPr txBox="1"/>
           <p:nvPr/>
         </p:nvSpPr>
@@ -6318,62 +6498,27 @@
               </p:cTn>
             </p:par>
             <p:par>
-              <p:cTn id="1005" nodeType="withEffect" dur="500" begin="400ms" fill="hold">
+              <p:cTn id="1004" nodeType="withEffect" dur="500" begin="600ms" fill="hold">
                 <p:animEffect presetClass="entr" presetId="10" dur="500"/>
               </p:cTn>
             </p:par>
             <p:par>
-              <p:cTn id="1008" nodeType="withEffect" dur="500" begin="600ms" fill="hold">
+              <p:cTn id="1012" nodeType="withEffect" dur="500" begin="1000ms" fill="hold">
                 <p:animEffect presetClass="entr" presetId="10" dur="500"/>
               </p:cTn>
             </p:par>
             <p:par>
-              <p:cTn id="1011" nodeType="withEffect" dur="500" begin="800ms" fill="hold">
+              <p:cTn id="1020" nodeType="withEffect" dur="500" begin="1400ms" fill="hold">
                 <p:animEffect presetClass="entr" presetId="10" dur="500"/>
               </p:cTn>
             </p:par>
             <p:par>
-              <p:cTn id="1014" nodeType="withEffect" dur="500" begin="1000ms" fill="hold">
+              <p:cTn id="1028" nodeType="withEffect" dur="500" begin="1800ms" fill="hold">
                 <p:animEffect presetClass="entr" presetId="10" dur="500"/>
               </p:cTn>
             </p:par>
             <p:par>
-              <p:cTn id="1018" nodeType="withEffect" dur="500" begin="1200ms" fill="hold">
-                <p:animEffect presetClass="entr" presetId="10" dur="500"/>
-              </p:cTn>
-            </p:par>
-            <p:par>
-              <p:cTn id="1021" nodeType="withEffect" dur="500" begin="1400ms" fill="hold">
-                <p:animEffect presetClass="entr" presetId="10" dur="500"/>
-              </p:cTn>
-            </p:par>
-            <p:par>
-              <p:cTn id="1024" nodeType="withEffect" dur="500" begin="1600ms" fill="hold">
-                <p:animEffect presetClass="entr" presetId="10" dur="500"/>
-              </p:cTn>
-            </p:par>
-            <p:par>
-              <p:cTn id="1027" nodeType="withEffect" dur="500" begin="1800ms" fill="hold">
-                <p:animEffect presetClass="entr" presetId="10" dur="500"/>
-              </p:cTn>
-            </p:par>
-            <p:par>
-              <p:cTn id="1030" nodeType="withEffect" dur="500" begin="2000ms" fill="hold">
-                <p:animEffect presetClass="entr" presetId="10" dur="500"/>
-              </p:cTn>
-            </p:par>
-            <p:par>
-              <p:cTn id="1032" nodeType="withEffect" dur="500" begin="2300ms" fill="hold">
-                <p:animEffect presetClass="entr" presetId="10" dur="500"/>
-              </p:cTn>
-            </p:par>
-            <p:par>
-              <p:cTn id="1034" nodeType="withEffect" dur="500" begin="2600ms" fill="hold">
-                <p:animEffect presetClass="entr" presetId="10" dur="500"/>
-              </p:cTn>
-            </p:par>
-            <p:par>
-              <p:cTn id="1032" nodeType="withEffect" dur="1500" begin="3500ms" fill="hold" repeatCount="indefinite">
+              <p:cTn id="1039" nodeType="withEffect" dur="1500" begin="2500ms" fill="hold" repeatCount="indefinite">
                 <p:animEffect presetClass="emph" presetId="26" dur="1500"/>
               </p:cTn>
             </p:par>

--- a/docs/ppt/javabrain.pptx
+++ b/docs/ppt/javabrain.pptx
@@ -3517,7 +3517,7 @@
       </p:sp>
       <p:sp>
         <p:nvSpPr>
-          <p:cNvPr id="1012" name="TextBox 1011"/>
+          <p:cNvPr id="13" name="TextBox 12"/>
           <p:cNvSpPr txBox="1"/>
           <p:nvPr/>
         </p:nvSpPr>
@@ -3555,46 +3555,6 @@
   <p:clrMapOvr>
     <a:masterClrMapping/>
   </p:clrMapOvr>
-  <p:timing>
-    <p:tnLst>
-      <p:par>
-        <p:cTn id="1" nodeType="tmRoot" pres="1">
-          <p:tnLst>
-            <p:par>
-              <p:cTn id="1002" nodeType="withEffect" dur="800" begin="0ms" fill="hold">
-                <p:animEffect presetClass="entr" presetId="23" dur="800"/>
-              </p:cTn>
-            </p:par>
-            <p:par>
-              <p:cTn id="1003" nodeType="withEffect" dur="500" begin="600ms" fill="hold">
-                <p:animEffect presetClass="entr" presetId="10" dur="500"/>
-              </p:cTn>
-            </p:par>
-            <p:par>
-              <p:cTn id="1004" nodeType="withEffect" dur="500" begin="1000ms" fill="hold">
-                <p:animEffect presetClass="entr" presetId="10" dur="500"/>
-              </p:cTn>
-            </p:par>
-            <p:par>
-              <p:cTn id="1005" nodeType="withEffect" dur="500" begin="1400ms" fill="hold">
-                <p:animEffect presetClass="entr" presetId="10" dur="500"/>
-              </p:cTn>
-            </p:par>
-            <p:par>
-              <p:cTn id="1008" nodeType="withEffect" dur="500" begin="1600ms" fill="hold">
-                <p:animEffect presetClass="entr" presetId="10" dur="500"/>
-              </p:cTn>
-            </p:par>
-            <p:par>
-              <p:cTn id="1011" nodeType="withEffect" dur="600" begin="2000ms" fill="hold">
-                <p:animEffect presetClass="entr" presetId="23" dur="600"/>
-              </p:cTn>
-            </p:par>
-          </p:tnLst>
-        </p:cTn>
-      </p:par>
-    </p:tnLst>
-  </p:timing>
 </p:sld>
 </file>
 
@@ -3660,7 +3620,182 @@
         <p:spPr>
           <a:xfrm>
             <a:off x="274320" y="868680"/>
-            <a:ext cx="3657600" cy="320040"/>
+            <a:ext cx="2834640" cy="320040"/>
+          </a:xfrm>
+          <a:prstGeom prst="rect">
+            <a:avLst/>
+          </a:prstGeom>
+          <a:noFill/>
+        </p:spPr>
+        <p:txBody>
+          <a:bodyPr wrap="square">
+            <a:spAutoFit/>
+          </a:bodyPr>
+          <a:lstStyle/>
+          <a:p>
+            <a:pPr algn="ctr"/>
+            <a:r>
+              <a:rPr sz="1400" b="1">
+                <a:solidFill>
+                  <a:srgbClr val="007396"/>
+                </a:solidFill>
+                <a:latin typeface="阿里巴巴普惠体 3.0"/>
+              </a:rPr>
+              <a:t>技术派 · 4 项测试</a:t>
+            </a:r>
+          </a:p>
+        </p:txBody>
+      </p:sp>
+      <p:sp>
+        <p:nvSpPr>
+          <p:cNvPr id="4" name="TextBox 3"/>
+          <p:cNvSpPr txBox="1"/>
+          <p:nvPr/>
+        </p:nvSpPr>
+        <p:spPr>
+          <a:xfrm>
+            <a:off x="365760" y="1371600"/>
+            <a:ext cx="2743200" cy="365760"/>
+          </a:xfrm>
+          <a:prstGeom prst="rect">
+            <a:avLst/>
+          </a:prstGeom>
+          <a:noFill/>
+        </p:spPr>
+        <p:txBody>
+          <a:bodyPr wrap="square">
+            <a:spAutoFit/>
+          </a:bodyPr>
+          <a:lstStyle/>
+          <a:p>
+            <a:pPr algn="ctr"/>
+            <a:r>
+              <a:rPr sz="1200" b="0">
+                <a:solidFill>
+                  <a:srgbClr val="1F2937"/>
+                </a:solidFill>
+                <a:latin typeface="阿里巴巴普惠体 3.0"/>
+              </a:rPr>
+              <a:t>✓ 7 张表测试</a:t>
+            </a:r>
+          </a:p>
+        </p:txBody>
+      </p:sp>
+      <p:sp>
+        <p:nvSpPr>
+          <p:cNvPr id="5" name="TextBox 4"/>
+          <p:cNvSpPr txBox="1"/>
+          <p:nvPr/>
+        </p:nvSpPr>
+        <p:spPr>
+          <a:xfrm>
+            <a:off x="365760" y="1874519"/>
+            <a:ext cx="2743200" cy="365760"/>
+          </a:xfrm>
+          <a:prstGeom prst="rect">
+            <a:avLst/>
+          </a:prstGeom>
+          <a:noFill/>
+        </p:spPr>
+        <p:txBody>
+          <a:bodyPr wrap="square">
+            <a:spAutoFit/>
+          </a:bodyPr>
+          <a:lstStyle/>
+          <a:p>
+            <a:pPr algn="ctr"/>
+            <a:r>
+              <a:rPr sz="1200" b="0">
+                <a:solidFill>
+                  <a:srgbClr val="1F2937"/>
+                </a:solidFill>
+                <a:latin typeface="阿里巴巴普惠体 3.0"/>
+              </a:rPr>
+              <a:t>✓ 0 漂移 / 0 错误链接</a:t>
+            </a:r>
+          </a:p>
+        </p:txBody>
+      </p:sp>
+      <p:sp>
+        <p:nvSpPr>
+          <p:cNvPr id="6" name="TextBox 5"/>
+          <p:cNvSpPr txBox="1"/>
+          <p:nvPr/>
+        </p:nvSpPr>
+        <p:spPr>
+          <a:xfrm>
+            <a:off x="365760" y="2377440"/>
+            <a:ext cx="2743200" cy="365760"/>
+          </a:xfrm>
+          <a:prstGeom prst="rect">
+            <a:avLst/>
+          </a:prstGeom>
+          <a:noFill/>
+        </p:spPr>
+        <p:txBody>
+          <a:bodyPr wrap="square">
+            <a:spAutoFit/>
+          </a:bodyPr>
+          <a:lstStyle/>
+          <a:p>
+            <a:pPr algn="ctr"/>
+            <a:r>
+              <a:rPr sz="1200" b="0">
+                <a:solidFill>
+                  <a:srgbClr val="1F2937"/>
+                </a:solidFill>
+                <a:latin typeface="阿里巴巴普惠体 3.0"/>
+              </a:rPr>
+              <a:t>✓ 5/5 字段推断通过</a:t>
+            </a:r>
+          </a:p>
+        </p:txBody>
+      </p:sp>
+      <p:sp>
+        <p:nvSpPr>
+          <p:cNvPr id="7" name="TextBox 6"/>
+          <p:cNvSpPr txBox="1"/>
+          <p:nvPr/>
+        </p:nvSpPr>
+        <p:spPr>
+          <a:xfrm>
+            <a:off x="365760" y="2880360"/>
+            <a:ext cx="2743200" cy="365760"/>
+          </a:xfrm>
+          <a:prstGeom prst="rect">
+            <a:avLst/>
+          </a:prstGeom>
+          <a:noFill/>
+        </p:spPr>
+        <p:txBody>
+          <a:bodyPr wrap="square">
+            <a:spAutoFit/>
+          </a:bodyPr>
+          <a:lstStyle/>
+          <a:p>
+            <a:pPr algn="ctr"/>
+            <a:r>
+              <a:rPr sz="1200" b="1">
+                <a:solidFill>
+                  <a:srgbClr val="F59E0B"/>
+                </a:solidFill>
+                <a:latin typeface="阿里巴巴普惠体 3.0"/>
+              </a:rPr>
+              <a:t>✓ 节省 CRUD &gt;80%</a:t>
+            </a:r>
+          </a:p>
+        </p:txBody>
+      </p:sp>
+      <p:sp>
+        <p:nvSpPr>
+          <p:cNvPr id="8" name="TextBox 7"/>
+          <p:cNvSpPr txBox="1"/>
+          <p:nvPr/>
+        </p:nvSpPr>
+        <p:spPr>
+          <a:xfrm>
+            <a:off x="3291840" y="868680"/>
+            <a:ext cx="5577840" cy="320040"/>
           </a:xfrm>
           <a:prstGeom prst="rect">
             <a:avLst/>
@@ -3677,186 +3812,11 @@
             <a:r>
               <a:rPr sz="1500" b="1">
                 <a:solidFill>
-                  <a:srgbClr val="007396"/>
+                  <a:srgbClr val="6B46C1"/>
                 </a:solidFill>
                 <a:latin typeface="阿里巴巴普惠体 3.0"/>
               </a:rPr>
-              <a:t>技术派 · 4 项测试</a:t>
-            </a:r>
-          </a:p>
-        </p:txBody>
-      </p:sp>
-      <p:sp>
-        <p:nvSpPr>
-          <p:cNvPr id="4" name="TextBox 3"/>
-          <p:cNvSpPr txBox="1"/>
-          <p:nvPr/>
-        </p:nvSpPr>
-        <p:spPr>
-          <a:xfrm>
-            <a:off x="365760" y="1371600"/>
-            <a:ext cx="3657600" cy="365760"/>
-          </a:xfrm>
-          <a:prstGeom prst="rect">
-            <a:avLst/>
-          </a:prstGeom>
-          <a:noFill/>
-        </p:spPr>
-        <p:txBody>
-          <a:bodyPr wrap="square">
-            <a:spAutoFit/>
-          </a:bodyPr>
-          <a:lstStyle/>
-          <a:p>
-            <a:pPr algn="ctr"/>
-            <a:r>
-              <a:rPr sz="1300" b="0">
-                <a:solidFill>
-                  <a:srgbClr val="1F2937"/>
-                </a:solidFill>
-                <a:latin typeface="阿里巴巴普惠体 3.0"/>
-              </a:rPr>
-              <a:t>✓ 7 张表测试(简单/字典/自关联)</a:t>
-            </a:r>
-          </a:p>
-        </p:txBody>
-      </p:sp>
-      <p:sp>
-        <p:nvSpPr>
-          <p:cNvPr id="5" name="TextBox 4"/>
-          <p:cNvSpPr txBox="1"/>
-          <p:nvPr/>
-        </p:nvSpPr>
-        <p:spPr>
-          <a:xfrm>
-            <a:off x="365760" y="1874519"/>
-            <a:ext cx="3657600" cy="365760"/>
-          </a:xfrm>
-          <a:prstGeom prst="rect">
-            <a:avLst/>
-          </a:prstGeom>
-          <a:noFill/>
-        </p:spPr>
-        <p:txBody>
-          <a:bodyPr wrap="square">
-            <a:spAutoFit/>
-          </a:bodyPr>
-          <a:lstStyle/>
-          <a:p>
-            <a:pPr algn="ctr"/>
-            <a:r>
-              <a:rPr sz="1300" b="0">
-                <a:solidFill>
-                  <a:srgbClr val="1F2937"/>
-                </a:solidFill>
-                <a:latin typeface="阿里巴巴普惠体 3.0"/>
-              </a:rPr>
-              <a:t>✓ 0 漂移 / 0 错误链接 / 0 乱码</a:t>
-            </a:r>
-          </a:p>
-        </p:txBody>
-      </p:sp>
-      <p:sp>
-        <p:nvSpPr>
-          <p:cNvPr id="6" name="TextBox 5"/>
-          <p:cNvSpPr txBox="1"/>
-          <p:nvPr/>
-        </p:nvSpPr>
-        <p:spPr>
-          <a:xfrm>
-            <a:off x="365760" y="2377440"/>
-            <a:ext cx="3657600" cy="365760"/>
-          </a:xfrm>
-          <a:prstGeom prst="rect">
-            <a:avLst/>
-          </a:prstGeom>
-          <a:noFill/>
-        </p:spPr>
-        <p:txBody>
-          <a:bodyPr wrap="square">
-            <a:spAutoFit/>
-          </a:bodyPr>
-          <a:lstStyle/>
-          <a:p>
-            <a:pPr algn="ctr"/>
-            <a:r>
-              <a:rPr sz="1300" b="0">
-                <a:solidFill>
-                  <a:srgbClr val="1F2937"/>
-                </a:solidFill>
-                <a:latin typeface="阿里巴巴普惠体 3.0"/>
-              </a:rPr>
-              <a:t>✓ 5/5 AI 字段推断自检通过</a:t>
-            </a:r>
-          </a:p>
-        </p:txBody>
-      </p:sp>
-      <p:sp>
-        <p:nvSpPr>
-          <p:cNvPr id="7" name="TextBox 6"/>
-          <p:cNvSpPr txBox="1"/>
-          <p:nvPr/>
-        </p:nvSpPr>
-        <p:spPr>
-          <a:xfrm>
-            <a:off x="365760" y="2880360"/>
-            <a:ext cx="3657600" cy="365760"/>
-          </a:xfrm>
-          <a:prstGeom prst="rect">
-            <a:avLst/>
-          </a:prstGeom>
-          <a:noFill/>
-        </p:spPr>
-        <p:txBody>
-          <a:bodyPr wrap="square">
-            <a:spAutoFit/>
-          </a:bodyPr>
-          <a:lstStyle/>
-          <a:p>
-            <a:pPr algn="ctr"/>
-            <a:r>
-              <a:rPr sz="1300" b="1">
-                <a:solidFill>
-                  <a:srgbClr val="F59E0B"/>
-                </a:solidFill>
-                <a:latin typeface="阿里巴巴普惠体 3.0"/>
-              </a:rPr>
-              <a:t>✓ 节省 CRUD 开发时间 &gt;80%</a:t>
-            </a:r>
-          </a:p>
-        </p:txBody>
-      </p:sp>
-      <p:sp>
-        <p:nvSpPr>
-          <p:cNvPr id="8" name="TextBox 7"/>
-          <p:cNvSpPr txBox="1"/>
-          <p:nvPr/>
-        </p:nvSpPr>
-        <p:spPr>
-          <a:xfrm>
-            <a:off x="4297680" y="868680"/>
-            <a:ext cx="3200400" cy="320040"/>
-          </a:xfrm>
-          <a:prstGeom prst="rect">
-            <a:avLst/>
-          </a:prstGeom>
-          <a:noFill/>
-        </p:spPr>
-        <p:txBody>
-          <a:bodyPr wrap="square">
-            <a:spAutoFit/>
-          </a:bodyPr>
-          <a:lstStyle/>
-          <a:p>
-            <a:pPr algn="ctr"/>
-            <a:r>
-              <a:rPr sz="1500" b="1">
-                <a:solidFill>
-                  <a:srgbClr val="6B46C1"/>
-                </a:solidFill>
-                <a:latin typeface="阿里巴巴普惠体 3.0"/>
-              </a:rPr>
-              <a:t>开发时间 · 3 种方案</a:t>
+              <a:t>开发时间 · 3 种方案(柱状图为主角)</a:t>
             </a:r>
           </a:p>
         </p:txBody>
@@ -3869,8 +3829,8 @@
         </p:nvSpPr>
         <p:spPr>
           <a:xfrm>
-            <a:off x="4480560" y="2011680"/>
-            <a:ext cx="822960" cy="2560320"/>
+            <a:off x="3931920" y="2011680"/>
+            <a:ext cx="1188720" cy="2743200"/>
           </a:xfrm>
           <a:prstGeom prst="rect">
             <a:avLst/>
@@ -3912,58 +3872,93 @@
         </p:nvSpPr>
         <p:spPr>
           <a:xfrm>
-            <a:off x="4480560" y="1691640"/>
-            <a:ext cx="822960" cy="274320"/>
-          </a:xfrm>
-          <a:prstGeom prst="rect">
-            <a:avLst/>
-          </a:prstGeom>
-          <a:noFill/>
-        </p:spPr>
-        <p:txBody>
-          <a:bodyPr wrap="square">
-            <a:spAutoFit/>
-          </a:bodyPr>
-          <a:lstStyle/>
-          <a:p>
-            <a:pPr algn="ctr"/>
-            <a:r>
-              <a:rPr sz="1100" b="1">
+            <a:off x="3931920" y="1554480"/>
+            <a:ext cx="1188720" cy="365760"/>
+          </a:xfrm>
+          <a:prstGeom prst="rect">
+            <a:avLst/>
+          </a:prstGeom>
+          <a:noFill/>
+        </p:spPr>
+        <p:txBody>
+          <a:bodyPr wrap="square">
+            <a:spAutoFit/>
+          </a:bodyPr>
+          <a:lstStyle/>
+          <a:p>
+            <a:pPr algn="ctr"/>
+            <a:r>
+              <a:rPr sz="1800" b="1">
                 <a:solidFill>
                   <a:srgbClr val="E5E7EB"/>
                 </a:solidFill>
+                <a:latin typeface="Inter"/>
+              </a:rPr>
+              <a:t>30天</a:t>
+            </a:r>
+          </a:p>
+        </p:txBody>
+      </p:sp>
+      <p:sp>
+        <p:nvSpPr>
+          <p:cNvPr id="11" name="TextBox 10"/>
+          <p:cNvSpPr txBox="1"/>
+          <p:nvPr/>
+        </p:nvSpPr>
+        <p:spPr>
+          <a:xfrm>
+            <a:off x="3931920" y="1234440"/>
+            <a:ext cx="1188720" cy="274320"/>
+          </a:xfrm>
+          <a:prstGeom prst="rect">
+            <a:avLst/>
+          </a:prstGeom>
+          <a:noFill/>
+        </p:spPr>
+        <p:txBody>
+          <a:bodyPr wrap="square">
+            <a:spAutoFit/>
+          </a:bodyPr>
+          <a:lstStyle/>
+          <a:p>
+            <a:pPr algn="ctr"/>
+            <a:r>
+              <a:rPr sz="1200" b="1">
+                <a:solidFill>
+                  <a:srgbClr val="DC2626"/>
+                </a:solidFill>
                 <a:latin typeface="阿里巴巴普惠体 3.0"/>
               </a:rPr>
-              <a:t>30天</a:t>
-            </a:r>
-          </a:p>
-        </p:txBody>
-      </p:sp>
-      <p:sp>
-        <p:nvSpPr>
-          <p:cNvPr id="11" name="TextBox 10"/>
-          <p:cNvSpPr txBox="1"/>
-          <p:nvPr/>
-        </p:nvSpPr>
-        <p:spPr>
-          <a:xfrm>
-            <a:off x="4480560" y="4709160"/>
-            <a:ext cx="822960" cy="274320"/>
-          </a:xfrm>
-          <a:prstGeom prst="rect">
-            <a:avLst/>
-          </a:prstGeom>
-          <a:noFill/>
-        </p:spPr>
-        <p:txBody>
-          <a:bodyPr wrap="square">
-            <a:spAutoFit/>
-          </a:bodyPr>
-          <a:lstStyle/>
-          <a:p>
-            <a:pPr algn="ctr"/>
-            <a:r>
-              <a:rPr sz="1100" b="1">
+              <a:t>≈ 3 月</a:t>
+            </a:r>
+          </a:p>
+        </p:txBody>
+      </p:sp>
+      <p:sp>
+        <p:nvSpPr>
+          <p:cNvPr id="12" name="TextBox 11"/>
+          <p:cNvSpPr txBox="1"/>
+          <p:nvPr/>
+        </p:nvSpPr>
+        <p:spPr>
+          <a:xfrm>
+            <a:off x="3931920" y="4892040"/>
+            <a:ext cx="1188720" cy="365760"/>
+          </a:xfrm>
+          <a:prstGeom prst="rect">
+            <a:avLst/>
+          </a:prstGeom>
+          <a:noFill/>
+        </p:spPr>
+        <p:txBody>
+          <a:bodyPr wrap="square">
+            <a:spAutoFit/>
+          </a:bodyPr>
+          <a:lstStyle/>
+          <a:p>
+            <a:pPr algn="ctr"/>
+            <a:r>
+              <a:rPr sz="1200" b="1">
                 <a:solidFill>
                   <a:srgbClr val="1F2937"/>
                 </a:solidFill>
@@ -3976,14 +3971,49 @@
       </p:sp>
       <p:sp>
         <p:nvSpPr>
-          <p:cNvPr id="12" name="Rectangle 11"/>
+          <p:cNvPr id="13" name="TextBox 12"/>
+          <p:cNvSpPr txBox="1"/>
+          <p:nvPr/>
+        </p:nvSpPr>
+        <p:spPr>
+          <a:xfrm>
+            <a:off x="3931920" y="5349240"/>
+            <a:ext cx="1188720" cy="365760"/>
+          </a:xfrm>
+          <a:prstGeom prst="rect">
+            <a:avLst/>
+          </a:prstGeom>
+          <a:noFill/>
+        </p:spPr>
+        <p:txBody>
+          <a:bodyPr wrap="square">
+            <a:spAutoFit/>
+          </a:bodyPr>
+          <a:lstStyle/>
+          <a:p>
+            <a:pPr algn="ctr"/>
+            <a:r>
+              <a:rPr sz="1400" b="1">
+                <a:solidFill>
+                  <a:srgbClr val="DC2626"/>
+                </a:solidFill>
+                <a:latin typeface="Inter"/>
+              </a:rPr>
+              <a:t>≈ 3 月</a:t>
+            </a:r>
+          </a:p>
+        </p:txBody>
+      </p:sp>
+      <p:sp>
+        <p:nvSpPr>
+          <p:cNvPr id="14" name="Rectangle 13"/>
           <p:cNvSpPr/>
           <p:nvPr/>
         </p:nvSpPr>
         <p:spPr>
           <a:xfrm>
-            <a:off x="5532120" y="3718560"/>
-            <a:ext cx="822960" cy="853439"/>
+            <a:off x="5486400" y="3840480"/>
+            <a:ext cx="1188720" cy="914400"/>
           </a:xfrm>
           <a:prstGeom prst="rect">
             <a:avLst/>
@@ -4019,64 +4049,99 @@
       </p:sp>
       <p:sp>
         <p:nvSpPr>
-          <p:cNvPr id="13" name="TextBox 12"/>
-          <p:cNvSpPr txBox="1"/>
-          <p:nvPr/>
-        </p:nvSpPr>
-        <p:spPr>
-          <a:xfrm>
-            <a:off x="5532120" y="3398519"/>
-            <a:ext cx="822960" cy="274320"/>
-          </a:xfrm>
-          <a:prstGeom prst="rect">
-            <a:avLst/>
-          </a:prstGeom>
-          <a:noFill/>
-        </p:spPr>
-        <p:txBody>
-          <a:bodyPr wrap="square">
-            <a:spAutoFit/>
-          </a:bodyPr>
-          <a:lstStyle/>
-          <a:p>
-            <a:pPr algn="ctr"/>
-            <a:r>
-              <a:rPr sz="1100" b="1">
+          <p:cNvPr id="15" name="TextBox 14"/>
+          <p:cNvSpPr txBox="1"/>
+          <p:nvPr/>
+        </p:nvSpPr>
+        <p:spPr>
+          <a:xfrm>
+            <a:off x="5486400" y="3383280"/>
+            <a:ext cx="1188720" cy="365760"/>
+          </a:xfrm>
+          <a:prstGeom prst="rect">
+            <a:avLst/>
+          </a:prstGeom>
+          <a:noFill/>
+        </p:spPr>
+        <p:txBody>
+          <a:bodyPr wrap="square">
+            <a:spAutoFit/>
+          </a:bodyPr>
+          <a:lstStyle/>
+          <a:p>
+            <a:pPr algn="ctr"/>
+            <a:r>
+              <a:rPr sz="1800" b="1">
                 <a:solidFill>
                   <a:srgbClr val="DC2626"/>
                 </a:solidFill>
+                <a:latin typeface="Inter"/>
+              </a:rPr>
+              <a:t>10天</a:t>
+            </a:r>
+          </a:p>
+        </p:txBody>
+      </p:sp>
+      <p:sp>
+        <p:nvSpPr>
+          <p:cNvPr id="16" name="TextBox 15"/>
+          <p:cNvSpPr txBox="1"/>
+          <p:nvPr/>
+        </p:nvSpPr>
+        <p:spPr>
+          <a:xfrm>
+            <a:off x="5486400" y="3063240"/>
+            <a:ext cx="1188720" cy="274320"/>
+          </a:xfrm>
+          <a:prstGeom prst="rect">
+            <a:avLst/>
+          </a:prstGeom>
+          <a:noFill/>
+        </p:spPr>
+        <p:txBody>
+          <a:bodyPr wrap="square">
+            <a:spAutoFit/>
+          </a:bodyPr>
+          <a:lstStyle/>
+          <a:p>
+            <a:pPr algn="ctr"/>
+            <a:r>
+              <a:rPr sz="1200" b="1">
+                <a:solidFill>
+                  <a:srgbClr val="DC2626"/>
+                </a:solidFill>
                 <a:latin typeface="阿里巴巴普惠体 3.0"/>
               </a:rPr>
-              <a:t>10天</a:t>
-            </a:r>
-          </a:p>
-        </p:txBody>
-      </p:sp>
-      <p:sp>
-        <p:nvSpPr>
-          <p:cNvPr id="14" name="TextBox 13"/>
-          <p:cNvSpPr txBox="1"/>
-          <p:nvPr/>
-        </p:nvSpPr>
-        <p:spPr>
-          <a:xfrm>
-            <a:off x="5532120" y="4709160"/>
-            <a:ext cx="822960" cy="274320"/>
-          </a:xfrm>
-          <a:prstGeom prst="rect">
-            <a:avLst/>
-          </a:prstGeom>
-          <a:noFill/>
-        </p:spPr>
-        <p:txBody>
-          <a:bodyPr wrap="square">
-            <a:spAutoFit/>
-          </a:bodyPr>
-          <a:lstStyle/>
-          <a:p>
-            <a:pPr algn="ctr"/>
-            <a:r>
-              <a:rPr sz="1100" b="1">
+              <a:t>10 天</a:t>
+            </a:r>
+          </a:p>
+        </p:txBody>
+      </p:sp>
+      <p:sp>
+        <p:nvSpPr>
+          <p:cNvPr id="17" name="TextBox 16"/>
+          <p:cNvSpPr txBox="1"/>
+          <p:nvPr/>
+        </p:nvSpPr>
+        <p:spPr>
+          <a:xfrm>
+            <a:off x="5486400" y="4892040"/>
+            <a:ext cx="1188720" cy="365760"/>
+          </a:xfrm>
+          <a:prstGeom prst="rect">
+            <a:avLst/>
+          </a:prstGeom>
+          <a:noFill/>
+        </p:spPr>
+        <p:txBody>
+          <a:bodyPr wrap="square">
+            <a:spAutoFit/>
+          </a:bodyPr>
+          <a:lstStyle/>
+          <a:p>
+            <a:pPr algn="ctr"/>
+            <a:r>
+              <a:rPr sz="1200" b="1">
                 <a:solidFill>
                   <a:srgbClr val="1F2937"/>
                 </a:solidFill>
@@ -4089,14 +4154,49 @@
       </p:sp>
       <p:sp>
         <p:nvSpPr>
-          <p:cNvPr id="15" name="Rectangle 14"/>
+          <p:cNvPr id="18" name="TextBox 17"/>
+          <p:cNvSpPr txBox="1"/>
+          <p:nvPr/>
+        </p:nvSpPr>
+        <p:spPr>
+          <a:xfrm>
+            <a:off x="5486400" y="5349240"/>
+            <a:ext cx="1188720" cy="365760"/>
+          </a:xfrm>
+          <a:prstGeom prst="rect">
+            <a:avLst/>
+          </a:prstGeom>
+          <a:noFill/>
+        </p:spPr>
+        <p:txBody>
+          <a:bodyPr wrap="square">
+            <a:spAutoFit/>
+          </a:bodyPr>
+          <a:lstStyle/>
+          <a:p>
+            <a:pPr algn="ctr"/>
+            <a:r>
+              <a:rPr sz="1400" b="1">
+                <a:solidFill>
+                  <a:srgbClr val="DC2626"/>
+                </a:solidFill>
+                <a:latin typeface="Inter"/>
+              </a:rPr>
+              <a:t>10 天</a:t>
+            </a:r>
+          </a:p>
+        </p:txBody>
+      </p:sp>
+      <p:sp>
+        <p:nvSpPr>
+          <p:cNvPr id="19" name="Rectangle 18"/>
           <p:cNvSpPr/>
           <p:nvPr/>
         </p:nvSpPr>
         <p:spPr>
           <a:xfrm>
-            <a:off x="6583680" y="4486656"/>
-            <a:ext cx="822960" cy="85343"/>
+            <a:off x="7040880" y="4663440"/>
+            <a:ext cx="1188720" cy="91440"/>
           </a:xfrm>
           <a:prstGeom prst="rect">
             <a:avLst/>
@@ -4132,64 +4232,99 @@
       </p:sp>
       <p:sp>
         <p:nvSpPr>
-          <p:cNvPr id="16" name="TextBox 15"/>
-          <p:cNvSpPr txBox="1"/>
-          <p:nvPr/>
-        </p:nvSpPr>
-        <p:spPr>
-          <a:xfrm>
-            <a:off x="6583680" y="4166616"/>
-            <a:ext cx="822960" cy="274320"/>
-          </a:xfrm>
-          <a:prstGeom prst="rect">
-            <a:avLst/>
-          </a:prstGeom>
-          <a:noFill/>
-        </p:spPr>
-        <p:txBody>
-          <a:bodyPr wrap="square">
-            <a:spAutoFit/>
-          </a:bodyPr>
-          <a:lstStyle/>
-          <a:p>
-            <a:pPr algn="ctr"/>
-            <a:r>
-              <a:rPr sz="1100" b="1">
+          <p:cNvPr id="20" name="TextBox 19"/>
+          <p:cNvSpPr txBox="1"/>
+          <p:nvPr/>
+        </p:nvSpPr>
+        <p:spPr>
+          <a:xfrm>
+            <a:off x="7040880" y="4206240"/>
+            <a:ext cx="1188720" cy="365760"/>
+          </a:xfrm>
+          <a:prstGeom prst="rect">
+            <a:avLst/>
+          </a:prstGeom>
+          <a:noFill/>
+        </p:spPr>
+        <p:txBody>
+          <a:bodyPr wrap="square">
+            <a:spAutoFit/>
+          </a:bodyPr>
+          <a:lstStyle/>
+          <a:p>
+            <a:pPr algn="ctr"/>
+            <a:r>
+              <a:rPr sz="1800" b="1">
                 <a:solidFill>
                   <a:srgbClr val="10B981"/>
                 </a:solidFill>
+                <a:latin typeface="Inter"/>
+              </a:rPr>
+              <a:t>1天</a:t>
+            </a:r>
+          </a:p>
+        </p:txBody>
+      </p:sp>
+      <p:sp>
+        <p:nvSpPr>
+          <p:cNvPr id="21" name="TextBox 20"/>
+          <p:cNvSpPr txBox="1"/>
+          <p:nvPr/>
+        </p:nvSpPr>
+        <p:spPr>
+          <a:xfrm>
+            <a:off x="7040880" y="3886200"/>
+            <a:ext cx="1188720" cy="274320"/>
+          </a:xfrm>
+          <a:prstGeom prst="rect">
+            <a:avLst/>
+          </a:prstGeom>
+          <a:noFill/>
+        </p:spPr>
+        <p:txBody>
+          <a:bodyPr wrap="square">
+            <a:spAutoFit/>
+          </a:bodyPr>
+          <a:lstStyle/>
+          <a:p>
+            <a:pPr algn="ctr"/>
+            <a:r>
+              <a:rPr sz="1200" b="1">
+                <a:solidFill>
+                  <a:srgbClr val="10B981"/>
+                </a:solidFill>
                 <a:latin typeface="阿里巴巴普惠体 3.0"/>
               </a:rPr>
-              <a:t>1天</a:t>
-            </a:r>
-          </a:p>
-        </p:txBody>
-      </p:sp>
-      <p:sp>
-        <p:nvSpPr>
-          <p:cNvPr id="17" name="TextBox 16"/>
-          <p:cNvSpPr txBox="1"/>
-          <p:nvPr/>
-        </p:nvSpPr>
-        <p:spPr>
-          <a:xfrm>
-            <a:off x="6583680" y="4709160"/>
-            <a:ext cx="822960" cy="274320"/>
-          </a:xfrm>
-          <a:prstGeom prst="rect">
-            <a:avLst/>
-          </a:prstGeom>
-          <a:noFill/>
-        </p:spPr>
-        <p:txBody>
-          <a:bodyPr wrap="square">
-            <a:spAutoFit/>
-          </a:bodyPr>
-          <a:lstStyle/>
-          <a:p>
-            <a:pPr algn="ctr"/>
-            <a:r>
-              <a:rPr sz="1100" b="1">
+              <a:t>≈ 3 分</a:t>
+            </a:r>
+          </a:p>
+        </p:txBody>
+      </p:sp>
+      <p:sp>
+        <p:nvSpPr>
+          <p:cNvPr id="22" name="TextBox 21"/>
+          <p:cNvSpPr txBox="1"/>
+          <p:nvPr/>
+        </p:nvSpPr>
+        <p:spPr>
+          <a:xfrm>
+            <a:off x="7040880" y="4892040"/>
+            <a:ext cx="1188720" cy="365760"/>
+          </a:xfrm>
+          <a:prstGeom prst="rect">
+            <a:avLst/>
+          </a:prstGeom>
+          <a:noFill/>
+        </p:spPr>
+        <p:txBody>
+          <a:bodyPr wrap="square">
+            <a:spAutoFit/>
+          </a:bodyPr>
+          <a:lstStyle/>
+          <a:p>
+            <a:pPr algn="ctr"/>
+            <a:r>
+              <a:rPr sz="1200" b="1">
                 <a:solidFill>
                   <a:srgbClr val="1F2937"/>
                 </a:solidFill>
@@ -4202,49 +4337,84 @@
       </p:sp>
       <p:sp>
         <p:nvSpPr>
-          <p:cNvPr id="18" name="TextBox 17"/>
-          <p:cNvSpPr txBox="1"/>
-          <p:nvPr/>
-        </p:nvSpPr>
-        <p:spPr>
-          <a:xfrm>
-            <a:off x="7589520" y="868680"/>
-            <a:ext cx="4389120" cy="320040"/>
-          </a:xfrm>
-          <a:prstGeom prst="rect">
-            <a:avLst/>
-          </a:prstGeom>
-          <a:noFill/>
-        </p:spPr>
-        <p:txBody>
-          <a:bodyPr wrap="square">
-            <a:spAutoFit/>
-          </a:bodyPr>
-          <a:lstStyle/>
-          <a:p>
-            <a:pPr algn="ctr"/>
-            <a:r>
-              <a:rPr sz="1500" b="1">
+          <p:cNvPr id="23" name="TextBox 22"/>
+          <p:cNvSpPr txBox="1"/>
+          <p:nvPr/>
+        </p:nvSpPr>
+        <p:spPr>
+          <a:xfrm>
+            <a:off x="7040880" y="5349240"/>
+            <a:ext cx="1188720" cy="365760"/>
+          </a:xfrm>
+          <a:prstGeom prst="rect">
+            <a:avLst/>
+          </a:prstGeom>
+          <a:noFill/>
+        </p:spPr>
+        <p:txBody>
+          <a:bodyPr wrap="square">
+            <a:spAutoFit/>
+          </a:bodyPr>
+          <a:lstStyle/>
+          <a:p>
+            <a:pPr algn="ctr"/>
+            <a:r>
+              <a:rPr sz="1400" b="1">
+                <a:solidFill>
+                  <a:srgbClr val="10B981"/>
+                </a:solidFill>
+                <a:latin typeface="Inter"/>
+              </a:rPr>
+              <a:t>≈ 3 分</a:t>
+            </a:r>
+          </a:p>
+        </p:txBody>
+      </p:sp>
+      <p:sp>
+        <p:nvSpPr>
+          <p:cNvPr id="24" name="TextBox 23"/>
+          <p:cNvSpPr txBox="1"/>
+          <p:nvPr/>
+        </p:nvSpPr>
+        <p:spPr>
+          <a:xfrm>
+            <a:off x="9052560" y="868680"/>
+            <a:ext cx="2926080" cy="320040"/>
+          </a:xfrm>
+          <a:prstGeom prst="rect">
+            <a:avLst/>
+          </a:prstGeom>
+          <a:noFill/>
+        </p:spPr>
+        <p:txBody>
+          <a:bodyPr wrap="square">
+            <a:spAutoFit/>
+          </a:bodyPr>
+          <a:lstStyle/>
+          <a:p>
+            <a:pPr algn="ctr"/>
+            <a:r>
+              <a:rPr sz="1400" b="1">
                 <a:solidFill>
                   <a:srgbClr val="6B46C1"/>
                 </a:solidFill>
                 <a:latin typeface="阿里巴巴普惠体 3.0"/>
               </a:rPr>
-              <a:t>商业派 · 5 项对比</a:t>
-            </a:r>
-          </a:p>
-        </p:txBody>
-      </p:sp>
-      <p:sp>
-        <p:nvSpPr>
-          <p:cNvPr id="19" name="Rectangle 18"/>
+              <a:t>商业派 · 5 项</a:t>
+            </a:r>
+          </a:p>
+        </p:txBody>
+      </p:sp>
+      <p:sp>
+        <p:nvSpPr>
+          <p:cNvPr id="25" name="Rectangle 24"/>
           <p:cNvSpPr/>
           <p:nvPr/>
         </p:nvSpPr>
         <p:spPr>
           <a:xfrm>
-            <a:off x="7589520" y="1371600"/>
-            <a:ext cx="4389120" cy="411480"/>
+            <a:off x="9052560" y="1371600"/>
+            <a:ext cx="2926080" cy="411480"/>
           </a:xfrm>
           <a:prstGeom prst="rect">
             <a:avLst/>
@@ -4282,28 +4452,28 @@
       </p:sp>
       <p:sp>
         <p:nvSpPr>
-          <p:cNvPr id="20" name="TextBox 19"/>
-          <p:cNvSpPr txBox="1"/>
-          <p:nvPr/>
-        </p:nvSpPr>
-        <p:spPr>
-          <a:xfrm>
-            <a:off x="7772400" y="1417320"/>
-            <a:ext cx="2743200" cy="365760"/>
-          </a:xfrm>
-          <a:prstGeom prst="rect">
-            <a:avLst/>
-          </a:prstGeom>
-          <a:noFill/>
-        </p:spPr>
-        <p:txBody>
-          <a:bodyPr wrap="square">
-            <a:spAutoFit/>
-          </a:bodyPr>
-          <a:lstStyle/>
-          <a:p>
-            <a:r>
-              <a:rPr sz="1400" b="0">
+          <p:cNvPr id="26" name="TextBox 25"/>
+          <p:cNvSpPr txBox="1"/>
+          <p:nvPr/>
+        </p:nvSpPr>
+        <p:spPr>
+          <a:xfrm>
+            <a:off x="9189720" y="1417320"/>
+            <a:ext cx="1828800" cy="365760"/>
+          </a:xfrm>
+          <a:prstGeom prst="rect">
+            <a:avLst/>
+          </a:prstGeom>
+          <a:noFill/>
+        </p:spPr>
+        <p:txBody>
+          <a:bodyPr wrap="square">
+            <a:spAutoFit/>
+          </a:bodyPr>
+          <a:lstStyle/>
+          <a:p>
+            <a:r>
+              <a:rPr sz="1200" b="0">
                 <a:solidFill>
                   <a:srgbClr val="1F2937"/>
                 </a:solidFill>
@@ -4316,14 +4486,14 @@
       </p:sp>
       <p:sp>
         <p:nvSpPr>
-          <p:cNvPr id="21" name="TextBox 20"/>
-          <p:cNvSpPr txBox="1"/>
-          <p:nvPr/>
-        </p:nvSpPr>
-        <p:spPr>
-          <a:xfrm>
-            <a:off x="10698480" y="1417320"/>
-            <a:ext cx="1097280" cy="365760"/>
+          <p:cNvPr id="27" name="TextBox 26"/>
+          <p:cNvSpPr txBox="1"/>
+          <p:nvPr/>
+        </p:nvSpPr>
+        <p:spPr>
+          <a:xfrm>
+            <a:off x="11247120" y="1417320"/>
+            <a:ext cx="731520" cy="365760"/>
           </a:xfrm>
           <a:prstGeom prst="rect">
             <a:avLst/>
@@ -4351,14 +4521,14 @@
       </p:sp>
       <p:sp>
         <p:nvSpPr>
-          <p:cNvPr id="22" name="Rectangle 21"/>
+          <p:cNvPr id="28" name="Rectangle 27"/>
           <p:cNvSpPr/>
           <p:nvPr/>
         </p:nvSpPr>
         <p:spPr>
           <a:xfrm>
-            <a:off x="7589520" y="1828800"/>
-            <a:ext cx="4389120" cy="411480"/>
+            <a:off x="9052560" y="1828800"/>
+            <a:ext cx="2926080" cy="411480"/>
           </a:xfrm>
           <a:prstGeom prst="rect">
             <a:avLst/>
@@ -4396,28 +4566,28 @@
       </p:sp>
       <p:sp>
         <p:nvSpPr>
-          <p:cNvPr id="23" name="TextBox 22"/>
-          <p:cNvSpPr txBox="1"/>
-          <p:nvPr/>
-        </p:nvSpPr>
-        <p:spPr>
-          <a:xfrm>
-            <a:off x="7772400" y="1874519"/>
-            <a:ext cx="2743200" cy="365760"/>
-          </a:xfrm>
-          <a:prstGeom prst="rect">
-            <a:avLst/>
-          </a:prstGeom>
-          <a:noFill/>
-        </p:spPr>
-        <p:txBody>
-          <a:bodyPr wrap="square">
-            <a:spAutoFit/>
-          </a:bodyPr>
-          <a:lstStyle/>
-          <a:p>
-            <a:r>
-              <a:rPr sz="1400" b="0">
+          <p:cNvPr id="29" name="TextBox 28"/>
+          <p:cNvSpPr txBox="1"/>
+          <p:nvPr/>
+        </p:nvSpPr>
+        <p:spPr>
+          <a:xfrm>
+            <a:off x="9189720" y="1874519"/>
+            <a:ext cx="1828800" cy="365760"/>
+          </a:xfrm>
+          <a:prstGeom prst="rect">
+            <a:avLst/>
+          </a:prstGeom>
+          <a:noFill/>
+        </p:spPr>
+        <p:txBody>
+          <a:bodyPr wrap="square">
+            <a:spAutoFit/>
+          </a:bodyPr>
+          <a:lstStyle/>
+          <a:p>
+            <a:r>
+              <a:rPr sz="1200" b="0">
                 <a:solidFill>
                   <a:srgbClr val="1F2937"/>
                 </a:solidFill>
@@ -4430,14 +4600,14 @@
       </p:sp>
       <p:sp>
         <p:nvSpPr>
-          <p:cNvPr id="24" name="TextBox 23"/>
-          <p:cNvSpPr txBox="1"/>
-          <p:nvPr/>
-        </p:nvSpPr>
-        <p:spPr>
-          <a:xfrm>
-            <a:off x="10698480" y="1874519"/>
-            <a:ext cx="1097280" cy="365760"/>
+          <p:cNvPr id="30" name="TextBox 29"/>
+          <p:cNvSpPr txBox="1"/>
+          <p:nvPr/>
+        </p:nvSpPr>
+        <p:spPr>
+          <a:xfrm>
+            <a:off x="11247120" y="1874519"/>
+            <a:ext cx="731520" cy="365760"/>
           </a:xfrm>
           <a:prstGeom prst="rect">
             <a:avLst/>
@@ -4465,14 +4635,14 @@
       </p:sp>
       <p:sp>
         <p:nvSpPr>
-          <p:cNvPr id="25" name="Rectangle 24"/>
+          <p:cNvPr id="31" name="Rectangle 30"/>
           <p:cNvSpPr/>
           <p:nvPr/>
         </p:nvSpPr>
         <p:spPr>
           <a:xfrm>
-            <a:off x="7589520" y="2286000"/>
-            <a:ext cx="4389120" cy="411480"/>
+            <a:off x="9052560" y="2286000"/>
+            <a:ext cx="2926080" cy="411480"/>
           </a:xfrm>
           <a:prstGeom prst="rect">
             <a:avLst/>
@@ -4510,28 +4680,28 @@
       </p:sp>
       <p:sp>
         <p:nvSpPr>
-          <p:cNvPr id="26" name="TextBox 25"/>
-          <p:cNvSpPr txBox="1"/>
-          <p:nvPr/>
-        </p:nvSpPr>
-        <p:spPr>
-          <a:xfrm>
-            <a:off x="7772400" y="2331720"/>
-            <a:ext cx="2743200" cy="365760"/>
-          </a:xfrm>
-          <a:prstGeom prst="rect">
-            <a:avLst/>
-          </a:prstGeom>
-          <a:noFill/>
-        </p:spPr>
-        <p:txBody>
-          <a:bodyPr wrap="square">
-            <a:spAutoFit/>
-          </a:bodyPr>
-          <a:lstStyle/>
-          <a:p>
-            <a:r>
-              <a:rPr sz="1400" b="0">
+          <p:cNvPr id="32" name="TextBox 31"/>
+          <p:cNvSpPr txBox="1"/>
+          <p:nvPr/>
+        </p:nvSpPr>
+        <p:spPr>
+          <a:xfrm>
+            <a:off x="9189720" y="2331720"/>
+            <a:ext cx="1828800" cy="365760"/>
+          </a:xfrm>
+          <a:prstGeom prst="rect">
+            <a:avLst/>
+          </a:prstGeom>
+          <a:noFill/>
+        </p:spPr>
+        <p:txBody>
+          <a:bodyPr wrap="square">
+            <a:spAutoFit/>
+          </a:bodyPr>
+          <a:lstStyle/>
+          <a:p>
+            <a:r>
+              <a:rPr sz="1200" b="0">
                 <a:solidFill>
                   <a:srgbClr val="1F2937"/>
                 </a:solidFill>
@@ -4544,14 +4714,14 @@
       </p:sp>
       <p:sp>
         <p:nvSpPr>
-          <p:cNvPr id="27" name="TextBox 26"/>
-          <p:cNvSpPr txBox="1"/>
-          <p:nvPr/>
-        </p:nvSpPr>
-        <p:spPr>
-          <a:xfrm>
-            <a:off x="10698480" y="2331720"/>
-            <a:ext cx="1097280" cy="365760"/>
+          <p:cNvPr id="33" name="TextBox 32"/>
+          <p:cNvSpPr txBox="1"/>
+          <p:nvPr/>
+        </p:nvSpPr>
+        <p:spPr>
+          <a:xfrm>
+            <a:off x="11247120" y="2331720"/>
+            <a:ext cx="731520" cy="365760"/>
           </a:xfrm>
           <a:prstGeom prst="rect">
             <a:avLst/>
@@ -4579,14 +4749,14 @@
       </p:sp>
       <p:sp>
         <p:nvSpPr>
-          <p:cNvPr id="28" name="Rectangle 27"/>
+          <p:cNvPr id="34" name="Rectangle 33"/>
           <p:cNvSpPr/>
           <p:nvPr/>
         </p:nvSpPr>
         <p:spPr>
           <a:xfrm>
-            <a:off x="7589520" y="2743200"/>
-            <a:ext cx="4389120" cy="411480"/>
+            <a:off x="9052560" y="2743200"/>
+            <a:ext cx="2926080" cy="411480"/>
           </a:xfrm>
           <a:prstGeom prst="rect">
             <a:avLst/>
@@ -4624,28 +4794,28 @@
       </p:sp>
       <p:sp>
         <p:nvSpPr>
-          <p:cNvPr id="29" name="TextBox 28"/>
-          <p:cNvSpPr txBox="1"/>
-          <p:nvPr/>
-        </p:nvSpPr>
-        <p:spPr>
-          <a:xfrm>
-            <a:off x="7772400" y="2788920"/>
-            <a:ext cx="2743200" cy="365760"/>
-          </a:xfrm>
-          <a:prstGeom prst="rect">
-            <a:avLst/>
-          </a:prstGeom>
-          <a:noFill/>
-        </p:spPr>
-        <p:txBody>
-          <a:bodyPr wrap="square">
-            <a:spAutoFit/>
-          </a:bodyPr>
-          <a:lstStyle/>
-          <a:p>
-            <a:r>
-              <a:rPr sz="1400" b="0">
+          <p:cNvPr id="35" name="TextBox 34"/>
+          <p:cNvSpPr txBox="1"/>
+          <p:nvPr/>
+        </p:nvSpPr>
+        <p:spPr>
+          <a:xfrm>
+            <a:off x="9189720" y="2788920"/>
+            <a:ext cx="1828800" cy="365760"/>
+          </a:xfrm>
+          <a:prstGeom prst="rect">
+            <a:avLst/>
+          </a:prstGeom>
+          <a:noFill/>
+        </p:spPr>
+        <p:txBody>
+          <a:bodyPr wrap="square">
+            <a:spAutoFit/>
+          </a:bodyPr>
+          <a:lstStyle/>
+          <a:p>
+            <a:r>
+              <a:rPr sz="1200" b="0">
                 <a:solidFill>
                   <a:srgbClr val="1F2937"/>
                 </a:solidFill>
@@ -4658,14 +4828,14 @@
       </p:sp>
       <p:sp>
         <p:nvSpPr>
-          <p:cNvPr id="30" name="TextBox 29"/>
-          <p:cNvSpPr txBox="1"/>
-          <p:nvPr/>
-        </p:nvSpPr>
-        <p:spPr>
-          <a:xfrm>
-            <a:off x="10698480" y="2788920"/>
-            <a:ext cx="1097280" cy="365760"/>
+          <p:cNvPr id="36" name="TextBox 35"/>
+          <p:cNvSpPr txBox="1"/>
+          <p:nvPr/>
+        </p:nvSpPr>
+        <p:spPr>
+          <a:xfrm>
+            <a:off x="11247120" y="2788920"/>
+            <a:ext cx="731520" cy="365760"/>
           </a:xfrm>
           <a:prstGeom prst="rect">
             <a:avLst/>
@@ -4693,14 +4863,14 @@
       </p:sp>
       <p:sp>
         <p:nvSpPr>
-          <p:cNvPr id="31" name="Rectangle 30"/>
+          <p:cNvPr id="37" name="Rectangle 36"/>
           <p:cNvSpPr/>
           <p:nvPr/>
         </p:nvSpPr>
         <p:spPr>
           <a:xfrm>
-            <a:off x="7589520" y="3200400"/>
-            <a:ext cx="4389120" cy="411480"/>
+            <a:off x="9052560" y="3200400"/>
+            <a:ext cx="2926080" cy="411480"/>
           </a:xfrm>
           <a:prstGeom prst="rect">
             <a:avLst/>
@@ -4738,28 +4908,28 @@
       </p:sp>
       <p:sp>
         <p:nvSpPr>
-          <p:cNvPr id="32" name="TextBox 31"/>
-          <p:cNvSpPr txBox="1"/>
-          <p:nvPr/>
-        </p:nvSpPr>
-        <p:spPr>
-          <a:xfrm>
-            <a:off x="7772400" y="3246120"/>
-            <a:ext cx="2743200" cy="365760"/>
-          </a:xfrm>
-          <a:prstGeom prst="rect">
-            <a:avLst/>
-          </a:prstGeom>
-          <a:noFill/>
-        </p:spPr>
-        <p:txBody>
-          <a:bodyPr wrap="square">
-            <a:spAutoFit/>
-          </a:bodyPr>
-          <a:lstStyle/>
-          <a:p>
-            <a:r>
-              <a:rPr sz="1400" b="0">
+          <p:cNvPr id="38" name="TextBox 37"/>
+          <p:cNvSpPr txBox="1"/>
+          <p:nvPr/>
+        </p:nvSpPr>
+        <p:spPr>
+          <a:xfrm>
+            <a:off x="9189720" y="3246120"/>
+            <a:ext cx="1828800" cy="365760"/>
+          </a:xfrm>
+          <a:prstGeom prst="rect">
+            <a:avLst/>
+          </a:prstGeom>
+          <a:noFill/>
+        </p:spPr>
+        <p:txBody>
+          <a:bodyPr wrap="square">
+            <a:spAutoFit/>
+          </a:bodyPr>
+          <a:lstStyle/>
+          <a:p>
+            <a:r>
+              <a:rPr sz="1200" b="0">
                 <a:solidFill>
                   <a:srgbClr val="1F2937"/>
                 </a:solidFill>
@@ -4772,14 +4942,14 @@
       </p:sp>
       <p:sp>
         <p:nvSpPr>
-          <p:cNvPr id="33" name="TextBox 32"/>
-          <p:cNvSpPr txBox="1"/>
-          <p:nvPr/>
-        </p:nvSpPr>
-        <p:spPr>
-          <a:xfrm>
-            <a:off x="10698480" y="3246120"/>
-            <a:ext cx="1097280" cy="365760"/>
+          <p:cNvPr id="39" name="TextBox 38"/>
+          <p:cNvSpPr txBox="1"/>
+          <p:nvPr/>
+        </p:nvSpPr>
+        <p:spPr>
+          <a:xfrm>
+            <a:off x="11247120" y="3246120"/>
+            <a:ext cx="731520" cy="365760"/>
           </a:xfrm>
           <a:prstGeom prst="rect">
             <a:avLst/>
@@ -4807,42 +4977,7 @@
       </p:sp>
       <p:sp>
         <p:nvSpPr>
-          <p:cNvPr id="34" name="TextBox 33"/>
-          <p:cNvSpPr txBox="1"/>
-          <p:nvPr/>
-        </p:nvSpPr>
-        <p:spPr>
-          <a:xfrm>
-            <a:off x="457200" y="5760720"/>
-            <a:ext cx="11277295" cy="457200"/>
-          </a:xfrm>
-          <a:prstGeom prst="rect">
-            <a:avLst/>
-          </a:prstGeom>
-          <a:noFill/>
-        </p:spPr>
-        <p:txBody>
-          <a:bodyPr wrap="square">
-            <a:spAutoFit/>
-          </a:bodyPr>
-          <a:lstStyle/>
-          <a:p>
-            <a:pPr algn="ctr"/>
-            <a:r>
-              <a:rPr sz="1800" b="1">
-                <a:solidFill>
-                  <a:srgbClr val="F59E0B"/>
-                </a:solidFill>
-                <a:latin typeface="阿里巴巴普惠体 3.0"/>
-              </a:rPr>
-              <a:t>★ JavaBrain 在 安全 + 智能 + 私有化 三角都做到</a:t>
-            </a:r>
-          </a:p>
-        </p:txBody>
-      </p:sp>
-      <p:sp>
-        <p:nvSpPr>
-          <p:cNvPr id="1033" name="TextBox 1032"/>
+          <p:cNvPr id="40" name="TextBox 39"/>
           <p:cNvSpPr txBox="1"/>
           <p:nvPr/>
         </p:nvSpPr>
@@ -4880,81 +5015,6 @@
   <p:clrMapOvr>
     <a:masterClrMapping/>
   </p:clrMapOvr>
-  <p:timing>
-    <p:tnLst>
-      <p:par>
-        <p:cTn id="1" nodeType="tmRoot" pres="1">
-          <p:tnLst>
-            <p:par>
-              <p:cTn id="1004" nodeType="withEffect" dur="400" begin="0ms" fill="hold">
-                <p:animEffect presetClass="entr" presetId="10" dur="400"/>
-              </p:cTn>
-            </p:par>
-            <p:par>
-              <p:cTn id="1005" nodeType="withEffect" dur="400" begin="225ms" fill="hold">
-                <p:animEffect presetClass="entr" presetId="10" dur="400"/>
-              </p:cTn>
-            </p:par>
-            <p:par>
-              <p:cTn id="1006" nodeType="withEffect" dur="400" begin="450ms" fill="hold">
-                <p:animEffect presetClass="entr" presetId="10" dur="400"/>
-              </p:cTn>
-            </p:par>
-            <p:par>
-              <p:cTn id="1007" nodeType="withEffect" dur="400" begin="675ms" fill="hold">
-                <p:animEffect presetClass="entr" presetId="10" dur="400"/>
-              </p:cTn>
-            </p:par>
-            <p:par>
-              <p:cTn id="1009" nodeType="withEffect" dur="400" begin="1200ms" fill="hold">
-                <p:animEffect presetClass="entr" presetId="10" dur="400"/>
-              </p:cTn>
-            </p:par>
-            <p:par>
-              <p:cTn id="1012" nodeType="withEffect" dur="400" begin="1400ms" fill="hold">
-                <p:animEffect presetClass="entr" presetId="10" dur="400"/>
-              </p:cTn>
-            </p:par>
-            <p:par>
-              <p:cTn id="1015" nodeType="withEffect" dur="400" begin="1600ms" fill="hold">
-                <p:animEffect presetClass="entr" presetId="10" dur="400"/>
-              </p:cTn>
-            </p:par>
-            <p:par>
-              <p:cTn id="1020" nodeType="withEffect" dur="400" begin="2100ms" fill="hold">
-                <p:animEffect presetClass="entr" presetId="10" dur="400"/>
-              </p:cTn>
-            </p:par>
-            <p:par>
-              <p:cTn id="1023" nodeType="withEffect" dur="400" begin="2300ms" fill="hold">
-                <p:animEffect presetClass="entr" presetId="10" dur="400"/>
-              </p:cTn>
-            </p:par>
-            <p:par>
-              <p:cTn id="1026" nodeType="withEffect" dur="400" begin="2500ms" fill="hold">
-                <p:animEffect presetClass="entr" presetId="10" dur="400"/>
-              </p:cTn>
-            </p:par>
-            <p:par>
-              <p:cTn id="1029" nodeType="withEffect" dur="400" begin="2700ms" fill="hold">
-                <p:animEffect presetClass="entr" presetId="10" dur="400"/>
-              </p:cTn>
-            </p:par>
-            <p:par>
-              <p:cTn id="1032" nodeType="withEffect" dur="400" begin="2900ms" fill="hold">
-                <p:animEffect presetClass="entr" presetId="10" dur="400"/>
-              </p:cTn>
-            </p:par>
-            <p:par>
-              <p:cTn id="1007" nodeType="withEffect" dur="1500" begin="12000ms" fill="hold" repeatCount="indefinite">
-                <p:animEffect presetClass="emph" presetId="26" dur="1500"/>
-              </p:cTn>
-            </p:par>
-          </p:tnLst>
-        </p:cTn>
-      </p:par>
-    </p:tnLst>
-  </p:timing>
 </p:sld>
 </file>
 
@@ -6449,7 +6509,7 @@
       </p:sp>
       <p:sp>
         <p:nvSpPr>
-          <p:cNvPr id="1040" name="TextBox 1039"/>
+          <p:cNvPr id="41" name="TextBox 40"/>
           <p:cNvSpPr txBox="1"/>
           <p:nvPr/>
         </p:nvSpPr>
@@ -6487,46 +6547,6 @@
   <p:clrMapOvr>
     <a:masterClrMapping/>
   </p:clrMapOvr>
-  <p:timing>
-    <p:tnLst>
-      <p:par>
-        <p:cTn id="1" nodeType="tmRoot" pres="1">
-          <p:tnLst>
-            <p:par>
-              <p:cTn id="1002" nodeType="withEffect" dur="500" begin="0ms" fill="hold">
-                <p:animEffect presetClass="entr" presetId="10" dur="500"/>
-              </p:cTn>
-            </p:par>
-            <p:par>
-              <p:cTn id="1004" nodeType="withEffect" dur="500" begin="600ms" fill="hold">
-                <p:animEffect presetClass="entr" presetId="10" dur="500"/>
-              </p:cTn>
-            </p:par>
-            <p:par>
-              <p:cTn id="1012" nodeType="withEffect" dur="500" begin="1000ms" fill="hold">
-                <p:animEffect presetClass="entr" presetId="10" dur="500"/>
-              </p:cTn>
-            </p:par>
-            <p:par>
-              <p:cTn id="1020" nodeType="withEffect" dur="500" begin="1400ms" fill="hold">
-                <p:animEffect presetClass="entr" presetId="10" dur="500"/>
-              </p:cTn>
-            </p:par>
-            <p:par>
-              <p:cTn id="1028" nodeType="withEffect" dur="500" begin="1800ms" fill="hold">
-                <p:animEffect presetClass="entr" presetId="10" dur="500"/>
-              </p:cTn>
-            </p:par>
-            <p:par>
-              <p:cTn id="1039" nodeType="withEffect" dur="1500" begin="2500ms" fill="hold" repeatCount="indefinite">
-                <p:animEffect presetClass="emph" presetId="26" dur="1500"/>
-              </p:cTn>
-            </p:par>
-          </p:tnLst>
-        </p:cTn>
-      </p:par>
-    </p:tnLst>
-  </p:timing>
 </p:sld>
 </file>
 
@@ -6942,7 +6962,7 @@
       </p:sp>
       <p:sp>
         <p:nvSpPr>
-          <p:cNvPr id="1010" name="TextBox 1009"/>
+          <p:cNvPr id="13" name="TextBox 12"/>
           <p:cNvSpPr txBox="1"/>
           <p:nvPr/>
         </p:nvSpPr>
@@ -6980,51 +7000,6 @@
   <p:clrMapOvr>
     <a:masterClrMapping/>
   </p:clrMapOvr>
-  <p:timing>
-    <p:tnLst>
-      <p:par>
-        <p:cTn id="1" nodeType="tmRoot" pres="1">
-          <p:tnLst>
-            <p:par>
-              <p:cTn id="1002" nodeType="withEffect" dur="8000" begin="0ms" fill="hold" repeatCount="indefinite">
-                <p:animEffect presetClass="emph" presetId="8" dur="8000"/>
-              </p:cTn>
-            </p:par>
-            <p:par>
-              <p:cTn id="1003" nodeType="withEffect" dur="500" begin="0ms" fill="hold">
-                <p:animEffect presetClass="entr" presetId="10" dur="500"/>
-              </p:cTn>
-            </p:par>
-            <p:par>
-              <p:cTn id="1004" nodeType="withEffect" dur="500" begin="600ms" fill="hold">
-                <p:animEffect presetClass="entr" presetId="10" dur="500"/>
-              </p:cTn>
-            </p:par>
-            <p:par>
-              <p:cTn id="1005" nodeType="withEffect" dur="500" begin="1200ms" fill="hold">
-                <p:animEffect presetClass="entr" presetId="10" dur="500"/>
-              </p:cTn>
-            </p:par>
-            <p:par>
-              <p:cTn id="1006" nodeType="withEffect" dur="500" begin="1800ms" fill="hold">
-                <p:animEffect presetClass="entr" presetId="10" dur="500"/>
-              </p:cTn>
-            </p:par>
-            <p:par>
-              <p:cTn id="1007" nodeType="withEffect" dur="1500" begin="6000ms" fill="hold" repeatCount="indefinite">
-                <p:animEffect presetClass="emph" presetId="26" dur="1500"/>
-              </p:cTn>
-            </p:par>
-            <p:par>
-              <p:cTn id="1009" nodeType="withEffect" dur="500" begin="4000ms" fill="hold">
-                <p:animEffect presetClass="entr" presetId="10" dur="500"/>
-              </p:cTn>
-            </p:par>
-          </p:tnLst>
-        </p:cTn>
-      </p:par>
-    </p:tnLst>
-  </p:timing>
 </p:sld>
 </file>
 
@@ -8284,7 +8259,7 @@
       </p:sp>
       <p:sp>
         <p:nvSpPr>
-          <p:cNvPr id="1035" name="TextBox 1034"/>
+          <p:cNvPr id="36" name="TextBox 35"/>
           <p:cNvSpPr txBox="1"/>
           <p:nvPr/>
         </p:nvSpPr>
@@ -8322,56 +8297,6 @@
   <p:clrMapOvr>
     <a:masterClrMapping/>
   </p:clrMapOvr>
-  <p:timing>
-    <p:tnLst>
-      <p:par>
-        <p:cTn id="1" nodeType="tmRoot" pres="1">
-          <p:tnLst>
-            <p:par>
-              <p:cTn id="1007" nodeType="withEffect" dur="500" begin="0ms" fill="hold">
-                <p:animEffect presetClass="entr" presetId="10" dur="500"/>
-              </p:cTn>
-            </p:par>
-            <p:par>
-              <p:cTn id="1008" nodeType="withEffect" dur="500" begin="350ms" fill="hold">
-                <p:animEffect presetClass="entr" presetId="10" dur="500"/>
-              </p:cTn>
-            </p:par>
-            <p:par>
-              <p:cTn id="1009" nodeType="withEffect" dur="500" begin="700ms" fill="hold">
-                <p:animEffect presetClass="entr" presetId="10" dur="500"/>
-              </p:cTn>
-            </p:par>
-            <p:par>
-              <p:cTn id="1010" nodeType="withEffect" dur="500" begin="1050ms" fill="hold">
-                <p:animEffect presetClass="entr" presetId="10" dur="500"/>
-              </p:cTn>
-            </p:par>
-            <p:par>
-              <p:cTn id="1011" nodeType="withEffect" dur="500" begin="1400ms" fill="hold">
-                <p:animEffect presetClass="entr" presetId="10" dur="500"/>
-              </p:cTn>
-            </p:par>
-            <p:par>
-              <p:cTn id="1012" nodeType="withEffect" dur="500" begin="1750ms" fill="hold">
-                <p:animEffect presetClass="entr" presetId="10" dur="500"/>
-              </p:cTn>
-            </p:par>
-            <p:par>
-              <p:cTn id="1034" nodeType="withEffect" dur="1500" begin="3500ms" fill="hold" repeatCount="indefinite">
-                <p:animEffect presetClass="emph" presetId="26" dur="1500"/>
-              </p:cTn>
-            </p:par>
-            <p:par>
-              <p:cTn id="1031" nodeType="withEffect" dur="500" begin="2200ms" fill="hold">
-                <p:animEffect presetClass="entr" presetId="10" dur="500"/>
-              </p:cTn>
-            </p:par>
-          </p:tnLst>
-        </p:cTn>
-      </p:par>
-    </p:tnLst>
-  </p:timing>
 </p:sld>
 </file>
 
@@ -8701,7 +8626,7 @@
       </p:sp>
       <p:sp>
         <p:nvSpPr>
-          <p:cNvPr id="1008" name="TextBox 1007"/>
+          <p:cNvPr id="11" name="TextBox 10"/>
           <p:cNvSpPr txBox="1"/>
           <p:nvPr/>
         </p:nvSpPr>
@@ -8739,36 +8664,6 @@
   <p:clrMapOvr>
     <a:masterClrMapping/>
   </p:clrMapOvr>
-  <p:timing>
-    <p:tnLst>
-      <p:par>
-        <p:cTn id="1" nodeType="tmRoot" pres="1">
-          <p:tnLst>
-            <p:par>
-              <p:cTn id="1002" nodeType="withEffect" dur="500" begin="0ms" fill="hold">
-                <p:animEffect presetClass="entr" presetId="10" dur="500"/>
-              </p:cTn>
-            </p:par>
-            <p:par>
-              <p:cTn id="1003" nodeType="withEffect" dur="500" begin="600ms" fill="hold">
-                <p:animEffect presetClass="entr" presetId="10" dur="500"/>
-              </p:cTn>
-            </p:par>
-            <p:par>
-              <p:cTn id="1007" nodeType="withEffect" dur="500" begin="1200ms" fill="hold">
-                <p:animEffect presetClass="entr" presetId="10" dur="500"/>
-              </p:cTn>
-            </p:par>
-            <p:par>
-              <p:cTn id="1007" nodeType="withEffect" dur="1500" begin="2000ms" fill="hold" repeatCount="indefinite">
-                <p:animEffect presetClass="emph" presetId="26" dur="1500"/>
-              </p:cTn>
-            </p:par>
-          </p:tnLst>
-        </p:cTn>
-      </p:par>
-    </p:tnLst>
-  </p:timing>
 </p:sld>
 </file>
 
@@ -8916,7 +8811,7 @@
                 </a:solidFill>
                 <a:latin typeface="阿里巴巴普惠体 3.0"/>
               </a:rPr>
-              <a:t>★ 50 行配置 → 1 行模板,半年维护成本归零</a:t>
+              <a:t>★ 50 行配置 → 1 行模板 = 49 行省下</a:t>
             </a:r>
           </a:p>
         </p:txBody>
@@ -9493,7 +9388,7 @@
       </p:sp>
       <p:sp>
         <p:nvSpPr>
-          <p:cNvPr id="1020" name="TextBox 1019"/>
+          <p:cNvPr id="21" name="TextBox 20"/>
           <p:cNvSpPr txBox="1"/>
           <p:nvPr/>
         </p:nvSpPr>
@@ -9531,56 +9426,6 @@
   <p:clrMapOvr>
     <a:masterClrMapping/>
   </p:clrMapOvr>
-  <p:timing>
-    <p:tnLst>
-      <p:par>
-        <p:cTn id="1" nodeType="tmRoot" pres="1">
-          <p:tnLst>
-            <p:par>
-              <p:cTn id="1003" nodeType="withEffect" dur="500" begin="0ms" fill="hold">
-                <p:animEffect presetClass="entr" presetId="10" dur="500"/>
-              </p:cTn>
-            </p:par>
-            <p:par>
-              <p:cTn id="1005" nodeType="withEffect" dur="500" begin="400ms" fill="hold">
-                <p:animEffect presetClass="entr" presetId="10" dur="500"/>
-              </p:cTn>
-            </p:par>
-            <p:par>
-              <p:cTn id="1009" nodeType="withEffect" dur="500" begin="400ms" fill="hold">
-                <p:animEffect presetClass="entr" presetId="10" dur="500"/>
-              </p:cTn>
-            </p:par>
-            <p:par>
-              <p:cTn id="1010" nodeType="withEffect" dur="500" begin="700ms" fill="hold">
-                <p:animEffect presetClass="entr" presetId="10" dur="500"/>
-              </p:cTn>
-            </p:par>
-            <p:par>
-              <p:cTn id="1014" nodeType="withEffect" dur="500" begin="700ms" fill="hold">
-                <p:animEffect presetClass="entr" presetId="10" dur="500"/>
-              </p:cTn>
-            </p:par>
-            <p:par>
-              <p:cTn id="1015" nodeType="withEffect" dur="500" begin="1000ms" fill="hold">
-                <p:animEffect presetClass="entr" presetId="10" dur="500"/>
-              </p:cTn>
-            </p:par>
-            <p:par>
-              <p:cTn id="1019" nodeType="withEffect" dur="500" begin="1000ms" fill="hold">
-                <p:animEffect presetClass="entr" presetId="10" dur="500"/>
-              </p:cTn>
-            </p:par>
-            <p:par>
-              <p:cTn id="1015" nodeType="withEffect" dur="1500" begin="2000ms" fill="hold" repeatCount="indefinite">
-                <p:animEffect presetClass="emph" presetId="26" dur="1500"/>
-              </p:cTn>
-            </p:par>
-          </p:tnLst>
-        </p:cTn>
-      </p:par>
-    </p:tnLst>
-  </p:timing>
 </p:sld>
 </file>
 
@@ -10394,7 +10239,7 @@
       </p:sp>
       <p:sp>
         <p:nvSpPr>
-          <p:cNvPr id="1019" name="TextBox 1018"/>
+          <p:cNvPr id="22" name="TextBox 21"/>
           <p:cNvSpPr txBox="1"/>
           <p:nvPr/>
         </p:nvSpPr>
@@ -10432,56 +10277,6 @@
   <p:clrMapOvr>
     <a:masterClrMapping/>
   </p:clrMapOvr>
-  <p:timing>
-    <p:tnLst>
-      <p:par>
-        <p:cTn id="1" nodeType="tmRoot" pres="1">
-          <p:tnLst>
-            <p:par>
-              <p:cTn id="1003" nodeType="withEffect" dur="500" begin="0ms" fill="hold">
-                <p:animEffect presetClass="entr" presetId="10" dur="500"/>
-              </p:cTn>
-            </p:par>
-            <p:par>
-              <p:cTn id="1006" nodeType="withEffect" dur="500" begin="200ms" fill="hold">
-                <p:animEffect presetClass="entr" presetId="10" dur="500"/>
-              </p:cTn>
-            </p:par>
-            <p:par>
-              <p:cTn id="1009" nodeType="withEffect" dur="500" begin="400ms" fill="hold">
-                <p:animEffect presetClass="entr" presetId="10" dur="500"/>
-              </p:cTn>
-            </p:par>
-            <p:par>
-              <p:cTn id="1012" nodeType="withEffect" dur="500" begin="600ms" fill="hold">
-                <p:animEffect presetClass="entr" presetId="10" dur="500"/>
-              </p:cTn>
-            </p:par>
-            <p:par>
-              <p:cTn id="1015" nodeType="withEffect" dur="500" begin="800ms" fill="hold">
-                <p:animEffect presetClass="entr" presetId="10" dur="500"/>
-              </p:cTn>
-            </p:par>
-            <p:par>
-              <p:cTn id="1018" nodeType="withEffect" dur="500" begin="1000ms" fill="hold">
-                <p:animEffect presetClass="entr" presetId="10" dur="500"/>
-              </p:cTn>
-            </p:par>
-            <p:par>
-              <p:cTn id="1006" nodeType="withEffect" dur="1500" begin="10000ms" fill="hold" repeatCount="indefinite">
-                <p:animEffect presetClass="emph" presetId="26" dur="1500"/>
-              </p:cTn>
-            </p:par>
-            <p:par>
-              <p:cTn id="1009" nodeType="withEffect" dur="1500" begin="12000ms" fill="hold" repeatCount="indefinite">
-                <p:animEffect presetClass="emph" presetId="26" dur="1500"/>
-              </p:cTn>
-            </p:par>
-          </p:tnLst>
-        </p:cTn>
-      </p:par>
-    </p:tnLst>
-  </p:timing>
 </p:sld>
 </file>
 
@@ -11206,7 +11001,7 @@
       </p:sp>
       <p:sp>
         <p:nvSpPr>
-          <p:cNvPr id="1020" name="TextBox 1019"/>
+          <p:cNvPr id="21" name="TextBox 20"/>
           <p:cNvSpPr txBox="1"/>
           <p:nvPr/>
         </p:nvSpPr>
@@ -11244,56 +11039,6 @@
   <p:clrMapOvr>
     <a:masterClrMapping/>
   </p:clrMapOvr>
-  <p:timing>
-    <p:tnLst>
-      <p:par>
-        <p:cTn id="1" nodeType="tmRoot" pres="1">
-          <p:tnLst>
-            <p:par>
-              <p:cTn id="1003" nodeType="withEffect" dur="500" begin="0ms" fill="hold">
-                <p:animEffect presetClass="entr" presetId="10" dur="500"/>
-              </p:cTn>
-            </p:par>
-            <p:par>
-              <p:cTn id="1005" nodeType="withEffect" dur="500" begin="400ms" fill="hold">
-                <p:animEffect presetClass="entr" presetId="10" dur="500"/>
-              </p:cTn>
-            </p:par>
-            <p:par>
-              <p:cTn id="1009" nodeType="withEffect" dur="500" begin="400ms" fill="hold">
-                <p:animEffect presetClass="entr" presetId="10" dur="500"/>
-              </p:cTn>
-            </p:par>
-            <p:par>
-              <p:cTn id="1010" nodeType="withEffect" dur="500" begin="700ms" fill="hold">
-                <p:animEffect presetClass="entr" presetId="10" dur="500"/>
-              </p:cTn>
-            </p:par>
-            <p:par>
-              <p:cTn id="1014" nodeType="withEffect" dur="500" begin="700ms" fill="hold">
-                <p:animEffect presetClass="entr" presetId="10" dur="500"/>
-              </p:cTn>
-            </p:par>
-            <p:par>
-              <p:cTn id="1015" nodeType="withEffect" dur="500" begin="1000ms" fill="hold">
-                <p:animEffect presetClass="entr" presetId="10" dur="500"/>
-              </p:cTn>
-            </p:par>
-            <p:par>
-              <p:cTn id="1019" nodeType="withEffect" dur="500" begin="1000ms" fill="hold">
-                <p:animEffect presetClass="entr" presetId="10" dur="500"/>
-              </p:cTn>
-            </p:par>
-            <p:par>
-              <p:cTn id="1015" nodeType="withEffect" dur="1500" begin="2000ms" fill="hold" repeatCount="indefinite">
-                <p:animEffect presetClass="emph" presetId="26" dur="1500"/>
-              </p:cTn>
-            </p:par>
-          </p:tnLst>
-        </p:cTn>
-      </p:par>
-    </p:tnLst>
-  </p:timing>
 </p:sld>
 </file>
 
@@ -12179,7 +11924,7 @@
       </p:sp>
       <p:sp>
         <p:nvSpPr>
-          <p:cNvPr id="1022" name="TextBox 1021"/>
+          <p:cNvPr id="24" name="TextBox 23"/>
           <p:cNvSpPr txBox="1"/>
           <p:nvPr/>
         </p:nvSpPr>
@@ -12217,81 +11962,6 @@
   <p:clrMapOvr>
     <a:masterClrMapping/>
   </p:clrMapOvr>
-  <p:timing>
-    <p:tnLst>
-      <p:par>
-        <p:cTn id="1" nodeType="tmRoot" pres="1">
-          <p:tnLst>
-            <p:par>
-              <p:cTn id="1003" nodeType="withEffect" dur="500" begin="0ms" fill="hold">
-                <p:animEffect presetClass="entr" presetId="10" dur="500"/>
-              </p:cTn>
-            </p:par>
-            <p:par>
-              <p:cTn id="1005" nodeType="withEffect" dur="500" begin="200ms" fill="hold">
-                <p:animEffect presetClass="entr" presetId="10" dur="500"/>
-              </p:cTn>
-            </p:par>
-            <p:par>
-              <p:cTn id="1007" nodeType="withEffect" dur="500" begin="400ms" fill="hold">
-                <p:animEffect presetClass="entr" presetId="10" dur="500"/>
-              </p:cTn>
-            </p:par>
-            <p:par>
-              <p:cTn id="1009" nodeType="withEffect" dur="500" begin="600ms" fill="hold">
-                <p:animEffect presetClass="entr" presetId="10" dur="500"/>
-              </p:cTn>
-            </p:par>
-            <p:par>
-              <p:cTn id="1011" nodeType="withEffect" dur="500" begin="1000ms" fill="hold">
-                <p:animEffect presetClass="entr" presetId="10" dur="500"/>
-              </p:cTn>
-            </p:par>
-            <p:par>
-              <p:cTn id="1013" nodeType="withEffect" dur="500" begin="1200ms" fill="hold">
-                <p:animEffect presetClass="entr" presetId="10" dur="500"/>
-              </p:cTn>
-            </p:par>
-            <p:par>
-              <p:cTn id="1015" nodeType="withEffect" dur="500" begin="1400ms" fill="hold">
-                <p:animEffect presetClass="entr" presetId="10" dur="500"/>
-              </p:cTn>
-            </p:par>
-            <p:par>
-              <p:cTn id="1017" nodeType="withEffect" dur="500" begin="1600ms" fill="hold">
-                <p:animEffect presetClass="entr" presetId="10" dur="500"/>
-              </p:cTn>
-            </p:par>
-            <p:par>
-              <p:cTn id="1019" nodeType="withEffect" dur="500" begin="1800ms" fill="hold">
-                <p:animEffect presetClass="entr" presetId="10" dur="500"/>
-              </p:cTn>
-            </p:par>
-            <p:par>
-              <p:cTn id="1021" nodeType="withEffect" dur="500" begin="2000ms" fill="hold">
-                <p:animEffect presetClass="entr" presetId="10" dur="500"/>
-              </p:cTn>
-            </p:par>
-            <p:par>
-              <p:cTn id="1011" nodeType="withEffect" dur="1500" begin="15000ms" fill="hold" repeatCount="indefinite">
-                <p:animEffect presetClass="emph" presetId="26" dur="1500"/>
-              </p:cTn>
-            </p:par>
-            <p:par>
-              <p:cTn id="1013" nodeType="withEffect" dur="1500" begin="17000ms" fill="hold" repeatCount="indefinite">
-                <p:animEffect presetClass="emph" presetId="26" dur="1500"/>
-              </p:cTn>
-            </p:par>
-            <p:par>
-              <p:cTn id="1015" nodeType="withEffect" dur="1500" begin="19000ms" fill="hold" repeatCount="indefinite">
-                <p:animEffect presetClass="emph" presetId="26" dur="1500"/>
-              </p:cTn>
-            </p:par>
-          </p:tnLst>
-        </p:cTn>
-      </p:par>
-    </p:tnLst>
-  </p:timing>
 </p:sld>
 </file>
 
@@ -13135,7 +12805,7 @@
       </p:sp>
       <p:sp>
         <p:nvSpPr>
-          <p:cNvPr id="1017" name="TextBox 1016"/>
+          <p:cNvPr id="24" name="TextBox 23"/>
           <p:cNvSpPr txBox="1"/>
           <p:nvPr/>
         </p:nvSpPr>
@@ -13173,46 +12843,6 @@
   <p:clrMapOvr>
     <a:masterClrMapping/>
   </p:clrMapOvr>
-  <p:timing>
-    <p:tnLst>
-      <p:par>
-        <p:cTn id="1" nodeType="tmRoot" pres="1">
-          <p:tnLst>
-            <p:par>
-              <p:cTn id="1004" nodeType="withEffect" dur="500" begin="0ms" fill="hold">
-                <p:animEffect presetClass="entr" presetId="10" dur="500"/>
-              </p:cTn>
-            </p:par>
-            <p:par>
-              <p:cTn id="1007" nodeType="withEffect" dur="500" begin="400ms" fill="hold">
-                <p:animEffect presetClass="entr" presetId="10" dur="500"/>
-              </p:cTn>
-            </p:par>
-            <p:par>
-              <p:cTn id="1010" nodeType="withEffect" dur="500" begin="800ms" fill="hold">
-                <p:animEffect presetClass="entr" presetId="10" dur="500"/>
-              </p:cTn>
-            </p:par>
-            <p:par>
-              <p:cTn id="1013" nodeType="withEffect" dur="500" begin="1200ms" fill="hold">
-                <p:animEffect presetClass="entr" presetId="10" dur="500"/>
-              </p:cTn>
-            </p:par>
-            <p:par>
-              <p:cTn id="1016" nodeType="withEffect" dur="500" begin="1600ms" fill="hold">
-                <p:animEffect presetClass="entr" presetId="10" dur="500"/>
-              </p:cTn>
-            </p:par>
-            <p:par>
-              <p:cTn id="1016" nodeType="withEffect" dur="1500" begin="2500ms" fill="hold" repeatCount="indefinite">
-                <p:animEffect presetClass="emph" presetId="26" dur="1500"/>
-              </p:cTn>
-            </p:par>
-          </p:tnLst>
-        </p:cTn>
-      </p:par>
-    </p:tnLst>
-  </p:timing>
 </p:sld>
 </file>
 
@@ -14056,7 +13686,7 @@
       </p:sp>
       <p:sp>
         <p:nvSpPr>
-          <p:cNvPr id="1017" name="TextBox 1016"/>
+          <p:cNvPr id="24" name="TextBox 23"/>
           <p:cNvSpPr txBox="1"/>
           <p:nvPr/>
         </p:nvSpPr>
@@ -14094,46 +13724,6 @@
   <p:clrMapOvr>
     <a:masterClrMapping/>
   </p:clrMapOvr>
-  <p:timing>
-    <p:tnLst>
-      <p:par>
-        <p:cTn id="1" nodeType="tmRoot" pres="1">
-          <p:tnLst>
-            <p:par>
-              <p:cTn id="1004" nodeType="withEffect" dur="500" begin="0ms" fill="hold">
-                <p:animEffect presetClass="entr" presetId="10" dur="500"/>
-              </p:cTn>
-            </p:par>
-            <p:par>
-              <p:cTn id="1007" nodeType="withEffect" dur="500" begin="400ms" fill="hold">
-                <p:animEffect presetClass="entr" presetId="10" dur="500"/>
-              </p:cTn>
-            </p:par>
-            <p:par>
-              <p:cTn id="1010" nodeType="withEffect" dur="500" begin="800ms" fill="hold">
-                <p:animEffect presetClass="entr" presetId="10" dur="500"/>
-              </p:cTn>
-            </p:par>
-            <p:par>
-              <p:cTn id="1013" nodeType="withEffect" dur="500" begin="1200ms" fill="hold">
-                <p:animEffect presetClass="entr" presetId="10" dur="500"/>
-              </p:cTn>
-            </p:par>
-            <p:par>
-              <p:cTn id="1016" nodeType="withEffect" dur="500" begin="1600ms" fill="hold">
-                <p:animEffect presetClass="entr" presetId="10" dur="500"/>
-              </p:cTn>
-            </p:par>
-            <p:par>
-              <p:cTn id="1016" nodeType="withEffect" dur="1500" begin="2500ms" fill="hold" repeatCount="indefinite">
-                <p:animEffect presetClass="emph" presetId="26" dur="1500"/>
-              </p:cTn>
-            </p:par>
-          </p:tnLst>
-        </p:cTn>
-      </p:par>
-    </p:tnLst>
-  </p:timing>
 </p:sld>
 </file>
 
